--- a/Complex Systems/project/PresentationPROJECTSM3201466.pptx
+++ b/Complex Systems/project/PresentationPROJECTSM3201466.pptx
@@ -5,7 +5,7 @@
     <p:sldMasterId id="2147483648" r:id="rId1"/>
   </p:sldMasterIdLst>
   <p:notesMasterIdLst>
-    <p:notesMasterId r:id="rId27"/>
+    <p:notesMasterId r:id="rId33"/>
   </p:notesMasterIdLst>
   <p:sldIdLst>
     <p:sldId id="257" r:id="rId2"/>
@@ -22,17 +22,23 @@
     <p:sldId id="265" r:id="rId13"/>
     <p:sldId id="266" r:id="rId14"/>
     <p:sldId id="267" r:id="rId15"/>
-    <p:sldId id="280" r:id="rId16"/>
+    <p:sldId id="287" r:id="rId16"/>
     <p:sldId id="281" r:id="rId17"/>
-    <p:sldId id="271" r:id="rId18"/>
-    <p:sldId id="272" r:id="rId19"/>
-    <p:sldId id="273" r:id="rId20"/>
-    <p:sldId id="274" r:id="rId21"/>
-    <p:sldId id="275" r:id="rId22"/>
-    <p:sldId id="276" r:id="rId23"/>
-    <p:sldId id="277" r:id="rId24"/>
-    <p:sldId id="278" r:id="rId25"/>
-    <p:sldId id="279" r:id="rId26"/>
+    <p:sldId id="291" r:id="rId18"/>
+    <p:sldId id="290" r:id="rId19"/>
+    <p:sldId id="271" r:id="rId20"/>
+    <p:sldId id="272" r:id="rId21"/>
+    <p:sldId id="273" r:id="rId22"/>
+    <p:sldId id="274" r:id="rId23"/>
+    <p:sldId id="275" r:id="rId24"/>
+    <p:sldId id="276" r:id="rId25"/>
+    <p:sldId id="277" r:id="rId26"/>
+    <p:sldId id="278" r:id="rId27"/>
+    <p:sldId id="279" r:id="rId28"/>
+    <p:sldId id="286" r:id="rId29"/>
+    <p:sldId id="282" r:id="rId30"/>
+    <p:sldId id="284" r:id="rId31"/>
+    <p:sldId id="285" r:id="rId32"/>
   </p:sldIdLst>
   <p:sldSz cx="12192000" cy="6858000"/>
   <p:notesSz cx="6858000" cy="9144000"/>
@@ -221,7 +227,7 @@
           <a:p>
             <a:fld id="{BEA086CB-A695-49D9-8C2E-9873859BCA4A}" type="datetimeFigureOut">
               <a:rPr lang="en-US" smtClean="0"/>
-              <a:t>12/30/2025</a:t>
+              <a:t>1/3/2026</a:t>
             </a:fld>
             <a:endParaRPr lang="en-US"/>
           </a:p>
@@ -635,7 +641,7 @@
           <a:p>
             <a:fld id="{F07E9E74-BB92-43A1-93A9-56899A08A8EA}" type="datetime1">
               <a:rPr lang="it-IT" smtClean="0"/>
-              <a:t>30/12/2025</a:t>
+              <a:t>03/01/2026</a:t>
             </a:fld>
             <a:endParaRPr lang="en-US"/>
           </a:p>
@@ -837,7 +843,7 @@
           <a:p>
             <a:fld id="{52F8FB06-37EE-426F-B4C2-4056D956FFB6}" type="datetime1">
               <a:rPr lang="it-IT" smtClean="0"/>
-              <a:t>30/12/2025</a:t>
+              <a:t>03/01/2026</a:t>
             </a:fld>
             <a:endParaRPr lang="en-US"/>
           </a:p>
@@ -1049,7 +1055,7 @@
           <a:p>
             <a:fld id="{60D66374-9FAD-424A-A417-2FC77F42A162}" type="datetime1">
               <a:rPr lang="it-IT" smtClean="0"/>
-              <a:t>30/12/2025</a:t>
+              <a:t>03/01/2026</a:t>
             </a:fld>
             <a:endParaRPr lang="en-US"/>
           </a:p>
@@ -1251,7 +1257,7 @@
           <a:p>
             <a:fld id="{98FE7E5C-3220-4614-A522-AFD916A4C527}" type="datetime1">
               <a:rPr lang="it-IT" smtClean="0"/>
-              <a:t>30/12/2025</a:t>
+              <a:t>03/01/2026</a:t>
             </a:fld>
             <a:endParaRPr lang="en-US"/>
           </a:p>
@@ -1530,7 +1536,7 @@
           <a:p>
             <a:fld id="{67EDB044-EFFF-4CBD-97F7-2F91E5899AD1}" type="datetime1">
               <a:rPr lang="it-IT" smtClean="0"/>
-              <a:t>30/12/2025</a:t>
+              <a:t>03/01/2026</a:t>
             </a:fld>
             <a:endParaRPr lang="en-US"/>
           </a:p>
@@ -1799,7 +1805,7 @@
           <a:p>
             <a:fld id="{CE358A1C-7692-454B-B2B0-19CF8E1B29B2}" type="datetime1">
               <a:rPr lang="it-IT" smtClean="0"/>
-              <a:t>30/12/2025</a:t>
+              <a:t>03/01/2026</a:t>
             </a:fld>
             <a:endParaRPr lang="en-US"/>
           </a:p>
@@ -2215,7 +2221,7 @@
           <a:p>
             <a:fld id="{EA334287-8B58-4D94-B233-149ADA4285AB}" type="datetime1">
               <a:rPr lang="it-IT" smtClean="0"/>
-              <a:t>30/12/2025</a:t>
+              <a:t>03/01/2026</a:t>
             </a:fld>
             <a:endParaRPr lang="en-US"/>
           </a:p>
@@ -2360,7 +2366,7 @@
           <a:p>
             <a:fld id="{13469EFB-7A72-40B7-8B4E-23EC3F3D9178}" type="datetime1">
               <a:rPr lang="it-IT" smtClean="0"/>
-              <a:t>30/12/2025</a:t>
+              <a:t>03/01/2026</a:t>
             </a:fld>
             <a:endParaRPr lang="en-US"/>
           </a:p>
@@ -2477,7 +2483,7 @@
           <a:p>
             <a:fld id="{BC1B6C92-C1CD-4F55-ADFF-59EB1DF3CE0B}" type="datetime1">
               <a:rPr lang="it-IT" smtClean="0"/>
-              <a:t>30/12/2025</a:t>
+              <a:t>03/01/2026</a:t>
             </a:fld>
             <a:endParaRPr lang="en-US"/>
           </a:p>
@@ -2792,7 +2798,7 @@
           <a:p>
             <a:fld id="{5B54A038-0D44-4453-9D70-4F5E44A505EF}" type="datetime1">
               <a:rPr lang="it-IT" smtClean="0"/>
-              <a:t>30/12/2025</a:t>
+              <a:t>03/01/2026</a:t>
             </a:fld>
             <a:endParaRPr lang="en-US"/>
           </a:p>
@@ -3084,7 +3090,7 @@
           <a:p>
             <a:fld id="{F21DD4DD-220B-420A-80A9-E353ADB19088}" type="datetime1">
               <a:rPr lang="it-IT" smtClean="0"/>
-              <a:t>30/12/2025</a:t>
+              <a:t>03/01/2026</a:t>
             </a:fld>
             <a:endParaRPr lang="en-US"/>
           </a:p>
@@ -3329,7 +3335,7 @@
           <a:p>
             <a:fld id="{28ACF47F-4A45-43A2-A4A7-840A2C11A772}" type="datetime1">
               <a:rPr lang="it-IT" smtClean="0"/>
-              <a:t>30/12/2025</a:t>
+              <a:t>03/01/2026</a:t>
             </a:fld>
             <a:endParaRPr lang="en-US" dirty="0"/>
           </a:p>
@@ -3912,7 +3918,7 @@
           <a:p>
             <a:fld id="{52B8E00E-772D-4437-B382-3CBA9B54C360}" type="datetime1">
               <a:rPr lang="it-IT" smtClean="0"/>
-              <a:t>30/12/2025</a:t>
+              <a:t>03/01/2026</a:t>
             </a:fld>
             <a:endParaRPr lang="en-US"/>
           </a:p>
@@ -4114,7 +4120,7 @@
         <p:spPr>
           <a:xfrm>
             <a:off x="688257" y="1147031"/>
-            <a:ext cx="8288595" cy="5632311"/>
+            <a:ext cx="8288595" cy="5232202"/>
           </a:xfrm>
           <a:prstGeom prst="rect">
             <a:avLst/>
@@ -4136,21 +4142,34 @@
                 <a:latin typeface="Arial" panose="020B0604020202020204" pitchFamily="34" charset="0"/>
                 <a:cs typeface="Arial" panose="020B0604020202020204" pitchFamily="34" charset="0"/>
               </a:rPr>
-              <a:t>Esperimento 0: W2 esiste ed è GAS</a:t>
-            </a:r>
-          </a:p>
-          <a:p>
-            <a:pPr marL="285750" indent="-285750">
+              <a:t>Obbiettivo: Replicare i seguenti risultati</a:t>
+            </a:r>
+          </a:p>
+          <a:p>
+            <a:pPr marL="742950" lvl="1" indent="-285750">
               <a:buFont typeface="Wingdings" panose="05000000000000000000" pitchFamily="2" charset="2"/>
               <a:buChar char="q"/>
             </a:pPr>
-            <a:endParaRPr lang="it-IT" sz="2400" dirty="0">
+            <a:r>
+              <a:rPr lang="it-IT" sz="2400" dirty="0">
+                <a:latin typeface="Arial" panose="020B0604020202020204" pitchFamily="34" charset="0"/>
+                <a:cs typeface="Arial" panose="020B0604020202020204" pitchFamily="34" charset="0"/>
+              </a:rPr>
+              <a:t>Esperimento 0: W2 esiste ed è GAS</a:t>
+            </a:r>
+          </a:p>
+          <a:p>
+            <a:pPr marL="742950" lvl="1" indent="-285750">
+              <a:buFont typeface="Wingdings" panose="05000000000000000000" pitchFamily="2" charset="2"/>
+              <a:buChar char="q"/>
+            </a:pPr>
+            <a:endParaRPr lang="it-IT" sz="1400" dirty="0">
               <a:latin typeface="Arial" panose="020B0604020202020204" pitchFamily="34" charset="0"/>
               <a:cs typeface="Arial" panose="020B0604020202020204" pitchFamily="34" charset="0"/>
             </a:endParaRPr>
           </a:p>
           <a:p>
-            <a:pPr marL="285750" indent="-285750">
+            <a:pPr marL="742950" lvl="1" indent="-285750">
               <a:buFont typeface="Wingdings" panose="05000000000000000000" pitchFamily="2" charset="2"/>
               <a:buChar char="q"/>
             </a:pPr>
@@ -4163,17 +4182,17 @@
             </a:r>
           </a:p>
           <a:p>
-            <a:pPr marL="285750" indent="-285750">
+            <a:pPr marL="742950" lvl="1" indent="-285750">
               <a:buFont typeface="Wingdings" panose="05000000000000000000" pitchFamily="2" charset="2"/>
               <a:buChar char="q"/>
             </a:pPr>
-            <a:endParaRPr lang="it-IT" sz="2400" dirty="0">
+            <a:endParaRPr lang="it-IT" dirty="0">
               <a:latin typeface="Arial" panose="020B0604020202020204" pitchFamily="34" charset="0"/>
               <a:cs typeface="Arial" panose="020B0604020202020204" pitchFamily="34" charset="0"/>
             </a:endParaRPr>
           </a:p>
           <a:p>
-            <a:pPr marL="285750" indent="-285750">
+            <a:pPr marL="742950" lvl="1" indent="-285750">
               <a:buFont typeface="Wingdings" panose="05000000000000000000" pitchFamily="2" charset="2"/>
               <a:buChar char="q"/>
             </a:pPr>
@@ -4186,17 +4205,17 @@
             </a:r>
           </a:p>
           <a:p>
-            <a:pPr marL="285750" indent="-285750">
+            <a:pPr marL="742950" lvl="1" indent="-285750">
               <a:buFont typeface="Wingdings" panose="05000000000000000000" pitchFamily="2" charset="2"/>
               <a:buChar char="q"/>
             </a:pPr>
-            <a:endParaRPr lang="it-IT" sz="2400" dirty="0">
+            <a:endParaRPr lang="it-IT" sz="1400" dirty="0">
               <a:latin typeface="Arial" panose="020B0604020202020204" pitchFamily="34" charset="0"/>
               <a:cs typeface="Arial" panose="020B0604020202020204" pitchFamily="34" charset="0"/>
             </a:endParaRPr>
           </a:p>
           <a:p>
-            <a:pPr marL="285750" indent="-285750">
+            <a:pPr marL="742950" lvl="1" indent="-285750">
               <a:buFont typeface="Wingdings" panose="05000000000000000000" pitchFamily="2" charset="2"/>
               <a:buChar char="q"/>
             </a:pPr>
@@ -4209,17 +4228,17 @@
             </a:r>
           </a:p>
           <a:p>
-            <a:pPr marL="285750" indent="-285750">
+            <a:pPr marL="742950" lvl="1" indent="-285750">
               <a:buFont typeface="Wingdings" panose="05000000000000000000" pitchFamily="2" charset="2"/>
               <a:buChar char="q"/>
             </a:pPr>
-            <a:endParaRPr lang="it-IT" sz="2400" dirty="0">
+            <a:endParaRPr lang="it-IT" sz="1400" dirty="0">
               <a:latin typeface="Arial" panose="020B0604020202020204" pitchFamily="34" charset="0"/>
               <a:cs typeface="Arial" panose="020B0604020202020204" pitchFamily="34" charset="0"/>
             </a:endParaRPr>
           </a:p>
           <a:p>
-            <a:pPr marL="285750" indent="-285750">
+            <a:pPr marL="742950" lvl="1" indent="-285750">
               <a:buFont typeface="Wingdings" panose="05000000000000000000" pitchFamily="2" charset="2"/>
               <a:buChar char="q"/>
             </a:pPr>
@@ -4232,17 +4251,17 @@
             </a:r>
           </a:p>
           <a:p>
-            <a:pPr marL="285750" indent="-285750">
+            <a:pPr marL="742950" lvl="1" indent="-285750">
               <a:buFont typeface="Wingdings" panose="05000000000000000000" pitchFamily="2" charset="2"/>
               <a:buChar char="q"/>
             </a:pPr>
-            <a:endParaRPr lang="it-IT" sz="2400" dirty="0">
+            <a:endParaRPr lang="it-IT" sz="1400" dirty="0">
               <a:latin typeface="Arial" panose="020B0604020202020204" pitchFamily="34" charset="0"/>
               <a:cs typeface="Arial" panose="020B0604020202020204" pitchFamily="34" charset="0"/>
             </a:endParaRPr>
           </a:p>
           <a:p>
-            <a:pPr marL="285750" indent="-285750">
+            <a:pPr marL="742950" lvl="1" indent="-285750">
               <a:buFont typeface="Wingdings" panose="05000000000000000000" pitchFamily="2" charset="2"/>
               <a:buChar char="q"/>
             </a:pPr>
@@ -4255,17 +4274,14 @@
             </a:r>
           </a:p>
           <a:p>
-            <a:pPr marL="285750" indent="-285750">
-              <a:buFont typeface="Wingdings" panose="05000000000000000000" pitchFamily="2" charset="2"/>
-              <a:buChar char="q"/>
-            </a:pPr>
-            <a:endParaRPr lang="it-IT" sz="2400" dirty="0">
+            <a:pPr lvl="1"/>
+            <a:endParaRPr lang="it-IT" sz="1400" dirty="0">
               <a:latin typeface="Arial" panose="020B0604020202020204" pitchFamily="34" charset="0"/>
               <a:cs typeface="Arial" panose="020B0604020202020204" pitchFamily="34" charset="0"/>
             </a:endParaRPr>
           </a:p>
           <a:p>
-            <a:pPr marL="285750" indent="-285750">
+            <a:pPr marL="742950" lvl="1" indent="-285750">
               <a:buFont typeface="Wingdings" panose="05000000000000000000" pitchFamily="2" charset="2"/>
               <a:buChar char="q"/>
             </a:pPr>
@@ -4338,7 +4354,7 @@
           <a:p>
             <a:fld id="{EA77D956-8483-48F0-B072-75AF7025ADAB}" type="datetime1">
               <a:rPr lang="it-IT" smtClean="0"/>
-              <a:t>30/12/2025</a:t>
+              <a:t>03/01/2026</a:t>
             </a:fld>
             <a:endParaRPr lang="en-US"/>
           </a:p>
@@ -4468,7 +4484,7 @@
           <a:p>
             <a:r>
               <a:rPr lang="it-IT" sz="2800" b="1" dirty="0"/>
-              <a:t>ESEMPI (selezionati) DI RISULTATI</a:t>
+              <a:t>ESEMPI DI RISULTATI PROPOSTI</a:t>
             </a:r>
           </a:p>
         </p:txBody>
@@ -4583,7 +4599,7 @@
         </p:blipFill>
         <p:spPr>
           <a:xfrm>
-            <a:off x="1931308" y="1638145"/>
+            <a:off x="1931308" y="2028068"/>
             <a:ext cx="8329382" cy="3581710"/>
           </a:xfrm>
           <a:prstGeom prst="rect">
@@ -4614,7 +4630,7 @@
           <a:p>
             <a:fld id="{7B4D458A-1DE7-4BA5-AF5A-3746645FA5DB}" type="datetime1">
               <a:rPr lang="it-IT" smtClean="0"/>
-              <a:t>30/12/2025</a:t>
+              <a:t>03/01/2026</a:t>
             </a:fld>
             <a:endParaRPr lang="en-US"/>
           </a:p>
@@ -4675,6 +4691,48 @@
               <a:t>11</a:t>
             </a:fld>
             <a:endParaRPr lang="en-US"/>
+          </a:p>
+        </p:txBody>
+      </p:sp>
+      <p:sp>
+        <p:nvSpPr>
+          <p:cNvPr id="8" name="TextBox 7">
+            <a:extLst>
+              <a:ext uri="{FF2B5EF4-FFF2-40B4-BE49-F238E27FC236}">
+                <a16:creationId xmlns:a16="http://schemas.microsoft.com/office/drawing/2014/main" id="{2003D181-7A07-426F-76A1-12764B85F819}"/>
+              </a:ext>
+            </a:extLst>
+          </p:cNvPr>
+          <p:cNvSpPr txBox="1"/>
+          <p:nvPr/>
+        </p:nvSpPr>
+        <p:spPr>
+          <a:xfrm>
+            <a:off x="688257" y="1354929"/>
+            <a:ext cx="8288595" cy="461665"/>
+          </a:xfrm>
+          <a:prstGeom prst="rect">
+            <a:avLst/>
+          </a:prstGeom>
+          <a:noFill/>
+        </p:spPr>
+        <p:txBody>
+          <a:bodyPr wrap="square" rtlCol="0">
+            <a:spAutoFit/>
+          </a:bodyPr>
+          <a:lstStyle/>
+          <a:p>
+            <a:pPr marL="285750" indent="-285750">
+              <a:buFont typeface="Wingdings" panose="05000000000000000000" pitchFamily="2" charset="2"/>
+              <a:buChar char="q"/>
+            </a:pPr>
+            <a:r>
+              <a:rPr lang="it-IT" sz="2400" dirty="0">
+                <a:latin typeface="Arial" panose="020B0604020202020204" pitchFamily="34" charset="0"/>
+                <a:cs typeface="Arial" panose="020B0604020202020204" pitchFamily="34" charset="0"/>
+              </a:rPr>
+              <a:t>Esperimento 0</a:t>
+            </a:r>
           </a:p>
         </p:txBody>
       </p:sp>
@@ -4744,7 +4802,7 @@
           <a:p>
             <a:r>
               <a:rPr lang="it-IT" sz="2800" b="1" dirty="0"/>
-              <a:t>ESEMPI (selezionati) DI RISULTATI</a:t>
+              <a:t>ESEMPI DI RISULTATI PROPOSTI</a:t>
             </a:r>
           </a:p>
         </p:txBody>
@@ -4859,7 +4917,7 @@
         </p:blipFill>
         <p:spPr>
           <a:xfrm>
-            <a:off x="3002011" y="1426920"/>
+            <a:off x="3002011" y="1652784"/>
             <a:ext cx="6187976" cy="4816257"/>
           </a:xfrm>
           <a:prstGeom prst="rect">
@@ -4890,7 +4948,7 @@
           <a:p>
             <a:fld id="{0F073BDE-955B-4E08-A876-9008EBC2E5D9}" type="datetime1">
               <a:rPr lang="it-IT" smtClean="0"/>
-              <a:t>30/12/2025</a:t>
+              <a:t>03/01/2026</a:t>
             </a:fld>
             <a:endParaRPr lang="en-US"/>
           </a:p>
@@ -4951,6 +5009,48 @@
               <a:t>12</a:t>
             </a:fld>
             <a:endParaRPr lang="en-US"/>
+          </a:p>
+        </p:txBody>
+      </p:sp>
+      <p:sp>
+        <p:nvSpPr>
+          <p:cNvPr id="10" name="TextBox 9">
+            <a:extLst>
+              <a:ext uri="{FF2B5EF4-FFF2-40B4-BE49-F238E27FC236}">
+                <a16:creationId xmlns:a16="http://schemas.microsoft.com/office/drawing/2014/main" id="{4EB9D807-8DDD-9EAA-751E-700FEAE81398}"/>
+              </a:ext>
+            </a:extLst>
+          </p:cNvPr>
+          <p:cNvSpPr txBox="1"/>
+          <p:nvPr/>
+        </p:nvSpPr>
+        <p:spPr>
+          <a:xfrm>
+            <a:off x="688257" y="1191119"/>
+            <a:ext cx="6094602" cy="461665"/>
+          </a:xfrm>
+          <a:prstGeom prst="rect">
+            <a:avLst/>
+          </a:prstGeom>
+          <a:noFill/>
+        </p:spPr>
+        <p:txBody>
+          <a:bodyPr wrap="square">
+            <a:spAutoFit/>
+          </a:bodyPr>
+          <a:lstStyle/>
+          <a:p>
+            <a:pPr marL="285750" indent="-285750">
+              <a:buFont typeface="Wingdings" panose="05000000000000000000" pitchFamily="2" charset="2"/>
+              <a:buChar char="q"/>
+            </a:pPr>
+            <a:r>
+              <a:rPr lang="it-IT" sz="2400" dirty="0">
+                <a:latin typeface="Arial" panose="020B0604020202020204" pitchFamily="34" charset="0"/>
+                <a:cs typeface="Arial" panose="020B0604020202020204" pitchFamily="34" charset="0"/>
+              </a:rPr>
+              <a:t>Una parte di esperimento 3</a:t>
+            </a:r>
           </a:p>
         </p:txBody>
       </p:sp>
@@ -5020,7 +5120,7 @@
           <a:p>
             <a:r>
               <a:rPr lang="it-IT" sz="2800" b="1" dirty="0"/>
-              <a:t>ESEMPI (selezionati) DI RISULTATI</a:t>
+              <a:t>ESEMPI DI RISULTATI PROPOSTI</a:t>
             </a:r>
           </a:p>
         </p:txBody>
@@ -5135,7 +5235,7 @@
         </p:blipFill>
         <p:spPr>
           <a:xfrm>
-            <a:off x="3169665" y="1520782"/>
+            <a:off x="3169665" y="1593242"/>
             <a:ext cx="5852667" cy="4740051"/>
           </a:xfrm>
           <a:prstGeom prst="rect">
@@ -5166,7 +5266,7 @@
           <a:p>
             <a:fld id="{85077CAD-8672-4530-9999-911CF4F320CA}" type="datetime1">
               <a:rPr lang="it-IT" smtClean="0"/>
-              <a:t>30/12/2025</a:t>
+              <a:t>03/01/2026</a:t>
             </a:fld>
             <a:endParaRPr lang="en-US"/>
           </a:p>
@@ -5227,6 +5327,48 @@
               <a:t>13</a:t>
             </a:fld>
             <a:endParaRPr lang="en-US"/>
+          </a:p>
+        </p:txBody>
+      </p:sp>
+      <p:sp>
+        <p:nvSpPr>
+          <p:cNvPr id="10" name="TextBox 9">
+            <a:extLst>
+              <a:ext uri="{FF2B5EF4-FFF2-40B4-BE49-F238E27FC236}">
+                <a16:creationId xmlns:a16="http://schemas.microsoft.com/office/drawing/2014/main" id="{FA8F7B66-6F76-A0EB-BE9D-0CFD56CBD1F0}"/>
+              </a:ext>
+            </a:extLst>
+          </p:cNvPr>
+          <p:cNvSpPr txBox="1"/>
+          <p:nvPr/>
+        </p:nvSpPr>
+        <p:spPr>
+          <a:xfrm>
+            <a:off x="688257" y="1142135"/>
+            <a:ext cx="6094602" cy="461665"/>
+          </a:xfrm>
+          <a:prstGeom prst="rect">
+            <a:avLst/>
+          </a:prstGeom>
+          <a:noFill/>
+        </p:spPr>
+        <p:txBody>
+          <a:bodyPr wrap="square">
+            <a:spAutoFit/>
+          </a:bodyPr>
+          <a:lstStyle/>
+          <a:p>
+            <a:pPr marL="285750" indent="-285750">
+              <a:buFont typeface="Wingdings" panose="05000000000000000000" pitchFamily="2" charset="2"/>
+              <a:buChar char="q"/>
+            </a:pPr>
+            <a:r>
+              <a:rPr lang="it-IT" sz="2400" dirty="0">
+                <a:latin typeface="Arial" panose="020B0604020202020204" pitchFamily="34" charset="0"/>
+                <a:cs typeface="Arial" panose="020B0604020202020204" pitchFamily="34" charset="0"/>
+              </a:rPr>
+              <a:t>Una parte di esperimento 4</a:t>
+            </a:r>
           </a:p>
         </p:txBody>
       </p:sp>
@@ -5533,7 +5675,7 @@
           <a:p>
             <a:fld id="{A2AF2A43-5120-4B7D-95A3-344374AC366D}" type="datetime1">
               <a:rPr lang="it-IT" smtClean="0"/>
-              <a:t>30/12/2025</a:t>
+              <a:t>03/01/2026</a:t>
             </a:fld>
             <a:endParaRPr lang="en-US"/>
           </a:p>
@@ -5618,7 +5760,7 @@
         <p:cNvPr id="1" name="">
           <a:extLst>
             <a:ext uri="{FF2B5EF4-FFF2-40B4-BE49-F238E27FC236}">
-              <a16:creationId xmlns:a16="http://schemas.microsoft.com/office/drawing/2014/main" id="{BFC17E0E-AE97-F13E-620E-0CBC1E3B9B86}"/>
+              <a16:creationId xmlns:a16="http://schemas.microsoft.com/office/drawing/2014/main" id="{B77017D8-AFD3-9ECF-888F-78B1E69A7474}"/>
             </a:ext>
           </a:extLst>
         </p:cNvPr>
@@ -5638,7 +5780,7 @@
           <p:cNvPr id="3" name="TextBox 2">
             <a:extLst>
               <a:ext uri="{FF2B5EF4-FFF2-40B4-BE49-F238E27FC236}">
-                <a16:creationId xmlns:a16="http://schemas.microsoft.com/office/drawing/2014/main" id="{E58BAD74-1C4B-F1EE-8FB8-9A08373A7B2E}"/>
+                <a16:creationId xmlns:a16="http://schemas.microsoft.com/office/drawing/2014/main" id="{76EAB306-B5C9-C2C2-9518-F42386EB11A9}"/>
               </a:ext>
             </a:extLst>
           </p:cNvPr>
@@ -5673,7 +5815,7 @@
           <p:cNvPr id="4" name="Rectangle 3">
             <a:extLst>
               <a:ext uri="{FF2B5EF4-FFF2-40B4-BE49-F238E27FC236}">
-                <a16:creationId xmlns:a16="http://schemas.microsoft.com/office/drawing/2014/main" id="{2EFD6AF4-F8C5-F991-8E66-4486571B84D8}"/>
+                <a16:creationId xmlns:a16="http://schemas.microsoft.com/office/drawing/2014/main" id="{7A55AECD-545C-F2BB-503F-DC60D369564E}"/>
               </a:ext>
             </a:extLst>
           </p:cNvPr>
@@ -5725,7 +5867,7 @@
           <p:cNvPr id="7" name="TextBox 6">
             <a:extLst>
               <a:ext uri="{FF2B5EF4-FFF2-40B4-BE49-F238E27FC236}">
-                <a16:creationId xmlns:a16="http://schemas.microsoft.com/office/drawing/2014/main" id="{76C4D47C-A653-DC7D-546F-EE8C6CCE931C}"/>
+                <a16:creationId xmlns:a16="http://schemas.microsoft.com/office/drawing/2014/main" id="{7FA77567-78A8-4540-A0B0-5DDF183203B7}"/>
               </a:ext>
             </a:extLst>
           </p:cNvPr>
@@ -5735,7 +5877,7 @@
         <p:spPr>
           <a:xfrm>
             <a:off x="688257" y="1257642"/>
-            <a:ext cx="8288595" cy="1200329"/>
+            <a:ext cx="8288595" cy="1569660"/>
           </a:xfrm>
           <a:prstGeom prst="rect">
             <a:avLst/>
@@ -5758,6 +5900,19 @@
                 <a:cs typeface="Arial" panose="020B0604020202020204" pitchFamily="34" charset="0"/>
               </a:rPr>
               <a:t>Gli esperimenti 0, 1, 2, 5, 6 erano consistenti col paper</a:t>
+            </a:r>
+          </a:p>
+          <a:p>
+            <a:pPr marL="742950" lvl="1" indent="-285750">
+              <a:buFont typeface="Wingdings" panose="05000000000000000000" pitchFamily="2" charset="2"/>
+              <a:buChar char="q"/>
+            </a:pPr>
+            <a:r>
+              <a:rPr lang="it-IT" sz="2400" dirty="0">
+                <a:latin typeface="Arial" panose="020B0604020202020204" pitchFamily="34" charset="0"/>
+                <a:cs typeface="Arial" panose="020B0604020202020204" pitchFamily="34" charset="0"/>
+              </a:rPr>
+              <a:t>Esperimento 4 parzialmente consistente</a:t>
             </a:r>
           </a:p>
           <a:p>
@@ -5790,7 +5945,7 @@
           <p:cNvPr id="9" name="TextBox 8">
             <a:extLst>
               <a:ext uri="{FF2B5EF4-FFF2-40B4-BE49-F238E27FC236}">
-                <a16:creationId xmlns:a16="http://schemas.microsoft.com/office/drawing/2014/main" id="{D10CDA77-DFD5-7449-721C-0C1EEC85DB78}"/>
+                <a16:creationId xmlns:a16="http://schemas.microsoft.com/office/drawing/2014/main" id="{CD161C93-E697-979E-5CEF-EE525B6D4512}"/>
               </a:ext>
             </a:extLst>
           </p:cNvPr>
@@ -5821,12 +5976,99 @@
           </a:p>
         </p:txBody>
       </p:sp>
+      <p:sp>
+        <p:nvSpPr>
+          <p:cNvPr id="5" name="Date Placeholder 4">
+            <a:extLst>
+              <a:ext uri="{FF2B5EF4-FFF2-40B4-BE49-F238E27FC236}">
+                <a16:creationId xmlns:a16="http://schemas.microsoft.com/office/drawing/2014/main" id="{FA832A08-EC71-B794-47C2-154D92E49A47}"/>
+              </a:ext>
+            </a:extLst>
+          </p:cNvPr>
+          <p:cNvSpPr>
+            <a:spLocks noGrp="1"/>
+          </p:cNvSpPr>
+          <p:nvPr>
+            <p:ph type="dt" sz="half" idx="10"/>
+          </p:nvPr>
+        </p:nvSpPr>
+        <p:spPr/>
+        <p:txBody>
+          <a:bodyPr/>
+          <a:lstStyle/>
+          <a:p>
+            <a:fld id="{0E4BD75C-8A8B-4E75-8D28-95927EC03BF3}" type="datetime1">
+              <a:rPr lang="it-IT" smtClean="0"/>
+              <a:t>03/01/2026</a:t>
+            </a:fld>
+            <a:endParaRPr lang="en-US"/>
+          </a:p>
+        </p:txBody>
+      </p:sp>
+      <p:sp>
+        <p:nvSpPr>
+          <p:cNvPr id="6" name="Footer Placeholder 5">
+            <a:extLst>
+              <a:ext uri="{FF2B5EF4-FFF2-40B4-BE49-F238E27FC236}">
+                <a16:creationId xmlns:a16="http://schemas.microsoft.com/office/drawing/2014/main" id="{881573E2-3348-0555-2CC6-822818967645}"/>
+              </a:ext>
+            </a:extLst>
+          </p:cNvPr>
+          <p:cNvSpPr>
+            <a:spLocks noGrp="1"/>
+          </p:cNvSpPr>
+          <p:nvPr>
+            <p:ph type="ftr" sz="quarter" idx="11"/>
+          </p:nvPr>
+        </p:nvSpPr>
+        <p:spPr/>
+        <p:txBody>
+          <a:bodyPr/>
+          <a:lstStyle/>
+          <a:p>
+            <a:r>
+              <a:rPr lang="nn-NO"/>
+              <a:t>DINO MENG [SM3201466], BsC AIDA@MIGE</a:t>
+            </a:r>
+            <a:endParaRPr lang="en-US"/>
+          </a:p>
+        </p:txBody>
+      </p:sp>
+      <p:sp>
+        <p:nvSpPr>
+          <p:cNvPr id="8" name="Slide Number Placeholder 7">
+            <a:extLst>
+              <a:ext uri="{FF2B5EF4-FFF2-40B4-BE49-F238E27FC236}">
+                <a16:creationId xmlns:a16="http://schemas.microsoft.com/office/drawing/2014/main" id="{D33E3F76-D042-3D3C-C405-A1E194CA62AD}"/>
+              </a:ext>
+            </a:extLst>
+          </p:cNvPr>
+          <p:cNvSpPr>
+            <a:spLocks noGrp="1"/>
+          </p:cNvSpPr>
+          <p:nvPr>
+            <p:ph type="sldNum" sz="quarter" idx="12"/>
+          </p:nvPr>
+        </p:nvSpPr>
+        <p:spPr/>
+        <p:txBody>
+          <a:bodyPr/>
+          <a:lstStyle/>
+          <a:p>
+            <a:fld id="{8BF32AC9-143A-477E-841D-1F801B7F8FE8}" type="slidenum">
+              <a:rPr lang="en-US" smtClean="0"/>
+              <a:t>15</a:t>
+            </a:fld>
+            <a:endParaRPr lang="en-US"/>
+          </a:p>
+        </p:txBody>
+      </p:sp>
       <p:pic>
         <p:nvPicPr>
-          <p:cNvPr id="6" name="Picture 5" descr="A graph of different colored lines&#10;&#10;AI-generated content may be incorrect.">
-            <a:extLst>
-              <a:ext uri="{FF2B5EF4-FFF2-40B4-BE49-F238E27FC236}">
-                <a16:creationId xmlns:a16="http://schemas.microsoft.com/office/drawing/2014/main" id="{58917909-DD92-5D4D-1109-96ED5E4FF4EA}"/>
+          <p:cNvPr id="10" name="Picture 9" descr="A graph of different colored lines&#10;&#10;AI-generated content may be incorrect.">
+            <a:extLst>
+              <a:ext uri="{FF2B5EF4-FFF2-40B4-BE49-F238E27FC236}">
+                <a16:creationId xmlns:a16="http://schemas.microsoft.com/office/drawing/2014/main" id="{1098C0D8-EC70-870E-F65A-F825650BCD43}"/>
               </a:ext>
             </a:extLst>
           </p:cNvPr>
@@ -5843,105 +6085,18 @@
         </p:blipFill>
         <p:spPr>
           <a:xfrm>
-            <a:off x="1091379" y="2238325"/>
-            <a:ext cx="10009240" cy="4323410"/>
+            <a:off x="1504424" y="2449377"/>
+            <a:ext cx="9183150" cy="3966588"/>
           </a:xfrm>
           <a:prstGeom prst="rect">
             <a:avLst/>
           </a:prstGeom>
         </p:spPr>
       </p:pic>
-      <p:sp>
-        <p:nvSpPr>
-          <p:cNvPr id="2" name="Date Placeholder 1">
-            <a:extLst>
-              <a:ext uri="{FF2B5EF4-FFF2-40B4-BE49-F238E27FC236}">
-                <a16:creationId xmlns:a16="http://schemas.microsoft.com/office/drawing/2014/main" id="{06DBB2FE-76E9-D83A-5B65-74F2C2BF88A0}"/>
-              </a:ext>
-            </a:extLst>
-          </p:cNvPr>
-          <p:cNvSpPr>
-            <a:spLocks noGrp="1"/>
-          </p:cNvSpPr>
-          <p:nvPr>
-            <p:ph type="dt" sz="half" idx="10"/>
-          </p:nvPr>
-        </p:nvSpPr>
-        <p:spPr/>
-        <p:txBody>
-          <a:bodyPr/>
-          <a:lstStyle/>
-          <a:p>
-            <a:fld id="{8D6AD3B8-A5F2-4012-A800-E9DABE61F30B}" type="datetime1">
-              <a:rPr lang="it-IT" smtClean="0"/>
-              <a:t>30/12/2025</a:t>
-            </a:fld>
-            <a:endParaRPr lang="en-US"/>
-          </a:p>
-        </p:txBody>
-      </p:sp>
-      <p:sp>
-        <p:nvSpPr>
-          <p:cNvPr id="5" name="Footer Placeholder 4">
-            <a:extLst>
-              <a:ext uri="{FF2B5EF4-FFF2-40B4-BE49-F238E27FC236}">
-                <a16:creationId xmlns:a16="http://schemas.microsoft.com/office/drawing/2014/main" id="{181D42E8-18BC-269E-32BF-37E498C6BF20}"/>
-              </a:ext>
-            </a:extLst>
-          </p:cNvPr>
-          <p:cNvSpPr>
-            <a:spLocks noGrp="1"/>
-          </p:cNvSpPr>
-          <p:nvPr>
-            <p:ph type="ftr" sz="quarter" idx="11"/>
-          </p:nvPr>
-        </p:nvSpPr>
-        <p:spPr/>
-        <p:txBody>
-          <a:bodyPr/>
-          <a:lstStyle/>
-          <a:p>
-            <a:r>
-              <a:rPr lang="nn-NO"/>
-              <a:t>DINO MENG [SM3201466], BsC AIDA@MIGE</a:t>
-            </a:r>
-            <a:endParaRPr lang="en-US"/>
-          </a:p>
-        </p:txBody>
-      </p:sp>
-      <p:sp>
-        <p:nvSpPr>
-          <p:cNvPr id="8" name="Slide Number Placeholder 7">
-            <a:extLst>
-              <a:ext uri="{FF2B5EF4-FFF2-40B4-BE49-F238E27FC236}">
-                <a16:creationId xmlns:a16="http://schemas.microsoft.com/office/drawing/2014/main" id="{FC978F7B-49B7-F6FD-5D94-589EC5603498}"/>
-              </a:ext>
-            </a:extLst>
-          </p:cNvPr>
-          <p:cNvSpPr>
-            <a:spLocks noGrp="1"/>
-          </p:cNvSpPr>
-          <p:nvPr>
-            <p:ph type="sldNum" sz="quarter" idx="12"/>
-          </p:nvPr>
-        </p:nvSpPr>
-        <p:spPr/>
-        <p:txBody>
-          <a:bodyPr/>
-          <a:lstStyle/>
-          <a:p>
-            <a:fld id="{8BF32AC9-143A-477E-841D-1F801B7F8FE8}" type="slidenum">
-              <a:rPr lang="en-US" smtClean="0"/>
-              <a:t>15</a:t>
-            </a:fld>
-            <a:endParaRPr lang="en-US"/>
-          </a:p>
-        </p:txBody>
-      </p:sp>
     </p:spTree>
     <p:extLst>
       <p:ext uri="{BB962C8B-B14F-4D97-AF65-F5344CB8AC3E}">
-        <p14:creationId xmlns:p14="http://schemas.microsoft.com/office/powerpoint/2010/main" val="1846624256"/>
+        <p14:creationId xmlns:p14="http://schemas.microsoft.com/office/powerpoint/2010/main" val="1174128754"/>
       </p:ext>
     </p:extLst>
   </p:cSld>
@@ -6076,7 +6231,7 @@
         <p:spPr>
           <a:xfrm>
             <a:off x="688257" y="1257642"/>
-            <a:ext cx="8288595" cy="1200329"/>
+            <a:ext cx="8288595" cy="1569660"/>
           </a:xfrm>
           <a:prstGeom prst="rect">
             <a:avLst/>
@@ -6099,6 +6254,19 @@
                 <a:cs typeface="Arial" panose="020B0604020202020204" pitchFamily="34" charset="0"/>
               </a:rPr>
               <a:t>Gli esperimenti 0, 1, 2, 5, 6 erano consistenti col paper</a:t>
+            </a:r>
+          </a:p>
+          <a:p>
+            <a:pPr marL="742950" lvl="1" indent="-285750">
+              <a:buFont typeface="Wingdings" panose="05000000000000000000" pitchFamily="2" charset="2"/>
+              <a:buChar char="q"/>
+            </a:pPr>
+            <a:r>
+              <a:rPr lang="it-IT" sz="2400" dirty="0">
+                <a:latin typeface="Arial" panose="020B0604020202020204" pitchFamily="34" charset="0"/>
+                <a:cs typeface="Arial" panose="020B0604020202020204" pitchFamily="34" charset="0"/>
+              </a:rPr>
+              <a:t>Esperimento 4 parzialmente consistente</a:t>
             </a:r>
           </a:p>
           <a:p>
@@ -6192,7 +6360,7 @@
         </p:blipFill>
         <p:spPr>
           <a:xfrm>
-            <a:off x="1528914" y="2325340"/>
+            <a:off x="1528914" y="2501321"/>
             <a:ext cx="9134170" cy="3914644"/>
           </a:xfrm>
           <a:prstGeom prst="rect">
@@ -6223,7 +6391,7 @@
           <a:p>
             <a:fld id="{0E4BD75C-8A8B-4E75-8D28-95927EC03BF3}" type="datetime1">
               <a:rPr lang="it-IT" smtClean="0"/>
-              <a:t>30/12/2025</a:t>
+              <a:t>03/01/2026</a:t>
             </a:fld>
             <a:endParaRPr lang="en-US"/>
           </a:p>
@@ -6436,6 +6604,905 @@
 </file>
 
 <file path=ppt/slides/slide17.xml><?xml version="1.0" encoding="utf-8"?>
+<p:sld xmlns:a="http://schemas.openxmlformats.org/drawingml/2006/main" xmlns:r="http://schemas.openxmlformats.org/officeDocument/2006/relationships" xmlns:p="http://schemas.openxmlformats.org/presentationml/2006/main">
+  <p:cSld>
+    <p:spTree>
+      <p:nvGrpSpPr>
+        <p:cNvPr id="1" name="">
+          <a:extLst>
+            <a:ext uri="{FF2B5EF4-FFF2-40B4-BE49-F238E27FC236}">
+              <a16:creationId xmlns:a16="http://schemas.microsoft.com/office/drawing/2014/main" id="{9CE5AEBC-42B1-6175-B5AA-846E8D1DF7FE}"/>
+            </a:ext>
+          </a:extLst>
+        </p:cNvPr>
+        <p:cNvGrpSpPr/>
+        <p:nvPr/>
+      </p:nvGrpSpPr>
+      <p:grpSpPr>
+        <a:xfrm>
+          <a:off x="0" y="0"/>
+          <a:ext cx="0" cy="0"/>
+          <a:chOff x="0" y="0"/>
+          <a:chExt cx="0" cy="0"/>
+        </a:xfrm>
+      </p:grpSpPr>
+      <p:sp>
+        <p:nvSpPr>
+          <p:cNvPr id="3" name="TextBox 2">
+            <a:extLst>
+              <a:ext uri="{FF2B5EF4-FFF2-40B4-BE49-F238E27FC236}">
+                <a16:creationId xmlns:a16="http://schemas.microsoft.com/office/drawing/2014/main" id="{336C62D8-4D7A-703C-CBBB-364F4E15906E}"/>
+              </a:ext>
+            </a:extLst>
+          </p:cNvPr>
+          <p:cNvSpPr txBox="1"/>
+          <p:nvPr/>
+        </p:nvSpPr>
+        <p:spPr>
+          <a:xfrm>
+            <a:off x="688257" y="442035"/>
+            <a:ext cx="5407743" cy="523220"/>
+          </a:xfrm>
+          <a:prstGeom prst="rect">
+            <a:avLst/>
+          </a:prstGeom>
+          <a:noFill/>
+        </p:spPr>
+        <p:txBody>
+          <a:bodyPr wrap="square">
+            <a:spAutoFit/>
+          </a:bodyPr>
+          <a:lstStyle/>
+          <a:p>
+            <a:r>
+              <a:rPr lang="it-IT" sz="2800" b="1" dirty="0"/>
+              <a:t>RISULTATI CONSISTENTI</a:t>
+            </a:r>
+          </a:p>
+        </p:txBody>
+      </p:sp>
+      <p:sp>
+        <p:nvSpPr>
+          <p:cNvPr id="4" name="Rectangle 3">
+            <a:extLst>
+              <a:ext uri="{FF2B5EF4-FFF2-40B4-BE49-F238E27FC236}">
+                <a16:creationId xmlns:a16="http://schemas.microsoft.com/office/drawing/2014/main" id="{0E4DA277-9B4B-44E0-7836-CEDA86425928}"/>
+              </a:ext>
+            </a:extLst>
+          </p:cNvPr>
+          <p:cNvSpPr/>
+          <p:nvPr/>
+        </p:nvSpPr>
+        <p:spPr>
+          <a:xfrm>
+            <a:off x="688257" y="965255"/>
+            <a:ext cx="10815485" cy="104767"/>
+          </a:xfrm>
+          <a:prstGeom prst="rect">
+            <a:avLst/>
+          </a:prstGeom>
+          <a:solidFill>
+            <a:schemeClr val="accent4"/>
+          </a:solidFill>
+          <a:ln>
+            <a:noFill/>
+          </a:ln>
+        </p:spPr>
+        <p:style>
+          <a:lnRef idx="2">
+            <a:schemeClr val="accent1">
+              <a:shade val="15000"/>
+            </a:schemeClr>
+          </a:lnRef>
+          <a:fillRef idx="1">
+            <a:schemeClr val="accent1"/>
+          </a:fillRef>
+          <a:effectRef idx="0">
+            <a:schemeClr val="accent1"/>
+          </a:effectRef>
+          <a:fontRef idx="minor">
+            <a:schemeClr val="lt1"/>
+          </a:fontRef>
+        </p:style>
+        <p:txBody>
+          <a:bodyPr rtlCol="0" anchor="ctr"/>
+          <a:lstStyle/>
+          <a:p>
+            <a:pPr algn="ctr"/>
+            <a:endParaRPr lang="en-US"/>
+          </a:p>
+        </p:txBody>
+      </p:sp>
+      <mc:AlternateContent xmlns:mc="http://schemas.openxmlformats.org/markup-compatibility/2006">
+        <mc:Choice xmlns:a14="http://schemas.microsoft.com/office/drawing/2010/main" Requires="a14">
+          <p:sp>
+            <p:nvSpPr>
+              <p:cNvPr id="7" name="TextBox 6">
+                <a:extLst>
+                  <a:ext uri="{FF2B5EF4-FFF2-40B4-BE49-F238E27FC236}">
+                    <a16:creationId xmlns:a16="http://schemas.microsoft.com/office/drawing/2014/main" id="{0E72DD00-1859-E8C8-6ABE-FD948B09E642}"/>
+                  </a:ext>
+                </a:extLst>
+              </p:cNvPr>
+              <p:cNvSpPr txBox="1"/>
+              <p:nvPr/>
+            </p:nvSpPr>
+            <p:spPr>
+              <a:xfrm>
+                <a:off x="688258" y="1257642"/>
+                <a:ext cx="5007868" cy="2677656"/>
+              </a:xfrm>
+              <a:prstGeom prst="rect">
+                <a:avLst/>
+              </a:prstGeom>
+              <a:noFill/>
+            </p:spPr>
+            <p:txBody>
+              <a:bodyPr wrap="square" rtlCol="0">
+                <a:spAutoFit/>
+              </a:bodyPr>
+              <a:lstStyle/>
+              <a:p>
+                <a:pPr marL="285750" indent="-285750">
+                  <a:buFont typeface="Wingdings" panose="05000000000000000000" pitchFamily="2" charset="2"/>
+                  <a:buChar char="q"/>
+                </a:pPr>
+                <a:r>
+                  <a:rPr lang="it-IT" sz="2400" dirty="0">
+                    <a:latin typeface="Arial" panose="020B0604020202020204" pitchFamily="34" charset="0"/>
+                    <a:cs typeface="Arial" panose="020B0604020202020204" pitchFamily="34" charset="0"/>
+                  </a:rPr>
+                  <a:t>Esempio: Esperimento 5 (paper)</a:t>
+                </a:r>
+              </a:p>
+              <a:p>
+                <a:pPr marL="742950" lvl="1" indent="-285750">
+                  <a:buFont typeface="Wingdings" panose="05000000000000000000" pitchFamily="2" charset="2"/>
+                  <a:buChar char="q"/>
+                </a:pPr>
+                <a:r>
+                  <a:rPr lang="it-IT" sz="2400" dirty="0">
+                    <a:latin typeface="Arial" panose="020B0604020202020204" pitchFamily="34" charset="0"/>
+                    <a:cs typeface="Arial" panose="020B0604020202020204" pitchFamily="34" charset="0"/>
+                  </a:rPr>
+                  <a:t>(a): e </a:t>
+                </a:r>
+                <a14:m>
+                  <m:oMath xmlns:m="http://schemas.openxmlformats.org/officeDocument/2006/math">
+                    <m:r>
+                      <a:rPr lang="it-IT" sz="2400" b="0" i="1" smtClean="0">
+                        <a:latin typeface="Cambria Math" panose="02040503050406030204" pitchFamily="18" charset="0"/>
+                        <a:cs typeface="Arial" panose="020B0604020202020204" pitchFamily="34" charset="0"/>
+                      </a:rPr>
+                      <m:t>≤</m:t>
+                    </m:r>
+                  </m:oMath>
+                </a14:m>
+                <a:r>
+                  <a:rPr lang="it-IT" sz="2400" dirty="0">
+                    <a:latin typeface="Arial" panose="020B0604020202020204" pitchFamily="34" charset="0"/>
+                    <a:cs typeface="Arial" panose="020B0604020202020204" pitchFamily="34" charset="0"/>
+                  </a:rPr>
+                  <a:t> 0.01</a:t>
+                </a:r>
+              </a:p>
+              <a:p>
+                <a:pPr marL="742950" lvl="1" indent="-285750">
+                  <a:buFont typeface="Wingdings" panose="05000000000000000000" pitchFamily="2" charset="2"/>
+                  <a:buChar char="q"/>
+                </a:pPr>
+                <a:r>
+                  <a:rPr lang="it-IT" sz="2400" dirty="0">
+                    <a:latin typeface="Arial" panose="020B0604020202020204" pitchFamily="34" charset="0"/>
+                    <a:cs typeface="Arial" panose="020B0604020202020204" pitchFamily="34" charset="0"/>
+                  </a:rPr>
+                  <a:t>(b): </a:t>
+                </a:r>
+                <a14:m>
+                  <m:oMath xmlns:m="http://schemas.openxmlformats.org/officeDocument/2006/math">
+                    <m:r>
+                      <a:rPr lang="it-IT" sz="2400" b="0" i="1" smtClean="0">
+                        <a:latin typeface="Cambria Math" panose="02040503050406030204" pitchFamily="18" charset="0"/>
+                        <a:cs typeface="Arial" panose="020B0604020202020204" pitchFamily="34" charset="0"/>
+                      </a:rPr>
+                      <m:t>0.01 &lt; </m:t>
+                    </m:r>
+                    <m:r>
+                      <a:rPr lang="it-IT" sz="2400" b="0" i="1" smtClean="0">
+                        <a:latin typeface="Cambria Math" panose="02040503050406030204" pitchFamily="18" charset="0"/>
+                        <a:cs typeface="Arial" panose="020B0604020202020204" pitchFamily="34" charset="0"/>
+                      </a:rPr>
+                      <m:t>𝑒</m:t>
+                    </m:r>
+                    <m:r>
+                      <a:rPr lang="it-IT" sz="2400" b="0" i="1" smtClean="0">
+                        <a:latin typeface="Cambria Math" panose="02040503050406030204" pitchFamily="18" charset="0"/>
+                        <a:cs typeface="Arial" panose="020B0604020202020204" pitchFamily="34" charset="0"/>
+                      </a:rPr>
+                      <m:t> ≤0.5</m:t>
+                    </m:r>
+                  </m:oMath>
+                </a14:m>
+                <a:endParaRPr lang="it-IT" sz="2400" b="0" dirty="0">
+                  <a:latin typeface="Arial" panose="020B0604020202020204" pitchFamily="34" charset="0"/>
+                  <a:cs typeface="Arial" panose="020B0604020202020204" pitchFamily="34" charset="0"/>
+                </a:endParaRPr>
+              </a:p>
+              <a:p>
+                <a:pPr marL="742950" lvl="1" indent="-285750">
+                  <a:buFont typeface="Wingdings" panose="05000000000000000000" pitchFamily="2" charset="2"/>
+                  <a:buChar char="q"/>
+                </a:pPr>
+                <a:r>
+                  <a:rPr lang="it-IT" sz="2400" dirty="0">
+                    <a:latin typeface="Arial" panose="020B0604020202020204" pitchFamily="34" charset="0"/>
+                    <a:cs typeface="Arial" panose="020B0604020202020204" pitchFamily="34" charset="0"/>
+                  </a:rPr>
+                  <a:t>(c): </a:t>
+                </a:r>
+                <a14:m>
+                  <m:oMath xmlns:m="http://schemas.openxmlformats.org/officeDocument/2006/math">
+                    <m:r>
+                      <a:rPr lang="it-IT" sz="2400" i="1">
+                        <a:latin typeface="Cambria Math" panose="02040503050406030204" pitchFamily="18" charset="0"/>
+                        <a:cs typeface="Arial" panose="020B0604020202020204" pitchFamily="34" charset="0"/>
+                      </a:rPr>
+                      <m:t>0.</m:t>
+                    </m:r>
+                    <m:r>
+                      <a:rPr lang="it-IT" sz="2400" b="0" i="1" smtClean="0">
+                        <a:latin typeface="Cambria Math" panose="02040503050406030204" pitchFamily="18" charset="0"/>
+                        <a:cs typeface="Arial" panose="020B0604020202020204" pitchFamily="34" charset="0"/>
+                      </a:rPr>
+                      <m:t>6</m:t>
+                    </m:r>
+                    <m:r>
+                      <a:rPr lang="it-IT" sz="2400" i="1">
+                        <a:latin typeface="Cambria Math" panose="02040503050406030204" pitchFamily="18" charset="0"/>
+                        <a:cs typeface="Arial" panose="020B0604020202020204" pitchFamily="34" charset="0"/>
+                      </a:rPr>
+                      <m:t> </m:t>
+                    </m:r>
+                    <m:r>
+                      <a:rPr lang="it-IT" sz="2400" b="0" i="1" smtClean="0">
+                        <a:latin typeface="Cambria Math" panose="02040503050406030204" pitchFamily="18" charset="0"/>
+                        <a:cs typeface="Arial" panose="020B0604020202020204" pitchFamily="34" charset="0"/>
+                      </a:rPr>
+                      <m:t>≤</m:t>
+                    </m:r>
+                    <m:r>
+                      <a:rPr lang="it-IT" sz="2400" i="1">
+                        <a:latin typeface="Cambria Math" panose="02040503050406030204" pitchFamily="18" charset="0"/>
+                        <a:cs typeface="Arial" panose="020B0604020202020204" pitchFamily="34" charset="0"/>
+                      </a:rPr>
+                      <m:t> </m:t>
+                    </m:r>
+                    <m:r>
+                      <a:rPr lang="it-IT" sz="2400" i="1">
+                        <a:latin typeface="Cambria Math" panose="02040503050406030204" pitchFamily="18" charset="0"/>
+                        <a:cs typeface="Arial" panose="020B0604020202020204" pitchFamily="34" charset="0"/>
+                      </a:rPr>
+                      <m:t>𝑒</m:t>
+                    </m:r>
+                  </m:oMath>
+                </a14:m>
+                <a:endParaRPr lang="it-IT" sz="2400" dirty="0">
+                  <a:latin typeface="Arial" panose="020B0604020202020204" pitchFamily="34" charset="0"/>
+                  <a:cs typeface="Arial" panose="020B0604020202020204" pitchFamily="34" charset="0"/>
+                </a:endParaRPr>
+              </a:p>
+              <a:p>
+                <a:pPr marL="742950" lvl="1" indent="-285750">
+                  <a:buFont typeface="Wingdings" panose="05000000000000000000" pitchFamily="2" charset="2"/>
+                  <a:buChar char="q"/>
+                </a:pPr>
+                <a:endParaRPr lang="it-IT" sz="2400" b="0" dirty="0">
+                  <a:latin typeface="Arial" panose="020B0604020202020204" pitchFamily="34" charset="0"/>
+                  <a:cs typeface="Arial" panose="020B0604020202020204" pitchFamily="34" charset="0"/>
+                </a:endParaRPr>
+              </a:p>
+              <a:p>
+                <a:pPr marL="742950" lvl="1" indent="-285750">
+                  <a:buFont typeface="Wingdings" panose="05000000000000000000" pitchFamily="2" charset="2"/>
+                  <a:buChar char="q"/>
+                </a:pPr>
+                <a:endParaRPr lang="it-IT" sz="2400" dirty="0">
+                  <a:latin typeface="Arial" panose="020B0604020202020204" pitchFamily="34" charset="0"/>
+                  <a:cs typeface="Arial" panose="020B0604020202020204" pitchFamily="34" charset="0"/>
+                </a:endParaRPr>
+              </a:p>
+              <a:p>
+                <a:pPr marL="742950" lvl="1" indent="-285750">
+                  <a:buFont typeface="Wingdings" panose="05000000000000000000" pitchFamily="2" charset="2"/>
+                  <a:buChar char="q"/>
+                </a:pPr>
+                <a:endParaRPr lang="it-IT" sz="2400" dirty="0">
+                  <a:latin typeface="Arial" panose="020B0604020202020204" pitchFamily="34" charset="0"/>
+                  <a:cs typeface="Arial" panose="020B0604020202020204" pitchFamily="34" charset="0"/>
+                </a:endParaRPr>
+              </a:p>
+            </p:txBody>
+          </p:sp>
+        </mc:Choice>
+        <mc:Fallback>
+          <p:sp>
+            <p:nvSpPr>
+              <p:cNvPr id="7" name="TextBox 6">
+                <a:extLst>
+                  <a:ext uri="{FF2B5EF4-FFF2-40B4-BE49-F238E27FC236}">
+                    <a16:creationId xmlns:a16="http://schemas.microsoft.com/office/drawing/2014/main" id="{0E72DD00-1859-E8C8-6ABE-FD948B09E642}"/>
+                  </a:ext>
+                </a:extLst>
+              </p:cNvPr>
+              <p:cNvSpPr txBox="1">
+                <a:spLocks noRot="1" noChangeAspect="1" noMove="1" noResize="1" noEditPoints="1" noAdjustHandles="1" noChangeArrowheads="1" noChangeShapeType="1" noTextEdit="1"/>
+              </p:cNvSpPr>
+              <p:nvPr/>
+            </p:nvSpPr>
+            <p:spPr>
+              <a:xfrm>
+                <a:off x="688258" y="1257642"/>
+                <a:ext cx="5007868" cy="2677656"/>
+              </a:xfrm>
+              <a:prstGeom prst="rect">
+                <a:avLst/>
+              </a:prstGeom>
+              <a:blipFill>
+                <a:blip r:embed="rId2"/>
+                <a:stretch>
+                  <a:fillRect l="-1705" t="-1591"/>
+                </a:stretch>
+              </a:blipFill>
+            </p:spPr>
+            <p:txBody>
+              <a:bodyPr/>
+              <a:lstStyle/>
+              <a:p>
+                <a:r>
+                  <a:rPr lang="en-US">
+                    <a:noFill/>
+                  </a:rPr>
+                  <a:t> </a:t>
+                </a:r>
+              </a:p>
+            </p:txBody>
+          </p:sp>
+        </mc:Fallback>
+      </mc:AlternateContent>
+      <p:sp>
+        <p:nvSpPr>
+          <p:cNvPr id="9" name="TextBox 8">
+            <a:extLst>
+              <a:ext uri="{FF2B5EF4-FFF2-40B4-BE49-F238E27FC236}">
+                <a16:creationId xmlns:a16="http://schemas.microsoft.com/office/drawing/2014/main" id="{A8F60D2B-40BB-7E2A-976F-C051554D1EFF}"/>
+              </a:ext>
+            </a:extLst>
+          </p:cNvPr>
+          <p:cNvSpPr txBox="1"/>
+          <p:nvPr/>
+        </p:nvSpPr>
+        <p:spPr>
+          <a:xfrm>
+            <a:off x="6959599" y="514495"/>
+            <a:ext cx="4544143" cy="461665"/>
+          </a:xfrm>
+          <a:prstGeom prst="rect">
+            <a:avLst/>
+          </a:prstGeom>
+          <a:noFill/>
+        </p:spPr>
+        <p:txBody>
+          <a:bodyPr wrap="square">
+            <a:spAutoFit/>
+          </a:bodyPr>
+          <a:lstStyle/>
+          <a:p>
+            <a:pPr algn="r"/>
+            <a:r>
+              <a:rPr lang="it-IT" sz="2400" b="1" i="1" dirty="0"/>
+              <a:t>Step: Confronto dei risultati</a:t>
+            </a:r>
+          </a:p>
+        </p:txBody>
+      </p:sp>
+      <p:sp>
+        <p:nvSpPr>
+          <p:cNvPr id="5" name="Date Placeholder 4">
+            <a:extLst>
+              <a:ext uri="{FF2B5EF4-FFF2-40B4-BE49-F238E27FC236}">
+                <a16:creationId xmlns:a16="http://schemas.microsoft.com/office/drawing/2014/main" id="{BD2F4F5F-071A-A029-DC45-FE35BEB55BBA}"/>
+              </a:ext>
+            </a:extLst>
+          </p:cNvPr>
+          <p:cNvSpPr>
+            <a:spLocks noGrp="1"/>
+          </p:cNvSpPr>
+          <p:nvPr>
+            <p:ph type="dt" sz="half" idx="10"/>
+          </p:nvPr>
+        </p:nvSpPr>
+        <p:spPr/>
+        <p:txBody>
+          <a:bodyPr/>
+          <a:lstStyle/>
+          <a:p>
+            <a:fld id="{0E4BD75C-8A8B-4E75-8D28-95927EC03BF3}" type="datetime1">
+              <a:rPr lang="it-IT" smtClean="0"/>
+              <a:t>03/01/2026</a:t>
+            </a:fld>
+            <a:endParaRPr lang="en-US"/>
+          </a:p>
+        </p:txBody>
+      </p:sp>
+      <p:sp>
+        <p:nvSpPr>
+          <p:cNvPr id="6" name="Footer Placeholder 5">
+            <a:extLst>
+              <a:ext uri="{FF2B5EF4-FFF2-40B4-BE49-F238E27FC236}">
+                <a16:creationId xmlns:a16="http://schemas.microsoft.com/office/drawing/2014/main" id="{783FECD1-FEA2-35C1-C58E-6F59D92FDBF6}"/>
+              </a:ext>
+            </a:extLst>
+          </p:cNvPr>
+          <p:cNvSpPr>
+            <a:spLocks noGrp="1"/>
+          </p:cNvSpPr>
+          <p:nvPr>
+            <p:ph type="ftr" sz="quarter" idx="11"/>
+          </p:nvPr>
+        </p:nvSpPr>
+        <p:spPr/>
+        <p:txBody>
+          <a:bodyPr/>
+          <a:lstStyle/>
+          <a:p>
+            <a:r>
+              <a:rPr lang="nn-NO"/>
+              <a:t>DINO MENG [SM3201466], BsC AIDA@MIGE</a:t>
+            </a:r>
+            <a:endParaRPr lang="en-US"/>
+          </a:p>
+        </p:txBody>
+      </p:sp>
+      <p:sp>
+        <p:nvSpPr>
+          <p:cNvPr id="8" name="Slide Number Placeholder 7">
+            <a:extLst>
+              <a:ext uri="{FF2B5EF4-FFF2-40B4-BE49-F238E27FC236}">
+                <a16:creationId xmlns:a16="http://schemas.microsoft.com/office/drawing/2014/main" id="{2D13C14F-D97B-AD5A-AFF9-355CF467190B}"/>
+              </a:ext>
+            </a:extLst>
+          </p:cNvPr>
+          <p:cNvSpPr>
+            <a:spLocks noGrp="1"/>
+          </p:cNvSpPr>
+          <p:nvPr>
+            <p:ph type="sldNum" sz="quarter" idx="12"/>
+          </p:nvPr>
+        </p:nvSpPr>
+        <p:spPr/>
+        <p:txBody>
+          <a:bodyPr/>
+          <a:lstStyle/>
+          <a:p>
+            <a:fld id="{8BF32AC9-143A-477E-841D-1F801B7F8FE8}" type="slidenum">
+              <a:rPr lang="en-US" smtClean="0"/>
+              <a:t>17</a:t>
+            </a:fld>
+            <a:endParaRPr lang="en-US"/>
+          </a:p>
+        </p:txBody>
+      </p:sp>
+      <p:pic>
+        <p:nvPicPr>
+          <p:cNvPr id="10" name="Picture 9" descr="A graph of different types of data&#10;&#10;AI-generated content may be incorrect.">
+            <a:extLst>
+              <a:ext uri="{FF2B5EF4-FFF2-40B4-BE49-F238E27FC236}">
+                <a16:creationId xmlns:a16="http://schemas.microsoft.com/office/drawing/2014/main" id="{A49F2C5B-FD7A-0466-C4CE-EE22A8A579AC}"/>
+              </a:ext>
+            </a:extLst>
+          </p:cNvPr>
+          <p:cNvPicPr>
+            <a:picLocks noChangeAspect="1"/>
+          </p:cNvPicPr>
+          <p:nvPr/>
+        </p:nvPicPr>
+        <p:blipFill>
+          <a:blip r:embed="rId3"/>
+          <a:stretch>
+            <a:fillRect/>
+          </a:stretch>
+        </p:blipFill>
+        <p:spPr>
+          <a:xfrm>
+            <a:off x="5462924" y="1244240"/>
+            <a:ext cx="6295352" cy="5018248"/>
+          </a:xfrm>
+          <a:prstGeom prst="rect">
+            <a:avLst/>
+          </a:prstGeom>
+        </p:spPr>
+      </p:pic>
+    </p:spTree>
+    <p:extLst>
+      <p:ext uri="{BB962C8B-B14F-4D97-AF65-F5344CB8AC3E}">
+        <p14:creationId xmlns:p14="http://schemas.microsoft.com/office/powerpoint/2010/main" val="2296715791"/>
+      </p:ext>
+    </p:extLst>
+  </p:cSld>
+  <p:clrMapOvr>
+    <a:masterClrMapping/>
+  </p:clrMapOvr>
+</p:sld>
+</file>
+
+<file path=ppt/slides/slide18.xml><?xml version="1.0" encoding="utf-8"?>
+<p:sld xmlns:a="http://schemas.openxmlformats.org/drawingml/2006/main" xmlns:r="http://schemas.openxmlformats.org/officeDocument/2006/relationships" xmlns:p="http://schemas.openxmlformats.org/presentationml/2006/main">
+  <p:cSld>
+    <p:spTree>
+      <p:nvGrpSpPr>
+        <p:cNvPr id="1" name="">
+          <a:extLst>
+            <a:ext uri="{FF2B5EF4-FFF2-40B4-BE49-F238E27FC236}">
+              <a16:creationId xmlns:a16="http://schemas.microsoft.com/office/drawing/2014/main" id="{36052923-C3F6-36C6-E92B-965CA3B75581}"/>
+            </a:ext>
+          </a:extLst>
+        </p:cNvPr>
+        <p:cNvGrpSpPr/>
+        <p:nvPr/>
+      </p:nvGrpSpPr>
+      <p:grpSpPr>
+        <a:xfrm>
+          <a:off x="0" y="0"/>
+          <a:ext cx="0" cy="0"/>
+          <a:chOff x="0" y="0"/>
+          <a:chExt cx="0" cy="0"/>
+        </a:xfrm>
+      </p:grpSpPr>
+      <p:sp>
+        <p:nvSpPr>
+          <p:cNvPr id="3" name="TextBox 2">
+            <a:extLst>
+              <a:ext uri="{FF2B5EF4-FFF2-40B4-BE49-F238E27FC236}">
+                <a16:creationId xmlns:a16="http://schemas.microsoft.com/office/drawing/2014/main" id="{22701AAC-E917-91A8-A07E-665E33A7748E}"/>
+              </a:ext>
+            </a:extLst>
+          </p:cNvPr>
+          <p:cNvSpPr txBox="1"/>
+          <p:nvPr/>
+        </p:nvSpPr>
+        <p:spPr>
+          <a:xfrm>
+            <a:off x="688257" y="442035"/>
+            <a:ext cx="5407743" cy="523220"/>
+          </a:xfrm>
+          <a:prstGeom prst="rect">
+            <a:avLst/>
+          </a:prstGeom>
+          <a:noFill/>
+        </p:spPr>
+        <p:txBody>
+          <a:bodyPr wrap="square">
+            <a:spAutoFit/>
+          </a:bodyPr>
+          <a:lstStyle/>
+          <a:p>
+            <a:r>
+              <a:rPr lang="it-IT" sz="2800" b="1" dirty="0"/>
+              <a:t>RISULTATI CONSISTENTI</a:t>
+            </a:r>
+          </a:p>
+        </p:txBody>
+      </p:sp>
+      <p:sp>
+        <p:nvSpPr>
+          <p:cNvPr id="4" name="Rectangle 3">
+            <a:extLst>
+              <a:ext uri="{FF2B5EF4-FFF2-40B4-BE49-F238E27FC236}">
+                <a16:creationId xmlns:a16="http://schemas.microsoft.com/office/drawing/2014/main" id="{825123C6-739B-4783-904E-CBA17D5F01CA}"/>
+              </a:ext>
+            </a:extLst>
+          </p:cNvPr>
+          <p:cNvSpPr/>
+          <p:nvPr/>
+        </p:nvSpPr>
+        <p:spPr>
+          <a:xfrm>
+            <a:off x="688257" y="965255"/>
+            <a:ext cx="10815485" cy="104767"/>
+          </a:xfrm>
+          <a:prstGeom prst="rect">
+            <a:avLst/>
+          </a:prstGeom>
+          <a:solidFill>
+            <a:schemeClr val="accent4"/>
+          </a:solidFill>
+          <a:ln>
+            <a:noFill/>
+          </a:ln>
+        </p:spPr>
+        <p:style>
+          <a:lnRef idx="2">
+            <a:schemeClr val="accent1">
+              <a:shade val="15000"/>
+            </a:schemeClr>
+          </a:lnRef>
+          <a:fillRef idx="1">
+            <a:schemeClr val="accent1"/>
+          </a:fillRef>
+          <a:effectRef idx="0">
+            <a:schemeClr val="accent1"/>
+          </a:effectRef>
+          <a:fontRef idx="minor">
+            <a:schemeClr val="lt1"/>
+          </a:fontRef>
+        </p:style>
+        <p:txBody>
+          <a:bodyPr rtlCol="0" anchor="ctr"/>
+          <a:lstStyle/>
+          <a:p>
+            <a:pPr algn="ctr"/>
+            <a:endParaRPr lang="en-US"/>
+          </a:p>
+        </p:txBody>
+      </p:sp>
+      <p:sp>
+        <p:nvSpPr>
+          <p:cNvPr id="7" name="TextBox 6">
+            <a:extLst>
+              <a:ext uri="{FF2B5EF4-FFF2-40B4-BE49-F238E27FC236}">
+                <a16:creationId xmlns:a16="http://schemas.microsoft.com/office/drawing/2014/main" id="{A8B33972-B305-3D52-C6CC-1D6765BB7EEB}"/>
+              </a:ext>
+            </a:extLst>
+          </p:cNvPr>
+          <p:cNvSpPr txBox="1"/>
+          <p:nvPr/>
+        </p:nvSpPr>
+        <p:spPr>
+          <a:xfrm>
+            <a:off x="688257" y="1257642"/>
+            <a:ext cx="8288595" cy="1938992"/>
+          </a:xfrm>
+          <a:prstGeom prst="rect">
+            <a:avLst/>
+          </a:prstGeom>
+          <a:noFill/>
+        </p:spPr>
+        <p:txBody>
+          <a:bodyPr wrap="square" rtlCol="0">
+            <a:spAutoFit/>
+          </a:bodyPr>
+          <a:lstStyle/>
+          <a:p>
+            <a:pPr marL="285750" indent="-285750">
+              <a:buFont typeface="Wingdings" panose="05000000000000000000" pitchFamily="2" charset="2"/>
+              <a:buChar char="q"/>
+            </a:pPr>
+            <a:r>
+              <a:rPr lang="it-IT" sz="2400" dirty="0">
+                <a:latin typeface="Arial" panose="020B0604020202020204" pitchFamily="34" charset="0"/>
+                <a:cs typeface="Arial" panose="020B0604020202020204" pitchFamily="34" charset="0"/>
+              </a:rPr>
+              <a:t>Esempio: Esperimento 5 (mio)</a:t>
+            </a:r>
+          </a:p>
+          <a:p>
+            <a:pPr marL="742950" lvl="1" indent="-285750">
+              <a:buFont typeface="Wingdings" panose="05000000000000000000" pitchFamily="2" charset="2"/>
+              <a:buChar char="q"/>
+            </a:pPr>
+            <a:r>
+              <a:rPr lang="it-IT" sz="2400" dirty="0">
+                <a:latin typeface="Arial" panose="020B0604020202020204" pitchFamily="34" charset="0"/>
+                <a:cs typeface="Arial" panose="020B0604020202020204" pitchFamily="34" charset="0"/>
+              </a:rPr>
+              <a:t>R: 0.005</a:t>
+            </a:r>
+          </a:p>
+          <a:p>
+            <a:pPr marL="742950" lvl="1" indent="-285750">
+              <a:buFont typeface="Wingdings" panose="05000000000000000000" pitchFamily="2" charset="2"/>
+              <a:buChar char="q"/>
+            </a:pPr>
+            <a:r>
+              <a:rPr lang="it-IT" sz="2400" dirty="0">
+                <a:latin typeface="Arial" panose="020B0604020202020204" pitchFamily="34" charset="0"/>
+                <a:cs typeface="Arial" panose="020B0604020202020204" pitchFamily="34" charset="0"/>
+              </a:rPr>
+              <a:t>G: 0.4</a:t>
+            </a:r>
+          </a:p>
+          <a:p>
+            <a:pPr marL="742950" lvl="1" indent="-285750">
+              <a:buFont typeface="Wingdings" panose="05000000000000000000" pitchFamily="2" charset="2"/>
+              <a:buChar char="q"/>
+            </a:pPr>
+            <a:r>
+              <a:rPr lang="it-IT" sz="2400" dirty="0">
+                <a:latin typeface="Arial" panose="020B0604020202020204" pitchFamily="34" charset="0"/>
+                <a:cs typeface="Arial" panose="020B0604020202020204" pitchFamily="34" charset="0"/>
+              </a:rPr>
+              <a:t>B: 0.7</a:t>
+            </a:r>
+          </a:p>
+          <a:p>
+            <a:pPr marL="742950" lvl="1" indent="-285750">
+              <a:buFont typeface="Wingdings" panose="05000000000000000000" pitchFamily="2" charset="2"/>
+              <a:buChar char="q"/>
+            </a:pPr>
+            <a:endParaRPr lang="it-IT" sz="2400" dirty="0">
+              <a:latin typeface="Arial" panose="020B0604020202020204" pitchFamily="34" charset="0"/>
+              <a:cs typeface="Arial" panose="020B0604020202020204" pitchFamily="34" charset="0"/>
+            </a:endParaRPr>
+          </a:p>
+        </p:txBody>
+      </p:sp>
+      <p:sp>
+        <p:nvSpPr>
+          <p:cNvPr id="9" name="TextBox 8">
+            <a:extLst>
+              <a:ext uri="{FF2B5EF4-FFF2-40B4-BE49-F238E27FC236}">
+                <a16:creationId xmlns:a16="http://schemas.microsoft.com/office/drawing/2014/main" id="{586AF2EB-4740-D17D-C653-75D632B26AAC}"/>
+              </a:ext>
+            </a:extLst>
+          </p:cNvPr>
+          <p:cNvSpPr txBox="1"/>
+          <p:nvPr/>
+        </p:nvSpPr>
+        <p:spPr>
+          <a:xfrm>
+            <a:off x="6959599" y="514495"/>
+            <a:ext cx="4544143" cy="461665"/>
+          </a:xfrm>
+          <a:prstGeom prst="rect">
+            <a:avLst/>
+          </a:prstGeom>
+          <a:noFill/>
+        </p:spPr>
+        <p:txBody>
+          <a:bodyPr wrap="square">
+            <a:spAutoFit/>
+          </a:bodyPr>
+          <a:lstStyle/>
+          <a:p>
+            <a:pPr algn="r"/>
+            <a:r>
+              <a:rPr lang="it-IT" sz="2400" b="1" i="1" dirty="0"/>
+              <a:t>Step: Confronto dei risultati</a:t>
+            </a:r>
+          </a:p>
+        </p:txBody>
+      </p:sp>
+      <p:sp>
+        <p:nvSpPr>
+          <p:cNvPr id="5" name="Date Placeholder 4">
+            <a:extLst>
+              <a:ext uri="{FF2B5EF4-FFF2-40B4-BE49-F238E27FC236}">
+                <a16:creationId xmlns:a16="http://schemas.microsoft.com/office/drawing/2014/main" id="{ACD3E362-D7C6-712E-DD9E-A57AB37F1F78}"/>
+              </a:ext>
+            </a:extLst>
+          </p:cNvPr>
+          <p:cNvSpPr>
+            <a:spLocks noGrp="1"/>
+          </p:cNvSpPr>
+          <p:nvPr>
+            <p:ph type="dt" sz="half" idx="10"/>
+          </p:nvPr>
+        </p:nvSpPr>
+        <p:spPr/>
+        <p:txBody>
+          <a:bodyPr/>
+          <a:lstStyle/>
+          <a:p>
+            <a:fld id="{0E4BD75C-8A8B-4E75-8D28-95927EC03BF3}" type="datetime1">
+              <a:rPr lang="it-IT" smtClean="0"/>
+              <a:t>03/01/2026</a:t>
+            </a:fld>
+            <a:endParaRPr lang="en-US"/>
+          </a:p>
+        </p:txBody>
+      </p:sp>
+      <p:sp>
+        <p:nvSpPr>
+          <p:cNvPr id="6" name="Footer Placeholder 5">
+            <a:extLst>
+              <a:ext uri="{FF2B5EF4-FFF2-40B4-BE49-F238E27FC236}">
+                <a16:creationId xmlns:a16="http://schemas.microsoft.com/office/drawing/2014/main" id="{37B6BFBE-294D-CE22-E1F4-13A8F515D421}"/>
+              </a:ext>
+            </a:extLst>
+          </p:cNvPr>
+          <p:cNvSpPr>
+            <a:spLocks noGrp="1"/>
+          </p:cNvSpPr>
+          <p:nvPr>
+            <p:ph type="ftr" sz="quarter" idx="11"/>
+          </p:nvPr>
+        </p:nvSpPr>
+        <p:spPr/>
+        <p:txBody>
+          <a:bodyPr/>
+          <a:lstStyle/>
+          <a:p>
+            <a:r>
+              <a:rPr lang="nn-NO"/>
+              <a:t>DINO MENG [SM3201466], BsC AIDA@MIGE</a:t>
+            </a:r>
+            <a:endParaRPr lang="en-US"/>
+          </a:p>
+        </p:txBody>
+      </p:sp>
+      <p:sp>
+        <p:nvSpPr>
+          <p:cNvPr id="8" name="Slide Number Placeholder 7">
+            <a:extLst>
+              <a:ext uri="{FF2B5EF4-FFF2-40B4-BE49-F238E27FC236}">
+                <a16:creationId xmlns:a16="http://schemas.microsoft.com/office/drawing/2014/main" id="{16C58775-F23C-1494-D35B-E901F38643EE}"/>
+              </a:ext>
+            </a:extLst>
+          </p:cNvPr>
+          <p:cNvSpPr>
+            <a:spLocks noGrp="1"/>
+          </p:cNvSpPr>
+          <p:nvPr>
+            <p:ph type="sldNum" sz="quarter" idx="12"/>
+          </p:nvPr>
+        </p:nvSpPr>
+        <p:spPr/>
+        <p:txBody>
+          <a:bodyPr/>
+          <a:lstStyle/>
+          <a:p>
+            <a:fld id="{8BF32AC9-143A-477E-841D-1F801B7F8FE8}" type="slidenum">
+              <a:rPr lang="en-US" smtClean="0"/>
+              <a:t>18</a:t>
+            </a:fld>
+            <a:endParaRPr lang="en-US"/>
+          </a:p>
+        </p:txBody>
+      </p:sp>
+      <p:pic>
+        <p:nvPicPr>
+          <p:cNvPr id="11" name="Picture 10" descr="A graph of a graph of a graph of a graph of a graph of a graph of a graph of a graph of a graph of a graph of a graph of a graph of a graph of&#10;&#10;AI-generated content may be incorrect.">
+            <a:extLst>
+              <a:ext uri="{FF2B5EF4-FFF2-40B4-BE49-F238E27FC236}">
+                <a16:creationId xmlns:a16="http://schemas.microsoft.com/office/drawing/2014/main" id="{2DACABAC-2446-5411-5181-D5CFB873E180}"/>
+              </a:ext>
+            </a:extLst>
+          </p:cNvPr>
+          <p:cNvPicPr>
+            <a:picLocks noChangeAspect="1"/>
+          </p:cNvPicPr>
+          <p:nvPr/>
+        </p:nvPicPr>
+        <p:blipFill>
+          <a:blip r:embed="rId2"/>
+          <a:stretch>
+            <a:fillRect/>
+          </a:stretch>
+        </p:blipFill>
+        <p:spPr>
+          <a:xfrm>
+            <a:off x="2793747" y="1743147"/>
+            <a:ext cx="8870446" cy="4508436"/>
+          </a:xfrm>
+          <a:prstGeom prst="rect">
+            <a:avLst/>
+          </a:prstGeom>
+        </p:spPr>
+      </p:pic>
+    </p:spTree>
+    <p:extLst>
+      <p:ext uri="{BB962C8B-B14F-4D97-AF65-F5344CB8AC3E}">
+        <p14:creationId xmlns:p14="http://schemas.microsoft.com/office/powerpoint/2010/main" val="3825720893"/>
+      </p:ext>
+    </p:extLst>
+  </p:cSld>
+  <p:clrMapOvr>
+    <a:masterClrMapping/>
+  </p:clrMapOvr>
+</p:sld>
+</file>
+
+<file path=ppt/slides/slide19.xml><?xml version="1.0" encoding="utf-8"?>
 <p:sld xmlns:a="http://schemas.openxmlformats.org/drawingml/2006/main" xmlns:r="http://schemas.openxmlformats.org/officeDocument/2006/relationships" xmlns:p="http://schemas.openxmlformats.org/presentationml/2006/main">
   <p:cSld>
     <p:spTree>
@@ -6810,7 +7877,7 @@
           <a:p>
             <a:fld id="{22D2901C-25D2-4418-A5A0-267BB4E58730}" type="datetime1">
               <a:rPr lang="it-IT" smtClean="0"/>
-              <a:t>30/12/2025</a:t>
+              <a:t>03/01/2026</a:t>
             </a:fld>
             <a:endParaRPr lang="en-US"/>
           </a:p>
@@ -6868,7 +7935,7 @@
           <a:p>
             <a:fld id="{8BF32AC9-143A-477E-841D-1F801B7F8FE8}" type="slidenum">
               <a:rPr lang="en-US" smtClean="0"/>
-              <a:t>17</a:t>
+              <a:t>19</a:t>
             </a:fld>
             <a:endParaRPr lang="en-US"/>
           </a:p>
@@ -6887,7 +7954,488 @@
 </p:sld>
 </file>
 
-<file path=ppt/slides/slide18.xml><?xml version="1.0" encoding="utf-8"?>
+<file path=ppt/slides/slide2.xml><?xml version="1.0" encoding="utf-8"?>
+<p:sld xmlns:a="http://schemas.openxmlformats.org/drawingml/2006/main" xmlns:r="http://schemas.openxmlformats.org/officeDocument/2006/relationships" xmlns:p="http://schemas.openxmlformats.org/presentationml/2006/main">
+  <p:cSld>
+    <p:spTree>
+      <p:nvGrpSpPr>
+        <p:cNvPr id="1" name="">
+          <a:extLst>
+            <a:ext uri="{FF2B5EF4-FFF2-40B4-BE49-F238E27FC236}">
+              <a16:creationId xmlns:a16="http://schemas.microsoft.com/office/drawing/2014/main" id="{42783EDE-02B6-E8AC-2521-60C029C1744D}"/>
+            </a:ext>
+          </a:extLst>
+        </p:cNvPr>
+        <p:cNvGrpSpPr/>
+        <p:nvPr/>
+      </p:nvGrpSpPr>
+      <p:grpSpPr>
+        <a:xfrm>
+          <a:off x="0" y="0"/>
+          <a:ext cx="0" cy="0"/>
+          <a:chOff x="0" y="0"/>
+          <a:chExt cx="0" cy="0"/>
+        </a:xfrm>
+      </p:grpSpPr>
+      <p:sp>
+        <p:nvSpPr>
+          <p:cNvPr id="3" name="TextBox 2">
+            <a:extLst>
+              <a:ext uri="{FF2B5EF4-FFF2-40B4-BE49-F238E27FC236}">
+                <a16:creationId xmlns:a16="http://schemas.microsoft.com/office/drawing/2014/main" id="{D10A35CD-D2E2-120B-D1B4-F34531D5C50D}"/>
+              </a:ext>
+            </a:extLst>
+          </p:cNvPr>
+          <p:cNvSpPr txBox="1"/>
+          <p:nvPr/>
+        </p:nvSpPr>
+        <p:spPr>
+          <a:xfrm>
+            <a:off x="688257" y="442035"/>
+            <a:ext cx="5407744" cy="523220"/>
+          </a:xfrm>
+          <a:prstGeom prst="rect">
+            <a:avLst/>
+          </a:prstGeom>
+          <a:noFill/>
+        </p:spPr>
+        <p:txBody>
+          <a:bodyPr wrap="square">
+            <a:spAutoFit/>
+          </a:bodyPr>
+          <a:lstStyle/>
+          <a:p>
+            <a:r>
+              <a:rPr lang="it-IT" sz="2800" b="1" dirty="0"/>
+              <a:t>INTRODUZIONE </a:t>
+            </a:r>
+          </a:p>
+        </p:txBody>
+      </p:sp>
+      <p:sp>
+        <p:nvSpPr>
+          <p:cNvPr id="4" name="Rectangle 3">
+            <a:extLst>
+              <a:ext uri="{FF2B5EF4-FFF2-40B4-BE49-F238E27FC236}">
+                <a16:creationId xmlns:a16="http://schemas.microsoft.com/office/drawing/2014/main" id="{A12F190A-AADC-AEC9-B613-D7B38E6B36B7}"/>
+              </a:ext>
+            </a:extLst>
+          </p:cNvPr>
+          <p:cNvSpPr/>
+          <p:nvPr/>
+        </p:nvSpPr>
+        <p:spPr>
+          <a:xfrm>
+            <a:off x="688257" y="965255"/>
+            <a:ext cx="10815485" cy="104767"/>
+          </a:xfrm>
+          <a:prstGeom prst="rect">
+            <a:avLst/>
+          </a:prstGeom>
+          <a:solidFill>
+            <a:schemeClr val="accent4"/>
+          </a:solidFill>
+          <a:ln>
+            <a:noFill/>
+          </a:ln>
+        </p:spPr>
+        <p:style>
+          <a:lnRef idx="2">
+            <a:schemeClr val="accent1">
+              <a:shade val="15000"/>
+            </a:schemeClr>
+          </a:lnRef>
+          <a:fillRef idx="1">
+            <a:schemeClr val="accent1"/>
+          </a:fillRef>
+          <a:effectRef idx="0">
+            <a:schemeClr val="accent1"/>
+          </a:effectRef>
+          <a:fontRef idx="minor">
+            <a:schemeClr val="lt1"/>
+          </a:fontRef>
+        </p:style>
+        <p:txBody>
+          <a:bodyPr rtlCol="0" anchor="ctr"/>
+          <a:lstStyle/>
+          <a:p>
+            <a:pPr algn="ctr"/>
+            <a:endParaRPr lang="en-US"/>
+          </a:p>
+        </p:txBody>
+      </p:sp>
+      <p:sp>
+        <p:nvSpPr>
+          <p:cNvPr id="7" name="TextBox 6">
+            <a:extLst>
+              <a:ext uri="{FF2B5EF4-FFF2-40B4-BE49-F238E27FC236}">
+                <a16:creationId xmlns:a16="http://schemas.microsoft.com/office/drawing/2014/main" id="{AC4CDCCF-1BC0-D866-B370-AD2C83637A8F}"/>
+              </a:ext>
+            </a:extLst>
+          </p:cNvPr>
+          <p:cNvSpPr txBox="1"/>
+          <p:nvPr/>
+        </p:nvSpPr>
+        <p:spPr>
+          <a:xfrm>
+            <a:off x="688257" y="1242253"/>
+            <a:ext cx="6735098" cy="3785652"/>
+          </a:xfrm>
+          <a:prstGeom prst="rect">
+            <a:avLst/>
+          </a:prstGeom>
+          <a:noFill/>
+        </p:spPr>
+        <p:txBody>
+          <a:bodyPr wrap="square" rtlCol="0">
+            <a:spAutoFit/>
+          </a:bodyPr>
+          <a:lstStyle/>
+          <a:p>
+            <a:pPr marL="285750" indent="-285750">
+              <a:buFont typeface="Wingdings" panose="05000000000000000000" pitchFamily="2" charset="2"/>
+              <a:buChar char="q"/>
+            </a:pPr>
+            <a:r>
+              <a:rPr lang="it-IT" sz="2400" dirty="0">
+                <a:latin typeface="Arial" panose="020B0604020202020204" pitchFamily="34" charset="0"/>
+                <a:cs typeface="Arial" panose="020B0604020202020204" pitchFamily="34" charset="0"/>
+              </a:rPr>
+              <a:t>Dinamica prede-predatori</a:t>
+            </a:r>
+          </a:p>
+          <a:p>
+            <a:pPr marL="285750" indent="-285750">
+              <a:buFont typeface="Wingdings" panose="05000000000000000000" pitchFamily="2" charset="2"/>
+              <a:buChar char="q"/>
+            </a:pPr>
+            <a:endParaRPr lang="it-IT" sz="2400" dirty="0">
+              <a:latin typeface="Arial" panose="020B0604020202020204" pitchFamily="34" charset="0"/>
+              <a:cs typeface="Arial" panose="020B0604020202020204" pitchFamily="34" charset="0"/>
+            </a:endParaRPr>
+          </a:p>
+          <a:p>
+            <a:pPr marL="285750" indent="-285750">
+              <a:buFont typeface="Wingdings" panose="05000000000000000000" pitchFamily="2" charset="2"/>
+              <a:buChar char="q"/>
+            </a:pPr>
+            <a:r>
+              <a:rPr lang="it-IT" sz="2400" dirty="0">
+                <a:latin typeface="Arial" panose="020B0604020202020204" pitchFamily="34" charset="0"/>
+                <a:cs typeface="Arial" panose="020B0604020202020204" pitchFamily="34" charset="0"/>
+              </a:rPr>
+              <a:t>Più fattori:</a:t>
+            </a:r>
+          </a:p>
+          <a:p>
+            <a:pPr marL="742950" lvl="1" indent="-285750">
+              <a:buFont typeface="Wingdings" panose="05000000000000000000" pitchFamily="2" charset="2"/>
+              <a:buChar char="q"/>
+            </a:pPr>
+            <a:r>
+              <a:rPr lang="it-IT" sz="2400" dirty="0">
+                <a:latin typeface="Arial" panose="020B0604020202020204" pitchFamily="34" charset="0"/>
+                <a:cs typeface="Arial" panose="020B0604020202020204" pitchFamily="34" charset="0"/>
+              </a:rPr>
+              <a:t>«Paura» delle prede e fattore di «rifugio»</a:t>
+            </a:r>
+          </a:p>
+          <a:p>
+            <a:pPr marL="742950" lvl="1" indent="-285750">
+              <a:buFont typeface="Wingdings" panose="05000000000000000000" pitchFamily="2" charset="2"/>
+              <a:buChar char="q"/>
+            </a:pPr>
+            <a:r>
+              <a:rPr lang="it-IT" sz="2400" dirty="0">
+                <a:latin typeface="Arial" panose="020B0604020202020204" pitchFamily="34" charset="0"/>
+                <a:cs typeface="Arial" panose="020B0604020202020204" pitchFamily="34" charset="0"/>
+              </a:rPr>
+              <a:t>«Risorse aggiuntive» esterne</a:t>
+            </a:r>
+          </a:p>
+          <a:p>
+            <a:pPr marL="742950" lvl="1" indent="-285750">
+              <a:buFont typeface="Wingdings" panose="05000000000000000000" pitchFamily="2" charset="2"/>
+              <a:buChar char="q"/>
+            </a:pPr>
+            <a:r>
+              <a:rPr lang="it-IT" sz="2400" dirty="0">
+                <a:latin typeface="Arial" panose="020B0604020202020204" pitchFamily="34" charset="0"/>
+                <a:cs typeface="Arial" panose="020B0604020202020204" pitchFamily="34" charset="0"/>
+              </a:rPr>
+              <a:t>Risposta funzionale asimmetrica (1 preda consumata != 1 predatore)</a:t>
+            </a:r>
+          </a:p>
+          <a:p>
+            <a:pPr marL="742950" lvl="1" indent="-285750">
+              <a:buFont typeface="Wingdings" panose="05000000000000000000" pitchFamily="2" charset="2"/>
+              <a:buChar char="q"/>
+            </a:pPr>
+            <a:r>
+              <a:rPr lang="it-IT" sz="2400" dirty="0">
+                <a:latin typeface="Arial" panose="020B0604020202020204" pitchFamily="34" charset="0"/>
+                <a:cs typeface="Arial" panose="020B0604020202020204" pitchFamily="34" charset="0"/>
+              </a:rPr>
+              <a:t>Emigrazione dei predatori</a:t>
+            </a:r>
+          </a:p>
+          <a:p>
+            <a:pPr marL="742950" lvl="1" indent="-285750">
+              <a:buFont typeface="Wingdings" panose="05000000000000000000" pitchFamily="2" charset="2"/>
+              <a:buChar char="q"/>
+            </a:pPr>
+            <a:endParaRPr lang="it-IT" sz="2400" dirty="0">
+              <a:latin typeface="Arial" panose="020B0604020202020204" pitchFamily="34" charset="0"/>
+              <a:cs typeface="Arial" panose="020B0604020202020204" pitchFamily="34" charset="0"/>
+            </a:endParaRPr>
+          </a:p>
+          <a:p>
+            <a:pPr marL="285750" indent="-285750">
+              <a:buFont typeface="Wingdings" panose="05000000000000000000" pitchFamily="2" charset="2"/>
+              <a:buChar char="q"/>
+            </a:pPr>
+            <a:r>
+              <a:rPr lang="it-IT" sz="2400" dirty="0">
+                <a:latin typeface="Arial" panose="020B0604020202020204" pitchFamily="34" charset="0"/>
+                <a:cs typeface="Arial" panose="020B0604020202020204" pitchFamily="34" charset="0"/>
+              </a:rPr>
+              <a:t>Articolo scientifico: </a:t>
+            </a:r>
+          </a:p>
+        </p:txBody>
+      </p:sp>
+      <p:sp>
+        <p:nvSpPr>
+          <p:cNvPr id="9" name="TextBox 8">
+            <a:extLst>
+              <a:ext uri="{FF2B5EF4-FFF2-40B4-BE49-F238E27FC236}">
+                <a16:creationId xmlns:a16="http://schemas.microsoft.com/office/drawing/2014/main" id="{F4F3A0B6-5A5F-4103-CA68-7D3869F21563}"/>
+              </a:ext>
+            </a:extLst>
+          </p:cNvPr>
+          <p:cNvSpPr txBox="1"/>
+          <p:nvPr/>
+        </p:nvSpPr>
+        <p:spPr>
+          <a:xfrm>
+            <a:off x="1696064" y="5027905"/>
+            <a:ext cx="8799871" cy="1446550"/>
+          </a:xfrm>
+          <a:prstGeom prst="rect">
+            <a:avLst/>
+          </a:prstGeom>
+          <a:noFill/>
+        </p:spPr>
+        <p:txBody>
+          <a:bodyPr wrap="square">
+            <a:spAutoFit/>
+          </a:bodyPr>
+          <a:lstStyle/>
+          <a:p>
+            <a:pPr algn="ctr"/>
+            <a:r>
+              <a:rPr lang="en-US" i="1" dirty="0">
+                <a:latin typeface="Arial" panose="020B0604020202020204" pitchFamily="34" charset="0"/>
+                <a:cs typeface="Arial" panose="020B0604020202020204" pitchFamily="34" charset="0"/>
+              </a:rPr>
+              <a:t>Effect of the Fear Factor and Prey Refuge in an Asymmetric Predator–Prey Model</a:t>
+            </a:r>
+          </a:p>
+          <a:p>
+            <a:pPr algn="ctr"/>
+            <a:r>
+              <a:rPr lang="en-US" sz="1600" i="1" dirty="0">
+                <a:latin typeface="Arial" panose="020B0604020202020204" pitchFamily="34" charset="0"/>
+                <a:cs typeface="Arial" panose="020B0604020202020204" pitchFamily="34" charset="0"/>
+              </a:rPr>
+              <a:t>Rasha M. Yaseen · May M. Helal · Kaushik </a:t>
+            </a:r>
+            <a:r>
+              <a:rPr lang="en-US" sz="1600" i="1" dirty="0" err="1">
+                <a:latin typeface="Arial" panose="020B0604020202020204" pitchFamily="34" charset="0"/>
+                <a:cs typeface="Arial" panose="020B0604020202020204" pitchFamily="34" charset="0"/>
+              </a:rPr>
+              <a:t>Dehingia</a:t>
+            </a:r>
+            <a:r>
+              <a:rPr lang="en-US" sz="1600" i="1" dirty="0">
+                <a:latin typeface="Arial" panose="020B0604020202020204" pitchFamily="34" charset="0"/>
+                <a:cs typeface="Arial" panose="020B0604020202020204" pitchFamily="34" charset="0"/>
+              </a:rPr>
+              <a:t> · Ahmed A. Mohsen</a:t>
+            </a:r>
+          </a:p>
+          <a:p>
+            <a:pPr algn="ctr"/>
+            <a:r>
+              <a:rPr lang="en-US" i="1" dirty="0">
+                <a:latin typeface="Arial" panose="020B0604020202020204" pitchFamily="34" charset="0"/>
+                <a:cs typeface="Arial" panose="020B0604020202020204" pitchFamily="34" charset="0"/>
+              </a:rPr>
+              <a:t>Brazilian Journal of Physics (2024)</a:t>
+            </a:r>
+          </a:p>
+          <a:p>
+            <a:pPr algn="ctr"/>
+            <a:r>
+              <a:rPr lang="en-US" b="1" i="1" dirty="0">
+                <a:latin typeface="Arial" panose="020B0604020202020204" pitchFamily="34" charset="0"/>
+                <a:cs typeface="Arial" panose="020B0604020202020204" pitchFamily="34" charset="0"/>
+              </a:rPr>
+              <a:t>DOI: </a:t>
+            </a:r>
+            <a:r>
+              <a:rPr lang="en-US" b="1" i="1" dirty="0">
+                <a:latin typeface="Arial" panose="020B0604020202020204" pitchFamily="34" charset="0"/>
+                <a:cs typeface="Arial" panose="020B0604020202020204" pitchFamily="34" charset="0"/>
+                <a:hlinkClick r:id="rId2"/>
+              </a:rPr>
+              <a:t>https://doi.org/10.1007/s13538-024-01594-9</a:t>
+            </a:r>
+            <a:br>
+              <a:rPr lang="en-US" b="1" i="1" dirty="0">
+                <a:latin typeface="Arial" panose="020B0604020202020204" pitchFamily="34" charset="0"/>
+                <a:cs typeface="Arial" panose="020B0604020202020204" pitchFamily="34" charset="0"/>
+              </a:rPr>
+            </a:br>
+            <a:endParaRPr lang="en-US" b="1" i="1" dirty="0">
+              <a:latin typeface="Arial" panose="020B0604020202020204" pitchFamily="34" charset="0"/>
+              <a:cs typeface="Arial" panose="020B0604020202020204" pitchFamily="34" charset="0"/>
+            </a:endParaRPr>
+          </a:p>
+        </p:txBody>
+      </p:sp>
+      <p:pic>
+        <p:nvPicPr>
+          <p:cNvPr id="11" name="Picture 10" descr="A group of black and white books">
+            <a:extLst>
+              <a:ext uri="{FF2B5EF4-FFF2-40B4-BE49-F238E27FC236}">
+                <a16:creationId xmlns:a16="http://schemas.microsoft.com/office/drawing/2014/main" id="{D34E898A-D22B-361E-3757-B9958ED7668E}"/>
+              </a:ext>
+            </a:extLst>
+          </p:cNvPr>
+          <p:cNvPicPr>
+            <a:picLocks noChangeAspect="1"/>
+          </p:cNvPicPr>
+          <p:nvPr/>
+        </p:nvPicPr>
+        <p:blipFill>
+          <a:blip r:embed="rId3"/>
+          <a:stretch>
+            <a:fillRect/>
+          </a:stretch>
+        </p:blipFill>
+        <p:spPr>
+          <a:xfrm>
+            <a:off x="7423355" y="1984705"/>
+            <a:ext cx="4601496" cy="2300748"/>
+          </a:xfrm>
+          <a:prstGeom prst="rect">
+            <a:avLst/>
+          </a:prstGeom>
+        </p:spPr>
+      </p:pic>
+      <p:sp>
+        <p:nvSpPr>
+          <p:cNvPr id="2" name="Date Placeholder 1">
+            <a:extLst>
+              <a:ext uri="{FF2B5EF4-FFF2-40B4-BE49-F238E27FC236}">
+                <a16:creationId xmlns:a16="http://schemas.microsoft.com/office/drawing/2014/main" id="{679F9A49-6EAB-475E-F1A0-7281F77EEA15}"/>
+              </a:ext>
+            </a:extLst>
+          </p:cNvPr>
+          <p:cNvSpPr>
+            <a:spLocks noGrp="1"/>
+          </p:cNvSpPr>
+          <p:nvPr>
+            <p:ph type="dt" sz="half" idx="10"/>
+          </p:nvPr>
+        </p:nvSpPr>
+        <p:spPr/>
+        <p:txBody>
+          <a:bodyPr/>
+          <a:lstStyle/>
+          <a:p>
+            <a:fld id="{B4609506-6624-4C93-99FC-2FCD7C3B5EE8}" type="datetime1">
+              <a:rPr lang="it-IT" smtClean="0"/>
+              <a:t>03/01/2026</a:t>
+            </a:fld>
+            <a:endParaRPr lang="en-US"/>
+          </a:p>
+        </p:txBody>
+      </p:sp>
+      <p:sp>
+        <p:nvSpPr>
+          <p:cNvPr id="5" name="Footer Placeholder 4">
+            <a:extLst>
+              <a:ext uri="{FF2B5EF4-FFF2-40B4-BE49-F238E27FC236}">
+                <a16:creationId xmlns:a16="http://schemas.microsoft.com/office/drawing/2014/main" id="{01E3F394-AA29-7D3E-79E3-8E53BC37DF35}"/>
+              </a:ext>
+            </a:extLst>
+          </p:cNvPr>
+          <p:cNvSpPr>
+            <a:spLocks noGrp="1"/>
+          </p:cNvSpPr>
+          <p:nvPr>
+            <p:ph type="ftr" sz="quarter" idx="11"/>
+          </p:nvPr>
+        </p:nvSpPr>
+        <p:spPr/>
+        <p:txBody>
+          <a:bodyPr/>
+          <a:lstStyle/>
+          <a:p>
+            <a:r>
+              <a:rPr lang="nn-NO"/>
+              <a:t>DINO MENG [SM3201466], BsC AIDA@MIGE</a:t>
+            </a:r>
+            <a:endParaRPr lang="en-US"/>
+          </a:p>
+        </p:txBody>
+      </p:sp>
+      <p:sp>
+        <p:nvSpPr>
+          <p:cNvPr id="6" name="Slide Number Placeholder 5">
+            <a:extLst>
+              <a:ext uri="{FF2B5EF4-FFF2-40B4-BE49-F238E27FC236}">
+                <a16:creationId xmlns:a16="http://schemas.microsoft.com/office/drawing/2014/main" id="{E6599908-6A31-CACD-4ED7-FFD6629F9A47}"/>
+              </a:ext>
+            </a:extLst>
+          </p:cNvPr>
+          <p:cNvSpPr>
+            <a:spLocks noGrp="1"/>
+          </p:cNvSpPr>
+          <p:nvPr>
+            <p:ph type="sldNum" sz="quarter" idx="12"/>
+          </p:nvPr>
+        </p:nvSpPr>
+        <p:spPr/>
+        <p:txBody>
+          <a:bodyPr/>
+          <a:lstStyle/>
+          <a:p>
+            <a:fld id="{8BF32AC9-143A-477E-841D-1F801B7F8FE8}" type="slidenum">
+              <a:rPr lang="en-US" smtClean="0"/>
+              <a:t>2</a:t>
+            </a:fld>
+            <a:endParaRPr lang="en-US"/>
+          </a:p>
+        </p:txBody>
+      </p:sp>
+    </p:spTree>
+    <p:extLst>
+      <p:ext uri="{BB962C8B-B14F-4D97-AF65-F5344CB8AC3E}">
+        <p14:creationId xmlns:p14="http://schemas.microsoft.com/office/powerpoint/2010/main" val="3701561688"/>
+      </p:ext>
+    </p:extLst>
+  </p:cSld>
+  <p:clrMapOvr>
+    <a:masterClrMapping/>
+  </p:clrMapOvr>
+</p:sld>
+</file>
+
+<file path=ppt/slides/slide20.xml><?xml version="1.0" encoding="utf-8"?>
 <p:sld xmlns:a="http://schemas.openxmlformats.org/drawingml/2006/main" xmlns:r="http://schemas.openxmlformats.org/officeDocument/2006/relationships" xmlns:p="http://schemas.openxmlformats.org/presentationml/2006/main">
   <p:cSld>
     <p:spTree>
@@ -7243,7 +8791,7 @@
           <a:p>
             <a:fld id="{F2A62A29-0D40-4C95-BBC3-4CE9585C45D0}" type="datetime1">
               <a:rPr lang="it-IT" smtClean="0"/>
-              <a:t>30/12/2025</a:t>
+              <a:t>03/01/2026</a:t>
             </a:fld>
             <a:endParaRPr lang="en-US"/>
           </a:p>
@@ -7301,7 +8849,7 @@
           <a:p>
             <a:fld id="{8BF32AC9-143A-477E-841D-1F801B7F8FE8}" type="slidenum">
               <a:rPr lang="en-US" smtClean="0"/>
-              <a:t>18</a:t>
+              <a:t>20</a:t>
             </a:fld>
             <a:endParaRPr lang="en-US"/>
           </a:p>
@@ -7320,7 +8868,7 @@
 </p:sld>
 </file>
 
-<file path=ppt/slides/slide19.xml><?xml version="1.0" encoding="utf-8"?>
+<file path=ppt/slides/slide21.xml><?xml version="1.0" encoding="utf-8"?>
 <p:sld xmlns:a="http://schemas.openxmlformats.org/drawingml/2006/main" xmlns:r="http://schemas.openxmlformats.org/officeDocument/2006/relationships" xmlns:p="http://schemas.openxmlformats.org/presentationml/2006/main">
   <p:cSld>
     <p:spTree>
@@ -7490,7 +9038,7 @@
                 <a:latin typeface="Arial" panose="020B0604020202020204" pitchFamily="34" charset="0"/>
                 <a:cs typeface="Arial" panose="020B0604020202020204" pitchFamily="34" charset="0"/>
               </a:rPr>
-              <a:t>Ci sono cicli limite</a:t>
+              <a:t>Cicli limite: OK</a:t>
             </a:r>
           </a:p>
           <a:p>
@@ -7597,7 +9145,7 @@
           <a:p>
             <a:fld id="{E6091BEE-CBDC-4E52-BEE4-6FA4559C220C}" type="datetime1">
               <a:rPr lang="it-IT" smtClean="0"/>
-              <a:t>30/12/2025</a:t>
+              <a:t>03/01/2026</a:t>
             </a:fld>
             <a:endParaRPr lang="en-US"/>
           </a:p>
@@ -7655,7 +9203,7 @@
           <a:p>
             <a:fld id="{8BF32AC9-143A-477E-841D-1F801B7F8FE8}" type="slidenum">
               <a:rPr lang="en-US" smtClean="0"/>
-              <a:t>19</a:t>
+              <a:t>21</a:t>
             </a:fld>
             <a:endParaRPr lang="en-US"/>
           </a:p>
@@ -7674,7 +9222,7 @@
 </p:sld>
 </file>
 
-<file path=ppt/slides/slide2.xml><?xml version="1.0" encoding="utf-8"?>
+<file path=ppt/slides/slide22.xml><?xml version="1.0" encoding="utf-8"?>
 <p:sld xmlns:a="http://schemas.openxmlformats.org/drawingml/2006/main" xmlns:r="http://schemas.openxmlformats.org/officeDocument/2006/relationships" xmlns:p="http://schemas.openxmlformats.org/presentationml/2006/main">
   <p:cSld>
     <p:spTree>
@@ -7682,7 +9230,7 @@
         <p:cNvPr id="1" name="">
           <a:extLst>
             <a:ext uri="{FF2B5EF4-FFF2-40B4-BE49-F238E27FC236}">
-              <a16:creationId xmlns:a16="http://schemas.microsoft.com/office/drawing/2014/main" id="{42783EDE-02B6-E8AC-2521-60C029C1744D}"/>
+              <a16:creationId xmlns:a16="http://schemas.microsoft.com/office/drawing/2014/main" id="{DF6D25D6-DF3E-3A97-3D95-1AF6E2697643}"/>
             </a:ext>
           </a:extLst>
         </p:cNvPr>
@@ -7702,7 +9250,7 @@
           <p:cNvPr id="3" name="TextBox 2">
             <a:extLst>
               <a:ext uri="{FF2B5EF4-FFF2-40B4-BE49-F238E27FC236}">
-                <a16:creationId xmlns:a16="http://schemas.microsoft.com/office/drawing/2014/main" id="{D10A35CD-D2E2-120B-D1B4-F34531D5C50D}"/>
+                <a16:creationId xmlns:a16="http://schemas.microsoft.com/office/drawing/2014/main" id="{63B57647-AFEA-49E4-DC17-3F73C7EFD82D}"/>
               </a:ext>
             </a:extLst>
           </p:cNvPr>
@@ -7712,7 +9260,7 @@
         <p:spPr>
           <a:xfrm>
             <a:off x="688257" y="442035"/>
-            <a:ext cx="5407744" cy="523220"/>
+            <a:ext cx="5407743" cy="523220"/>
           </a:xfrm>
           <a:prstGeom prst="rect">
             <a:avLst/>
@@ -7727,7 +9275,7 @@
           <a:p>
             <a:r>
               <a:rPr lang="it-IT" sz="2800" b="1" dirty="0"/>
-              <a:t>INTRODUZIONE E BIOGRAFIA</a:t>
+              <a:t>RISULTATO IRRIPRODUCIBILE</a:t>
             </a:r>
           </a:p>
         </p:txBody>
@@ -7737,7 +9285,7 @@
           <p:cNvPr id="4" name="Rectangle 3">
             <a:extLst>
               <a:ext uri="{FF2B5EF4-FFF2-40B4-BE49-F238E27FC236}">
-                <a16:creationId xmlns:a16="http://schemas.microsoft.com/office/drawing/2014/main" id="{A12F190A-AADC-AEC9-B613-D7B38E6B36B7}"/>
+                <a16:creationId xmlns:a16="http://schemas.microsoft.com/office/drawing/2014/main" id="{ED116D3D-FD7A-FFED-460F-9F3A48DFE0CF}"/>
               </a:ext>
             </a:extLst>
           </p:cNvPr>
@@ -7789,7 +9337,7 @@
           <p:cNvPr id="7" name="TextBox 6">
             <a:extLst>
               <a:ext uri="{FF2B5EF4-FFF2-40B4-BE49-F238E27FC236}">
-                <a16:creationId xmlns:a16="http://schemas.microsoft.com/office/drawing/2014/main" id="{AC4CDCCF-1BC0-D866-B370-AD2C83637A8F}"/>
+                <a16:creationId xmlns:a16="http://schemas.microsoft.com/office/drawing/2014/main" id="{7C7B5244-9BC4-7A7B-CD78-3D99A832B7AA}"/>
               </a:ext>
             </a:extLst>
           </p:cNvPr>
@@ -7798,8 +9346,8 @@
         </p:nvSpPr>
         <p:spPr>
           <a:xfrm>
-            <a:off x="688257" y="1242253"/>
-            <a:ext cx="6735098" cy="3785652"/>
+            <a:off x="688257" y="1257642"/>
+            <a:ext cx="10028904" cy="4893647"/>
           </a:xfrm>
           <a:prstGeom prst="rect">
             <a:avLst/>
@@ -7821,7 +9369,7 @@
                 <a:latin typeface="Arial" panose="020B0604020202020204" pitchFamily="34" charset="0"/>
                 <a:cs typeface="Arial" panose="020B0604020202020204" pitchFamily="34" charset="0"/>
               </a:rPr>
-              <a:t>Dinamica prede-predatori</a:t>
+              <a:t>Test di stabilità</a:t>
             </a:r>
           </a:p>
           <a:p>
@@ -7844,7 +9392,7 @@
                 <a:latin typeface="Arial" panose="020B0604020202020204" pitchFamily="34" charset="0"/>
                 <a:cs typeface="Arial" panose="020B0604020202020204" pitchFamily="34" charset="0"/>
               </a:rPr>
-              <a:t>Più fattori:</a:t>
+              <a:t>I test di stabilità non sono affidabili</a:t>
             </a:r>
           </a:p>
           <a:p>
@@ -7857,46 +9405,7 @@
                 <a:latin typeface="Arial" panose="020B0604020202020204" pitchFamily="34" charset="0"/>
                 <a:cs typeface="Arial" panose="020B0604020202020204" pitchFamily="34" charset="0"/>
               </a:rPr>
-              <a:t>«Paura» delle prede e fattore di «rifugio»</a:t>
-            </a:r>
-          </a:p>
-          <a:p>
-            <a:pPr marL="742950" lvl="1" indent="-285750">
-              <a:buFont typeface="Wingdings" panose="05000000000000000000" pitchFamily="2" charset="2"/>
-              <a:buChar char="q"/>
-            </a:pPr>
-            <a:r>
-              <a:rPr lang="it-IT" sz="2400" dirty="0">
-                <a:latin typeface="Arial" panose="020B0604020202020204" pitchFamily="34" charset="0"/>
-                <a:cs typeface="Arial" panose="020B0604020202020204" pitchFamily="34" charset="0"/>
-              </a:rPr>
-              <a:t>«Risorse aggiuntive» esterne</a:t>
-            </a:r>
-          </a:p>
-          <a:p>
-            <a:pPr marL="742950" lvl="1" indent="-285750">
-              <a:buFont typeface="Wingdings" panose="05000000000000000000" pitchFamily="2" charset="2"/>
-              <a:buChar char="q"/>
-            </a:pPr>
-            <a:r>
-              <a:rPr lang="it-IT" sz="2400" dirty="0">
-                <a:latin typeface="Arial" panose="020B0604020202020204" pitchFamily="34" charset="0"/>
-                <a:cs typeface="Arial" panose="020B0604020202020204" pitchFamily="34" charset="0"/>
-              </a:rPr>
-              <a:t>Risposta funzionale asimmetrica (1 preda consumata != 1 predatore)</a:t>
-            </a:r>
-          </a:p>
-          <a:p>
-            <a:pPr marL="742950" lvl="1" indent="-285750">
-              <a:buFont typeface="Wingdings" panose="05000000000000000000" pitchFamily="2" charset="2"/>
-              <a:buChar char="q"/>
-            </a:pPr>
-            <a:r>
-              <a:rPr lang="it-IT" sz="2400" dirty="0">
-                <a:latin typeface="Arial" panose="020B0604020202020204" pitchFamily="34" charset="0"/>
-                <a:cs typeface="Arial" panose="020B0604020202020204" pitchFamily="34" charset="0"/>
-              </a:rPr>
-              <a:t>Emigrazione dei predatori</a:t>
+              <a:t>Esempio: </a:t>
             </a:r>
           </a:p>
           <a:p>
@@ -7910,7 +9419,47 @@
             </a:endParaRPr>
           </a:p>
           <a:p>
-            <a:pPr marL="285750" indent="-285750">
+            <a:pPr marL="742950" lvl="1" indent="-285750">
+              <a:buFont typeface="Wingdings" panose="05000000000000000000" pitchFamily="2" charset="2"/>
+              <a:buChar char="q"/>
+            </a:pPr>
+            <a:endParaRPr lang="it-IT" sz="2400" dirty="0">
+              <a:latin typeface="Arial" panose="020B0604020202020204" pitchFamily="34" charset="0"/>
+              <a:cs typeface="Arial" panose="020B0604020202020204" pitchFamily="34" charset="0"/>
+            </a:endParaRPr>
+          </a:p>
+          <a:p>
+            <a:pPr marL="742950" lvl="1" indent="-285750">
+              <a:buFont typeface="Wingdings" panose="05000000000000000000" pitchFamily="2" charset="2"/>
+              <a:buChar char="q"/>
+            </a:pPr>
+            <a:endParaRPr lang="it-IT" sz="2400" dirty="0">
+              <a:latin typeface="Arial" panose="020B0604020202020204" pitchFamily="34" charset="0"/>
+              <a:cs typeface="Arial" panose="020B0604020202020204" pitchFamily="34" charset="0"/>
+            </a:endParaRPr>
+          </a:p>
+          <a:p>
+            <a:pPr marL="742950" lvl="1" indent="-285750">
+              <a:buFont typeface="Wingdings" panose="05000000000000000000" pitchFamily="2" charset="2"/>
+              <a:buChar char="q"/>
+            </a:pPr>
+            <a:endParaRPr lang="it-IT" sz="2400" dirty="0">
+              <a:latin typeface="Arial" panose="020B0604020202020204" pitchFamily="34" charset="0"/>
+              <a:cs typeface="Arial" panose="020B0604020202020204" pitchFamily="34" charset="0"/>
+            </a:endParaRPr>
+          </a:p>
+          <a:p>
+            <a:pPr marL="742950" lvl="1" indent="-285750">
+              <a:buFont typeface="Wingdings" panose="05000000000000000000" pitchFamily="2" charset="2"/>
+              <a:buChar char="q"/>
+            </a:pPr>
+            <a:endParaRPr lang="it-IT" sz="2400" dirty="0">
+              <a:latin typeface="Arial" panose="020B0604020202020204" pitchFamily="34" charset="0"/>
+              <a:cs typeface="Arial" panose="020B0604020202020204" pitchFamily="34" charset="0"/>
+            </a:endParaRPr>
+          </a:p>
+          <a:p>
+            <a:pPr marL="742950" lvl="1" indent="-285750">
               <a:buFont typeface="Wingdings" panose="05000000000000000000" pitchFamily="2" charset="2"/>
               <a:buChar char="q"/>
             </a:pPr>
@@ -7919,7 +9468,20 @@
                 <a:latin typeface="Arial" panose="020B0604020202020204" pitchFamily="34" charset="0"/>
                 <a:cs typeface="Arial" panose="020B0604020202020204" pitchFamily="34" charset="0"/>
               </a:rPr>
-              <a:t>Articolo scientifico: </a:t>
+              <a:t>Problema: Se x1 &gt; 1, allora chiaramente 1-x1 &lt; 0 e quindi la seconda equazione è sicuramente soddisfatta in quanto psi è positiva</a:t>
+            </a:r>
+          </a:p>
+          <a:p>
+            <a:pPr marL="1200150" lvl="2" indent="-285750">
+              <a:buFont typeface="Wingdings" panose="05000000000000000000" pitchFamily="2" charset="2"/>
+              <a:buChar char="q"/>
+            </a:pPr>
+            <a:r>
+              <a:rPr lang="it-IT" sz="2400" dirty="0">
+                <a:latin typeface="Arial" panose="020B0604020202020204" pitchFamily="34" charset="0"/>
+                <a:cs typeface="Arial" panose="020B0604020202020204" pitchFamily="34" charset="0"/>
+              </a:rPr>
+              <a:t>Ridondanza, è «sempre vera»</a:t>
             </a:r>
           </a:p>
         </p:txBody>
@@ -7929,7 +9491,7 @@
           <p:cNvPr id="9" name="TextBox 8">
             <a:extLst>
               <a:ext uri="{FF2B5EF4-FFF2-40B4-BE49-F238E27FC236}">
-                <a16:creationId xmlns:a16="http://schemas.microsoft.com/office/drawing/2014/main" id="{F4F3A0B6-5A5F-4103-CA68-7D3869F21563}"/>
+                <a16:creationId xmlns:a16="http://schemas.microsoft.com/office/drawing/2014/main" id="{DBF03D98-FD92-19A8-6C74-C69617A2B6A7}"/>
               </a:ext>
             </a:extLst>
           </p:cNvPr>
@@ -7938,8 +9500,8 @@
         </p:nvSpPr>
         <p:spPr>
           <a:xfrm>
-            <a:off x="1696064" y="5027905"/>
-            <a:ext cx="8799871" cy="1446550"/>
+            <a:off x="6959599" y="514495"/>
+            <a:ext cx="4544143" cy="461665"/>
           </a:xfrm>
           <a:prstGeom prst="rect">
             <a:avLst/>
@@ -7952,85 +9514,20 @@
           </a:bodyPr>
           <a:lstStyle/>
           <a:p>
-            <a:pPr algn="ctr"/>
-            <a:r>
-              <a:rPr lang="en-US" i="1" dirty="0">
-                <a:latin typeface="Arial" panose="020B0604020202020204" pitchFamily="34" charset="0"/>
-                <a:cs typeface="Arial" panose="020B0604020202020204" pitchFamily="34" charset="0"/>
-              </a:rPr>
-              <a:t>Effect of the Fear Factor and Prey Refuge in an Asymmetric Predator–Prey Model</a:t>
-            </a:r>
-          </a:p>
-          <a:p>
-            <a:pPr algn="ctr"/>
-            <a:r>
-              <a:rPr lang="en-US" sz="1600" i="1" dirty="0">
-                <a:latin typeface="Arial" panose="020B0604020202020204" pitchFamily="34" charset="0"/>
-                <a:cs typeface="Arial" panose="020B0604020202020204" pitchFamily="34" charset="0"/>
-              </a:rPr>
-              <a:t>Rasha M. Yaseen · May M. Helal · Kaushik </a:t>
-            </a:r>
-            <a:r>
-              <a:rPr lang="en-US" sz="1600" i="1" dirty="0" err="1">
-                <a:latin typeface="Arial" panose="020B0604020202020204" pitchFamily="34" charset="0"/>
-                <a:cs typeface="Arial" panose="020B0604020202020204" pitchFamily="34" charset="0"/>
-              </a:rPr>
-              <a:t>Dehingia</a:t>
-            </a:r>
-            <a:r>
-              <a:rPr lang="en-US" sz="1600" i="1" dirty="0">
-                <a:latin typeface="Arial" panose="020B0604020202020204" pitchFamily="34" charset="0"/>
-                <a:cs typeface="Arial" panose="020B0604020202020204" pitchFamily="34" charset="0"/>
-              </a:rPr>
-              <a:t> · Ahmed A. Mohsen</a:t>
-            </a:r>
-          </a:p>
-          <a:p>
-            <a:pPr algn="ctr"/>
-            <a:r>
-              <a:rPr lang="en-US" i="1" dirty="0">
-                <a:latin typeface="Arial" panose="020B0604020202020204" pitchFamily="34" charset="0"/>
-                <a:cs typeface="Arial" panose="020B0604020202020204" pitchFamily="34" charset="0"/>
-              </a:rPr>
-              <a:t>Brazilian Journal of Physics (2024)</a:t>
-            </a:r>
-          </a:p>
-          <a:p>
-            <a:pPr algn="ctr"/>
-            <a:r>
-              <a:rPr lang="en-US" b="1" i="1" dirty="0">
-                <a:latin typeface="Arial" panose="020B0604020202020204" pitchFamily="34" charset="0"/>
-                <a:cs typeface="Arial" panose="020B0604020202020204" pitchFamily="34" charset="0"/>
-              </a:rPr>
-              <a:t>DOI: </a:t>
-            </a:r>
-            <a:r>
-              <a:rPr lang="en-US" b="1" i="1" dirty="0">
-                <a:latin typeface="Arial" panose="020B0604020202020204" pitchFamily="34" charset="0"/>
-                <a:cs typeface="Arial" panose="020B0604020202020204" pitchFamily="34" charset="0"/>
-                <a:hlinkClick r:id="rId2"/>
-              </a:rPr>
-              <a:t>https://doi.org/10.1007/s13538-024-01594-9</a:t>
-            </a:r>
-            <a:br>
-              <a:rPr lang="en-US" b="1" i="1" dirty="0">
-                <a:latin typeface="Arial" panose="020B0604020202020204" pitchFamily="34" charset="0"/>
-                <a:cs typeface="Arial" panose="020B0604020202020204" pitchFamily="34" charset="0"/>
-              </a:rPr>
-            </a:br>
-            <a:endParaRPr lang="en-US" b="1" i="1" dirty="0">
-              <a:latin typeface="Arial" panose="020B0604020202020204" pitchFamily="34" charset="0"/>
-              <a:cs typeface="Arial" panose="020B0604020202020204" pitchFamily="34" charset="0"/>
-            </a:endParaRPr>
+            <a:pPr algn="r"/>
+            <a:r>
+              <a:rPr lang="it-IT" sz="2400" b="1" i="1" dirty="0"/>
+              <a:t>Step: Confronto dei risultati</a:t>
+            </a:r>
           </a:p>
         </p:txBody>
       </p:sp>
       <p:pic>
         <p:nvPicPr>
-          <p:cNvPr id="11" name="Picture 10" descr="A group of black and white books">
-            <a:extLst>
-              <a:ext uri="{FF2B5EF4-FFF2-40B4-BE49-F238E27FC236}">
-                <a16:creationId xmlns:a16="http://schemas.microsoft.com/office/drawing/2014/main" id="{D34E898A-D22B-361E-3757-B9958ED7668E}"/>
+          <p:cNvPr id="2" name="Picture 1" descr="A white background with black text&#10;&#10;AI-generated content may be incorrect.">
+            <a:extLst>
+              <a:ext uri="{FF2B5EF4-FFF2-40B4-BE49-F238E27FC236}">
+                <a16:creationId xmlns:a16="http://schemas.microsoft.com/office/drawing/2014/main" id="{3A0F69CA-E6C0-F97A-9B5F-430835072073}"/>
               </a:ext>
             </a:extLst>
           </p:cNvPr>
@@ -8040,15 +9537,15 @@
           <p:nvPr/>
         </p:nvPicPr>
         <p:blipFill>
-          <a:blip r:embed="rId3"/>
+          <a:blip r:embed="rId2"/>
           <a:stretch>
             <a:fillRect/>
           </a:stretch>
         </p:blipFill>
         <p:spPr>
           <a:xfrm>
-            <a:off x="7423355" y="1984705"/>
-            <a:ext cx="4601496" cy="2300748"/>
+            <a:off x="2794239" y="2410783"/>
+            <a:ext cx="5816940" cy="2036434"/>
           </a:xfrm>
           <a:prstGeom prst="rect">
             <a:avLst/>
@@ -8057,10 +9554,10 @@
       </p:pic>
       <p:sp>
         <p:nvSpPr>
-          <p:cNvPr id="2" name="Date Placeholder 1">
-            <a:extLst>
-              <a:ext uri="{FF2B5EF4-FFF2-40B4-BE49-F238E27FC236}">
-                <a16:creationId xmlns:a16="http://schemas.microsoft.com/office/drawing/2014/main" id="{679F9A49-6EAB-475E-F1A0-7281F77EEA15}"/>
+          <p:cNvPr id="5" name="Date Placeholder 4">
+            <a:extLst>
+              <a:ext uri="{FF2B5EF4-FFF2-40B4-BE49-F238E27FC236}">
+                <a16:creationId xmlns:a16="http://schemas.microsoft.com/office/drawing/2014/main" id="{B5A809DB-3D3D-8914-0886-852390D12DCA}"/>
               </a:ext>
             </a:extLst>
           </p:cNvPr>
@@ -8076,9 +9573,9 @@
           <a:bodyPr/>
           <a:lstStyle/>
           <a:p>
-            <a:fld id="{B4609506-6624-4C93-99FC-2FCD7C3B5EE8}" type="datetime1">
+            <a:fld id="{163A915D-2BA8-4F27-943A-17EA02CCA069}" type="datetime1">
               <a:rPr lang="it-IT" smtClean="0"/>
-              <a:t>30/12/2025</a:t>
+              <a:t>03/01/2026</a:t>
             </a:fld>
             <a:endParaRPr lang="en-US"/>
           </a:p>
@@ -8086,10 +9583,10 @@
       </p:sp>
       <p:sp>
         <p:nvSpPr>
-          <p:cNvPr id="5" name="Footer Placeholder 4">
-            <a:extLst>
-              <a:ext uri="{FF2B5EF4-FFF2-40B4-BE49-F238E27FC236}">
-                <a16:creationId xmlns:a16="http://schemas.microsoft.com/office/drawing/2014/main" id="{01E3F394-AA29-7D3E-79E3-8E53BC37DF35}"/>
+          <p:cNvPr id="6" name="Footer Placeholder 5">
+            <a:extLst>
+              <a:ext uri="{FF2B5EF4-FFF2-40B4-BE49-F238E27FC236}">
+                <a16:creationId xmlns:a16="http://schemas.microsoft.com/office/drawing/2014/main" id="{F67EC52C-B23D-BCB5-E5AF-A85DD77BEC4F}"/>
               </a:ext>
             </a:extLst>
           </p:cNvPr>
@@ -8115,10 +9612,10 @@
       </p:sp>
       <p:sp>
         <p:nvSpPr>
-          <p:cNvPr id="6" name="Slide Number Placeholder 5">
-            <a:extLst>
-              <a:ext uri="{FF2B5EF4-FFF2-40B4-BE49-F238E27FC236}">
-                <a16:creationId xmlns:a16="http://schemas.microsoft.com/office/drawing/2014/main" id="{E6599908-6A31-CACD-4ED7-FFD6629F9A47}"/>
+          <p:cNvPr id="8" name="Slide Number Placeholder 7">
+            <a:extLst>
+              <a:ext uri="{FF2B5EF4-FFF2-40B4-BE49-F238E27FC236}">
+                <a16:creationId xmlns:a16="http://schemas.microsoft.com/office/drawing/2014/main" id="{4F26B32F-7F49-17DD-9E16-FF42F586D4B8}"/>
               </a:ext>
             </a:extLst>
           </p:cNvPr>
@@ -8136,7 +9633,7 @@
           <a:p>
             <a:fld id="{8BF32AC9-143A-477E-841D-1F801B7F8FE8}" type="slidenum">
               <a:rPr lang="en-US" smtClean="0"/>
-              <a:t>2</a:t>
+              <a:t>22</a:t>
             </a:fld>
             <a:endParaRPr lang="en-US"/>
           </a:p>
@@ -8145,7 +9642,7 @@
     </p:spTree>
     <p:extLst>
       <p:ext uri="{BB962C8B-B14F-4D97-AF65-F5344CB8AC3E}">
-        <p14:creationId xmlns:p14="http://schemas.microsoft.com/office/powerpoint/2010/main" val="3701561688"/>
+        <p14:creationId xmlns:p14="http://schemas.microsoft.com/office/powerpoint/2010/main" val="4049771284"/>
       </p:ext>
     </p:extLst>
   </p:cSld>
@@ -8155,7 +9652,7 @@
 </p:sld>
 </file>
 
-<file path=ppt/slides/slide20.xml><?xml version="1.0" encoding="utf-8"?>
+<file path=ppt/slides/slide23.xml><?xml version="1.0" encoding="utf-8"?>
 <p:sld xmlns:a="http://schemas.openxmlformats.org/drawingml/2006/main" xmlns:r="http://schemas.openxmlformats.org/officeDocument/2006/relationships" xmlns:p="http://schemas.openxmlformats.org/presentationml/2006/main">
   <p:cSld>
     <p:spTree>
@@ -8163,7 +9660,7 @@
         <p:cNvPr id="1" name="">
           <a:extLst>
             <a:ext uri="{FF2B5EF4-FFF2-40B4-BE49-F238E27FC236}">
-              <a16:creationId xmlns:a16="http://schemas.microsoft.com/office/drawing/2014/main" id="{DF6D25D6-DF3E-3A97-3D95-1AF6E2697643}"/>
+              <a16:creationId xmlns:a16="http://schemas.microsoft.com/office/drawing/2014/main" id="{3F0ECB2B-DC3A-AED2-DE99-71ADF792FA02}"/>
             </a:ext>
           </a:extLst>
         </p:cNvPr>
@@ -8183,7 +9680,7 @@
           <p:cNvPr id="3" name="TextBox 2">
             <a:extLst>
               <a:ext uri="{FF2B5EF4-FFF2-40B4-BE49-F238E27FC236}">
-                <a16:creationId xmlns:a16="http://schemas.microsoft.com/office/drawing/2014/main" id="{63B57647-AFEA-49E4-DC17-3F73C7EFD82D}"/>
+                <a16:creationId xmlns:a16="http://schemas.microsoft.com/office/drawing/2014/main" id="{85428316-75AB-D183-4E4E-D0605625A833}"/>
               </a:ext>
             </a:extLst>
           </p:cNvPr>
@@ -8218,7 +9715,7 @@
           <p:cNvPr id="4" name="Rectangle 3">
             <a:extLst>
               <a:ext uri="{FF2B5EF4-FFF2-40B4-BE49-F238E27FC236}">
-                <a16:creationId xmlns:a16="http://schemas.microsoft.com/office/drawing/2014/main" id="{ED116D3D-FD7A-FFED-460F-9F3A48DFE0CF}"/>
+                <a16:creationId xmlns:a16="http://schemas.microsoft.com/office/drawing/2014/main" id="{1967F6A2-35D7-0C65-9C42-0C4D29A2636D}"/>
               </a:ext>
             </a:extLst>
           </p:cNvPr>
@@ -8270,7 +9767,7 @@
           <p:cNvPr id="7" name="TextBox 6">
             <a:extLst>
               <a:ext uri="{FF2B5EF4-FFF2-40B4-BE49-F238E27FC236}">
-                <a16:creationId xmlns:a16="http://schemas.microsoft.com/office/drawing/2014/main" id="{7C7B5244-9BC4-7A7B-CD78-3D99A832B7AA}"/>
+                <a16:creationId xmlns:a16="http://schemas.microsoft.com/office/drawing/2014/main" id="{EA28E273-BF7E-5A38-FF53-C27C8435D32D}"/>
               </a:ext>
             </a:extLst>
           </p:cNvPr>
@@ -8280,7 +9777,7 @@
         <p:spPr>
           <a:xfrm>
             <a:off x="688257" y="1257642"/>
-            <a:ext cx="10028904" cy="4893647"/>
+            <a:ext cx="10028904" cy="1569660"/>
           </a:xfrm>
           <a:prstGeom prst="rect">
             <a:avLst/>
@@ -8325,7 +9822,7 @@
                 <a:latin typeface="Arial" panose="020B0604020202020204" pitchFamily="34" charset="0"/>
                 <a:cs typeface="Arial" panose="020B0604020202020204" pitchFamily="34" charset="0"/>
               </a:rPr>
-              <a:t>Tutti i test di stabilità non sono affidabili</a:t>
+              <a:t>Alternativa (solo per la stabilità locale):</a:t>
             </a:r>
           </a:p>
           <a:p>
@@ -8338,83 +9835,7 @@
                 <a:latin typeface="Arial" panose="020B0604020202020204" pitchFamily="34" charset="0"/>
                 <a:cs typeface="Arial" panose="020B0604020202020204" pitchFamily="34" charset="0"/>
               </a:rPr>
-              <a:t>Esempio: </a:t>
-            </a:r>
-          </a:p>
-          <a:p>
-            <a:pPr marL="742950" lvl="1" indent="-285750">
-              <a:buFont typeface="Wingdings" panose="05000000000000000000" pitchFamily="2" charset="2"/>
-              <a:buChar char="q"/>
-            </a:pPr>
-            <a:endParaRPr lang="it-IT" sz="2400" dirty="0">
-              <a:latin typeface="Arial" panose="020B0604020202020204" pitchFamily="34" charset="0"/>
-              <a:cs typeface="Arial" panose="020B0604020202020204" pitchFamily="34" charset="0"/>
-            </a:endParaRPr>
-          </a:p>
-          <a:p>
-            <a:pPr marL="742950" lvl="1" indent="-285750">
-              <a:buFont typeface="Wingdings" panose="05000000000000000000" pitchFamily="2" charset="2"/>
-              <a:buChar char="q"/>
-            </a:pPr>
-            <a:endParaRPr lang="it-IT" sz="2400" dirty="0">
-              <a:latin typeface="Arial" panose="020B0604020202020204" pitchFamily="34" charset="0"/>
-              <a:cs typeface="Arial" panose="020B0604020202020204" pitchFamily="34" charset="0"/>
-            </a:endParaRPr>
-          </a:p>
-          <a:p>
-            <a:pPr marL="742950" lvl="1" indent="-285750">
-              <a:buFont typeface="Wingdings" panose="05000000000000000000" pitchFamily="2" charset="2"/>
-              <a:buChar char="q"/>
-            </a:pPr>
-            <a:endParaRPr lang="it-IT" sz="2400" dirty="0">
-              <a:latin typeface="Arial" panose="020B0604020202020204" pitchFamily="34" charset="0"/>
-              <a:cs typeface="Arial" panose="020B0604020202020204" pitchFamily="34" charset="0"/>
-            </a:endParaRPr>
-          </a:p>
-          <a:p>
-            <a:pPr marL="742950" lvl="1" indent="-285750">
-              <a:buFont typeface="Wingdings" panose="05000000000000000000" pitchFamily="2" charset="2"/>
-              <a:buChar char="q"/>
-            </a:pPr>
-            <a:endParaRPr lang="it-IT" sz="2400" dirty="0">
-              <a:latin typeface="Arial" panose="020B0604020202020204" pitchFamily="34" charset="0"/>
-              <a:cs typeface="Arial" panose="020B0604020202020204" pitchFamily="34" charset="0"/>
-            </a:endParaRPr>
-          </a:p>
-          <a:p>
-            <a:pPr marL="742950" lvl="1" indent="-285750">
-              <a:buFont typeface="Wingdings" panose="05000000000000000000" pitchFamily="2" charset="2"/>
-              <a:buChar char="q"/>
-            </a:pPr>
-            <a:endParaRPr lang="it-IT" sz="2400" dirty="0">
-              <a:latin typeface="Arial" panose="020B0604020202020204" pitchFamily="34" charset="0"/>
-              <a:cs typeface="Arial" panose="020B0604020202020204" pitchFamily="34" charset="0"/>
-            </a:endParaRPr>
-          </a:p>
-          <a:p>
-            <a:pPr marL="742950" lvl="1" indent="-285750">
-              <a:buFont typeface="Wingdings" panose="05000000000000000000" pitchFamily="2" charset="2"/>
-              <a:buChar char="q"/>
-            </a:pPr>
-            <a:r>
-              <a:rPr lang="it-IT" sz="2400" dirty="0">
-                <a:latin typeface="Arial" panose="020B0604020202020204" pitchFamily="34" charset="0"/>
-                <a:cs typeface="Arial" panose="020B0604020202020204" pitchFamily="34" charset="0"/>
-              </a:rPr>
-              <a:t>Problema: Se x1 &gt; 1, allora chiaramente 1-x1 &lt; 0 e quindi la seconda equazione è sicuramente soddisfatta in quanto psi è positiva</a:t>
-            </a:r>
-          </a:p>
-          <a:p>
-            <a:pPr marL="1200150" lvl="2" indent="-285750">
-              <a:buFont typeface="Wingdings" panose="05000000000000000000" pitchFamily="2" charset="2"/>
-              <a:buChar char="q"/>
-            </a:pPr>
-            <a:r>
-              <a:rPr lang="it-IT" sz="2400" dirty="0">
-                <a:latin typeface="Arial" panose="020B0604020202020204" pitchFamily="34" charset="0"/>
-                <a:cs typeface="Arial" panose="020B0604020202020204" pitchFamily="34" charset="0"/>
-              </a:rPr>
-              <a:t>Ridondanza, è «sempre vera»</a:t>
+              <a:t>Calcoliamo direttamente gli autovalori della Jacobiana</a:t>
             </a:r>
           </a:p>
         </p:txBody>
@@ -8424,7 +9845,7 @@
           <p:cNvPr id="9" name="TextBox 8">
             <a:extLst>
               <a:ext uri="{FF2B5EF4-FFF2-40B4-BE49-F238E27FC236}">
-                <a16:creationId xmlns:a16="http://schemas.microsoft.com/office/drawing/2014/main" id="{DBF03D98-FD92-19A8-6C74-C69617A2B6A7}"/>
+                <a16:creationId xmlns:a16="http://schemas.microsoft.com/office/drawing/2014/main" id="{418ED580-8CEF-579E-F95E-8256EB094D11}"/>
               </a:ext>
             </a:extLst>
           </p:cNvPr>
@@ -8455,42 +9876,12 @@
           </a:p>
         </p:txBody>
       </p:sp>
-      <p:pic>
-        <p:nvPicPr>
-          <p:cNvPr id="2" name="Picture 1" descr="A white background with black text&#10;&#10;AI-generated content may be incorrect.">
-            <a:extLst>
-              <a:ext uri="{FF2B5EF4-FFF2-40B4-BE49-F238E27FC236}">
-                <a16:creationId xmlns:a16="http://schemas.microsoft.com/office/drawing/2014/main" id="{3A0F69CA-E6C0-F97A-9B5F-430835072073}"/>
-              </a:ext>
-            </a:extLst>
-          </p:cNvPr>
-          <p:cNvPicPr>
-            <a:picLocks noChangeAspect="1"/>
-          </p:cNvPicPr>
-          <p:nvPr/>
-        </p:nvPicPr>
-        <p:blipFill>
-          <a:blip r:embed="rId2"/>
-          <a:stretch>
-            <a:fillRect/>
-          </a:stretch>
-        </p:blipFill>
-        <p:spPr>
-          <a:xfrm>
-            <a:off x="2794239" y="2410783"/>
-            <a:ext cx="5816940" cy="2036434"/>
-          </a:xfrm>
-          <a:prstGeom prst="rect">
-            <a:avLst/>
-          </a:prstGeom>
-        </p:spPr>
-      </p:pic>
-      <p:sp>
-        <p:nvSpPr>
-          <p:cNvPr id="5" name="Date Placeholder 4">
-            <a:extLst>
-              <a:ext uri="{FF2B5EF4-FFF2-40B4-BE49-F238E27FC236}">
-                <a16:creationId xmlns:a16="http://schemas.microsoft.com/office/drawing/2014/main" id="{B5A809DB-3D3D-8914-0886-852390D12DCA}"/>
+      <p:sp>
+        <p:nvSpPr>
+          <p:cNvPr id="2" name="Date Placeholder 1">
+            <a:extLst>
+              <a:ext uri="{FF2B5EF4-FFF2-40B4-BE49-F238E27FC236}">
+                <a16:creationId xmlns:a16="http://schemas.microsoft.com/office/drawing/2014/main" id="{0EDB870E-656D-F110-C16F-A80E269133BE}"/>
               </a:ext>
             </a:extLst>
           </p:cNvPr>
@@ -8506,9 +9897,9 @@
           <a:bodyPr/>
           <a:lstStyle/>
           <a:p>
-            <a:fld id="{163A915D-2BA8-4F27-943A-17EA02CCA069}" type="datetime1">
+            <a:fld id="{536AB137-0A56-4868-923D-646D7C7CC445}" type="datetime1">
               <a:rPr lang="it-IT" smtClean="0"/>
-              <a:t>30/12/2025</a:t>
+              <a:t>03/01/2026</a:t>
             </a:fld>
             <a:endParaRPr lang="en-US"/>
           </a:p>
@@ -8516,10 +9907,10 @@
       </p:sp>
       <p:sp>
         <p:nvSpPr>
-          <p:cNvPr id="6" name="Footer Placeholder 5">
-            <a:extLst>
-              <a:ext uri="{FF2B5EF4-FFF2-40B4-BE49-F238E27FC236}">
-                <a16:creationId xmlns:a16="http://schemas.microsoft.com/office/drawing/2014/main" id="{F67EC52C-B23D-BCB5-E5AF-A85DD77BEC4F}"/>
+          <p:cNvPr id="5" name="Footer Placeholder 4">
+            <a:extLst>
+              <a:ext uri="{FF2B5EF4-FFF2-40B4-BE49-F238E27FC236}">
+                <a16:creationId xmlns:a16="http://schemas.microsoft.com/office/drawing/2014/main" id="{11008A38-BBDC-13DF-A25D-5DE1CB1D0346}"/>
               </a:ext>
             </a:extLst>
           </p:cNvPr>
@@ -8545,10 +9936,10 @@
       </p:sp>
       <p:sp>
         <p:nvSpPr>
-          <p:cNvPr id="8" name="Slide Number Placeholder 7">
-            <a:extLst>
-              <a:ext uri="{FF2B5EF4-FFF2-40B4-BE49-F238E27FC236}">
-                <a16:creationId xmlns:a16="http://schemas.microsoft.com/office/drawing/2014/main" id="{4F26B32F-7F49-17DD-9E16-FF42F586D4B8}"/>
+          <p:cNvPr id="6" name="Slide Number Placeholder 5">
+            <a:extLst>
+              <a:ext uri="{FF2B5EF4-FFF2-40B4-BE49-F238E27FC236}">
+                <a16:creationId xmlns:a16="http://schemas.microsoft.com/office/drawing/2014/main" id="{5179D57B-FEE5-1526-32C4-1589F6092F2A}"/>
               </a:ext>
             </a:extLst>
           </p:cNvPr>
@@ -8566,7 +9957,7 @@
           <a:p>
             <a:fld id="{8BF32AC9-143A-477E-841D-1F801B7F8FE8}" type="slidenum">
               <a:rPr lang="en-US" smtClean="0"/>
-              <a:t>20</a:t>
+              <a:t>23</a:t>
             </a:fld>
             <a:endParaRPr lang="en-US"/>
           </a:p>
@@ -8575,7 +9966,7 @@
     </p:spTree>
     <p:extLst>
       <p:ext uri="{BB962C8B-B14F-4D97-AF65-F5344CB8AC3E}">
-        <p14:creationId xmlns:p14="http://schemas.microsoft.com/office/powerpoint/2010/main" val="4049771284"/>
+        <p14:creationId xmlns:p14="http://schemas.microsoft.com/office/powerpoint/2010/main" val="2199566815"/>
       </p:ext>
     </p:extLst>
   </p:cSld>
@@ -8585,7 +9976,7 @@
 </p:sld>
 </file>
 
-<file path=ppt/slides/slide21.xml><?xml version="1.0" encoding="utf-8"?>
+<file path=ppt/slides/slide24.xml><?xml version="1.0" encoding="utf-8"?>
 <p:sld xmlns:a="http://schemas.openxmlformats.org/drawingml/2006/main" xmlns:r="http://schemas.openxmlformats.org/officeDocument/2006/relationships" xmlns:p="http://schemas.openxmlformats.org/presentationml/2006/main">
   <p:cSld>
     <p:spTree>
@@ -8593,7 +9984,7 @@
         <p:cNvPr id="1" name="">
           <a:extLst>
             <a:ext uri="{FF2B5EF4-FFF2-40B4-BE49-F238E27FC236}">
-              <a16:creationId xmlns:a16="http://schemas.microsoft.com/office/drawing/2014/main" id="{3F0ECB2B-DC3A-AED2-DE99-71ADF792FA02}"/>
+              <a16:creationId xmlns:a16="http://schemas.microsoft.com/office/drawing/2014/main" id="{74B77452-60A4-53B8-652D-008E4EA9FB53}"/>
             </a:ext>
           </a:extLst>
         </p:cNvPr>
@@ -8613,7 +10004,7 @@
           <p:cNvPr id="3" name="TextBox 2">
             <a:extLst>
               <a:ext uri="{FF2B5EF4-FFF2-40B4-BE49-F238E27FC236}">
-                <a16:creationId xmlns:a16="http://schemas.microsoft.com/office/drawing/2014/main" id="{85428316-75AB-D183-4E4E-D0605625A833}"/>
+                <a16:creationId xmlns:a16="http://schemas.microsoft.com/office/drawing/2014/main" id="{E99C2578-8874-C74D-3E16-6FF3FE3DA224}"/>
               </a:ext>
             </a:extLst>
           </p:cNvPr>
@@ -8638,7 +10029,7 @@
           <a:p>
             <a:r>
               <a:rPr lang="it-IT" sz="2800" b="1" dirty="0"/>
-              <a:t>RISULTATO IRRIPRODUCIBILE</a:t>
+              <a:t>APPROFONDIMENTO SU W2</a:t>
             </a:r>
           </a:p>
         </p:txBody>
@@ -8648,7 +10039,7 @@
           <p:cNvPr id="4" name="Rectangle 3">
             <a:extLst>
               <a:ext uri="{FF2B5EF4-FFF2-40B4-BE49-F238E27FC236}">
-                <a16:creationId xmlns:a16="http://schemas.microsoft.com/office/drawing/2014/main" id="{1967F6A2-35D7-0C65-9C42-0C4D29A2636D}"/>
+                <a16:creationId xmlns:a16="http://schemas.microsoft.com/office/drawing/2014/main" id="{B377C2D9-F7F5-E652-0366-A39F3F7302A3}"/>
               </a:ext>
             </a:extLst>
           </p:cNvPr>
@@ -8700,7 +10091,7 @@
           <p:cNvPr id="7" name="TextBox 6">
             <a:extLst>
               <a:ext uri="{FF2B5EF4-FFF2-40B4-BE49-F238E27FC236}">
-                <a16:creationId xmlns:a16="http://schemas.microsoft.com/office/drawing/2014/main" id="{EA28E273-BF7E-5A38-FF53-C27C8435D32D}"/>
+                <a16:creationId xmlns:a16="http://schemas.microsoft.com/office/drawing/2014/main" id="{DCDC62C6-31C1-2703-CF00-528C89686729}"/>
               </a:ext>
             </a:extLst>
           </p:cNvPr>
@@ -8710,7 +10101,7 @@
         <p:spPr>
           <a:xfrm>
             <a:off x="688257" y="1257642"/>
-            <a:ext cx="10028904" cy="1569660"/>
+            <a:ext cx="10028904" cy="3416320"/>
           </a:xfrm>
           <a:prstGeom prst="rect">
             <a:avLst/>
@@ -8732,7 +10123,33 @@
                 <a:latin typeface="Arial" panose="020B0604020202020204" pitchFamily="34" charset="0"/>
                 <a:cs typeface="Arial" panose="020B0604020202020204" pitchFamily="34" charset="0"/>
               </a:rPr>
-              <a:t>Test di stabilità</a:t>
+              <a:t>Test della stabilità con la Jacobiana: W2 rimane «NOT LAS» con i parametri del primo esperimento</a:t>
+            </a:r>
+          </a:p>
+          <a:p>
+            <a:pPr marL="742950" lvl="1" indent="-285750">
+              <a:buFont typeface="Wingdings" panose="05000000000000000000" pitchFamily="2" charset="2"/>
+              <a:buChar char="q"/>
+            </a:pPr>
+            <a:r>
+              <a:rPr lang="it-IT" sz="2400" dirty="0">
+                <a:latin typeface="Arial" panose="020B0604020202020204" pitchFamily="34" charset="0"/>
+                <a:cs typeface="Arial" panose="020B0604020202020204" pitchFamily="34" charset="0"/>
+              </a:rPr>
+              <a:t>Il paper dichiarava che è LAS</a:t>
+            </a:r>
+          </a:p>
+          <a:p>
+            <a:pPr marL="742950" lvl="1" indent="-285750">
+              <a:buFont typeface="Wingdings" panose="05000000000000000000" pitchFamily="2" charset="2"/>
+              <a:buChar char="q"/>
+            </a:pPr>
+            <a:r>
+              <a:rPr lang="it-IT" sz="2400" dirty="0">
+                <a:latin typeface="Arial" panose="020B0604020202020204" pitchFamily="34" charset="0"/>
+                <a:cs typeface="Arial" panose="020B0604020202020204" pitchFamily="34" charset="0"/>
+              </a:rPr>
+              <a:t>Secondo la simulazione lo è «apparentemente»</a:t>
             </a:r>
           </a:p>
           <a:p>
@@ -8755,7 +10172,7 @@
                 <a:latin typeface="Arial" panose="020B0604020202020204" pitchFamily="34" charset="0"/>
                 <a:cs typeface="Arial" panose="020B0604020202020204" pitchFamily="34" charset="0"/>
               </a:rPr>
-              <a:t>Alternativa (solo per la stabilità locale):</a:t>
+              <a:t>Risultato inconsistente: rifatto l’esperimento</a:t>
             </a:r>
           </a:p>
           <a:p>
@@ -8768,8 +10185,31 @@
                 <a:latin typeface="Arial" panose="020B0604020202020204" pitchFamily="34" charset="0"/>
                 <a:cs typeface="Arial" panose="020B0604020202020204" pitchFamily="34" charset="0"/>
               </a:rPr>
-              <a:t>Calcoliamo direttamente gli autovalori della Jacobiana</a:t>
-            </a:r>
+              <a:t>Prolungato la simulazione (T=600), </a:t>
+            </a:r>
+          </a:p>
+          <a:p>
+            <a:pPr marL="742950" lvl="1" indent="-285750">
+              <a:buFont typeface="Wingdings" panose="05000000000000000000" pitchFamily="2" charset="2"/>
+              <a:buChar char="q"/>
+            </a:pPr>
+            <a:r>
+              <a:rPr lang="it-IT" sz="2400" dirty="0">
+                <a:latin typeface="Arial" panose="020B0604020202020204" pitchFamily="34" charset="0"/>
+                <a:cs typeface="Arial" panose="020B0604020202020204" pitchFamily="34" charset="0"/>
+              </a:rPr>
+              <a:t>Zoom su W2 nel grafico (time series)</a:t>
+            </a:r>
+          </a:p>
+          <a:p>
+            <a:pPr marL="742950" lvl="1" indent="-285750">
+              <a:buFont typeface="Wingdings" panose="05000000000000000000" pitchFamily="2" charset="2"/>
+              <a:buChar char="q"/>
+            </a:pPr>
+            <a:endParaRPr lang="it-IT" sz="2400" dirty="0">
+              <a:latin typeface="Arial" panose="020B0604020202020204" pitchFamily="34" charset="0"/>
+              <a:cs typeface="Arial" panose="020B0604020202020204" pitchFamily="34" charset="0"/>
+            </a:endParaRPr>
           </a:p>
         </p:txBody>
       </p:sp>
@@ -8778,7 +10218,7 @@
           <p:cNvPr id="9" name="TextBox 8">
             <a:extLst>
               <a:ext uri="{FF2B5EF4-FFF2-40B4-BE49-F238E27FC236}">
-                <a16:creationId xmlns:a16="http://schemas.microsoft.com/office/drawing/2014/main" id="{418ED580-8CEF-579E-F95E-8256EB094D11}"/>
+                <a16:creationId xmlns:a16="http://schemas.microsoft.com/office/drawing/2014/main" id="{B59FD846-B850-2EE9-2713-55B4018AB9AE}"/>
               </a:ext>
             </a:extLst>
           </p:cNvPr>
@@ -8814,7 +10254,7 @@
           <p:cNvPr id="2" name="Date Placeholder 1">
             <a:extLst>
               <a:ext uri="{FF2B5EF4-FFF2-40B4-BE49-F238E27FC236}">
-                <a16:creationId xmlns:a16="http://schemas.microsoft.com/office/drawing/2014/main" id="{0EDB870E-656D-F110-C16F-A80E269133BE}"/>
+                <a16:creationId xmlns:a16="http://schemas.microsoft.com/office/drawing/2014/main" id="{51390EF2-A2B8-BBB5-966B-44A83DF61685}"/>
               </a:ext>
             </a:extLst>
           </p:cNvPr>
@@ -8830,9 +10270,9 @@
           <a:bodyPr/>
           <a:lstStyle/>
           <a:p>
-            <a:fld id="{536AB137-0A56-4868-923D-646D7C7CC445}" type="datetime1">
+            <a:fld id="{DCD21B3C-0FEB-4362-9619-5D2FABF53E43}" type="datetime1">
               <a:rPr lang="it-IT" smtClean="0"/>
-              <a:t>30/12/2025</a:t>
+              <a:t>03/01/2026</a:t>
             </a:fld>
             <a:endParaRPr lang="en-US"/>
           </a:p>
@@ -8843,7 +10283,7 @@
           <p:cNvPr id="5" name="Footer Placeholder 4">
             <a:extLst>
               <a:ext uri="{FF2B5EF4-FFF2-40B4-BE49-F238E27FC236}">
-                <a16:creationId xmlns:a16="http://schemas.microsoft.com/office/drawing/2014/main" id="{11008A38-BBDC-13DF-A25D-5DE1CB1D0346}"/>
+                <a16:creationId xmlns:a16="http://schemas.microsoft.com/office/drawing/2014/main" id="{5521B956-4499-3184-8C33-996D0739C513}"/>
               </a:ext>
             </a:extLst>
           </p:cNvPr>
@@ -8872,7 +10312,7 @@
           <p:cNvPr id="6" name="Slide Number Placeholder 5">
             <a:extLst>
               <a:ext uri="{FF2B5EF4-FFF2-40B4-BE49-F238E27FC236}">
-                <a16:creationId xmlns:a16="http://schemas.microsoft.com/office/drawing/2014/main" id="{5179D57B-FEE5-1526-32C4-1589F6092F2A}"/>
+                <a16:creationId xmlns:a16="http://schemas.microsoft.com/office/drawing/2014/main" id="{792BBE54-F7B0-EA44-F857-F163C5680F96}"/>
               </a:ext>
             </a:extLst>
           </p:cNvPr>
@@ -8890,7 +10330,7 @@
           <a:p>
             <a:fld id="{8BF32AC9-143A-477E-841D-1F801B7F8FE8}" type="slidenum">
               <a:rPr lang="en-US" smtClean="0"/>
-              <a:t>21</a:t>
+              <a:t>24</a:t>
             </a:fld>
             <a:endParaRPr lang="en-US"/>
           </a:p>
@@ -8899,7 +10339,7 @@
     </p:spTree>
     <p:extLst>
       <p:ext uri="{BB962C8B-B14F-4D97-AF65-F5344CB8AC3E}">
-        <p14:creationId xmlns:p14="http://schemas.microsoft.com/office/powerpoint/2010/main" val="2199566815"/>
+        <p14:creationId xmlns:p14="http://schemas.microsoft.com/office/powerpoint/2010/main" val="678765483"/>
       </p:ext>
     </p:extLst>
   </p:cSld>
@@ -8909,7 +10349,7 @@
 </p:sld>
 </file>
 
-<file path=ppt/slides/slide22.xml><?xml version="1.0" encoding="utf-8"?>
+<file path=ppt/slides/slide25.xml><?xml version="1.0" encoding="utf-8"?>
 <p:sld xmlns:a="http://schemas.openxmlformats.org/drawingml/2006/main" xmlns:r="http://schemas.openxmlformats.org/officeDocument/2006/relationships" xmlns:p="http://schemas.openxmlformats.org/presentationml/2006/main">
   <p:cSld>
     <p:spTree>
@@ -8917,7 +10357,7 @@
         <p:cNvPr id="1" name="">
           <a:extLst>
             <a:ext uri="{FF2B5EF4-FFF2-40B4-BE49-F238E27FC236}">
-              <a16:creationId xmlns:a16="http://schemas.microsoft.com/office/drawing/2014/main" id="{74B77452-60A4-53B8-652D-008E4EA9FB53}"/>
+              <a16:creationId xmlns:a16="http://schemas.microsoft.com/office/drawing/2014/main" id="{E082A180-B4A3-A9EB-9C6B-97B7E6484B17}"/>
             </a:ext>
           </a:extLst>
         </p:cNvPr>
@@ -8937,7 +10377,7 @@
           <p:cNvPr id="3" name="TextBox 2">
             <a:extLst>
               <a:ext uri="{FF2B5EF4-FFF2-40B4-BE49-F238E27FC236}">
-                <a16:creationId xmlns:a16="http://schemas.microsoft.com/office/drawing/2014/main" id="{E99C2578-8874-C74D-3E16-6FF3FE3DA224}"/>
+                <a16:creationId xmlns:a16="http://schemas.microsoft.com/office/drawing/2014/main" id="{E5B1847E-2437-275D-BC8A-1158C45A42FE}"/>
               </a:ext>
             </a:extLst>
           </p:cNvPr>
@@ -8972,7 +10412,7 @@
           <p:cNvPr id="4" name="Rectangle 3">
             <a:extLst>
               <a:ext uri="{FF2B5EF4-FFF2-40B4-BE49-F238E27FC236}">
-                <a16:creationId xmlns:a16="http://schemas.microsoft.com/office/drawing/2014/main" id="{B377C2D9-F7F5-E652-0366-A39F3F7302A3}"/>
+                <a16:creationId xmlns:a16="http://schemas.microsoft.com/office/drawing/2014/main" id="{64639D59-BF8C-D069-2A3D-938ED69BB493}"/>
               </a:ext>
             </a:extLst>
           </p:cNvPr>
@@ -9021,137 +10461,10 @@
       </p:sp>
       <p:sp>
         <p:nvSpPr>
-          <p:cNvPr id="7" name="TextBox 6">
-            <a:extLst>
-              <a:ext uri="{FF2B5EF4-FFF2-40B4-BE49-F238E27FC236}">
-                <a16:creationId xmlns:a16="http://schemas.microsoft.com/office/drawing/2014/main" id="{DCDC62C6-31C1-2703-CF00-528C89686729}"/>
-              </a:ext>
-            </a:extLst>
-          </p:cNvPr>
-          <p:cNvSpPr txBox="1"/>
-          <p:nvPr/>
-        </p:nvSpPr>
-        <p:spPr>
-          <a:xfrm>
-            <a:off x="688257" y="1257642"/>
-            <a:ext cx="10028904" cy="3416320"/>
-          </a:xfrm>
-          <a:prstGeom prst="rect">
-            <a:avLst/>
-          </a:prstGeom>
-          <a:noFill/>
-        </p:spPr>
-        <p:txBody>
-          <a:bodyPr wrap="square" rtlCol="0">
-            <a:spAutoFit/>
-          </a:bodyPr>
-          <a:lstStyle/>
-          <a:p>
-            <a:pPr marL="285750" indent="-285750">
-              <a:buFont typeface="Wingdings" panose="05000000000000000000" pitchFamily="2" charset="2"/>
-              <a:buChar char="q"/>
-            </a:pPr>
-            <a:r>
-              <a:rPr lang="it-IT" sz="2400" dirty="0">
-                <a:latin typeface="Arial" panose="020B0604020202020204" pitchFamily="34" charset="0"/>
-                <a:cs typeface="Arial" panose="020B0604020202020204" pitchFamily="34" charset="0"/>
-              </a:rPr>
-              <a:t>Test della stabilità con la Jacobiana: W2 rimane «NOT LAS» con i parametri del primo esperimento</a:t>
-            </a:r>
-          </a:p>
-          <a:p>
-            <a:pPr marL="742950" lvl="1" indent="-285750">
-              <a:buFont typeface="Wingdings" panose="05000000000000000000" pitchFamily="2" charset="2"/>
-              <a:buChar char="q"/>
-            </a:pPr>
-            <a:r>
-              <a:rPr lang="it-IT" sz="2400" dirty="0">
-                <a:latin typeface="Arial" panose="020B0604020202020204" pitchFamily="34" charset="0"/>
-                <a:cs typeface="Arial" panose="020B0604020202020204" pitchFamily="34" charset="0"/>
-              </a:rPr>
-              <a:t>Il paper dichiarava che è LAS</a:t>
-            </a:r>
-          </a:p>
-          <a:p>
-            <a:pPr marL="742950" lvl="1" indent="-285750">
-              <a:buFont typeface="Wingdings" panose="05000000000000000000" pitchFamily="2" charset="2"/>
-              <a:buChar char="q"/>
-            </a:pPr>
-            <a:r>
-              <a:rPr lang="it-IT" sz="2400" dirty="0">
-                <a:latin typeface="Arial" panose="020B0604020202020204" pitchFamily="34" charset="0"/>
-                <a:cs typeface="Arial" panose="020B0604020202020204" pitchFamily="34" charset="0"/>
-              </a:rPr>
-              <a:t>Secondo la simulazione lo è «apparentemente»</a:t>
-            </a:r>
-          </a:p>
-          <a:p>
-            <a:pPr marL="285750" indent="-285750">
-              <a:buFont typeface="Wingdings" panose="05000000000000000000" pitchFamily="2" charset="2"/>
-              <a:buChar char="q"/>
-            </a:pPr>
-            <a:endParaRPr lang="it-IT" sz="2400" dirty="0">
-              <a:latin typeface="Arial" panose="020B0604020202020204" pitchFamily="34" charset="0"/>
-              <a:cs typeface="Arial" panose="020B0604020202020204" pitchFamily="34" charset="0"/>
-            </a:endParaRPr>
-          </a:p>
-          <a:p>
-            <a:pPr marL="285750" indent="-285750">
-              <a:buFont typeface="Wingdings" panose="05000000000000000000" pitchFamily="2" charset="2"/>
-              <a:buChar char="q"/>
-            </a:pPr>
-            <a:r>
-              <a:rPr lang="it-IT" sz="2400" dirty="0">
-                <a:latin typeface="Arial" panose="020B0604020202020204" pitchFamily="34" charset="0"/>
-                <a:cs typeface="Arial" panose="020B0604020202020204" pitchFamily="34" charset="0"/>
-              </a:rPr>
-              <a:t>Risultato inconsistente: rifatto l’esperimento</a:t>
-            </a:r>
-          </a:p>
-          <a:p>
-            <a:pPr marL="742950" lvl="1" indent="-285750">
-              <a:buFont typeface="Wingdings" panose="05000000000000000000" pitchFamily="2" charset="2"/>
-              <a:buChar char="q"/>
-            </a:pPr>
-            <a:r>
-              <a:rPr lang="it-IT" sz="2400" dirty="0">
-                <a:latin typeface="Arial" panose="020B0604020202020204" pitchFamily="34" charset="0"/>
-                <a:cs typeface="Arial" panose="020B0604020202020204" pitchFamily="34" charset="0"/>
-              </a:rPr>
-              <a:t>Prolungato la simulazione (T=600), </a:t>
-            </a:r>
-          </a:p>
-          <a:p>
-            <a:pPr marL="742950" lvl="1" indent="-285750">
-              <a:buFont typeface="Wingdings" panose="05000000000000000000" pitchFamily="2" charset="2"/>
-              <a:buChar char="q"/>
-            </a:pPr>
-            <a:r>
-              <a:rPr lang="it-IT" sz="2400" dirty="0">
-                <a:latin typeface="Arial" panose="020B0604020202020204" pitchFamily="34" charset="0"/>
-                <a:cs typeface="Arial" panose="020B0604020202020204" pitchFamily="34" charset="0"/>
-              </a:rPr>
-              <a:t>Zoom su W2 nel grafico</a:t>
-            </a:r>
-          </a:p>
-          <a:p>
-            <a:pPr marL="742950" lvl="1" indent="-285750">
-              <a:buFont typeface="Wingdings" panose="05000000000000000000" pitchFamily="2" charset="2"/>
-              <a:buChar char="q"/>
-            </a:pPr>
-            <a:endParaRPr lang="it-IT" sz="2400" dirty="0">
-              <a:latin typeface="Arial" panose="020B0604020202020204" pitchFamily="34" charset="0"/>
-              <a:cs typeface="Arial" panose="020B0604020202020204" pitchFamily="34" charset="0"/>
-            </a:endParaRPr>
-          </a:p>
-        </p:txBody>
-      </p:sp>
-      <p:sp>
-        <p:nvSpPr>
           <p:cNvPr id="9" name="TextBox 8">
             <a:extLst>
               <a:ext uri="{FF2B5EF4-FFF2-40B4-BE49-F238E27FC236}">
-                <a16:creationId xmlns:a16="http://schemas.microsoft.com/office/drawing/2014/main" id="{B59FD846-B850-2EE9-2713-55B4018AB9AE}"/>
+                <a16:creationId xmlns:a16="http://schemas.microsoft.com/office/drawing/2014/main" id="{C8D9922D-1633-0551-E062-C52E3F0E267A}"/>
               </a:ext>
             </a:extLst>
           </p:cNvPr>
@@ -9187,7 +10500,7 @@
           <p:cNvPr id="2" name="Date Placeholder 1">
             <a:extLst>
               <a:ext uri="{FF2B5EF4-FFF2-40B4-BE49-F238E27FC236}">
-                <a16:creationId xmlns:a16="http://schemas.microsoft.com/office/drawing/2014/main" id="{51390EF2-A2B8-BBB5-966B-44A83DF61685}"/>
+                <a16:creationId xmlns:a16="http://schemas.microsoft.com/office/drawing/2014/main" id="{544BA93B-ECEE-4F15-D94B-C334B01275B7}"/>
               </a:ext>
             </a:extLst>
           </p:cNvPr>
@@ -9203,9 +10516,9 @@
           <a:bodyPr/>
           <a:lstStyle/>
           <a:p>
-            <a:fld id="{DCD21B3C-0FEB-4362-9619-5D2FABF53E43}" type="datetime1">
+            <a:fld id="{5B984578-FC4A-4BC5-A56E-8C608487780F}" type="datetime1">
               <a:rPr lang="it-IT" smtClean="0"/>
-              <a:t>30/12/2025</a:t>
+              <a:t>03/01/2026</a:t>
             </a:fld>
             <a:endParaRPr lang="en-US"/>
           </a:p>
@@ -9213,10 +10526,10 @@
       </p:sp>
       <p:sp>
         <p:nvSpPr>
-          <p:cNvPr id="5" name="Footer Placeholder 4">
-            <a:extLst>
-              <a:ext uri="{FF2B5EF4-FFF2-40B4-BE49-F238E27FC236}">
-                <a16:creationId xmlns:a16="http://schemas.microsoft.com/office/drawing/2014/main" id="{5521B956-4499-3184-8C33-996D0739C513}"/>
+          <p:cNvPr id="6" name="Footer Placeholder 5">
+            <a:extLst>
+              <a:ext uri="{FF2B5EF4-FFF2-40B4-BE49-F238E27FC236}">
+                <a16:creationId xmlns:a16="http://schemas.microsoft.com/office/drawing/2014/main" id="{9D233D3A-3D73-C032-F75B-02CE82B2998C}"/>
               </a:ext>
             </a:extLst>
           </p:cNvPr>
@@ -9242,10 +10555,10 @@
       </p:sp>
       <p:sp>
         <p:nvSpPr>
-          <p:cNvPr id="6" name="Slide Number Placeholder 5">
-            <a:extLst>
-              <a:ext uri="{FF2B5EF4-FFF2-40B4-BE49-F238E27FC236}">
-                <a16:creationId xmlns:a16="http://schemas.microsoft.com/office/drawing/2014/main" id="{792BBE54-F7B0-EA44-F857-F163C5680F96}"/>
+          <p:cNvPr id="7" name="Slide Number Placeholder 6">
+            <a:extLst>
+              <a:ext uri="{FF2B5EF4-FFF2-40B4-BE49-F238E27FC236}">
+                <a16:creationId xmlns:a16="http://schemas.microsoft.com/office/drawing/2014/main" id="{18AEDF5E-071A-9EF2-4F0B-F1A2F9CEFAB8}"/>
               </a:ext>
             </a:extLst>
           </p:cNvPr>
@@ -9263,16 +10576,46 @@
           <a:p>
             <a:fld id="{8BF32AC9-143A-477E-841D-1F801B7F8FE8}" type="slidenum">
               <a:rPr lang="en-US" smtClean="0"/>
-              <a:t>22</a:t>
+              <a:t>25</a:t>
             </a:fld>
             <a:endParaRPr lang="en-US"/>
           </a:p>
         </p:txBody>
       </p:sp>
+      <p:pic>
+        <p:nvPicPr>
+          <p:cNvPr id="10" name="Picture 9" descr="A graph of a sound wave&#10;&#10;AI-generated content may be incorrect.">
+            <a:extLst>
+              <a:ext uri="{FF2B5EF4-FFF2-40B4-BE49-F238E27FC236}">
+                <a16:creationId xmlns:a16="http://schemas.microsoft.com/office/drawing/2014/main" id="{644F473F-2078-AD6E-2303-3291CBD0651E}"/>
+              </a:ext>
+            </a:extLst>
+          </p:cNvPr>
+          <p:cNvPicPr>
+            <a:picLocks noChangeAspect="1"/>
+          </p:cNvPicPr>
+          <p:nvPr/>
+        </p:nvPicPr>
+        <p:blipFill>
+          <a:blip r:embed="rId2"/>
+          <a:stretch>
+            <a:fillRect/>
+          </a:stretch>
+        </p:blipFill>
+        <p:spPr>
+          <a:xfrm>
+            <a:off x="1338261" y="1436711"/>
+            <a:ext cx="9515475" cy="4552950"/>
+          </a:xfrm>
+          <a:prstGeom prst="rect">
+            <a:avLst/>
+          </a:prstGeom>
+        </p:spPr>
+      </p:pic>
     </p:spTree>
     <p:extLst>
       <p:ext uri="{BB962C8B-B14F-4D97-AF65-F5344CB8AC3E}">
-        <p14:creationId xmlns:p14="http://schemas.microsoft.com/office/powerpoint/2010/main" val="678765483"/>
+        <p14:creationId xmlns:p14="http://schemas.microsoft.com/office/powerpoint/2010/main" val="3663038567"/>
       </p:ext>
     </p:extLst>
   </p:cSld>
@@ -9282,7 +10625,7 @@
 </p:sld>
 </file>
 
-<file path=ppt/slides/slide23.xml><?xml version="1.0" encoding="utf-8"?>
+<file path=ppt/slides/slide26.xml><?xml version="1.0" encoding="utf-8"?>
 <p:sld xmlns:a="http://schemas.openxmlformats.org/drawingml/2006/main" xmlns:r="http://schemas.openxmlformats.org/officeDocument/2006/relationships" xmlns:p="http://schemas.openxmlformats.org/presentationml/2006/main">
   <p:cSld>
     <p:spTree>
@@ -9290,7 +10633,7 @@
         <p:cNvPr id="1" name="">
           <a:extLst>
             <a:ext uri="{FF2B5EF4-FFF2-40B4-BE49-F238E27FC236}">
-              <a16:creationId xmlns:a16="http://schemas.microsoft.com/office/drawing/2014/main" id="{E082A180-B4A3-A9EB-9C6B-97B7E6484B17}"/>
+              <a16:creationId xmlns:a16="http://schemas.microsoft.com/office/drawing/2014/main" id="{729FE9A4-6EA0-3AB3-6F89-BE1990D2F7BA}"/>
             </a:ext>
           </a:extLst>
         </p:cNvPr>
@@ -9310,7 +10653,7 @@
           <p:cNvPr id="3" name="TextBox 2">
             <a:extLst>
               <a:ext uri="{FF2B5EF4-FFF2-40B4-BE49-F238E27FC236}">
-                <a16:creationId xmlns:a16="http://schemas.microsoft.com/office/drawing/2014/main" id="{E5B1847E-2437-275D-BC8A-1158C45A42FE}"/>
+                <a16:creationId xmlns:a16="http://schemas.microsoft.com/office/drawing/2014/main" id="{97B0DD3E-4157-B76F-9987-D1CD9DC5873B}"/>
               </a:ext>
             </a:extLst>
           </p:cNvPr>
@@ -9345,7 +10688,7 @@
           <p:cNvPr id="4" name="Rectangle 3">
             <a:extLst>
               <a:ext uri="{FF2B5EF4-FFF2-40B4-BE49-F238E27FC236}">
-                <a16:creationId xmlns:a16="http://schemas.microsoft.com/office/drawing/2014/main" id="{64639D59-BF8C-D069-2A3D-938ED69BB493}"/>
+                <a16:creationId xmlns:a16="http://schemas.microsoft.com/office/drawing/2014/main" id="{5CF43595-52D0-D7A0-717D-FDCAAB81CCE5}"/>
               </a:ext>
             </a:extLst>
           </p:cNvPr>
@@ -9397,7 +10740,7 @@
           <p:cNvPr id="9" name="TextBox 8">
             <a:extLst>
               <a:ext uri="{FF2B5EF4-FFF2-40B4-BE49-F238E27FC236}">
-                <a16:creationId xmlns:a16="http://schemas.microsoft.com/office/drawing/2014/main" id="{C8D9922D-1633-0551-E062-C52E3F0E267A}"/>
+                <a16:creationId xmlns:a16="http://schemas.microsoft.com/office/drawing/2014/main" id="{BCA882A3-E78C-B2BA-6C34-867AB5F7AA15}"/>
               </a:ext>
             </a:extLst>
           </p:cNvPr>
@@ -9428,42 +10771,139 @@
           </a:p>
         </p:txBody>
       </p:sp>
-      <p:pic>
-        <p:nvPicPr>
-          <p:cNvPr id="5" name="Picture 4" descr="zoom&#10;">
-            <a:extLst>
-              <a:ext uri="{FF2B5EF4-FFF2-40B4-BE49-F238E27FC236}">
-                <a16:creationId xmlns:a16="http://schemas.microsoft.com/office/drawing/2014/main" id="{0F4CA354-112B-69A1-F4D0-D8CCD55A8A1F}"/>
-              </a:ext>
-            </a:extLst>
-          </p:cNvPr>
-          <p:cNvPicPr>
-            <a:picLocks noChangeAspect="1"/>
-          </p:cNvPicPr>
+      <p:sp>
+        <p:nvSpPr>
+          <p:cNvPr id="2" name="TextBox 1">
+            <a:extLst>
+              <a:ext uri="{FF2B5EF4-FFF2-40B4-BE49-F238E27FC236}">
+                <a16:creationId xmlns:a16="http://schemas.microsoft.com/office/drawing/2014/main" id="{5229A26A-3C47-D1AB-FDA1-B2AF227D8AB0}"/>
+              </a:ext>
+            </a:extLst>
+          </p:cNvPr>
+          <p:cNvSpPr txBox="1"/>
           <p:nvPr/>
-        </p:nvPicPr>
-        <p:blipFill>
-          <a:blip r:embed="rId2"/>
-          <a:stretch>
-            <a:fillRect/>
-          </a:stretch>
-        </p:blipFill>
+        </p:nvSpPr>
         <p:spPr>
           <a:xfrm>
-            <a:off x="1602655" y="1593242"/>
-            <a:ext cx="8986688" cy="4421542"/>
+            <a:off x="688257" y="1257642"/>
+            <a:ext cx="10028904" cy="3046988"/>
           </a:xfrm>
           <a:prstGeom prst="rect">
             <a:avLst/>
           </a:prstGeom>
+          <a:noFill/>
         </p:spPr>
-      </p:pic>
-      <p:sp>
-        <p:nvSpPr>
-          <p:cNvPr id="2" name="Date Placeholder 1">
-            <a:extLst>
-              <a:ext uri="{FF2B5EF4-FFF2-40B4-BE49-F238E27FC236}">
-                <a16:creationId xmlns:a16="http://schemas.microsoft.com/office/drawing/2014/main" id="{544BA93B-ECEE-4F15-D94B-C334B01275B7}"/>
+        <p:txBody>
+          <a:bodyPr wrap="square" rtlCol="0">
+            <a:spAutoFit/>
+          </a:bodyPr>
+          <a:lstStyle/>
+          <a:p>
+            <a:pPr marL="285750" indent="-285750">
+              <a:buFont typeface="Wingdings" panose="05000000000000000000" pitchFamily="2" charset="2"/>
+              <a:buChar char="q"/>
+            </a:pPr>
+            <a:r>
+              <a:rPr lang="it-IT" sz="2400" dirty="0">
+                <a:latin typeface="Arial" panose="020B0604020202020204" pitchFamily="34" charset="0"/>
+                <a:cs typeface="Arial" panose="020B0604020202020204" pitchFamily="34" charset="0"/>
+              </a:rPr>
+              <a:t>Implicazioni</a:t>
+            </a:r>
+          </a:p>
+          <a:p>
+            <a:pPr marL="742950" lvl="1" indent="-285750">
+              <a:buFont typeface="Wingdings" panose="05000000000000000000" pitchFamily="2" charset="2"/>
+              <a:buChar char="q"/>
+            </a:pPr>
+            <a:r>
+              <a:rPr lang="it-IT" sz="2400" dirty="0">
+                <a:latin typeface="Arial" panose="020B0604020202020204" pitchFamily="34" charset="0"/>
+                <a:cs typeface="Arial" panose="020B0604020202020204" pitchFamily="34" charset="0"/>
+              </a:rPr>
+              <a:t>In realtà W2 non era mai LAS</a:t>
+            </a:r>
+          </a:p>
+          <a:p>
+            <a:pPr marL="1200150" lvl="2" indent="-285750">
+              <a:buFont typeface="Wingdings" panose="05000000000000000000" pitchFamily="2" charset="2"/>
+              <a:buChar char="q"/>
+            </a:pPr>
+            <a:r>
+              <a:rPr lang="it-IT" sz="2400" dirty="0">
+                <a:latin typeface="Arial" panose="020B0604020202020204" pitchFamily="34" charset="0"/>
+                <a:cs typeface="Arial" panose="020B0604020202020204" pitchFamily="34" charset="0"/>
+              </a:rPr>
+              <a:t>A discapito delle apparenze e quanto proposto nel paper</a:t>
+            </a:r>
+          </a:p>
+          <a:p>
+            <a:pPr marL="1200150" lvl="2" indent="-285750">
+              <a:buFont typeface="Wingdings" panose="05000000000000000000" pitchFamily="2" charset="2"/>
+              <a:buChar char="q"/>
+            </a:pPr>
+            <a:endParaRPr lang="it-IT" sz="2400" dirty="0">
+              <a:latin typeface="Arial" panose="020B0604020202020204" pitchFamily="34" charset="0"/>
+              <a:cs typeface="Arial" panose="020B0604020202020204" pitchFamily="34" charset="0"/>
+            </a:endParaRPr>
+          </a:p>
+          <a:p>
+            <a:pPr marL="285750" indent="-285750">
+              <a:buFont typeface="Wingdings" panose="05000000000000000000" pitchFamily="2" charset="2"/>
+              <a:buChar char="q"/>
+            </a:pPr>
+            <a:r>
+              <a:rPr lang="it-IT" sz="2400" dirty="0">
+                <a:latin typeface="Arial" panose="020B0604020202020204" pitchFamily="34" charset="0"/>
+                <a:cs typeface="Arial" panose="020B0604020202020204" pitchFamily="34" charset="0"/>
+              </a:rPr>
+              <a:t>Per confermare che non sia noise dovuto al risolutore:</a:t>
+            </a:r>
+          </a:p>
+          <a:p>
+            <a:pPr marL="742950" lvl="1" indent="-285750">
+              <a:buFont typeface="Wingdings" panose="05000000000000000000" pitchFamily="2" charset="2"/>
+              <a:buChar char="q"/>
+            </a:pPr>
+            <a:r>
+              <a:rPr lang="it-IT" sz="2400" dirty="0">
+                <a:latin typeface="Arial" panose="020B0604020202020204" pitchFamily="34" charset="0"/>
+                <a:cs typeface="Arial" panose="020B0604020202020204" pitchFamily="34" charset="0"/>
+              </a:rPr>
+              <a:t>Rieffettuato l’esperimento con metodi numerici diversi</a:t>
+            </a:r>
+          </a:p>
+          <a:p>
+            <a:pPr marL="742950" lvl="1" indent="-285750">
+              <a:buFont typeface="Wingdings" panose="05000000000000000000" pitchFamily="2" charset="2"/>
+              <a:buChar char="q"/>
+            </a:pPr>
+            <a:r>
+              <a:rPr lang="it-IT" sz="2400" dirty="0">
+                <a:latin typeface="Arial" panose="020B0604020202020204" pitchFamily="34" charset="0"/>
+                <a:cs typeface="Arial" panose="020B0604020202020204" pitchFamily="34" charset="0"/>
+              </a:rPr>
+              <a:t>Stessi risultati, confermato</a:t>
+            </a:r>
+          </a:p>
+          <a:p>
+            <a:pPr marL="742950" lvl="1" indent="-285750">
+              <a:buFont typeface="Wingdings" panose="05000000000000000000" pitchFamily="2" charset="2"/>
+              <a:buChar char="q"/>
+            </a:pPr>
+            <a:endParaRPr lang="it-IT" sz="2400" dirty="0">
+              <a:latin typeface="Arial" panose="020B0604020202020204" pitchFamily="34" charset="0"/>
+              <a:cs typeface="Arial" panose="020B0604020202020204" pitchFamily="34" charset="0"/>
+            </a:endParaRPr>
+          </a:p>
+        </p:txBody>
+      </p:sp>
+      <p:sp>
+        <p:nvSpPr>
+          <p:cNvPr id="5" name="Date Placeholder 4">
+            <a:extLst>
+              <a:ext uri="{FF2B5EF4-FFF2-40B4-BE49-F238E27FC236}">
+                <a16:creationId xmlns:a16="http://schemas.microsoft.com/office/drawing/2014/main" id="{2ED846B0-B38C-A692-E9A3-FFA97B60385E}"/>
               </a:ext>
             </a:extLst>
           </p:cNvPr>
@@ -9479,9 +10919,9 @@
           <a:bodyPr/>
           <a:lstStyle/>
           <a:p>
-            <a:fld id="{5B984578-FC4A-4BC5-A56E-8C608487780F}" type="datetime1">
+            <a:fld id="{C5E77C2B-364A-4D71-8BAD-691E9BD64FFE}" type="datetime1">
               <a:rPr lang="it-IT" smtClean="0"/>
-              <a:t>30/12/2025</a:t>
+              <a:t>03/01/2026</a:t>
             </a:fld>
             <a:endParaRPr lang="en-US"/>
           </a:p>
@@ -9492,7 +10932,7 @@
           <p:cNvPr id="6" name="Footer Placeholder 5">
             <a:extLst>
               <a:ext uri="{FF2B5EF4-FFF2-40B4-BE49-F238E27FC236}">
-                <a16:creationId xmlns:a16="http://schemas.microsoft.com/office/drawing/2014/main" id="{9D233D3A-3D73-C032-F75B-02CE82B2998C}"/>
+                <a16:creationId xmlns:a16="http://schemas.microsoft.com/office/drawing/2014/main" id="{F9469EB7-D049-4D97-ECD0-F3AE4915CDA4}"/>
               </a:ext>
             </a:extLst>
           </p:cNvPr>
@@ -9521,7 +10961,7 @@
           <p:cNvPr id="7" name="Slide Number Placeholder 6">
             <a:extLst>
               <a:ext uri="{FF2B5EF4-FFF2-40B4-BE49-F238E27FC236}">
-                <a16:creationId xmlns:a16="http://schemas.microsoft.com/office/drawing/2014/main" id="{18AEDF5E-071A-9EF2-4F0B-F1A2F9CEFAB8}"/>
+                <a16:creationId xmlns:a16="http://schemas.microsoft.com/office/drawing/2014/main" id="{2FF40AED-F76D-795E-5333-A4B81466833A}"/>
               </a:ext>
             </a:extLst>
           </p:cNvPr>
@@ -9539,7 +10979,7 @@
           <a:p>
             <a:fld id="{8BF32AC9-143A-477E-841D-1F801B7F8FE8}" type="slidenum">
               <a:rPr lang="en-US" smtClean="0"/>
-              <a:t>23</a:t>
+              <a:t>26</a:t>
             </a:fld>
             <a:endParaRPr lang="en-US"/>
           </a:p>
@@ -9548,7 +10988,7 @@
     </p:spTree>
     <p:extLst>
       <p:ext uri="{BB962C8B-B14F-4D97-AF65-F5344CB8AC3E}">
-        <p14:creationId xmlns:p14="http://schemas.microsoft.com/office/powerpoint/2010/main" val="3663038567"/>
+        <p14:creationId xmlns:p14="http://schemas.microsoft.com/office/powerpoint/2010/main" val="393239306"/>
       </p:ext>
     </p:extLst>
   </p:cSld>
@@ -9558,7 +10998,7 @@
 </p:sld>
 </file>
 
-<file path=ppt/slides/slide24.xml><?xml version="1.0" encoding="utf-8"?>
+<file path=ppt/slides/slide27.xml><?xml version="1.0" encoding="utf-8"?>
 <p:sld xmlns:a="http://schemas.openxmlformats.org/drawingml/2006/main" xmlns:r="http://schemas.openxmlformats.org/officeDocument/2006/relationships" xmlns:p="http://schemas.openxmlformats.org/presentationml/2006/main">
   <p:cSld>
     <p:spTree>
@@ -9566,7 +11006,7 @@
         <p:cNvPr id="1" name="">
           <a:extLst>
             <a:ext uri="{FF2B5EF4-FFF2-40B4-BE49-F238E27FC236}">
-              <a16:creationId xmlns:a16="http://schemas.microsoft.com/office/drawing/2014/main" id="{729FE9A4-6EA0-3AB3-6F89-BE1990D2F7BA}"/>
+              <a16:creationId xmlns:a16="http://schemas.microsoft.com/office/drawing/2014/main" id="{DDC630C4-A2E7-4675-A543-9FEFEB48C66F}"/>
             </a:ext>
           </a:extLst>
         </p:cNvPr>
@@ -9586,7 +11026,7 @@
           <p:cNvPr id="3" name="TextBox 2">
             <a:extLst>
               <a:ext uri="{FF2B5EF4-FFF2-40B4-BE49-F238E27FC236}">
-                <a16:creationId xmlns:a16="http://schemas.microsoft.com/office/drawing/2014/main" id="{97B0DD3E-4157-B76F-9987-D1CD9DC5873B}"/>
+                <a16:creationId xmlns:a16="http://schemas.microsoft.com/office/drawing/2014/main" id="{AA900290-CEF3-1C84-ED74-6C905D2E8C39}"/>
               </a:ext>
             </a:extLst>
           </p:cNvPr>
@@ -9611,7 +11051,7 @@
           <a:p>
             <a:r>
               <a:rPr lang="it-IT" sz="2800" b="1" dirty="0"/>
-              <a:t>APPROFONDIMENTO SU W2</a:t>
+              <a:t>ULTERIORI SPERIMENTAZIONI </a:t>
             </a:r>
           </a:p>
         </p:txBody>
@@ -9621,7 +11061,7 @@
           <p:cNvPr id="4" name="Rectangle 3">
             <a:extLst>
               <a:ext uri="{FF2B5EF4-FFF2-40B4-BE49-F238E27FC236}">
-                <a16:creationId xmlns:a16="http://schemas.microsoft.com/office/drawing/2014/main" id="{5CF43595-52D0-D7A0-717D-FDCAAB81CCE5}"/>
+                <a16:creationId xmlns:a16="http://schemas.microsoft.com/office/drawing/2014/main" id="{A296E94F-3EDF-85B5-9FE9-C83560FAD80A}"/>
               </a:ext>
             </a:extLst>
           </p:cNvPr>
@@ -9673,7 +11113,7 @@
           <p:cNvPr id="9" name="TextBox 8">
             <a:extLst>
               <a:ext uri="{FF2B5EF4-FFF2-40B4-BE49-F238E27FC236}">
-                <a16:creationId xmlns:a16="http://schemas.microsoft.com/office/drawing/2014/main" id="{BCA882A3-E78C-B2BA-6C34-867AB5F7AA15}"/>
+                <a16:creationId xmlns:a16="http://schemas.microsoft.com/office/drawing/2014/main" id="{FE8E974E-5D79-EAAD-8215-1CA8EB2ACDE4}"/>
               </a:ext>
             </a:extLst>
           </p:cNvPr>
@@ -9699,7 +11139,7 @@
             <a:pPr algn="r"/>
             <a:r>
               <a:rPr lang="it-IT" sz="2400" b="1" i="1" dirty="0"/>
-              <a:t>Step: Confronto dei risultati</a:t>
+              <a:t>Step: More stuff</a:t>
             </a:r>
           </a:p>
         </p:txBody>
@@ -9709,7 +11149,7 @@
           <p:cNvPr id="2" name="TextBox 1">
             <a:extLst>
               <a:ext uri="{FF2B5EF4-FFF2-40B4-BE49-F238E27FC236}">
-                <a16:creationId xmlns:a16="http://schemas.microsoft.com/office/drawing/2014/main" id="{5229A26A-3C47-D1AB-FDA1-B2AF227D8AB0}"/>
+                <a16:creationId xmlns:a16="http://schemas.microsoft.com/office/drawing/2014/main" id="{90B97E06-7102-F81F-5051-50DE12775BFD}"/>
               </a:ext>
             </a:extLst>
           </p:cNvPr>
@@ -9718,8 +11158,8 @@
         </p:nvSpPr>
         <p:spPr>
           <a:xfrm>
-            <a:off x="688257" y="1257642"/>
-            <a:ext cx="10028904" cy="3046988"/>
+            <a:off x="688257" y="1152875"/>
+            <a:ext cx="10028904" cy="830997"/>
           </a:xfrm>
           <a:prstGeom prst="rect">
             <a:avLst/>
@@ -9741,7 +11181,7 @@
                 <a:latin typeface="Arial" panose="020B0604020202020204" pitchFamily="34" charset="0"/>
                 <a:cs typeface="Arial" panose="020B0604020202020204" pitchFamily="34" charset="0"/>
               </a:rPr>
-              <a:t>Implicazioni</a:t>
+              <a:t>Disegno del campo vettoriale del modello</a:t>
             </a:r>
           </a:p>
           <a:p>
@@ -9754,80 +11194,8 @@
                 <a:latin typeface="Arial" panose="020B0604020202020204" pitchFamily="34" charset="0"/>
                 <a:cs typeface="Arial" panose="020B0604020202020204" pitchFamily="34" charset="0"/>
               </a:rPr>
-              <a:t>In realtà W2 non era mai LAS</a:t>
-            </a:r>
-          </a:p>
-          <a:p>
-            <a:pPr marL="1200150" lvl="2" indent="-285750">
-              <a:buFont typeface="Wingdings" panose="05000000000000000000" pitchFamily="2" charset="2"/>
-              <a:buChar char="q"/>
-            </a:pPr>
-            <a:r>
-              <a:rPr lang="it-IT" sz="2400" dirty="0">
-                <a:latin typeface="Arial" panose="020B0604020202020204" pitchFamily="34" charset="0"/>
-                <a:cs typeface="Arial" panose="020B0604020202020204" pitchFamily="34" charset="0"/>
-              </a:rPr>
-              <a:t>A discapito delle apparenze e quanto proposto nel paper</a:t>
-            </a:r>
-          </a:p>
-          <a:p>
-            <a:pPr marL="1200150" lvl="2" indent="-285750">
-              <a:buFont typeface="Wingdings" panose="05000000000000000000" pitchFamily="2" charset="2"/>
-              <a:buChar char="q"/>
-            </a:pPr>
-            <a:endParaRPr lang="it-IT" sz="2400" dirty="0">
-              <a:latin typeface="Arial" panose="020B0604020202020204" pitchFamily="34" charset="0"/>
-              <a:cs typeface="Arial" panose="020B0604020202020204" pitchFamily="34" charset="0"/>
-            </a:endParaRPr>
-          </a:p>
-          <a:p>
-            <a:pPr marL="285750" indent="-285750">
-              <a:buFont typeface="Wingdings" panose="05000000000000000000" pitchFamily="2" charset="2"/>
-              <a:buChar char="q"/>
-            </a:pPr>
-            <a:r>
-              <a:rPr lang="it-IT" sz="2400" dirty="0">
-                <a:latin typeface="Arial" panose="020B0604020202020204" pitchFamily="34" charset="0"/>
-                <a:cs typeface="Arial" panose="020B0604020202020204" pitchFamily="34" charset="0"/>
-              </a:rPr>
-              <a:t>Per confermare che non sia noise dovuto al risolutore:</a:t>
-            </a:r>
-          </a:p>
-          <a:p>
-            <a:pPr marL="742950" lvl="1" indent="-285750">
-              <a:buFont typeface="Wingdings" panose="05000000000000000000" pitchFamily="2" charset="2"/>
-              <a:buChar char="q"/>
-            </a:pPr>
-            <a:r>
-              <a:rPr lang="it-IT" sz="2400" dirty="0">
-                <a:latin typeface="Arial" panose="020B0604020202020204" pitchFamily="34" charset="0"/>
-                <a:cs typeface="Arial" panose="020B0604020202020204" pitchFamily="34" charset="0"/>
-              </a:rPr>
-              <a:t>Rieffettuato l’esperimento con metodi numerici diversi</a:t>
-            </a:r>
-          </a:p>
-          <a:p>
-            <a:pPr marL="742950" lvl="1" indent="-285750">
-              <a:buFont typeface="Wingdings" panose="05000000000000000000" pitchFamily="2" charset="2"/>
-              <a:buChar char="q"/>
-            </a:pPr>
-            <a:r>
-              <a:rPr lang="it-IT" sz="2400" dirty="0">
-                <a:latin typeface="Arial" panose="020B0604020202020204" pitchFamily="34" charset="0"/>
-                <a:cs typeface="Arial" panose="020B0604020202020204" pitchFamily="34" charset="0"/>
-              </a:rPr>
-              <a:t>Stessi risultati, confermato</a:t>
-            </a:r>
-          </a:p>
-          <a:p>
-            <a:pPr marL="742950" lvl="1" indent="-285750">
-              <a:buFont typeface="Wingdings" panose="05000000000000000000" pitchFamily="2" charset="2"/>
-              <a:buChar char="q"/>
-            </a:pPr>
-            <a:endParaRPr lang="it-IT" sz="2400" dirty="0">
-              <a:latin typeface="Arial" panose="020B0604020202020204" pitchFamily="34" charset="0"/>
-              <a:cs typeface="Arial" panose="020B0604020202020204" pitchFamily="34" charset="0"/>
-            </a:endParaRPr>
+              <a:t>Per «intuire» l’analisi della stabilità</a:t>
+            </a:r>
           </a:p>
         </p:txBody>
       </p:sp>
@@ -9836,7 +11204,7 @@
           <p:cNvPr id="5" name="Date Placeholder 4">
             <a:extLst>
               <a:ext uri="{FF2B5EF4-FFF2-40B4-BE49-F238E27FC236}">
-                <a16:creationId xmlns:a16="http://schemas.microsoft.com/office/drawing/2014/main" id="{2ED846B0-B38C-A692-E9A3-FFA97B60385E}"/>
+                <a16:creationId xmlns:a16="http://schemas.microsoft.com/office/drawing/2014/main" id="{2A7E0F7C-1668-FDA7-9EF0-021890FEC07C}"/>
               </a:ext>
             </a:extLst>
           </p:cNvPr>
@@ -9852,9 +11220,9 @@
           <a:bodyPr/>
           <a:lstStyle/>
           <a:p>
-            <a:fld id="{C5E77C2B-364A-4D71-8BAD-691E9BD64FFE}" type="datetime1">
+            <a:fld id="{C6EF02CD-913D-490D-9F2F-9D6BDCD607B3}" type="datetime1">
               <a:rPr lang="it-IT" smtClean="0"/>
-              <a:t>30/12/2025</a:t>
+              <a:t>03/01/2026</a:t>
             </a:fld>
             <a:endParaRPr lang="en-US"/>
           </a:p>
@@ -9865,7 +11233,7 @@
           <p:cNvPr id="6" name="Footer Placeholder 5">
             <a:extLst>
               <a:ext uri="{FF2B5EF4-FFF2-40B4-BE49-F238E27FC236}">
-                <a16:creationId xmlns:a16="http://schemas.microsoft.com/office/drawing/2014/main" id="{F9469EB7-D049-4D97-ECD0-F3AE4915CDA4}"/>
+                <a16:creationId xmlns:a16="http://schemas.microsoft.com/office/drawing/2014/main" id="{32A5CFCE-A70D-F477-FB32-EC44EEBCE39A}"/>
               </a:ext>
             </a:extLst>
           </p:cNvPr>
@@ -9894,7 +11262,7 @@
           <p:cNvPr id="7" name="Slide Number Placeholder 6">
             <a:extLst>
               <a:ext uri="{FF2B5EF4-FFF2-40B4-BE49-F238E27FC236}">
-                <a16:creationId xmlns:a16="http://schemas.microsoft.com/office/drawing/2014/main" id="{2FF40AED-F76D-795E-5333-A4B81466833A}"/>
+                <a16:creationId xmlns:a16="http://schemas.microsoft.com/office/drawing/2014/main" id="{EBC4F433-73F9-6ECE-A411-3A85C2F9B704}"/>
               </a:ext>
             </a:extLst>
           </p:cNvPr>
@@ -9912,16 +11280,76 @@
           <a:p>
             <a:fld id="{8BF32AC9-143A-477E-841D-1F801B7F8FE8}" type="slidenum">
               <a:rPr lang="en-US" smtClean="0"/>
-              <a:t>24</a:t>
+              <a:t>27</a:t>
             </a:fld>
             <a:endParaRPr lang="en-US"/>
           </a:p>
         </p:txBody>
       </p:sp>
+      <p:pic>
+        <p:nvPicPr>
+          <p:cNvPr id="10" name="Picture 9" descr="A graph of a graph of a graph&#10;&#10;AI-generated content may be incorrect.">
+            <a:extLst>
+              <a:ext uri="{FF2B5EF4-FFF2-40B4-BE49-F238E27FC236}">
+                <a16:creationId xmlns:a16="http://schemas.microsoft.com/office/drawing/2014/main" id="{CD6DC7DE-1358-6F55-0D9D-5163B0F2E90F}"/>
+              </a:ext>
+            </a:extLst>
+          </p:cNvPr>
+          <p:cNvPicPr>
+            <a:picLocks noChangeAspect="1"/>
+          </p:cNvPicPr>
+          <p:nvPr/>
+        </p:nvPicPr>
+        <p:blipFill>
+          <a:blip r:embed="rId2"/>
+          <a:stretch>
+            <a:fillRect/>
+          </a:stretch>
+        </p:blipFill>
+        <p:spPr>
+          <a:xfrm>
+            <a:off x="838200" y="2199103"/>
+            <a:ext cx="6847528" cy="3942016"/>
+          </a:xfrm>
+          <a:prstGeom prst="rect">
+            <a:avLst/>
+          </a:prstGeom>
+        </p:spPr>
+      </p:pic>
+      <p:pic>
+        <p:nvPicPr>
+          <p:cNvPr id="13" name="Picture 12" descr="A math equations with numbers&#10;&#10;AI-generated content may be incorrect.">
+            <a:extLst>
+              <a:ext uri="{FF2B5EF4-FFF2-40B4-BE49-F238E27FC236}">
+                <a16:creationId xmlns:a16="http://schemas.microsoft.com/office/drawing/2014/main" id="{917F945D-FE12-D765-28FF-03F42E5D742E}"/>
+              </a:ext>
+            </a:extLst>
+          </p:cNvPr>
+          <p:cNvPicPr>
+            <a:picLocks noChangeAspect="1"/>
+          </p:cNvPicPr>
+          <p:nvPr/>
+        </p:nvPicPr>
+        <p:blipFill>
+          <a:blip r:embed="rId3"/>
+          <a:stretch>
+            <a:fillRect/>
+          </a:stretch>
+        </p:blipFill>
+        <p:spPr>
+          <a:xfrm>
+            <a:off x="7685728" y="2588677"/>
+            <a:ext cx="4044892" cy="964958"/>
+          </a:xfrm>
+          <a:prstGeom prst="rect">
+            <a:avLst/>
+          </a:prstGeom>
+        </p:spPr>
+      </p:pic>
     </p:spTree>
     <p:extLst>
       <p:ext uri="{BB962C8B-B14F-4D97-AF65-F5344CB8AC3E}">
-        <p14:creationId xmlns:p14="http://schemas.microsoft.com/office/powerpoint/2010/main" val="393239306"/>
+        <p14:creationId xmlns:p14="http://schemas.microsoft.com/office/powerpoint/2010/main" val="917397115"/>
       </p:ext>
     </p:extLst>
   </p:cSld>
@@ -9931,7 +11359,7 @@
 </p:sld>
 </file>
 
-<file path=ppt/slides/slide25.xml><?xml version="1.0" encoding="utf-8"?>
+<file path=ppt/slides/slide28.xml><?xml version="1.0" encoding="utf-8"?>
 <p:sld xmlns:a="http://schemas.openxmlformats.org/drawingml/2006/main" xmlns:r="http://schemas.openxmlformats.org/officeDocument/2006/relationships" xmlns:p="http://schemas.openxmlformats.org/presentationml/2006/main">
   <p:cSld>
     <p:spTree>
@@ -9939,7 +11367,7 @@
         <p:cNvPr id="1" name="">
           <a:extLst>
             <a:ext uri="{FF2B5EF4-FFF2-40B4-BE49-F238E27FC236}">
-              <a16:creationId xmlns:a16="http://schemas.microsoft.com/office/drawing/2014/main" id="{DDC630C4-A2E7-4675-A543-9FEFEB48C66F}"/>
+              <a16:creationId xmlns:a16="http://schemas.microsoft.com/office/drawing/2014/main" id="{217BDE77-1D47-6679-BF7F-01B39EDAC215}"/>
             </a:ext>
           </a:extLst>
         </p:cNvPr>
@@ -9959,7 +11387,7 @@
           <p:cNvPr id="3" name="TextBox 2">
             <a:extLst>
               <a:ext uri="{FF2B5EF4-FFF2-40B4-BE49-F238E27FC236}">
-                <a16:creationId xmlns:a16="http://schemas.microsoft.com/office/drawing/2014/main" id="{AA900290-CEF3-1C84-ED74-6C905D2E8C39}"/>
+                <a16:creationId xmlns:a16="http://schemas.microsoft.com/office/drawing/2014/main" id="{DD685A1F-5E89-447C-43A5-111C74075040}"/>
               </a:ext>
             </a:extLst>
           </p:cNvPr>
@@ -9994,7 +11422,7 @@
           <p:cNvPr id="4" name="Rectangle 3">
             <a:extLst>
               <a:ext uri="{FF2B5EF4-FFF2-40B4-BE49-F238E27FC236}">
-                <a16:creationId xmlns:a16="http://schemas.microsoft.com/office/drawing/2014/main" id="{A296E94F-3EDF-85B5-9FE9-C83560FAD80A}"/>
+                <a16:creationId xmlns:a16="http://schemas.microsoft.com/office/drawing/2014/main" id="{3220AC3E-7693-5EF2-ADD1-5171E6B4A390}"/>
               </a:ext>
             </a:extLst>
           </p:cNvPr>
@@ -10046,7 +11474,7 @@
           <p:cNvPr id="9" name="TextBox 8">
             <a:extLst>
               <a:ext uri="{FF2B5EF4-FFF2-40B4-BE49-F238E27FC236}">
-                <a16:creationId xmlns:a16="http://schemas.microsoft.com/office/drawing/2014/main" id="{FE8E974E-5D79-EAAD-8215-1CA8EB2ACDE4}"/>
+                <a16:creationId xmlns:a16="http://schemas.microsoft.com/office/drawing/2014/main" id="{E1A9BD0E-6101-BB72-CD0C-F6B3B412E1E3}"/>
               </a:ext>
             </a:extLst>
           </p:cNvPr>
@@ -10077,14 +11505,14 @@
           </a:p>
         </p:txBody>
       </p:sp>
-      <mc:AlternateContent xmlns:mc="http://schemas.openxmlformats.org/markup-compatibility/2006" xmlns:a14="http://schemas.microsoft.com/office/drawing/2010/main">
-        <mc:Choice Requires="a14">
+      <mc:AlternateContent xmlns:mc="http://schemas.openxmlformats.org/markup-compatibility/2006">
+        <mc:Choice xmlns:a14="http://schemas.microsoft.com/office/drawing/2010/main" Requires="a14">
           <p:sp>
             <p:nvSpPr>
               <p:cNvPr id="2" name="TextBox 1">
                 <a:extLst>
                   <a:ext uri="{FF2B5EF4-FFF2-40B4-BE49-F238E27FC236}">
-                    <a16:creationId xmlns:a16="http://schemas.microsoft.com/office/drawing/2014/main" id="{90B97E06-7102-F81F-5051-50DE12775BFD}"/>
+                    <a16:creationId xmlns:a16="http://schemas.microsoft.com/office/drawing/2014/main" id="{ACCC3012-19D7-C76B-25B0-866D342315B4}"/>
                   </a:ext>
                 </a:extLst>
               </p:cNvPr>
@@ -10094,7 +11522,7 @@
             <p:spPr>
               <a:xfrm>
                 <a:off x="688257" y="1257642"/>
-                <a:ext cx="10028904" cy="4524315"/>
+                <a:ext cx="10028904" cy="4154984"/>
               </a:xfrm>
               <a:prstGeom prst="rect">
                 <a:avLst/>
@@ -10116,56 +11544,7 @@
                     <a:latin typeface="Arial" panose="020B0604020202020204" pitchFamily="34" charset="0"/>
                     <a:cs typeface="Arial" panose="020B0604020202020204" pitchFamily="34" charset="0"/>
                   </a:rPr>
-                  <a:t>Altre cose che ho fatto in più</a:t>
-                </a:r>
-              </a:p>
-              <a:p>
-                <a:pPr marL="742950" lvl="1" indent="-285750">
-                  <a:buFont typeface="Wingdings" panose="05000000000000000000" pitchFamily="2" charset="2"/>
-                  <a:buChar char="q"/>
-                </a:pPr>
-                <a:r>
-                  <a:rPr lang="it-IT" sz="2400" dirty="0">
-                    <a:latin typeface="Arial" panose="020B0604020202020204" pitchFamily="34" charset="0"/>
-                    <a:cs typeface="Arial" panose="020B0604020202020204" pitchFamily="34" charset="0"/>
-                  </a:rPr>
-                  <a:t>Disegno del campo vettoriale del modello</a:t>
-                </a:r>
-              </a:p>
-              <a:p>
-                <a:pPr marL="1200150" lvl="2" indent="-285750">
-                  <a:buFont typeface="Wingdings" panose="05000000000000000000" pitchFamily="2" charset="2"/>
-                  <a:buChar char="q"/>
-                </a:pPr>
-                <a:r>
-                  <a:rPr lang="it-IT" sz="2400" dirty="0">
-                    <a:latin typeface="Arial" panose="020B0604020202020204" pitchFamily="34" charset="0"/>
-                    <a:cs typeface="Arial" panose="020B0604020202020204" pitchFamily="34" charset="0"/>
-                  </a:rPr>
-                  <a:t>Utile per «intuire» l’analisi della stabilità</a:t>
-                </a:r>
-              </a:p>
-              <a:p>
-                <a:pPr marL="742950" lvl="1" indent="-285750">
-                  <a:buFont typeface="Wingdings" panose="05000000000000000000" pitchFamily="2" charset="2"/>
-                  <a:buChar char="q"/>
-                </a:pPr>
-                <a:endParaRPr lang="it-IT" sz="2400" dirty="0">
-                  <a:latin typeface="Arial" panose="020B0604020202020204" pitchFamily="34" charset="0"/>
-                  <a:cs typeface="Arial" panose="020B0604020202020204" pitchFamily="34" charset="0"/>
-                </a:endParaRPr>
-              </a:p>
-              <a:p>
-                <a:pPr marL="285750" indent="-285750">
-                  <a:buFont typeface="Wingdings" panose="05000000000000000000" pitchFamily="2" charset="2"/>
-                  <a:buChar char="q"/>
-                </a:pPr>
-                <a:r>
-                  <a:rPr lang="it-IT" sz="2400" dirty="0">
-                    <a:latin typeface="Arial" panose="020B0604020202020204" pitchFamily="34" charset="0"/>
-                    <a:cs typeface="Arial" panose="020B0604020202020204" pitchFamily="34" charset="0"/>
-                  </a:rPr>
-                  <a:t>Altre sperimentazioni con altri parametri:</a:t>
+                  <a:t>Sperimentazioni con altri parametri:</a:t>
                 </a:r>
               </a:p>
               <a:p>
@@ -10293,7 +11672,30 @@
                     <a:latin typeface="Arial" panose="020B0604020202020204" pitchFamily="34" charset="0"/>
                     <a:cs typeface="Arial" panose="020B0604020202020204" pitchFamily="34" charset="0"/>
                   </a:rPr>
-                  <a:t>W2 «passo passo»</a:t>
+                  <a:t>W2 «passo passo» e lo confrontiamo con W1</a:t>
+                </a:r>
+              </a:p>
+              <a:p>
+                <a:pPr marL="742950" lvl="1" indent="-285750">
+                  <a:buFont typeface="Wingdings" panose="05000000000000000000" pitchFamily="2" charset="2"/>
+                  <a:buChar char="q"/>
+                </a:pPr>
+                <a:endParaRPr lang="it-IT" sz="2400" b="0" dirty="0">
+                  <a:latin typeface="Arial" panose="020B0604020202020204" pitchFamily="34" charset="0"/>
+                  <a:cs typeface="Arial" panose="020B0604020202020204" pitchFamily="34" charset="0"/>
+                </a:endParaRPr>
+              </a:p>
+              <a:p>
+                <a:pPr marL="285750" indent="-285750">
+                  <a:buFont typeface="Wingdings" panose="05000000000000000000" pitchFamily="2" charset="2"/>
+                  <a:buChar char="q"/>
+                </a:pPr>
+                <a:r>
+                  <a:rPr lang="it-IT" sz="2400" dirty="0">
+                    <a:latin typeface="Arial" panose="020B0604020202020204" pitchFamily="34" charset="0"/>
+                    <a:cs typeface="Arial" panose="020B0604020202020204" pitchFamily="34" charset="0"/>
+                  </a:rPr>
+                  <a:t>Parametri: stessi dell’esperimento 0 (Esistenza e ciclo limite «attorno» di W2)</a:t>
                 </a:r>
                 <a:endParaRPr lang="it-IT" sz="2400" b="0" dirty="0">
                   <a:latin typeface="Arial" panose="020B0604020202020204" pitchFamily="34" charset="0"/>
@@ -10303,13 +11705,13 @@
             </p:txBody>
           </p:sp>
         </mc:Choice>
-        <mc:Fallback xmlns="">
+        <mc:Fallback>
           <p:sp>
             <p:nvSpPr>
               <p:cNvPr id="2" name="TextBox 1">
                 <a:extLst>
                   <a:ext uri="{FF2B5EF4-FFF2-40B4-BE49-F238E27FC236}">
-                    <a16:creationId xmlns:a16="http://schemas.microsoft.com/office/drawing/2014/main" id="{90B97E06-7102-F81F-5051-50DE12775BFD}"/>
+                    <a16:creationId xmlns:a16="http://schemas.microsoft.com/office/drawing/2014/main" id="{ACCC3012-19D7-C76B-25B0-866D342315B4}"/>
                   </a:ext>
                 </a:extLst>
               </p:cNvPr>
@@ -10321,7 +11723,7 @@
             <p:spPr>
               <a:xfrm>
                 <a:off x="688257" y="1257642"/>
-                <a:ext cx="10028904" cy="4524315"/>
+                <a:ext cx="10028904" cy="4154984"/>
               </a:xfrm>
               <a:prstGeom prst="rect">
                 <a:avLst/>
@@ -10329,7 +11731,7 @@
               <a:blipFill>
                 <a:blip r:embed="rId2"/>
                 <a:stretch>
-                  <a:fillRect l="-851" t="-943" b="-2291"/>
+                  <a:fillRect l="-851" t="-1026" r="-790" b="-2493"/>
                 </a:stretch>
               </a:blipFill>
             </p:spPr>
@@ -10353,7 +11755,7 @@
           <p:cNvPr id="5" name="Date Placeholder 4">
             <a:extLst>
               <a:ext uri="{FF2B5EF4-FFF2-40B4-BE49-F238E27FC236}">
-                <a16:creationId xmlns:a16="http://schemas.microsoft.com/office/drawing/2014/main" id="{2A7E0F7C-1668-FDA7-9EF0-021890FEC07C}"/>
+                <a16:creationId xmlns:a16="http://schemas.microsoft.com/office/drawing/2014/main" id="{EAF588AD-4A53-AC39-5FDC-9627637618E5}"/>
               </a:ext>
             </a:extLst>
           </p:cNvPr>
@@ -10371,7 +11773,7 @@
           <a:p>
             <a:fld id="{C6EF02CD-913D-490D-9F2F-9D6BDCD607B3}" type="datetime1">
               <a:rPr lang="it-IT" smtClean="0"/>
-              <a:t>30/12/2025</a:t>
+              <a:t>03/01/2026</a:t>
             </a:fld>
             <a:endParaRPr lang="en-US"/>
           </a:p>
@@ -10382,7 +11784,7 @@
           <p:cNvPr id="6" name="Footer Placeholder 5">
             <a:extLst>
               <a:ext uri="{FF2B5EF4-FFF2-40B4-BE49-F238E27FC236}">
-                <a16:creationId xmlns:a16="http://schemas.microsoft.com/office/drawing/2014/main" id="{32A5CFCE-A70D-F477-FB32-EC44EEBCE39A}"/>
+                <a16:creationId xmlns:a16="http://schemas.microsoft.com/office/drawing/2014/main" id="{1D56487E-47B2-E8F5-D950-30C7072479A3}"/>
               </a:ext>
             </a:extLst>
           </p:cNvPr>
@@ -10411,7 +11813,7 @@
           <p:cNvPr id="7" name="Slide Number Placeholder 6">
             <a:extLst>
               <a:ext uri="{FF2B5EF4-FFF2-40B4-BE49-F238E27FC236}">
-                <a16:creationId xmlns:a16="http://schemas.microsoft.com/office/drawing/2014/main" id="{EBC4F433-73F9-6ECE-A411-3A85C2F9B704}"/>
+                <a16:creationId xmlns:a16="http://schemas.microsoft.com/office/drawing/2014/main" id="{1B034304-72F4-2CCB-5650-9280065B4B33}"/>
               </a:ext>
             </a:extLst>
           </p:cNvPr>
@@ -10429,7 +11831,7 @@
           <a:p>
             <a:fld id="{8BF32AC9-143A-477E-841D-1F801B7F8FE8}" type="slidenum">
               <a:rPr lang="en-US" smtClean="0"/>
-              <a:t>25</a:t>
+              <a:t>28</a:t>
             </a:fld>
             <a:endParaRPr lang="en-US"/>
           </a:p>
@@ -10438,7 +11840,526 @@
     </p:spTree>
     <p:extLst>
       <p:ext uri="{BB962C8B-B14F-4D97-AF65-F5344CB8AC3E}">
-        <p14:creationId xmlns:p14="http://schemas.microsoft.com/office/powerpoint/2010/main" val="917397115"/>
+        <p14:creationId xmlns:p14="http://schemas.microsoft.com/office/powerpoint/2010/main" val="3921543612"/>
+      </p:ext>
+    </p:extLst>
+  </p:cSld>
+  <p:clrMapOvr>
+    <a:masterClrMapping/>
+  </p:clrMapOvr>
+</p:sld>
+</file>
+
+<file path=ppt/slides/slide29.xml><?xml version="1.0" encoding="utf-8"?>
+<p:sld xmlns:a="http://schemas.openxmlformats.org/drawingml/2006/main" xmlns:r="http://schemas.openxmlformats.org/officeDocument/2006/relationships" xmlns:p="http://schemas.openxmlformats.org/presentationml/2006/main">
+  <p:cSld>
+    <p:spTree>
+      <p:nvGrpSpPr>
+        <p:cNvPr id="1" name="">
+          <a:extLst>
+            <a:ext uri="{FF2B5EF4-FFF2-40B4-BE49-F238E27FC236}">
+              <a16:creationId xmlns:a16="http://schemas.microsoft.com/office/drawing/2014/main" id="{20E425A3-A17A-E86E-40CE-C2602872BB19}"/>
+            </a:ext>
+          </a:extLst>
+        </p:cNvPr>
+        <p:cNvGrpSpPr/>
+        <p:nvPr/>
+      </p:nvGrpSpPr>
+      <p:grpSpPr>
+        <a:xfrm>
+          <a:off x="0" y="0"/>
+          <a:ext cx="0" cy="0"/>
+          <a:chOff x="0" y="0"/>
+          <a:chExt cx="0" cy="0"/>
+        </a:xfrm>
+      </p:grpSpPr>
+      <p:sp>
+        <p:nvSpPr>
+          <p:cNvPr id="3" name="TextBox 2">
+            <a:extLst>
+              <a:ext uri="{FF2B5EF4-FFF2-40B4-BE49-F238E27FC236}">
+                <a16:creationId xmlns:a16="http://schemas.microsoft.com/office/drawing/2014/main" id="{51B109E4-023D-9AAE-29E9-40A6930BD57E}"/>
+              </a:ext>
+            </a:extLst>
+          </p:cNvPr>
+          <p:cNvSpPr txBox="1"/>
+          <p:nvPr/>
+        </p:nvSpPr>
+        <p:spPr>
+          <a:xfrm>
+            <a:off x="688257" y="442035"/>
+            <a:ext cx="5407743" cy="523220"/>
+          </a:xfrm>
+          <a:prstGeom prst="rect">
+            <a:avLst/>
+          </a:prstGeom>
+          <a:noFill/>
+        </p:spPr>
+        <p:txBody>
+          <a:bodyPr wrap="square">
+            <a:spAutoFit/>
+          </a:bodyPr>
+          <a:lstStyle/>
+          <a:p>
+            <a:r>
+              <a:rPr lang="it-IT" sz="2800" b="1" dirty="0"/>
+              <a:t>FATTORE </a:t>
+            </a:r>
+            <a:r>
+              <a:rPr lang="el-GR" sz="2800" b="1" dirty="0"/>
+              <a:t>αθ</a:t>
+            </a:r>
+          </a:p>
+        </p:txBody>
+      </p:sp>
+      <p:sp>
+        <p:nvSpPr>
+          <p:cNvPr id="4" name="Rectangle 3">
+            <a:extLst>
+              <a:ext uri="{FF2B5EF4-FFF2-40B4-BE49-F238E27FC236}">
+                <a16:creationId xmlns:a16="http://schemas.microsoft.com/office/drawing/2014/main" id="{A1D6AE5C-BEBB-50EA-C3A3-F09815BDF230}"/>
+              </a:ext>
+            </a:extLst>
+          </p:cNvPr>
+          <p:cNvSpPr/>
+          <p:nvPr/>
+        </p:nvSpPr>
+        <p:spPr>
+          <a:xfrm>
+            <a:off x="688257" y="965255"/>
+            <a:ext cx="10815485" cy="104767"/>
+          </a:xfrm>
+          <a:prstGeom prst="rect">
+            <a:avLst/>
+          </a:prstGeom>
+          <a:solidFill>
+            <a:schemeClr val="accent4"/>
+          </a:solidFill>
+          <a:ln>
+            <a:noFill/>
+          </a:ln>
+        </p:spPr>
+        <p:style>
+          <a:lnRef idx="2">
+            <a:schemeClr val="accent1">
+              <a:shade val="15000"/>
+            </a:schemeClr>
+          </a:lnRef>
+          <a:fillRef idx="1">
+            <a:schemeClr val="accent1"/>
+          </a:fillRef>
+          <a:effectRef idx="0">
+            <a:schemeClr val="accent1"/>
+          </a:effectRef>
+          <a:fontRef idx="minor">
+            <a:schemeClr val="lt1"/>
+          </a:fontRef>
+        </p:style>
+        <p:txBody>
+          <a:bodyPr rtlCol="0" anchor="ctr"/>
+          <a:lstStyle/>
+          <a:p>
+            <a:pPr algn="ctr"/>
+            <a:endParaRPr lang="en-US"/>
+          </a:p>
+        </p:txBody>
+      </p:sp>
+      <p:sp>
+        <p:nvSpPr>
+          <p:cNvPr id="9" name="TextBox 8">
+            <a:extLst>
+              <a:ext uri="{FF2B5EF4-FFF2-40B4-BE49-F238E27FC236}">
+                <a16:creationId xmlns:a16="http://schemas.microsoft.com/office/drawing/2014/main" id="{45DBF9D8-6A4A-9DF4-013C-0739E7CEA80A}"/>
+              </a:ext>
+            </a:extLst>
+          </p:cNvPr>
+          <p:cNvSpPr txBox="1"/>
+          <p:nvPr/>
+        </p:nvSpPr>
+        <p:spPr>
+          <a:xfrm>
+            <a:off x="6959599" y="514495"/>
+            <a:ext cx="4544143" cy="461665"/>
+          </a:xfrm>
+          <a:prstGeom prst="rect">
+            <a:avLst/>
+          </a:prstGeom>
+          <a:noFill/>
+        </p:spPr>
+        <p:txBody>
+          <a:bodyPr wrap="square">
+            <a:spAutoFit/>
+          </a:bodyPr>
+          <a:lstStyle/>
+          <a:p>
+            <a:pPr algn="r"/>
+            <a:r>
+              <a:rPr lang="it-IT" sz="2400" b="1" i="1" dirty="0"/>
+              <a:t>Step: More stuff</a:t>
+            </a:r>
+          </a:p>
+        </p:txBody>
+      </p:sp>
+      <p:sp>
+        <p:nvSpPr>
+          <p:cNvPr id="5" name="Date Placeholder 4">
+            <a:extLst>
+              <a:ext uri="{FF2B5EF4-FFF2-40B4-BE49-F238E27FC236}">
+                <a16:creationId xmlns:a16="http://schemas.microsoft.com/office/drawing/2014/main" id="{4D5F1F18-9B90-7C78-D732-B23D9F61BAB5}"/>
+              </a:ext>
+            </a:extLst>
+          </p:cNvPr>
+          <p:cNvSpPr>
+            <a:spLocks noGrp="1"/>
+          </p:cNvSpPr>
+          <p:nvPr>
+            <p:ph type="dt" sz="half" idx="10"/>
+          </p:nvPr>
+        </p:nvSpPr>
+        <p:spPr/>
+        <p:txBody>
+          <a:bodyPr/>
+          <a:lstStyle/>
+          <a:p>
+            <a:fld id="{C6EF02CD-913D-490D-9F2F-9D6BDCD607B3}" type="datetime1">
+              <a:rPr lang="it-IT" smtClean="0"/>
+              <a:t>03/01/2026</a:t>
+            </a:fld>
+            <a:endParaRPr lang="en-US"/>
+          </a:p>
+        </p:txBody>
+      </p:sp>
+      <p:sp>
+        <p:nvSpPr>
+          <p:cNvPr id="6" name="Footer Placeholder 5">
+            <a:extLst>
+              <a:ext uri="{FF2B5EF4-FFF2-40B4-BE49-F238E27FC236}">
+                <a16:creationId xmlns:a16="http://schemas.microsoft.com/office/drawing/2014/main" id="{9FD79F01-0EFF-7581-3164-84C4F2184AE2}"/>
+              </a:ext>
+            </a:extLst>
+          </p:cNvPr>
+          <p:cNvSpPr>
+            <a:spLocks noGrp="1"/>
+          </p:cNvSpPr>
+          <p:nvPr>
+            <p:ph type="ftr" sz="quarter" idx="11"/>
+          </p:nvPr>
+        </p:nvSpPr>
+        <p:spPr/>
+        <p:txBody>
+          <a:bodyPr/>
+          <a:lstStyle/>
+          <a:p>
+            <a:r>
+              <a:rPr lang="nn-NO"/>
+              <a:t>DINO MENG [SM3201466], BsC AIDA@MIGE</a:t>
+            </a:r>
+            <a:endParaRPr lang="en-US"/>
+          </a:p>
+        </p:txBody>
+      </p:sp>
+      <p:sp>
+        <p:nvSpPr>
+          <p:cNvPr id="7" name="Slide Number Placeholder 6">
+            <a:extLst>
+              <a:ext uri="{FF2B5EF4-FFF2-40B4-BE49-F238E27FC236}">
+                <a16:creationId xmlns:a16="http://schemas.microsoft.com/office/drawing/2014/main" id="{55A6FC86-7911-4BBF-01D3-9D5A570E008A}"/>
+              </a:ext>
+            </a:extLst>
+          </p:cNvPr>
+          <p:cNvSpPr>
+            <a:spLocks noGrp="1"/>
+          </p:cNvSpPr>
+          <p:nvPr>
+            <p:ph type="sldNum" sz="quarter" idx="12"/>
+          </p:nvPr>
+        </p:nvSpPr>
+        <p:spPr/>
+        <p:txBody>
+          <a:bodyPr/>
+          <a:lstStyle/>
+          <a:p>
+            <a:fld id="{8BF32AC9-143A-477E-841D-1F801B7F8FE8}" type="slidenum">
+              <a:rPr lang="en-US" smtClean="0"/>
+              <a:t>29</a:t>
+            </a:fld>
+            <a:endParaRPr lang="en-US"/>
+          </a:p>
+        </p:txBody>
+      </p:sp>
+      <p:pic>
+        <p:nvPicPr>
+          <p:cNvPr id="10" name="Picture 9" descr="A diagram of a diagram&#10;&#10;AI-generated content may be incorrect.">
+            <a:extLst>
+              <a:ext uri="{FF2B5EF4-FFF2-40B4-BE49-F238E27FC236}">
+                <a16:creationId xmlns:a16="http://schemas.microsoft.com/office/drawing/2014/main" id="{913F4DF8-8440-13C2-D076-CAD7EA95D582}"/>
+              </a:ext>
+            </a:extLst>
+          </p:cNvPr>
+          <p:cNvPicPr>
+            <a:picLocks noChangeAspect="1"/>
+          </p:cNvPicPr>
+          <p:nvPr/>
+        </p:nvPicPr>
+        <p:blipFill>
+          <a:blip r:embed="rId2"/>
+          <a:stretch>
+            <a:fillRect/>
+          </a:stretch>
+        </p:blipFill>
+        <p:spPr>
+          <a:xfrm>
+            <a:off x="625942" y="1488475"/>
+            <a:ext cx="5353050" cy="4572000"/>
+          </a:xfrm>
+          <a:prstGeom prst="rect">
+            <a:avLst/>
+          </a:prstGeom>
+        </p:spPr>
+      </p:pic>
+      <mc:AlternateContent xmlns:mc="http://schemas.openxmlformats.org/markup-compatibility/2006">
+        <mc:Choice xmlns:a14="http://schemas.microsoft.com/office/drawing/2010/main" Requires="a14">
+          <p:sp>
+            <p:nvSpPr>
+              <p:cNvPr id="12" name="TextBox 11">
+                <a:extLst>
+                  <a:ext uri="{FF2B5EF4-FFF2-40B4-BE49-F238E27FC236}">
+                    <a16:creationId xmlns:a16="http://schemas.microsoft.com/office/drawing/2014/main" id="{0BC350B4-7901-887D-1E2B-9563234F695E}"/>
+                  </a:ext>
+                </a:extLst>
+              </p:cNvPr>
+              <p:cNvSpPr txBox="1"/>
+              <p:nvPr/>
+            </p:nvSpPr>
+            <p:spPr>
+              <a:xfrm>
+                <a:off x="6213010" y="1536160"/>
+                <a:ext cx="5447687" cy="4524315"/>
+              </a:xfrm>
+              <a:prstGeom prst="rect">
+                <a:avLst/>
+              </a:prstGeom>
+              <a:noFill/>
+            </p:spPr>
+            <p:txBody>
+              <a:bodyPr wrap="square">
+                <a:spAutoFit/>
+              </a:bodyPr>
+              <a:lstStyle/>
+              <a:p>
+                <a:pPr marL="285750" indent="-285750">
+                  <a:buFont typeface="Wingdings" panose="05000000000000000000" pitchFamily="2" charset="2"/>
+                  <a:buChar char="q"/>
+                </a:pPr>
+                <a:r>
+                  <a:rPr lang="it-IT" sz="2400" dirty="0">
+                    <a:latin typeface="Arial" panose="020B0604020202020204" pitchFamily="34" charset="0"/>
+                    <a:cs typeface="Arial" panose="020B0604020202020204" pitchFamily="34" charset="0"/>
+                  </a:rPr>
+                  <a:t>Intuizione modellistica:</a:t>
+                </a:r>
+              </a:p>
+              <a:p>
+                <a:pPr marL="742950" lvl="1" indent="-285750">
+                  <a:buFont typeface="Wingdings" panose="05000000000000000000" pitchFamily="2" charset="2"/>
+                  <a:buChar char="q"/>
+                </a:pPr>
+                <a:r>
+                  <a:rPr lang="it-IT" sz="2400" dirty="0">
+                    <a:latin typeface="Arial" panose="020B0604020202020204" pitchFamily="34" charset="0"/>
+                    <a:cs typeface="Arial" panose="020B0604020202020204" pitchFamily="34" charset="0"/>
+                  </a:rPr>
+                  <a:t>Più e migliore risorse aggiuntive all’esterno </a:t>
+                </a:r>
+                <a14:m>
+                  <m:oMath xmlns:m="http://schemas.openxmlformats.org/officeDocument/2006/math">
+                    <m:r>
+                      <a:rPr lang="it-IT" sz="2400" i="1" smtClean="0">
+                        <a:latin typeface="Cambria Math" panose="02040503050406030204" pitchFamily="18" charset="0"/>
+                        <a:ea typeface="Cambria Math" panose="02040503050406030204" pitchFamily="18" charset="0"/>
+                        <a:cs typeface="Arial" panose="020B0604020202020204" pitchFamily="34" charset="0"/>
+                      </a:rPr>
+                      <m:t>⇒</m:t>
+                    </m:r>
+                  </m:oMath>
+                </a14:m>
+                <a:r>
+                  <a:rPr lang="it-IT" sz="2400" dirty="0">
+                    <a:latin typeface="Arial" panose="020B0604020202020204" pitchFamily="34" charset="0"/>
+                    <a:cs typeface="Arial" panose="020B0604020202020204" pitchFamily="34" charset="0"/>
+                  </a:rPr>
+                  <a:t> Predatori emigrano</a:t>
+                </a:r>
+              </a:p>
+              <a:p>
+                <a:pPr marL="742950" lvl="1" indent="-285750">
+                  <a:buFont typeface="Wingdings" panose="05000000000000000000" pitchFamily="2" charset="2"/>
+                  <a:buChar char="q"/>
+                </a:pPr>
+                <a:endParaRPr lang="it-IT" sz="2400" dirty="0">
+                  <a:latin typeface="Arial" panose="020B0604020202020204" pitchFamily="34" charset="0"/>
+                  <a:cs typeface="Arial" panose="020B0604020202020204" pitchFamily="34" charset="0"/>
+                </a:endParaRPr>
+              </a:p>
+              <a:p>
+                <a:pPr marL="285750" indent="-285750">
+                  <a:buFont typeface="Wingdings" panose="05000000000000000000" pitchFamily="2" charset="2"/>
+                  <a:buChar char="q"/>
+                </a:pPr>
+                <a:r>
+                  <a:rPr lang="it-IT" sz="2400" dirty="0">
+                    <a:latin typeface="Arial" panose="020B0604020202020204" pitchFamily="34" charset="0"/>
+                    <a:cs typeface="Arial" panose="020B0604020202020204" pitchFamily="34" charset="0"/>
+                  </a:rPr>
+                  <a:t>Risultato:</a:t>
+                </a:r>
+              </a:p>
+              <a:p>
+                <a:pPr marL="742950" lvl="1" indent="-285750">
+                  <a:buFont typeface="Wingdings" panose="05000000000000000000" pitchFamily="2" charset="2"/>
+                  <a:buChar char="q"/>
+                </a:pPr>
+                <a:r>
+                  <a:rPr lang="it-IT" sz="2400" dirty="0">
+                    <a:latin typeface="Arial" panose="020B0604020202020204" pitchFamily="34" charset="0"/>
+                    <a:cs typeface="Arial" panose="020B0604020202020204" pitchFamily="34" charset="0"/>
+                  </a:rPr>
+                  <a:t>Più e migliori risorse </a:t>
+                </a:r>
+                <a14:m>
+                  <m:oMath xmlns:m="http://schemas.openxmlformats.org/officeDocument/2006/math">
+                    <m:r>
+                      <a:rPr lang="it-IT" sz="2400" i="1">
+                        <a:latin typeface="Cambria Math" panose="02040503050406030204" pitchFamily="18" charset="0"/>
+                        <a:ea typeface="Cambria Math" panose="02040503050406030204" pitchFamily="18" charset="0"/>
+                        <a:cs typeface="Arial" panose="020B0604020202020204" pitchFamily="34" charset="0"/>
+                      </a:rPr>
+                      <m:t>⇒</m:t>
+                    </m:r>
+                  </m:oMath>
+                </a14:m>
+                <a:r>
+                  <a:rPr lang="it-IT" sz="2400" dirty="0">
+                    <a:latin typeface="Arial" panose="020B0604020202020204" pitchFamily="34" charset="0"/>
+                    <a:cs typeface="Arial" panose="020B0604020202020204" pitchFamily="34" charset="0"/>
+                  </a:rPr>
+                  <a:t> W2 tende a W1 </a:t>
+                </a:r>
+              </a:p>
+              <a:p>
+                <a:pPr marL="742950" lvl="1" indent="-285750">
+                  <a:buFont typeface="Wingdings" panose="05000000000000000000" pitchFamily="2" charset="2"/>
+                  <a:buChar char="q"/>
+                </a:pPr>
+                <a:r>
+                  <a:rPr lang="it-IT" sz="2400" dirty="0">
+                    <a:latin typeface="Arial" panose="020B0604020202020204" pitchFamily="34" charset="0"/>
+                    <a:cs typeface="Arial" panose="020B0604020202020204" pitchFamily="34" charset="0"/>
+                  </a:rPr>
+                  <a:t>Quindi meno predatori</a:t>
+                </a:r>
+              </a:p>
+              <a:p>
+                <a:pPr marL="742950" lvl="1" indent="-285750">
+                  <a:buFont typeface="Wingdings" panose="05000000000000000000" pitchFamily="2" charset="2"/>
+                  <a:buChar char="q"/>
+                </a:pPr>
+                <a:r>
+                  <a:rPr lang="it-IT" sz="2400" dirty="0">
+                    <a:latin typeface="Arial" panose="020B0604020202020204" pitchFamily="34" charset="0"/>
+                    <a:cs typeface="Arial" panose="020B0604020202020204" pitchFamily="34" charset="0"/>
+                  </a:rPr>
+                  <a:t>Intuizione confermata</a:t>
+                </a:r>
+              </a:p>
+              <a:p>
+                <a:pPr marL="742950" lvl="1" indent="-285750">
+                  <a:buFont typeface="Wingdings" panose="05000000000000000000" pitchFamily="2" charset="2"/>
+                  <a:buChar char="q"/>
+                </a:pPr>
+                <a:endParaRPr lang="it-IT" sz="2400" dirty="0">
+                  <a:latin typeface="Arial" panose="020B0604020202020204" pitchFamily="34" charset="0"/>
+                  <a:cs typeface="Arial" panose="020B0604020202020204" pitchFamily="34" charset="0"/>
+                </a:endParaRPr>
+              </a:p>
+              <a:p>
+                <a:pPr marL="285750" indent="-285750">
+                  <a:buFont typeface="Wingdings" panose="05000000000000000000" pitchFamily="2" charset="2"/>
+                  <a:buChar char="q"/>
+                </a:pPr>
+                <a:r>
+                  <a:rPr lang="it-IT" sz="2400" dirty="0">
+                    <a:latin typeface="Arial" panose="020B0604020202020204" pitchFamily="34" charset="0"/>
+                    <a:cs typeface="Arial" panose="020B0604020202020204" pitchFamily="34" charset="0"/>
+                  </a:rPr>
+                  <a:t>Tuttavia...</a:t>
+                </a:r>
+              </a:p>
+              <a:p>
+                <a:pPr marL="742950" lvl="1" indent="-285750">
+                  <a:buFont typeface="Wingdings" panose="05000000000000000000" pitchFamily="2" charset="2"/>
+                  <a:buChar char="q"/>
+                </a:pPr>
+                <a:r>
+                  <a:rPr lang="it-IT" sz="2400" dirty="0">
+                    <a:latin typeface="Arial" panose="020B0604020202020204" pitchFamily="34" charset="0"/>
+                    <a:cs typeface="Arial" panose="020B0604020202020204" pitchFamily="34" charset="0"/>
+                  </a:rPr>
+                  <a:t>Scala logaritmica</a:t>
+                </a:r>
+              </a:p>
+            </p:txBody>
+          </p:sp>
+        </mc:Choice>
+        <mc:Fallback>
+          <p:sp>
+            <p:nvSpPr>
+              <p:cNvPr id="12" name="TextBox 11">
+                <a:extLst>
+                  <a:ext uri="{FF2B5EF4-FFF2-40B4-BE49-F238E27FC236}">
+                    <a16:creationId xmlns:a16="http://schemas.microsoft.com/office/drawing/2014/main" id="{0BC350B4-7901-887D-1E2B-9563234F695E}"/>
+                  </a:ext>
+                </a:extLst>
+              </p:cNvPr>
+              <p:cNvSpPr txBox="1">
+                <a:spLocks noRot="1" noChangeAspect="1" noMove="1" noResize="1" noEditPoints="1" noAdjustHandles="1" noChangeArrowheads="1" noChangeShapeType="1" noTextEdit="1"/>
+              </p:cNvSpPr>
+              <p:nvPr/>
+            </p:nvSpPr>
+            <p:spPr>
+              <a:xfrm>
+                <a:off x="6213010" y="1536160"/>
+                <a:ext cx="5447687" cy="4524315"/>
+              </a:xfrm>
+              <a:prstGeom prst="rect">
+                <a:avLst/>
+              </a:prstGeom>
+              <a:blipFill>
+                <a:blip r:embed="rId3"/>
+                <a:stretch>
+                  <a:fillRect l="-1454" t="-943" r="-2573" b="-2291"/>
+                </a:stretch>
+              </a:blipFill>
+            </p:spPr>
+            <p:txBody>
+              <a:bodyPr/>
+              <a:lstStyle/>
+              <a:p>
+                <a:r>
+                  <a:rPr lang="en-US">
+                    <a:noFill/>
+                  </a:rPr>
+                  <a:t> </a:t>
+                </a:r>
+              </a:p>
+            </p:txBody>
+          </p:sp>
+        </mc:Fallback>
+      </mc:AlternateContent>
+    </p:spTree>
+    <p:extLst>
+      <p:ext uri="{BB962C8B-B14F-4D97-AF65-F5344CB8AC3E}">
+        <p14:creationId xmlns:p14="http://schemas.microsoft.com/office/powerpoint/2010/main" val="1716081219"/>
       </p:ext>
     </p:extLst>
   </p:cSld>
@@ -10558,12 +12479,383 @@
           </a:p>
         </p:txBody>
       </p:sp>
-      <p:sp>
-        <p:nvSpPr>
-          <p:cNvPr id="7" name="TextBox 6">
-            <a:extLst>
-              <a:ext uri="{FF2B5EF4-FFF2-40B4-BE49-F238E27FC236}">
-                <a16:creationId xmlns:a16="http://schemas.microsoft.com/office/drawing/2014/main" id="{506B2414-6B16-579D-3FCD-A65D35926A16}"/>
+      <mc:AlternateContent xmlns:mc="http://schemas.openxmlformats.org/markup-compatibility/2006">
+        <mc:Choice xmlns:a14="http://schemas.microsoft.com/office/drawing/2010/main" Requires="a14">
+          <p:sp>
+            <p:nvSpPr>
+              <p:cNvPr id="7" name="TextBox 6">
+                <a:extLst>
+                  <a:ext uri="{FF2B5EF4-FFF2-40B4-BE49-F238E27FC236}">
+                    <a16:creationId xmlns:a16="http://schemas.microsoft.com/office/drawing/2014/main" id="{506B2414-6B16-579D-3FCD-A65D35926A16}"/>
+                  </a:ext>
+                </a:extLst>
+              </p:cNvPr>
+              <p:cNvSpPr txBox="1"/>
+              <p:nvPr/>
+            </p:nvSpPr>
+            <p:spPr>
+              <a:xfrm>
+                <a:off x="688256" y="1242253"/>
+                <a:ext cx="9634303" cy="4893647"/>
+              </a:xfrm>
+              <a:prstGeom prst="rect">
+                <a:avLst/>
+              </a:prstGeom>
+              <a:noFill/>
+            </p:spPr>
+            <p:txBody>
+              <a:bodyPr wrap="square" rtlCol="0">
+                <a:spAutoFit/>
+              </a:bodyPr>
+              <a:lstStyle/>
+              <a:p>
+                <a:pPr marL="285750" indent="-285750">
+                  <a:buFont typeface="Wingdings" panose="05000000000000000000" pitchFamily="2" charset="2"/>
+                  <a:buChar char="q"/>
+                </a:pPr>
+                <a:r>
+                  <a:rPr lang="it-IT" sz="2400" dirty="0">
+                    <a:latin typeface="Arial" panose="020B0604020202020204" pitchFamily="34" charset="0"/>
+                    <a:cs typeface="Arial" panose="020B0604020202020204" pitchFamily="34" charset="0"/>
+                  </a:rPr>
+                  <a:t>Implementazione del modello</a:t>
+                </a:r>
+              </a:p>
+              <a:p>
+                <a:pPr marL="742950" lvl="1" indent="-285750">
+                  <a:buFont typeface="Wingdings" panose="05000000000000000000" pitchFamily="2" charset="2"/>
+                  <a:buChar char="q"/>
+                </a:pPr>
+                <a:r>
+                  <a:rPr lang="it-IT" sz="2400" dirty="0">
+                    <a:latin typeface="Arial" panose="020B0604020202020204" pitchFamily="34" charset="0"/>
+                    <a:cs typeface="Arial" panose="020B0604020202020204" pitchFamily="34" charset="0"/>
+                  </a:rPr>
+                  <a:t>Con Python</a:t>
+                </a:r>
+              </a:p>
+              <a:p>
+                <a:pPr marL="285750" indent="-285750">
+                  <a:buFont typeface="Wingdings" panose="05000000000000000000" pitchFamily="2" charset="2"/>
+                  <a:buChar char="q"/>
+                </a:pPr>
+                <a:endParaRPr lang="it-IT" sz="2400" dirty="0">
+                  <a:latin typeface="Arial" panose="020B0604020202020204" pitchFamily="34" charset="0"/>
+                  <a:cs typeface="Arial" panose="020B0604020202020204" pitchFamily="34" charset="0"/>
+                </a:endParaRPr>
+              </a:p>
+              <a:p>
+                <a:pPr marL="285750" indent="-285750">
+                  <a:buFont typeface="Wingdings" panose="05000000000000000000" pitchFamily="2" charset="2"/>
+                  <a:buChar char="q"/>
+                </a:pPr>
+                <a:r>
+                  <a:rPr lang="it-IT" sz="2400" dirty="0">
+                    <a:latin typeface="Arial" panose="020B0604020202020204" pitchFamily="34" charset="0"/>
+                    <a:cs typeface="Arial" panose="020B0604020202020204" pitchFamily="34" charset="0"/>
+                  </a:rPr>
+                  <a:t>Riproduzione dei risultati con i parametri proposti nell’articolo</a:t>
+                </a:r>
+              </a:p>
+              <a:p>
+                <a:pPr marL="742950" lvl="1" indent="-285750">
+                  <a:buFont typeface="Wingdings" panose="05000000000000000000" pitchFamily="2" charset="2"/>
+                  <a:buChar char="q"/>
+                </a:pPr>
+                <a:r>
+                  <a:rPr lang="it-IT" sz="2400" dirty="0">
+                    <a:latin typeface="Arial" panose="020B0604020202020204" pitchFamily="34" charset="0"/>
+                    <a:cs typeface="Arial" panose="020B0604020202020204" pitchFamily="34" charset="0"/>
+                  </a:rPr>
+                  <a:t>Con 7 esperimenti</a:t>
+                </a:r>
+              </a:p>
+              <a:p>
+                <a:pPr marL="1200150" lvl="2" indent="-285750">
+                  <a:buFont typeface="Wingdings" panose="05000000000000000000" pitchFamily="2" charset="2"/>
+                  <a:buChar char="q"/>
+                </a:pPr>
+                <a14:m>
+                  <m:oMath xmlns:m="http://schemas.openxmlformats.org/officeDocument/2006/math">
+                    <m:r>
+                      <a:rPr lang="it-IT" sz="2400" b="0" i="1" dirty="0" smtClean="0">
+                        <a:latin typeface="Cambria Math" panose="02040503050406030204" pitchFamily="18" charset="0"/>
+                        <a:cs typeface="Arial" panose="020B0604020202020204" pitchFamily="34" charset="0"/>
+                      </a:rPr>
+                      <m:t>≥</m:t>
+                    </m:r>
+                  </m:oMath>
+                </a14:m>
+                <a:r>
+                  <a:rPr lang="it-IT" sz="2400" dirty="0">
+                    <a:latin typeface="Arial" panose="020B0604020202020204" pitchFamily="34" charset="0"/>
+                    <a:cs typeface="Arial" panose="020B0604020202020204" pitchFamily="34" charset="0"/>
+                  </a:rPr>
+                  <a:t> 1 simulazione/i per ogni esperimento</a:t>
+                </a:r>
+              </a:p>
+              <a:p>
+                <a:pPr marL="285750" indent="-285750">
+                  <a:buFont typeface="Wingdings" panose="05000000000000000000" pitchFamily="2" charset="2"/>
+                  <a:buChar char="q"/>
+                </a:pPr>
+                <a:endParaRPr lang="it-IT" sz="2400" dirty="0">
+                  <a:latin typeface="Arial" panose="020B0604020202020204" pitchFamily="34" charset="0"/>
+                  <a:cs typeface="Arial" panose="020B0604020202020204" pitchFamily="34" charset="0"/>
+                </a:endParaRPr>
+              </a:p>
+              <a:p>
+                <a:pPr marL="285750" indent="-285750">
+                  <a:buFont typeface="Wingdings" panose="05000000000000000000" pitchFamily="2" charset="2"/>
+                  <a:buChar char="q"/>
+                </a:pPr>
+                <a:r>
+                  <a:rPr lang="it-IT" sz="2400" dirty="0">
+                    <a:latin typeface="Arial" panose="020B0604020202020204" pitchFamily="34" charset="0"/>
+                    <a:cs typeface="Arial" panose="020B0604020202020204" pitchFamily="34" charset="0"/>
+                  </a:rPr>
+                  <a:t>Confronto dei risultati</a:t>
+                </a:r>
+              </a:p>
+              <a:p>
+                <a:pPr marL="742950" lvl="1" indent="-285750">
+                  <a:buFont typeface="Wingdings" panose="05000000000000000000" pitchFamily="2" charset="2"/>
+                  <a:buChar char="q"/>
+                </a:pPr>
+                <a:r>
+                  <a:rPr lang="it-IT" sz="2400" dirty="0">
+                    <a:latin typeface="Arial" panose="020B0604020202020204" pitchFamily="34" charset="0"/>
+                    <a:cs typeface="Arial" panose="020B0604020202020204" pitchFamily="34" charset="0"/>
+                  </a:rPr>
+                  <a:t>Risultati sperimentali VS Risultati proposti nel paper</a:t>
+                </a:r>
+              </a:p>
+              <a:p>
+                <a:pPr marL="285750" indent="-285750">
+                  <a:buFont typeface="Wingdings" panose="05000000000000000000" pitchFamily="2" charset="2"/>
+                  <a:buChar char="q"/>
+                </a:pPr>
+                <a:endParaRPr lang="it-IT" sz="2400" dirty="0">
+                  <a:latin typeface="Arial" panose="020B0604020202020204" pitchFamily="34" charset="0"/>
+                  <a:cs typeface="Arial" panose="020B0604020202020204" pitchFamily="34" charset="0"/>
+                </a:endParaRPr>
+              </a:p>
+              <a:p>
+                <a:pPr marL="285750" indent="-285750">
+                  <a:buFont typeface="Wingdings" panose="05000000000000000000" pitchFamily="2" charset="2"/>
+                  <a:buChar char="q"/>
+                </a:pPr>
+                <a:r>
+                  <a:rPr lang="it-IT" sz="2400" dirty="0">
+                    <a:latin typeface="Arial" panose="020B0604020202020204" pitchFamily="34" charset="0"/>
+                    <a:cs typeface="Arial" panose="020B0604020202020204" pitchFamily="34" charset="0"/>
+                  </a:rPr>
+                  <a:t>Implementazioni accessorie ed esperimenti aggiuntivi</a:t>
+                </a:r>
+              </a:p>
+              <a:p>
+                <a:pPr marL="742950" lvl="1" indent="-285750">
+                  <a:buFont typeface="Wingdings" panose="05000000000000000000" pitchFamily="2" charset="2"/>
+                  <a:buChar char="q"/>
+                </a:pPr>
+                <a:r>
+                  <a:rPr lang="it-IT" sz="2400" dirty="0">
+                    <a:latin typeface="Arial" panose="020B0604020202020204" pitchFamily="34" charset="0"/>
+                    <a:cs typeface="Arial" panose="020B0604020202020204" pitchFamily="34" charset="0"/>
+                  </a:rPr>
+                  <a:t>Ciò che non è stato svolto nel paper</a:t>
+                </a:r>
+              </a:p>
+              <a:p>
+                <a:pPr marL="742950" lvl="1" indent="-285750">
+                  <a:buFont typeface="Wingdings" panose="05000000000000000000" pitchFamily="2" charset="2"/>
+                  <a:buChar char="q"/>
+                </a:pPr>
+                <a:r>
+                  <a:rPr lang="it-IT" sz="2400" dirty="0">
+                    <a:latin typeface="Arial" panose="020B0604020202020204" pitchFamily="34" charset="0"/>
+                    <a:cs typeface="Arial" panose="020B0604020202020204" pitchFamily="34" charset="0"/>
+                  </a:rPr>
+                  <a:t>Approfondimenti o altri strumenti per analizzare il modello</a:t>
+                </a:r>
+              </a:p>
+            </p:txBody>
+          </p:sp>
+        </mc:Choice>
+        <mc:Fallback>
+          <p:sp>
+            <p:nvSpPr>
+              <p:cNvPr id="7" name="TextBox 6">
+                <a:extLst>
+                  <a:ext uri="{FF2B5EF4-FFF2-40B4-BE49-F238E27FC236}">
+                    <a16:creationId xmlns:a16="http://schemas.microsoft.com/office/drawing/2014/main" id="{506B2414-6B16-579D-3FCD-A65D35926A16}"/>
+                  </a:ext>
+                </a:extLst>
+              </p:cNvPr>
+              <p:cNvSpPr txBox="1">
+                <a:spLocks noRot="1" noChangeAspect="1" noMove="1" noResize="1" noEditPoints="1" noAdjustHandles="1" noChangeArrowheads="1" noChangeShapeType="1" noTextEdit="1"/>
+              </p:cNvSpPr>
+              <p:nvPr/>
+            </p:nvSpPr>
+            <p:spPr>
+              <a:xfrm>
+                <a:off x="688256" y="1242253"/>
+                <a:ext cx="9634303" cy="4893647"/>
+              </a:xfrm>
+              <a:prstGeom prst="rect">
+                <a:avLst/>
+              </a:prstGeom>
+              <a:blipFill>
+                <a:blip r:embed="rId2"/>
+                <a:stretch>
+                  <a:fillRect l="-886" t="-872" b="-1993"/>
+                </a:stretch>
+              </a:blipFill>
+            </p:spPr>
+            <p:txBody>
+              <a:bodyPr/>
+              <a:lstStyle/>
+              <a:p>
+                <a:r>
+                  <a:rPr lang="en-US">
+                    <a:noFill/>
+                  </a:rPr>
+                  <a:t> </a:t>
+                </a:r>
+              </a:p>
+            </p:txBody>
+          </p:sp>
+        </mc:Fallback>
+      </mc:AlternateContent>
+      <p:sp>
+        <p:nvSpPr>
+          <p:cNvPr id="2" name="Date Placeholder 1">
+            <a:extLst>
+              <a:ext uri="{FF2B5EF4-FFF2-40B4-BE49-F238E27FC236}">
+                <a16:creationId xmlns:a16="http://schemas.microsoft.com/office/drawing/2014/main" id="{4A3D3DA8-4ED4-1FFD-5BF3-665CBDEC1303}"/>
+              </a:ext>
+            </a:extLst>
+          </p:cNvPr>
+          <p:cNvSpPr>
+            <a:spLocks noGrp="1"/>
+          </p:cNvSpPr>
+          <p:nvPr>
+            <p:ph type="dt" sz="half" idx="10"/>
+          </p:nvPr>
+        </p:nvSpPr>
+        <p:spPr/>
+        <p:txBody>
+          <a:bodyPr/>
+          <a:lstStyle/>
+          <a:p>
+            <a:fld id="{27A3E659-987F-4162-B81F-7A5AC08EB42B}" type="datetime1">
+              <a:rPr lang="it-IT" smtClean="0"/>
+              <a:t>03/01/2026</a:t>
+            </a:fld>
+            <a:endParaRPr lang="en-US"/>
+          </a:p>
+        </p:txBody>
+      </p:sp>
+      <p:sp>
+        <p:nvSpPr>
+          <p:cNvPr id="5" name="Footer Placeholder 4">
+            <a:extLst>
+              <a:ext uri="{FF2B5EF4-FFF2-40B4-BE49-F238E27FC236}">
+                <a16:creationId xmlns:a16="http://schemas.microsoft.com/office/drawing/2014/main" id="{821BE40E-DBD2-F0C8-470A-B85277778148}"/>
+              </a:ext>
+            </a:extLst>
+          </p:cNvPr>
+          <p:cNvSpPr>
+            <a:spLocks noGrp="1"/>
+          </p:cNvSpPr>
+          <p:nvPr>
+            <p:ph type="ftr" sz="quarter" idx="11"/>
+          </p:nvPr>
+        </p:nvSpPr>
+        <p:spPr/>
+        <p:txBody>
+          <a:bodyPr/>
+          <a:lstStyle/>
+          <a:p>
+            <a:r>
+              <a:rPr lang="nn-NO"/>
+              <a:t>DINO MENG [SM3201466], BsC AIDA@MIGE</a:t>
+            </a:r>
+            <a:endParaRPr lang="en-US"/>
+          </a:p>
+        </p:txBody>
+      </p:sp>
+      <p:sp>
+        <p:nvSpPr>
+          <p:cNvPr id="6" name="Slide Number Placeholder 5">
+            <a:extLst>
+              <a:ext uri="{FF2B5EF4-FFF2-40B4-BE49-F238E27FC236}">
+                <a16:creationId xmlns:a16="http://schemas.microsoft.com/office/drawing/2014/main" id="{B2F78F72-A646-3A49-DE0A-CCD78E625CD6}"/>
+              </a:ext>
+            </a:extLst>
+          </p:cNvPr>
+          <p:cNvSpPr>
+            <a:spLocks noGrp="1"/>
+          </p:cNvSpPr>
+          <p:nvPr>
+            <p:ph type="sldNum" sz="quarter" idx="12"/>
+          </p:nvPr>
+        </p:nvSpPr>
+        <p:spPr/>
+        <p:txBody>
+          <a:bodyPr/>
+          <a:lstStyle/>
+          <a:p>
+            <a:fld id="{8BF32AC9-143A-477E-841D-1F801B7F8FE8}" type="slidenum">
+              <a:rPr lang="en-US" smtClean="0"/>
+              <a:t>3</a:t>
+            </a:fld>
+            <a:endParaRPr lang="en-US"/>
+          </a:p>
+        </p:txBody>
+      </p:sp>
+    </p:spTree>
+    <p:extLst>
+      <p:ext uri="{BB962C8B-B14F-4D97-AF65-F5344CB8AC3E}">
+        <p14:creationId xmlns:p14="http://schemas.microsoft.com/office/powerpoint/2010/main" val="11954351"/>
+      </p:ext>
+    </p:extLst>
+  </p:cSld>
+  <p:clrMapOvr>
+    <a:masterClrMapping/>
+  </p:clrMapOvr>
+</p:sld>
+</file>
+
+<file path=ppt/slides/slide30.xml><?xml version="1.0" encoding="utf-8"?>
+<p:sld xmlns:a="http://schemas.openxmlformats.org/drawingml/2006/main" xmlns:r="http://schemas.openxmlformats.org/officeDocument/2006/relationships" xmlns:p="http://schemas.openxmlformats.org/presentationml/2006/main">
+  <p:cSld>
+    <p:spTree>
+      <p:nvGrpSpPr>
+        <p:cNvPr id="1" name="">
+          <a:extLst>
+            <a:ext uri="{FF2B5EF4-FFF2-40B4-BE49-F238E27FC236}">
+              <a16:creationId xmlns:a16="http://schemas.microsoft.com/office/drawing/2014/main" id="{96E5363B-C443-2C30-76AC-1A20ED6B1343}"/>
+            </a:ext>
+          </a:extLst>
+        </p:cNvPr>
+        <p:cNvGrpSpPr/>
+        <p:nvPr/>
+      </p:nvGrpSpPr>
+      <p:grpSpPr>
+        <a:xfrm>
+          <a:off x="0" y="0"/>
+          <a:ext cx="0" cy="0"/>
+          <a:chOff x="0" y="0"/>
+          <a:chExt cx="0" cy="0"/>
+        </a:xfrm>
+      </p:grpSpPr>
+      <p:sp>
+        <p:nvSpPr>
+          <p:cNvPr id="3" name="TextBox 2">
+            <a:extLst>
+              <a:ext uri="{FF2B5EF4-FFF2-40B4-BE49-F238E27FC236}">
+                <a16:creationId xmlns:a16="http://schemas.microsoft.com/office/drawing/2014/main" id="{18D8A499-2D61-3350-373E-8EBD281DB141}"/>
               </a:ext>
             </a:extLst>
           </p:cNvPr>
@@ -10572,8 +12864,8 @@
         </p:nvSpPr>
         <p:spPr>
           <a:xfrm>
-            <a:off x="688256" y="1242253"/>
-            <a:ext cx="9634303" cy="3416320"/>
+            <a:off x="688257" y="442035"/>
+            <a:ext cx="5407743" cy="523220"/>
           </a:xfrm>
           <a:prstGeom prst="rect">
             <a:avLst/>
@@ -10581,126 +12873,116 @@
           <a:noFill/>
         </p:spPr>
         <p:txBody>
-          <a:bodyPr wrap="square" rtlCol="0">
+          <a:bodyPr wrap="square">
             <a:spAutoFit/>
           </a:bodyPr>
           <a:lstStyle/>
           <a:p>
-            <a:pPr marL="285750" indent="-285750">
-              <a:buFont typeface="Wingdings" panose="05000000000000000000" pitchFamily="2" charset="2"/>
-              <a:buChar char="q"/>
-            </a:pPr>
-            <a:r>
-              <a:rPr lang="it-IT" sz="2400" dirty="0">
-                <a:latin typeface="Arial" panose="020B0604020202020204" pitchFamily="34" charset="0"/>
-                <a:cs typeface="Arial" panose="020B0604020202020204" pitchFamily="34" charset="0"/>
-              </a:rPr>
-              <a:t>Implementazione del modello</a:t>
-            </a:r>
-          </a:p>
-          <a:p>
-            <a:pPr marL="742950" lvl="1" indent="-285750">
-              <a:buFont typeface="Wingdings" panose="05000000000000000000" pitchFamily="2" charset="2"/>
-              <a:buChar char="q"/>
-            </a:pPr>
-            <a:r>
-              <a:rPr lang="it-IT" sz="2400" dirty="0">
-                <a:latin typeface="Arial" panose="020B0604020202020204" pitchFamily="34" charset="0"/>
-                <a:cs typeface="Arial" panose="020B0604020202020204" pitchFamily="34" charset="0"/>
-              </a:rPr>
-              <a:t>Con Python</a:t>
-            </a:r>
-          </a:p>
-          <a:p>
-            <a:pPr marL="285750" indent="-285750">
-              <a:buFont typeface="Wingdings" panose="05000000000000000000" pitchFamily="2" charset="2"/>
-              <a:buChar char="q"/>
-            </a:pPr>
-            <a:endParaRPr lang="it-IT" sz="2400" dirty="0">
-              <a:latin typeface="Arial" panose="020B0604020202020204" pitchFamily="34" charset="0"/>
-              <a:cs typeface="Arial" panose="020B0604020202020204" pitchFamily="34" charset="0"/>
-            </a:endParaRPr>
-          </a:p>
-          <a:p>
-            <a:pPr marL="285750" indent="-285750">
-              <a:buFont typeface="Wingdings" panose="05000000000000000000" pitchFamily="2" charset="2"/>
-              <a:buChar char="q"/>
-            </a:pPr>
-            <a:r>
-              <a:rPr lang="it-IT" sz="2400" dirty="0">
-                <a:latin typeface="Arial" panose="020B0604020202020204" pitchFamily="34" charset="0"/>
-                <a:cs typeface="Arial" panose="020B0604020202020204" pitchFamily="34" charset="0"/>
-              </a:rPr>
-              <a:t>Riproduzione dei risultati con i parametri proposti</a:t>
-            </a:r>
-          </a:p>
-          <a:p>
-            <a:pPr marL="285750" indent="-285750">
-              <a:buFont typeface="Wingdings" panose="05000000000000000000" pitchFamily="2" charset="2"/>
-              <a:buChar char="q"/>
-            </a:pPr>
-            <a:endParaRPr lang="it-IT" sz="2400" dirty="0">
-              <a:latin typeface="Arial" panose="020B0604020202020204" pitchFamily="34" charset="0"/>
-              <a:cs typeface="Arial" panose="020B0604020202020204" pitchFamily="34" charset="0"/>
-            </a:endParaRPr>
-          </a:p>
-          <a:p>
-            <a:pPr marL="285750" indent="-285750">
-              <a:buFont typeface="Wingdings" panose="05000000000000000000" pitchFamily="2" charset="2"/>
-              <a:buChar char="q"/>
-            </a:pPr>
-            <a:r>
-              <a:rPr lang="it-IT" sz="2400" dirty="0">
-                <a:latin typeface="Arial" panose="020B0604020202020204" pitchFamily="34" charset="0"/>
-                <a:cs typeface="Arial" panose="020B0604020202020204" pitchFamily="34" charset="0"/>
-              </a:rPr>
-              <a:t>Confronto dei risultati</a:t>
-            </a:r>
-          </a:p>
-          <a:p>
-            <a:pPr marL="285750" indent="-285750">
-              <a:buFont typeface="Wingdings" panose="05000000000000000000" pitchFamily="2" charset="2"/>
-              <a:buChar char="q"/>
-            </a:pPr>
-            <a:endParaRPr lang="it-IT" sz="2400" dirty="0">
-              <a:latin typeface="Arial" panose="020B0604020202020204" pitchFamily="34" charset="0"/>
-              <a:cs typeface="Arial" panose="020B0604020202020204" pitchFamily="34" charset="0"/>
-            </a:endParaRPr>
-          </a:p>
-          <a:p>
-            <a:pPr marL="285750" indent="-285750">
-              <a:buFont typeface="Wingdings" panose="05000000000000000000" pitchFamily="2" charset="2"/>
-              <a:buChar char="q"/>
-            </a:pPr>
-            <a:r>
-              <a:rPr lang="it-IT" sz="2400" dirty="0">
-                <a:latin typeface="Arial" panose="020B0604020202020204" pitchFamily="34" charset="0"/>
-                <a:cs typeface="Arial" panose="020B0604020202020204" pitchFamily="34" charset="0"/>
-              </a:rPr>
-              <a:t>Implementazioni accessorie e esperimenti aggiuntivi</a:t>
-            </a:r>
-          </a:p>
-          <a:p>
-            <a:pPr marL="742950" lvl="1" indent="-285750">
-              <a:buFont typeface="Wingdings" panose="05000000000000000000" pitchFamily="2" charset="2"/>
-              <a:buChar char="q"/>
-            </a:pPr>
-            <a:r>
-              <a:rPr lang="it-IT" sz="2400" dirty="0">
-                <a:latin typeface="Arial" panose="020B0604020202020204" pitchFamily="34" charset="0"/>
-                <a:cs typeface="Arial" panose="020B0604020202020204" pitchFamily="34" charset="0"/>
-              </a:rPr>
-              <a:t>Ciò che non è stato svolto nel paper</a:t>
-            </a:r>
-          </a:p>
-        </p:txBody>
-      </p:sp>
-      <p:sp>
-        <p:nvSpPr>
-          <p:cNvPr id="2" name="Date Placeholder 1">
-            <a:extLst>
-              <a:ext uri="{FF2B5EF4-FFF2-40B4-BE49-F238E27FC236}">
-                <a16:creationId xmlns:a16="http://schemas.microsoft.com/office/drawing/2014/main" id="{4A3D3DA8-4ED4-1FFD-5BF3-665CBDEC1303}"/>
+            <a:r>
+              <a:rPr lang="it-IT" sz="2800" b="1" dirty="0"/>
+              <a:t>FATTORE </a:t>
+            </a:r>
+            <a:r>
+              <a:rPr lang="el-GR" sz="2800" b="1" dirty="0"/>
+              <a:t>𝜎</a:t>
+            </a:r>
+          </a:p>
+        </p:txBody>
+      </p:sp>
+      <p:sp>
+        <p:nvSpPr>
+          <p:cNvPr id="4" name="Rectangle 3">
+            <a:extLst>
+              <a:ext uri="{FF2B5EF4-FFF2-40B4-BE49-F238E27FC236}">
+                <a16:creationId xmlns:a16="http://schemas.microsoft.com/office/drawing/2014/main" id="{55BBA5D8-A77B-7A34-15A4-D5765E556311}"/>
+              </a:ext>
+            </a:extLst>
+          </p:cNvPr>
+          <p:cNvSpPr/>
+          <p:nvPr/>
+        </p:nvSpPr>
+        <p:spPr>
+          <a:xfrm>
+            <a:off x="688257" y="965255"/>
+            <a:ext cx="10815485" cy="104767"/>
+          </a:xfrm>
+          <a:prstGeom prst="rect">
+            <a:avLst/>
+          </a:prstGeom>
+          <a:solidFill>
+            <a:schemeClr val="accent4"/>
+          </a:solidFill>
+          <a:ln>
+            <a:noFill/>
+          </a:ln>
+        </p:spPr>
+        <p:style>
+          <a:lnRef idx="2">
+            <a:schemeClr val="accent1">
+              <a:shade val="15000"/>
+            </a:schemeClr>
+          </a:lnRef>
+          <a:fillRef idx="1">
+            <a:schemeClr val="accent1"/>
+          </a:fillRef>
+          <a:effectRef idx="0">
+            <a:schemeClr val="accent1"/>
+          </a:effectRef>
+          <a:fontRef idx="minor">
+            <a:schemeClr val="lt1"/>
+          </a:fontRef>
+        </p:style>
+        <p:txBody>
+          <a:bodyPr rtlCol="0" anchor="ctr"/>
+          <a:lstStyle/>
+          <a:p>
+            <a:pPr algn="ctr"/>
+            <a:endParaRPr lang="en-US"/>
+          </a:p>
+        </p:txBody>
+      </p:sp>
+      <p:sp>
+        <p:nvSpPr>
+          <p:cNvPr id="9" name="TextBox 8">
+            <a:extLst>
+              <a:ext uri="{FF2B5EF4-FFF2-40B4-BE49-F238E27FC236}">
+                <a16:creationId xmlns:a16="http://schemas.microsoft.com/office/drawing/2014/main" id="{6662678C-7842-9FB1-14CE-5E5831F4C67F}"/>
+              </a:ext>
+            </a:extLst>
+          </p:cNvPr>
+          <p:cNvSpPr txBox="1"/>
+          <p:nvPr/>
+        </p:nvSpPr>
+        <p:spPr>
+          <a:xfrm>
+            <a:off x="6959599" y="514495"/>
+            <a:ext cx="4544143" cy="461665"/>
+          </a:xfrm>
+          <a:prstGeom prst="rect">
+            <a:avLst/>
+          </a:prstGeom>
+          <a:noFill/>
+        </p:spPr>
+        <p:txBody>
+          <a:bodyPr wrap="square">
+            <a:spAutoFit/>
+          </a:bodyPr>
+          <a:lstStyle/>
+          <a:p>
+            <a:pPr algn="r"/>
+            <a:r>
+              <a:rPr lang="it-IT" sz="2400" b="1" i="1" dirty="0"/>
+              <a:t>Step: More stuff</a:t>
+            </a:r>
+          </a:p>
+        </p:txBody>
+      </p:sp>
+      <p:sp>
+        <p:nvSpPr>
+          <p:cNvPr id="5" name="Date Placeholder 4">
+            <a:extLst>
+              <a:ext uri="{FF2B5EF4-FFF2-40B4-BE49-F238E27FC236}">
+                <a16:creationId xmlns:a16="http://schemas.microsoft.com/office/drawing/2014/main" id="{4324BAF3-B0FA-49A4-4F07-372D1C29CD81}"/>
               </a:ext>
             </a:extLst>
           </p:cNvPr>
@@ -10716,9 +12998,9 @@
           <a:bodyPr/>
           <a:lstStyle/>
           <a:p>
-            <a:fld id="{27A3E659-987F-4162-B81F-7A5AC08EB42B}" type="datetime1">
+            <a:fld id="{C6EF02CD-913D-490D-9F2F-9D6BDCD607B3}" type="datetime1">
               <a:rPr lang="it-IT" smtClean="0"/>
-              <a:t>30/12/2025</a:t>
+              <a:t>03/01/2026</a:t>
             </a:fld>
             <a:endParaRPr lang="en-US"/>
           </a:p>
@@ -10726,10 +13008,10 @@
       </p:sp>
       <p:sp>
         <p:nvSpPr>
-          <p:cNvPr id="5" name="Footer Placeholder 4">
-            <a:extLst>
-              <a:ext uri="{FF2B5EF4-FFF2-40B4-BE49-F238E27FC236}">
-                <a16:creationId xmlns:a16="http://schemas.microsoft.com/office/drawing/2014/main" id="{821BE40E-DBD2-F0C8-470A-B85277778148}"/>
+          <p:cNvPr id="6" name="Footer Placeholder 5">
+            <a:extLst>
+              <a:ext uri="{FF2B5EF4-FFF2-40B4-BE49-F238E27FC236}">
+                <a16:creationId xmlns:a16="http://schemas.microsoft.com/office/drawing/2014/main" id="{24AAAAC8-FFC7-7B63-19BE-AF2B8C10509F}"/>
               </a:ext>
             </a:extLst>
           </p:cNvPr>
@@ -10755,10 +13037,10 @@
       </p:sp>
       <p:sp>
         <p:nvSpPr>
-          <p:cNvPr id="6" name="Slide Number Placeholder 5">
-            <a:extLst>
-              <a:ext uri="{FF2B5EF4-FFF2-40B4-BE49-F238E27FC236}">
-                <a16:creationId xmlns:a16="http://schemas.microsoft.com/office/drawing/2014/main" id="{B2F78F72-A646-3A49-DE0A-CCD78E625CD6}"/>
+          <p:cNvPr id="7" name="Slide Number Placeholder 6">
+            <a:extLst>
+              <a:ext uri="{FF2B5EF4-FFF2-40B4-BE49-F238E27FC236}">
+                <a16:creationId xmlns:a16="http://schemas.microsoft.com/office/drawing/2014/main" id="{6B6A1E7B-5B7F-2BF9-E56B-74329CFAE4FD}"/>
               </a:ext>
             </a:extLst>
           </p:cNvPr>
@@ -10776,16 +13058,444 @@
           <a:p>
             <a:fld id="{8BF32AC9-143A-477E-841D-1F801B7F8FE8}" type="slidenum">
               <a:rPr lang="en-US" smtClean="0"/>
-              <a:t>3</a:t>
+              <a:t>30</a:t>
             </a:fld>
             <a:endParaRPr lang="en-US"/>
           </a:p>
         </p:txBody>
       </p:sp>
+      <mc:AlternateContent xmlns:mc="http://schemas.openxmlformats.org/markup-compatibility/2006">
+        <mc:Choice xmlns:a14="http://schemas.microsoft.com/office/drawing/2010/main" Requires="a14">
+          <p:sp>
+            <p:nvSpPr>
+              <p:cNvPr id="12" name="TextBox 11">
+                <a:extLst>
+                  <a:ext uri="{FF2B5EF4-FFF2-40B4-BE49-F238E27FC236}">
+                    <a16:creationId xmlns:a16="http://schemas.microsoft.com/office/drawing/2014/main" id="{8D3955B6-A31B-BE5E-7BDD-21C6641EF41B}"/>
+                  </a:ext>
+                </a:extLst>
+              </p:cNvPr>
+              <p:cNvSpPr txBox="1"/>
+              <p:nvPr/>
+            </p:nvSpPr>
+            <p:spPr>
+              <a:xfrm>
+                <a:off x="6213010" y="1983429"/>
+                <a:ext cx="5447687" cy="1200329"/>
+              </a:xfrm>
+              <a:prstGeom prst="rect">
+                <a:avLst/>
+              </a:prstGeom>
+              <a:noFill/>
+            </p:spPr>
+            <p:txBody>
+              <a:bodyPr wrap="square">
+                <a:spAutoFit/>
+              </a:bodyPr>
+              <a:lstStyle/>
+              <a:p>
+                <a:pPr marL="285750" indent="-285750">
+                  <a:buFont typeface="Wingdings" panose="05000000000000000000" pitchFamily="2" charset="2"/>
+                  <a:buChar char="q"/>
+                </a:pPr>
+                <a:r>
+                  <a:rPr lang="it-IT" sz="2400" dirty="0">
+                    <a:latin typeface="Arial" panose="020B0604020202020204" pitchFamily="34" charset="0"/>
+                    <a:cs typeface="Arial" panose="020B0604020202020204" pitchFamily="34" charset="0"/>
+                  </a:rPr>
+                  <a:t>Risultato analogo per </a:t>
+                </a:r>
+                <a14:m>
+                  <m:oMath xmlns:m="http://schemas.openxmlformats.org/officeDocument/2006/math">
+                    <m:r>
+                      <a:rPr lang="it-IT" sz="2400" i="1">
+                        <a:latin typeface="Cambria Math" panose="02040503050406030204" pitchFamily="18" charset="0"/>
+                        <a:cs typeface="Arial" panose="020B0604020202020204" pitchFamily="34" charset="0"/>
+                      </a:rPr>
+                      <m:t>𝜎</m:t>
+                    </m:r>
+                  </m:oMath>
+                </a14:m>
+                <a:endParaRPr lang="it-IT" sz="2400" dirty="0">
+                  <a:latin typeface="Arial" panose="020B0604020202020204" pitchFamily="34" charset="0"/>
+                  <a:cs typeface="Arial" panose="020B0604020202020204" pitchFamily="34" charset="0"/>
+                </a:endParaRPr>
+              </a:p>
+              <a:p>
+                <a:pPr marL="742950" lvl="1" indent="-285750">
+                  <a:buFont typeface="Wingdings" panose="05000000000000000000" pitchFamily="2" charset="2"/>
+                  <a:buChar char="q"/>
+                </a:pPr>
+                <a:r>
+                  <a:rPr lang="it-IT" sz="2400" dirty="0">
+                    <a:latin typeface="Arial" panose="020B0604020202020204" pitchFamily="34" charset="0"/>
+                    <a:cs typeface="Arial" panose="020B0604020202020204" pitchFamily="34" charset="0"/>
+                  </a:rPr>
+                  <a:t>Questa volta fatto variare «solo» in [0,10]</a:t>
+                </a:r>
+              </a:p>
+            </p:txBody>
+          </p:sp>
+        </mc:Choice>
+        <mc:Fallback>
+          <p:sp>
+            <p:nvSpPr>
+              <p:cNvPr id="12" name="TextBox 11">
+                <a:extLst>
+                  <a:ext uri="{FF2B5EF4-FFF2-40B4-BE49-F238E27FC236}">
+                    <a16:creationId xmlns:a16="http://schemas.microsoft.com/office/drawing/2014/main" id="{8D3955B6-A31B-BE5E-7BDD-21C6641EF41B}"/>
+                  </a:ext>
+                </a:extLst>
+              </p:cNvPr>
+              <p:cNvSpPr txBox="1">
+                <a:spLocks noRot="1" noChangeAspect="1" noMove="1" noResize="1" noEditPoints="1" noAdjustHandles="1" noChangeArrowheads="1" noChangeShapeType="1" noTextEdit="1"/>
+              </p:cNvSpPr>
+              <p:nvPr/>
+            </p:nvSpPr>
+            <p:spPr>
+              <a:xfrm>
+                <a:off x="6213010" y="1983429"/>
+                <a:ext cx="5447687" cy="1200329"/>
+              </a:xfrm>
+              <a:prstGeom prst="rect">
+                <a:avLst/>
+              </a:prstGeom>
+              <a:blipFill>
+                <a:blip r:embed="rId2"/>
+                <a:stretch>
+                  <a:fillRect l="-1454" t="-3553" r="-895" b="-11168"/>
+                </a:stretch>
+              </a:blipFill>
+            </p:spPr>
+            <p:txBody>
+              <a:bodyPr/>
+              <a:lstStyle/>
+              <a:p>
+                <a:r>
+                  <a:rPr lang="en-US">
+                    <a:noFill/>
+                  </a:rPr>
+                  <a:t> </a:t>
+                </a:r>
+              </a:p>
+            </p:txBody>
+          </p:sp>
+        </mc:Fallback>
+      </mc:AlternateContent>
+      <p:pic>
+        <p:nvPicPr>
+          <p:cNvPr id="13" name="Picture 12" descr="A diagram of a graph&#10;&#10;AI-generated content may be incorrect.">
+            <a:extLst>
+              <a:ext uri="{FF2B5EF4-FFF2-40B4-BE49-F238E27FC236}">
+                <a16:creationId xmlns:a16="http://schemas.microsoft.com/office/drawing/2014/main" id="{B2263EAB-BD24-3C41-ED62-87EE15141122}"/>
+              </a:ext>
+            </a:extLst>
+          </p:cNvPr>
+          <p:cNvPicPr>
+            <a:picLocks noChangeAspect="1"/>
+          </p:cNvPicPr>
+          <p:nvPr/>
+        </p:nvPicPr>
+        <p:blipFill>
+          <a:blip r:embed="rId3"/>
+          <a:stretch>
+            <a:fillRect/>
+          </a:stretch>
+        </p:blipFill>
+        <p:spPr>
+          <a:xfrm>
+            <a:off x="688257" y="1416015"/>
+            <a:ext cx="5353050" cy="4572000"/>
+          </a:xfrm>
+          <a:prstGeom prst="rect">
+            <a:avLst/>
+          </a:prstGeom>
+        </p:spPr>
+      </p:pic>
     </p:spTree>
     <p:extLst>
       <p:ext uri="{BB962C8B-B14F-4D97-AF65-F5344CB8AC3E}">
-        <p14:creationId xmlns:p14="http://schemas.microsoft.com/office/powerpoint/2010/main" val="11954351"/>
+        <p14:creationId xmlns:p14="http://schemas.microsoft.com/office/powerpoint/2010/main" val="4047128178"/>
+      </p:ext>
+    </p:extLst>
+  </p:cSld>
+  <p:clrMapOvr>
+    <a:masterClrMapping/>
+  </p:clrMapOvr>
+</p:sld>
+</file>
+
+<file path=ppt/slides/slide31.xml><?xml version="1.0" encoding="utf-8"?>
+<p:sld xmlns:a="http://schemas.openxmlformats.org/drawingml/2006/main" xmlns:r="http://schemas.openxmlformats.org/officeDocument/2006/relationships" xmlns:p="http://schemas.openxmlformats.org/presentationml/2006/main">
+  <p:cSld>
+    <p:spTree>
+      <p:nvGrpSpPr>
+        <p:cNvPr id="1" name="">
+          <a:extLst>
+            <a:ext uri="{FF2B5EF4-FFF2-40B4-BE49-F238E27FC236}">
+              <a16:creationId xmlns:a16="http://schemas.microsoft.com/office/drawing/2014/main" id="{B74B6A40-D661-9A26-0E43-D4D937EBCC3F}"/>
+            </a:ext>
+          </a:extLst>
+        </p:cNvPr>
+        <p:cNvGrpSpPr/>
+        <p:nvPr/>
+      </p:nvGrpSpPr>
+      <p:grpSpPr>
+        <a:xfrm>
+          <a:off x="0" y="0"/>
+          <a:ext cx="0" cy="0"/>
+          <a:chOff x="0" y="0"/>
+          <a:chExt cx="0" cy="0"/>
+        </a:xfrm>
+      </p:grpSpPr>
+      <p:sp>
+        <p:nvSpPr>
+          <p:cNvPr id="3" name="TextBox 2">
+            <a:extLst>
+              <a:ext uri="{FF2B5EF4-FFF2-40B4-BE49-F238E27FC236}">
+                <a16:creationId xmlns:a16="http://schemas.microsoft.com/office/drawing/2014/main" id="{18F2C9DA-85F0-4279-745E-F5A7627C2113}"/>
+              </a:ext>
+            </a:extLst>
+          </p:cNvPr>
+          <p:cNvSpPr txBox="1"/>
+          <p:nvPr/>
+        </p:nvSpPr>
+        <p:spPr>
+          <a:xfrm>
+            <a:off x="688257" y="442035"/>
+            <a:ext cx="5407743" cy="523220"/>
+          </a:xfrm>
+          <a:prstGeom prst="rect">
+            <a:avLst/>
+          </a:prstGeom>
+          <a:noFill/>
+        </p:spPr>
+        <p:txBody>
+          <a:bodyPr wrap="square">
+            <a:spAutoFit/>
+          </a:bodyPr>
+          <a:lstStyle/>
+          <a:p>
+            <a:r>
+              <a:rPr lang="it-IT" sz="2800" b="1" dirty="0"/>
+              <a:t>FATTORE </a:t>
+            </a:r>
+            <a:r>
+              <a:rPr lang="el-GR" sz="2800" b="1" dirty="0"/>
+              <a:t>𝜎</a:t>
+            </a:r>
+          </a:p>
+        </p:txBody>
+      </p:sp>
+      <p:sp>
+        <p:nvSpPr>
+          <p:cNvPr id="4" name="Rectangle 3">
+            <a:extLst>
+              <a:ext uri="{FF2B5EF4-FFF2-40B4-BE49-F238E27FC236}">
+                <a16:creationId xmlns:a16="http://schemas.microsoft.com/office/drawing/2014/main" id="{A8C17A29-B201-8A6E-5DFB-AF2E0F3F1329}"/>
+              </a:ext>
+            </a:extLst>
+          </p:cNvPr>
+          <p:cNvSpPr/>
+          <p:nvPr/>
+        </p:nvSpPr>
+        <p:spPr>
+          <a:xfrm>
+            <a:off x="688257" y="965255"/>
+            <a:ext cx="10815485" cy="104767"/>
+          </a:xfrm>
+          <a:prstGeom prst="rect">
+            <a:avLst/>
+          </a:prstGeom>
+          <a:solidFill>
+            <a:schemeClr val="accent4"/>
+          </a:solidFill>
+          <a:ln>
+            <a:noFill/>
+          </a:ln>
+        </p:spPr>
+        <p:style>
+          <a:lnRef idx="2">
+            <a:schemeClr val="accent1">
+              <a:shade val="15000"/>
+            </a:schemeClr>
+          </a:lnRef>
+          <a:fillRef idx="1">
+            <a:schemeClr val="accent1"/>
+          </a:fillRef>
+          <a:effectRef idx="0">
+            <a:schemeClr val="accent1"/>
+          </a:effectRef>
+          <a:fontRef idx="minor">
+            <a:schemeClr val="lt1"/>
+          </a:fontRef>
+        </p:style>
+        <p:txBody>
+          <a:bodyPr rtlCol="0" anchor="ctr"/>
+          <a:lstStyle/>
+          <a:p>
+            <a:pPr algn="ctr"/>
+            <a:endParaRPr lang="en-US"/>
+          </a:p>
+        </p:txBody>
+      </p:sp>
+      <p:sp>
+        <p:nvSpPr>
+          <p:cNvPr id="9" name="TextBox 8">
+            <a:extLst>
+              <a:ext uri="{FF2B5EF4-FFF2-40B4-BE49-F238E27FC236}">
+                <a16:creationId xmlns:a16="http://schemas.microsoft.com/office/drawing/2014/main" id="{26ADCA7A-CA30-93E7-807D-37D345A7EF64}"/>
+              </a:ext>
+            </a:extLst>
+          </p:cNvPr>
+          <p:cNvSpPr txBox="1"/>
+          <p:nvPr/>
+        </p:nvSpPr>
+        <p:spPr>
+          <a:xfrm>
+            <a:off x="6959599" y="514495"/>
+            <a:ext cx="4544143" cy="461665"/>
+          </a:xfrm>
+          <a:prstGeom prst="rect">
+            <a:avLst/>
+          </a:prstGeom>
+          <a:noFill/>
+        </p:spPr>
+        <p:txBody>
+          <a:bodyPr wrap="square">
+            <a:spAutoFit/>
+          </a:bodyPr>
+          <a:lstStyle/>
+          <a:p>
+            <a:pPr algn="r"/>
+            <a:r>
+              <a:rPr lang="it-IT" sz="2400" b="1" i="1" dirty="0"/>
+              <a:t>Step: More stuff</a:t>
+            </a:r>
+          </a:p>
+        </p:txBody>
+      </p:sp>
+      <p:sp>
+        <p:nvSpPr>
+          <p:cNvPr id="5" name="Date Placeholder 4">
+            <a:extLst>
+              <a:ext uri="{FF2B5EF4-FFF2-40B4-BE49-F238E27FC236}">
+                <a16:creationId xmlns:a16="http://schemas.microsoft.com/office/drawing/2014/main" id="{B6164E64-4683-F6B2-A4E8-3147F1ED829E}"/>
+              </a:ext>
+            </a:extLst>
+          </p:cNvPr>
+          <p:cNvSpPr>
+            <a:spLocks noGrp="1"/>
+          </p:cNvSpPr>
+          <p:nvPr>
+            <p:ph type="dt" sz="half" idx="10"/>
+          </p:nvPr>
+        </p:nvSpPr>
+        <p:spPr/>
+        <p:txBody>
+          <a:bodyPr/>
+          <a:lstStyle/>
+          <a:p>
+            <a:fld id="{C6EF02CD-913D-490D-9F2F-9D6BDCD607B3}" type="datetime1">
+              <a:rPr lang="it-IT" smtClean="0"/>
+              <a:t>03/01/2026</a:t>
+            </a:fld>
+            <a:endParaRPr lang="en-US"/>
+          </a:p>
+        </p:txBody>
+      </p:sp>
+      <p:sp>
+        <p:nvSpPr>
+          <p:cNvPr id="6" name="Footer Placeholder 5">
+            <a:extLst>
+              <a:ext uri="{FF2B5EF4-FFF2-40B4-BE49-F238E27FC236}">
+                <a16:creationId xmlns:a16="http://schemas.microsoft.com/office/drawing/2014/main" id="{95A6F43F-BCD3-A849-551B-FD5B61092448}"/>
+              </a:ext>
+            </a:extLst>
+          </p:cNvPr>
+          <p:cNvSpPr>
+            <a:spLocks noGrp="1"/>
+          </p:cNvSpPr>
+          <p:nvPr>
+            <p:ph type="ftr" sz="quarter" idx="11"/>
+          </p:nvPr>
+        </p:nvSpPr>
+        <p:spPr/>
+        <p:txBody>
+          <a:bodyPr/>
+          <a:lstStyle/>
+          <a:p>
+            <a:r>
+              <a:rPr lang="nn-NO"/>
+              <a:t>DINO MENG [SM3201466], BsC AIDA@MIGE</a:t>
+            </a:r>
+            <a:endParaRPr lang="en-US"/>
+          </a:p>
+        </p:txBody>
+      </p:sp>
+      <p:sp>
+        <p:nvSpPr>
+          <p:cNvPr id="7" name="Slide Number Placeholder 6">
+            <a:extLst>
+              <a:ext uri="{FF2B5EF4-FFF2-40B4-BE49-F238E27FC236}">
+                <a16:creationId xmlns:a16="http://schemas.microsoft.com/office/drawing/2014/main" id="{B0F95E78-CE82-F067-7EBD-C1EB7772B1B7}"/>
+              </a:ext>
+            </a:extLst>
+          </p:cNvPr>
+          <p:cNvSpPr>
+            <a:spLocks noGrp="1"/>
+          </p:cNvSpPr>
+          <p:nvPr>
+            <p:ph type="sldNum" sz="quarter" idx="12"/>
+          </p:nvPr>
+        </p:nvSpPr>
+        <p:spPr/>
+        <p:txBody>
+          <a:bodyPr/>
+          <a:lstStyle/>
+          <a:p>
+            <a:fld id="{8BF32AC9-143A-477E-841D-1F801B7F8FE8}" type="slidenum">
+              <a:rPr lang="en-US" smtClean="0"/>
+              <a:t>31</a:t>
+            </a:fld>
+            <a:endParaRPr lang="en-US"/>
+          </a:p>
+        </p:txBody>
+      </p:sp>
+      <p:pic>
+        <p:nvPicPr>
+          <p:cNvPr id="8" name="Picture 7" descr="A graph of different colored lines&#10;&#10;AI-generated content may be incorrect.">
+            <a:extLst>
+              <a:ext uri="{FF2B5EF4-FFF2-40B4-BE49-F238E27FC236}">
+                <a16:creationId xmlns:a16="http://schemas.microsoft.com/office/drawing/2014/main" id="{55C000E7-208C-EC4A-1744-A812B88A24F4}"/>
+              </a:ext>
+            </a:extLst>
+          </p:cNvPr>
+          <p:cNvPicPr>
+            <a:picLocks noChangeAspect="1"/>
+          </p:cNvPicPr>
+          <p:nvPr/>
+        </p:nvPicPr>
+        <p:blipFill>
+          <a:blip r:embed="rId2"/>
+          <a:stretch>
+            <a:fillRect/>
+          </a:stretch>
+        </p:blipFill>
+        <p:spPr>
+          <a:xfrm>
+            <a:off x="1150340" y="1416015"/>
+            <a:ext cx="9891320" cy="4629817"/>
+          </a:xfrm>
+          <a:prstGeom prst="rect">
+            <a:avLst/>
+          </a:prstGeom>
+        </p:spPr>
+      </p:pic>
+    </p:spTree>
+    <p:extLst>
+      <p:ext uri="{BB962C8B-B14F-4D97-AF65-F5344CB8AC3E}">
+        <p14:creationId xmlns:p14="http://schemas.microsoft.com/office/powerpoint/2010/main" val="202612540"/>
       </p:ext>
     </p:extLst>
   </p:cSld>
@@ -11031,7 +13741,7 @@
           <a:p>
             <a:fld id="{D9845C1A-9AE7-4CFB-B4BB-FF54D6A71ADB}" type="datetime1">
               <a:rPr lang="it-IT" smtClean="0"/>
-              <a:t>30/12/2025</a:t>
+              <a:t>03/01/2026</a:t>
             </a:fld>
             <a:endParaRPr lang="en-US"/>
           </a:p>
@@ -11498,7 +14208,7 @@
         </p:blipFill>
         <p:spPr>
           <a:xfrm>
-            <a:off x="1769805" y="5212813"/>
+            <a:off x="1769805" y="5056101"/>
             <a:ext cx="8652388" cy="1359864"/>
           </a:xfrm>
           <a:prstGeom prst="rect">
@@ -11529,7 +14239,7 @@
           <a:p>
             <a:fld id="{5DCCCD83-F29B-4178-A789-3E26EABE1C7A}" type="datetime1">
               <a:rPr lang="it-IT" smtClean="0"/>
-              <a:t>30/12/2025</a:t>
+              <a:t>03/01/2026</a:t>
             </a:fld>
             <a:endParaRPr lang="en-US"/>
           </a:p>
@@ -11905,7 +14615,7 @@
           <a:p>
             <a:fld id="{4C441016-63A1-42AC-B939-9B58CF64338C}" type="datetime1">
               <a:rPr lang="it-IT" smtClean="0"/>
-              <a:t>30/12/2025</a:t>
+              <a:t>03/01/2026</a:t>
             </a:fld>
             <a:endParaRPr lang="en-US"/>
           </a:p>
@@ -12311,7 +15021,7 @@
           <a:p>
             <a:fld id="{63B55B49-8341-42AA-9537-F1E5653FF438}" type="datetime1">
               <a:rPr lang="it-IT" smtClean="0"/>
-              <a:t>30/12/2025</a:t>
+              <a:t>03/01/2026</a:t>
             </a:fld>
             <a:endParaRPr lang="en-US"/>
           </a:p>
@@ -12586,7 +15296,7 @@
           <a:p>
             <a:fld id="{8B082B6C-FF82-4F52-8DBB-5FB157E26F63}" type="datetime1">
               <a:rPr lang="it-IT" smtClean="0"/>
-              <a:t>30/12/2025</a:t>
+              <a:t>03/01/2026</a:t>
             </a:fld>
             <a:endParaRPr lang="en-US"/>
           </a:p>
@@ -12773,8 +15483,8 @@
           </a:p>
         </p:txBody>
       </p:sp>
-      <mc:AlternateContent xmlns:mc="http://schemas.openxmlformats.org/markup-compatibility/2006" xmlns:a14="http://schemas.microsoft.com/office/drawing/2010/main">
-        <mc:Choice Requires="a14">
+      <mc:AlternateContent xmlns:mc="http://schemas.openxmlformats.org/markup-compatibility/2006">
+        <mc:Choice xmlns:a14="http://schemas.microsoft.com/office/drawing/2010/main" Requires="a14">
           <p:sp>
             <p:nvSpPr>
               <p:cNvPr id="7" name="TextBox 6">
@@ -12878,7 +15588,7 @@
                     <a:latin typeface="Arial" panose="020B0604020202020204" pitchFamily="34" charset="0"/>
                     <a:cs typeface="Arial" panose="020B0604020202020204" pitchFamily="34" charset="0"/>
                   </a:rPr>
-                  <a:t>Esperimento 0: nada</a:t>
+                  <a:t>Esperimento 0: invariato</a:t>
                 </a:r>
               </a:p>
               <a:p>
@@ -13147,7 +15857,7 @@
             </p:txBody>
           </p:sp>
         </mc:Choice>
-        <mc:Fallback xmlns="">
+        <mc:Fallback>
           <p:sp>
             <p:nvSpPr>
               <p:cNvPr id="7" name="TextBox 6">
@@ -13281,7 +15991,7 @@
           <a:p>
             <a:fld id="{777D5E0C-B568-4CE8-9D10-8B739A803584}" type="datetime1">
               <a:rPr lang="it-IT" smtClean="0"/>
-              <a:t>30/12/2025</a:t>
+              <a:t>03/01/2026</a:t>
             </a:fld>
             <a:endParaRPr lang="en-US"/>
           </a:p>

--- a/Complex Systems/project/PresentationPROJECTSM3201466.pptx
+++ b/Complex Systems/project/PresentationPROJECTSM3201466.pptx
@@ -5,7 +5,7 @@
     <p:sldMasterId id="2147483648" r:id="rId1"/>
   </p:sldMasterIdLst>
   <p:notesMasterIdLst>
-    <p:notesMasterId r:id="rId33"/>
+    <p:notesMasterId r:id="rId31"/>
   </p:notesMasterIdLst>
   <p:sldIdLst>
     <p:sldId id="257" r:id="rId2"/>
@@ -31,14 +31,12 @@
     <p:sldId id="273" r:id="rId22"/>
     <p:sldId id="274" r:id="rId23"/>
     <p:sldId id="275" r:id="rId24"/>
-    <p:sldId id="276" r:id="rId25"/>
-    <p:sldId id="277" r:id="rId26"/>
-    <p:sldId id="278" r:id="rId27"/>
-    <p:sldId id="279" r:id="rId28"/>
-    <p:sldId id="286" r:id="rId29"/>
-    <p:sldId id="282" r:id="rId30"/>
-    <p:sldId id="284" r:id="rId31"/>
-    <p:sldId id="285" r:id="rId32"/>
+    <p:sldId id="278" r:id="rId25"/>
+    <p:sldId id="279" r:id="rId26"/>
+    <p:sldId id="286" r:id="rId27"/>
+    <p:sldId id="282" r:id="rId28"/>
+    <p:sldId id="284" r:id="rId29"/>
+    <p:sldId id="285" r:id="rId30"/>
   </p:sldIdLst>
   <p:sldSz cx="12192000" cy="6858000"/>
   <p:notesSz cx="6858000" cy="9144000"/>
@@ -227,7 +225,7 @@
           <a:p>
             <a:fld id="{BEA086CB-A695-49D9-8C2E-9873859BCA4A}" type="datetimeFigureOut">
               <a:rPr lang="en-US" smtClean="0"/>
-              <a:t>1/3/2026</a:t>
+              <a:t>1/4/2026</a:t>
             </a:fld>
             <a:endParaRPr lang="en-US"/>
           </a:p>
@@ -641,7 +639,7 @@
           <a:p>
             <a:fld id="{F07E9E74-BB92-43A1-93A9-56899A08A8EA}" type="datetime1">
               <a:rPr lang="it-IT" smtClean="0"/>
-              <a:t>03/01/2026</a:t>
+              <a:t>04/01/2026</a:t>
             </a:fld>
             <a:endParaRPr lang="en-US"/>
           </a:p>
@@ -843,7 +841,7 @@
           <a:p>
             <a:fld id="{52F8FB06-37EE-426F-B4C2-4056D956FFB6}" type="datetime1">
               <a:rPr lang="it-IT" smtClean="0"/>
-              <a:t>03/01/2026</a:t>
+              <a:t>04/01/2026</a:t>
             </a:fld>
             <a:endParaRPr lang="en-US"/>
           </a:p>
@@ -1055,7 +1053,7 @@
           <a:p>
             <a:fld id="{60D66374-9FAD-424A-A417-2FC77F42A162}" type="datetime1">
               <a:rPr lang="it-IT" smtClean="0"/>
-              <a:t>03/01/2026</a:t>
+              <a:t>04/01/2026</a:t>
             </a:fld>
             <a:endParaRPr lang="en-US"/>
           </a:p>
@@ -1257,7 +1255,7 @@
           <a:p>
             <a:fld id="{98FE7E5C-3220-4614-A522-AFD916A4C527}" type="datetime1">
               <a:rPr lang="it-IT" smtClean="0"/>
-              <a:t>03/01/2026</a:t>
+              <a:t>04/01/2026</a:t>
             </a:fld>
             <a:endParaRPr lang="en-US"/>
           </a:p>
@@ -1536,7 +1534,7 @@
           <a:p>
             <a:fld id="{67EDB044-EFFF-4CBD-97F7-2F91E5899AD1}" type="datetime1">
               <a:rPr lang="it-IT" smtClean="0"/>
-              <a:t>03/01/2026</a:t>
+              <a:t>04/01/2026</a:t>
             </a:fld>
             <a:endParaRPr lang="en-US"/>
           </a:p>
@@ -1805,7 +1803,7 @@
           <a:p>
             <a:fld id="{CE358A1C-7692-454B-B2B0-19CF8E1B29B2}" type="datetime1">
               <a:rPr lang="it-IT" smtClean="0"/>
-              <a:t>03/01/2026</a:t>
+              <a:t>04/01/2026</a:t>
             </a:fld>
             <a:endParaRPr lang="en-US"/>
           </a:p>
@@ -2221,7 +2219,7 @@
           <a:p>
             <a:fld id="{EA334287-8B58-4D94-B233-149ADA4285AB}" type="datetime1">
               <a:rPr lang="it-IT" smtClean="0"/>
-              <a:t>03/01/2026</a:t>
+              <a:t>04/01/2026</a:t>
             </a:fld>
             <a:endParaRPr lang="en-US"/>
           </a:p>
@@ -2366,7 +2364,7 @@
           <a:p>
             <a:fld id="{13469EFB-7A72-40B7-8B4E-23EC3F3D9178}" type="datetime1">
               <a:rPr lang="it-IT" smtClean="0"/>
-              <a:t>03/01/2026</a:t>
+              <a:t>04/01/2026</a:t>
             </a:fld>
             <a:endParaRPr lang="en-US"/>
           </a:p>
@@ -2483,7 +2481,7 @@
           <a:p>
             <a:fld id="{BC1B6C92-C1CD-4F55-ADFF-59EB1DF3CE0B}" type="datetime1">
               <a:rPr lang="it-IT" smtClean="0"/>
-              <a:t>03/01/2026</a:t>
+              <a:t>04/01/2026</a:t>
             </a:fld>
             <a:endParaRPr lang="en-US"/>
           </a:p>
@@ -2798,7 +2796,7 @@
           <a:p>
             <a:fld id="{5B54A038-0D44-4453-9D70-4F5E44A505EF}" type="datetime1">
               <a:rPr lang="it-IT" smtClean="0"/>
-              <a:t>03/01/2026</a:t>
+              <a:t>04/01/2026</a:t>
             </a:fld>
             <a:endParaRPr lang="en-US"/>
           </a:p>
@@ -3090,7 +3088,7 @@
           <a:p>
             <a:fld id="{F21DD4DD-220B-420A-80A9-E353ADB19088}" type="datetime1">
               <a:rPr lang="it-IT" smtClean="0"/>
-              <a:t>03/01/2026</a:t>
+              <a:t>04/01/2026</a:t>
             </a:fld>
             <a:endParaRPr lang="en-US"/>
           </a:p>
@@ -3335,7 +3333,7 @@
           <a:p>
             <a:fld id="{28ACF47F-4A45-43A2-A4A7-840A2C11A772}" type="datetime1">
               <a:rPr lang="it-IT" smtClean="0"/>
-              <a:t>03/01/2026</a:t>
+              <a:t>04/01/2026</a:t>
             </a:fld>
             <a:endParaRPr lang="en-US" dirty="0"/>
           </a:p>
@@ -3918,7 +3916,7 @@
           <a:p>
             <a:fld id="{52B8E00E-772D-4437-B382-3CBA9B54C360}" type="datetime1">
               <a:rPr lang="it-IT" smtClean="0"/>
-              <a:t>03/01/2026</a:t>
+              <a:t>04/01/2026</a:t>
             </a:fld>
             <a:endParaRPr lang="en-US"/>
           </a:p>
@@ -4354,7 +4352,7 @@
           <a:p>
             <a:fld id="{EA77D956-8483-48F0-B072-75AF7025ADAB}" type="datetime1">
               <a:rPr lang="it-IT" smtClean="0"/>
-              <a:t>03/01/2026</a:t>
+              <a:t>04/01/2026</a:t>
             </a:fld>
             <a:endParaRPr lang="en-US"/>
           </a:p>
@@ -4630,7 +4628,7 @@
           <a:p>
             <a:fld id="{7B4D458A-1DE7-4BA5-AF5A-3746645FA5DB}" type="datetime1">
               <a:rPr lang="it-IT" smtClean="0"/>
-              <a:t>03/01/2026</a:t>
+              <a:t>04/01/2026</a:t>
             </a:fld>
             <a:endParaRPr lang="en-US"/>
           </a:p>
@@ -4948,7 +4946,7 @@
           <a:p>
             <a:fld id="{0F073BDE-955B-4E08-A876-9008EBC2E5D9}" type="datetime1">
               <a:rPr lang="it-IT" smtClean="0"/>
-              <a:t>03/01/2026</a:t>
+              <a:t>04/01/2026</a:t>
             </a:fld>
             <a:endParaRPr lang="en-US"/>
           </a:p>
@@ -5266,7 +5264,7 @@
           <a:p>
             <a:fld id="{85077CAD-8672-4530-9999-911CF4F320CA}" type="datetime1">
               <a:rPr lang="it-IT" smtClean="0"/>
-              <a:t>03/01/2026</a:t>
+              <a:t>04/01/2026</a:t>
             </a:fld>
             <a:endParaRPr lang="en-US"/>
           </a:p>
@@ -5675,7 +5673,7 @@
           <a:p>
             <a:fld id="{A2AF2A43-5120-4B7D-95A3-344374AC366D}" type="datetime1">
               <a:rPr lang="it-IT" smtClean="0"/>
-              <a:t>03/01/2026</a:t>
+              <a:t>04/01/2026</a:t>
             </a:fld>
             <a:endParaRPr lang="en-US"/>
           </a:p>
@@ -5999,7 +5997,7 @@
           <a:p>
             <a:fld id="{0E4BD75C-8A8B-4E75-8D28-95927EC03BF3}" type="datetime1">
               <a:rPr lang="it-IT" smtClean="0"/>
-              <a:t>03/01/2026</a:t>
+              <a:t>04/01/2026</a:t>
             </a:fld>
             <a:endParaRPr lang="en-US"/>
           </a:p>
@@ -6391,7 +6389,7 @@
           <a:p>
             <a:fld id="{0E4BD75C-8A8B-4E75-8D28-95927EC03BF3}" type="datetime1">
               <a:rPr lang="it-IT" smtClean="0"/>
-              <a:t>03/01/2026</a:t>
+              <a:t>04/01/2026</a:t>
             </a:fld>
             <a:endParaRPr lang="en-US"/>
           </a:p>
@@ -6713,8 +6711,8 @@
           </a:p>
         </p:txBody>
       </p:sp>
-      <mc:AlternateContent xmlns:mc="http://schemas.openxmlformats.org/markup-compatibility/2006">
-        <mc:Choice xmlns:a14="http://schemas.microsoft.com/office/drawing/2010/main" Requires="a14">
+      <mc:AlternateContent xmlns:mc="http://schemas.openxmlformats.org/markup-compatibility/2006" xmlns:a14="http://schemas.microsoft.com/office/drawing/2010/main">
+        <mc:Choice Requires="a14">
           <p:sp>
             <p:nvSpPr>
               <p:cNvPr id="7" name="TextBox 6">
@@ -6924,7 +6922,7 @@
             </p:txBody>
           </p:sp>
         </mc:Choice>
-        <mc:Fallback>
+        <mc:Fallback xmlns="">
           <p:sp>
             <p:nvSpPr>
               <p:cNvPr id="7" name="TextBox 6">
@@ -7028,7 +7026,7 @@
           <a:p>
             <a:fld id="{0E4BD75C-8A8B-4E75-8D28-95927EC03BF3}" type="datetime1">
               <a:rPr lang="it-IT" smtClean="0"/>
-              <a:t>03/01/2026</a:t>
+              <a:t>04/01/2026</a:t>
             </a:fld>
             <a:endParaRPr lang="en-US"/>
           </a:p>
@@ -7395,7 +7393,7 @@
           <a:p>
             <a:fld id="{0E4BD75C-8A8B-4E75-8D28-95927EC03BF3}" type="datetime1">
               <a:rPr lang="it-IT" smtClean="0"/>
-              <a:t>03/01/2026</a:t>
+              <a:t>04/01/2026</a:t>
             </a:fld>
             <a:endParaRPr lang="en-US"/>
           </a:p>
@@ -7877,7 +7875,7 @@
           <a:p>
             <a:fld id="{22D2901C-25D2-4418-A5A0-267BB4E58730}" type="datetime1">
               <a:rPr lang="it-IT" smtClean="0"/>
-              <a:t>03/01/2026</a:t>
+              <a:t>04/01/2026</a:t>
             </a:fld>
             <a:endParaRPr lang="en-US"/>
           </a:p>
@@ -8358,7 +8356,7 @@
           <a:p>
             <a:fld id="{B4609506-6624-4C93-99FC-2FCD7C3B5EE8}" type="datetime1">
               <a:rPr lang="it-IT" smtClean="0"/>
-              <a:t>03/01/2026</a:t>
+              <a:t>04/01/2026</a:t>
             </a:fld>
             <a:endParaRPr lang="en-US"/>
           </a:p>
@@ -8791,7 +8789,7 @@
           <a:p>
             <a:fld id="{F2A62A29-0D40-4C95-BBC3-4CE9585C45D0}" type="datetime1">
               <a:rPr lang="it-IT" smtClean="0"/>
-              <a:t>03/01/2026</a:t>
+              <a:t>04/01/2026</a:t>
             </a:fld>
             <a:endParaRPr lang="en-US"/>
           </a:p>
@@ -9145,7 +9143,7 @@
           <a:p>
             <a:fld id="{E6091BEE-CBDC-4E52-BEE4-6FA4559C220C}" type="datetime1">
               <a:rPr lang="it-IT" smtClean="0"/>
-              <a:t>03/01/2026</a:t>
+              <a:t>04/01/2026</a:t>
             </a:fld>
             <a:endParaRPr lang="en-US"/>
           </a:p>
@@ -9575,7 +9573,7 @@
           <a:p>
             <a:fld id="{163A915D-2BA8-4F27-943A-17EA02CCA069}" type="datetime1">
               <a:rPr lang="it-IT" smtClean="0"/>
-              <a:t>03/01/2026</a:t>
+              <a:t>04/01/2026</a:t>
             </a:fld>
             <a:endParaRPr lang="en-US"/>
           </a:p>
@@ -9899,7 +9897,7 @@
           <a:p>
             <a:fld id="{536AB137-0A56-4868-923D-646D7C7CC445}" type="datetime1">
               <a:rPr lang="it-IT" smtClean="0"/>
-              <a:t>03/01/2026</a:t>
+              <a:t>04/01/2026</a:t>
             </a:fld>
             <a:endParaRPr lang="en-US"/>
           </a:p>
@@ -9984,7 +9982,7 @@
         <p:cNvPr id="1" name="">
           <a:extLst>
             <a:ext uri="{FF2B5EF4-FFF2-40B4-BE49-F238E27FC236}">
-              <a16:creationId xmlns:a16="http://schemas.microsoft.com/office/drawing/2014/main" id="{74B77452-60A4-53B8-652D-008E4EA9FB53}"/>
+              <a16:creationId xmlns:a16="http://schemas.microsoft.com/office/drawing/2014/main" id="{729FE9A4-6EA0-3AB3-6F89-BE1990D2F7BA}"/>
             </a:ext>
           </a:extLst>
         </p:cNvPr>
@@ -10004,7 +10002,7 @@
           <p:cNvPr id="3" name="TextBox 2">
             <a:extLst>
               <a:ext uri="{FF2B5EF4-FFF2-40B4-BE49-F238E27FC236}">
-                <a16:creationId xmlns:a16="http://schemas.microsoft.com/office/drawing/2014/main" id="{E99C2578-8874-C74D-3E16-6FF3FE3DA224}"/>
+                <a16:creationId xmlns:a16="http://schemas.microsoft.com/office/drawing/2014/main" id="{97B0DD3E-4157-B76F-9987-D1CD9DC5873B}"/>
               </a:ext>
             </a:extLst>
           </p:cNvPr>
@@ -10039,7 +10037,7 @@
           <p:cNvPr id="4" name="Rectangle 3">
             <a:extLst>
               <a:ext uri="{FF2B5EF4-FFF2-40B4-BE49-F238E27FC236}">
-                <a16:creationId xmlns:a16="http://schemas.microsoft.com/office/drawing/2014/main" id="{B377C2D9-F7F5-E652-0366-A39F3F7302A3}"/>
+                <a16:creationId xmlns:a16="http://schemas.microsoft.com/office/drawing/2014/main" id="{5CF43595-52D0-D7A0-717D-FDCAAB81CCE5}"/>
               </a:ext>
             </a:extLst>
           </p:cNvPr>
@@ -10088,137 +10086,10 @@
       </p:sp>
       <p:sp>
         <p:nvSpPr>
-          <p:cNvPr id="7" name="TextBox 6">
-            <a:extLst>
-              <a:ext uri="{FF2B5EF4-FFF2-40B4-BE49-F238E27FC236}">
-                <a16:creationId xmlns:a16="http://schemas.microsoft.com/office/drawing/2014/main" id="{DCDC62C6-31C1-2703-CF00-528C89686729}"/>
-              </a:ext>
-            </a:extLst>
-          </p:cNvPr>
-          <p:cNvSpPr txBox="1"/>
-          <p:nvPr/>
-        </p:nvSpPr>
-        <p:spPr>
-          <a:xfrm>
-            <a:off x="688257" y="1257642"/>
-            <a:ext cx="10028904" cy="3416320"/>
-          </a:xfrm>
-          <a:prstGeom prst="rect">
-            <a:avLst/>
-          </a:prstGeom>
-          <a:noFill/>
-        </p:spPr>
-        <p:txBody>
-          <a:bodyPr wrap="square" rtlCol="0">
-            <a:spAutoFit/>
-          </a:bodyPr>
-          <a:lstStyle/>
-          <a:p>
-            <a:pPr marL="285750" indent="-285750">
-              <a:buFont typeface="Wingdings" panose="05000000000000000000" pitchFamily="2" charset="2"/>
-              <a:buChar char="q"/>
-            </a:pPr>
-            <a:r>
-              <a:rPr lang="it-IT" sz="2400" dirty="0">
-                <a:latin typeface="Arial" panose="020B0604020202020204" pitchFamily="34" charset="0"/>
-                <a:cs typeface="Arial" panose="020B0604020202020204" pitchFamily="34" charset="0"/>
-              </a:rPr>
-              <a:t>Test della stabilità con la Jacobiana: W2 rimane «NOT LAS» con i parametri del primo esperimento</a:t>
-            </a:r>
-          </a:p>
-          <a:p>
-            <a:pPr marL="742950" lvl="1" indent="-285750">
-              <a:buFont typeface="Wingdings" panose="05000000000000000000" pitchFamily="2" charset="2"/>
-              <a:buChar char="q"/>
-            </a:pPr>
-            <a:r>
-              <a:rPr lang="it-IT" sz="2400" dirty="0">
-                <a:latin typeface="Arial" panose="020B0604020202020204" pitchFamily="34" charset="0"/>
-                <a:cs typeface="Arial" panose="020B0604020202020204" pitchFamily="34" charset="0"/>
-              </a:rPr>
-              <a:t>Il paper dichiarava che è LAS</a:t>
-            </a:r>
-          </a:p>
-          <a:p>
-            <a:pPr marL="742950" lvl="1" indent="-285750">
-              <a:buFont typeface="Wingdings" panose="05000000000000000000" pitchFamily="2" charset="2"/>
-              <a:buChar char="q"/>
-            </a:pPr>
-            <a:r>
-              <a:rPr lang="it-IT" sz="2400" dirty="0">
-                <a:latin typeface="Arial" panose="020B0604020202020204" pitchFamily="34" charset="0"/>
-                <a:cs typeface="Arial" panose="020B0604020202020204" pitchFamily="34" charset="0"/>
-              </a:rPr>
-              <a:t>Secondo la simulazione lo è «apparentemente»</a:t>
-            </a:r>
-          </a:p>
-          <a:p>
-            <a:pPr marL="285750" indent="-285750">
-              <a:buFont typeface="Wingdings" panose="05000000000000000000" pitchFamily="2" charset="2"/>
-              <a:buChar char="q"/>
-            </a:pPr>
-            <a:endParaRPr lang="it-IT" sz="2400" dirty="0">
-              <a:latin typeface="Arial" panose="020B0604020202020204" pitchFamily="34" charset="0"/>
-              <a:cs typeface="Arial" panose="020B0604020202020204" pitchFamily="34" charset="0"/>
-            </a:endParaRPr>
-          </a:p>
-          <a:p>
-            <a:pPr marL="285750" indent="-285750">
-              <a:buFont typeface="Wingdings" panose="05000000000000000000" pitchFamily="2" charset="2"/>
-              <a:buChar char="q"/>
-            </a:pPr>
-            <a:r>
-              <a:rPr lang="it-IT" sz="2400" dirty="0">
-                <a:latin typeface="Arial" panose="020B0604020202020204" pitchFamily="34" charset="0"/>
-                <a:cs typeface="Arial" panose="020B0604020202020204" pitchFamily="34" charset="0"/>
-              </a:rPr>
-              <a:t>Risultato inconsistente: rifatto l’esperimento</a:t>
-            </a:r>
-          </a:p>
-          <a:p>
-            <a:pPr marL="742950" lvl="1" indent="-285750">
-              <a:buFont typeface="Wingdings" panose="05000000000000000000" pitchFamily="2" charset="2"/>
-              <a:buChar char="q"/>
-            </a:pPr>
-            <a:r>
-              <a:rPr lang="it-IT" sz="2400" dirty="0">
-                <a:latin typeface="Arial" panose="020B0604020202020204" pitchFamily="34" charset="0"/>
-                <a:cs typeface="Arial" panose="020B0604020202020204" pitchFamily="34" charset="0"/>
-              </a:rPr>
-              <a:t>Prolungato la simulazione (T=600), </a:t>
-            </a:r>
-          </a:p>
-          <a:p>
-            <a:pPr marL="742950" lvl="1" indent="-285750">
-              <a:buFont typeface="Wingdings" panose="05000000000000000000" pitchFamily="2" charset="2"/>
-              <a:buChar char="q"/>
-            </a:pPr>
-            <a:r>
-              <a:rPr lang="it-IT" sz="2400" dirty="0">
-                <a:latin typeface="Arial" panose="020B0604020202020204" pitchFamily="34" charset="0"/>
-                <a:cs typeface="Arial" panose="020B0604020202020204" pitchFamily="34" charset="0"/>
-              </a:rPr>
-              <a:t>Zoom su W2 nel grafico (time series)</a:t>
-            </a:r>
-          </a:p>
-          <a:p>
-            <a:pPr marL="742950" lvl="1" indent="-285750">
-              <a:buFont typeface="Wingdings" panose="05000000000000000000" pitchFamily="2" charset="2"/>
-              <a:buChar char="q"/>
-            </a:pPr>
-            <a:endParaRPr lang="it-IT" sz="2400" dirty="0">
-              <a:latin typeface="Arial" panose="020B0604020202020204" pitchFamily="34" charset="0"/>
-              <a:cs typeface="Arial" panose="020B0604020202020204" pitchFamily="34" charset="0"/>
-            </a:endParaRPr>
-          </a:p>
-        </p:txBody>
-      </p:sp>
-      <p:sp>
-        <p:nvSpPr>
           <p:cNvPr id="9" name="TextBox 8">
             <a:extLst>
               <a:ext uri="{FF2B5EF4-FFF2-40B4-BE49-F238E27FC236}">
-                <a16:creationId xmlns:a16="http://schemas.microsoft.com/office/drawing/2014/main" id="{B59FD846-B850-2EE9-2713-55B4018AB9AE}"/>
+                <a16:creationId xmlns:a16="http://schemas.microsoft.com/office/drawing/2014/main" id="{BCA882A3-E78C-B2BA-6C34-867AB5F7AA15}"/>
               </a:ext>
             </a:extLst>
           </p:cNvPr>
@@ -10251,10 +10122,137 @@
       </p:sp>
       <p:sp>
         <p:nvSpPr>
-          <p:cNvPr id="2" name="Date Placeholder 1">
-            <a:extLst>
-              <a:ext uri="{FF2B5EF4-FFF2-40B4-BE49-F238E27FC236}">
-                <a16:creationId xmlns:a16="http://schemas.microsoft.com/office/drawing/2014/main" id="{51390EF2-A2B8-BBB5-966B-44A83DF61685}"/>
+          <p:cNvPr id="2" name="TextBox 1">
+            <a:extLst>
+              <a:ext uri="{FF2B5EF4-FFF2-40B4-BE49-F238E27FC236}">
+                <a16:creationId xmlns:a16="http://schemas.microsoft.com/office/drawing/2014/main" id="{5229A26A-3C47-D1AB-FDA1-B2AF227D8AB0}"/>
+              </a:ext>
+            </a:extLst>
+          </p:cNvPr>
+          <p:cNvSpPr txBox="1"/>
+          <p:nvPr/>
+        </p:nvSpPr>
+        <p:spPr>
+          <a:xfrm>
+            <a:off x="688257" y="1257642"/>
+            <a:ext cx="10028904" cy="3046988"/>
+          </a:xfrm>
+          <a:prstGeom prst="rect">
+            <a:avLst/>
+          </a:prstGeom>
+          <a:noFill/>
+        </p:spPr>
+        <p:txBody>
+          <a:bodyPr wrap="square" rtlCol="0">
+            <a:spAutoFit/>
+          </a:bodyPr>
+          <a:lstStyle/>
+          <a:p>
+            <a:pPr marL="285750" indent="-285750">
+              <a:buFont typeface="Wingdings" panose="05000000000000000000" pitchFamily="2" charset="2"/>
+              <a:buChar char="q"/>
+            </a:pPr>
+            <a:r>
+              <a:rPr lang="it-IT" sz="2400" dirty="0">
+                <a:latin typeface="Arial" panose="020B0604020202020204" pitchFamily="34" charset="0"/>
+                <a:cs typeface="Arial" panose="020B0604020202020204" pitchFamily="34" charset="0"/>
+              </a:rPr>
+              <a:t>Implicazioni</a:t>
+            </a:r>
+          </a:p>
+          <a:p>
+            <a:pPr marL="742950" lvl="1" indent="-285750">
+              <a:buFont typeface="Wingdings" panose="05000000000000000000" pitchFamily="2" charset="2"/>
+              <a:buChar char="q"/>
+            </a:pPr>
+            <a:r>
+              <a:rPr lang="it-IT" sz="2400" dirty="0">
+                <a:latin typeface="Arial" panose="020B0604020202020204" pitchFamily="34" charset="0"/>
+                <a:cs typeface="Arial" panose="020B0604020202020204" pitchFamily="34" charset="0"/>
+              </a:rPr>
+              <a:t>In realtà W2 non era mai LAS</a:t>
+            </a:r>
+          </a:p>
+          <a:p>
+            <a:pPr marL="1200150" lvl="2" indent="-285750">
+              <a:buFont typeface="Wingdings" panose="05000000000000000000" pitchFamily="2" charset="2"/>
+              <a:buChar char="q"/>
+            </a:pPr>
+            <a:r>
+              <a:rPr lang="it-IT" sz="2400" dirty="0">
+                <a:latin typeface="Arial" panose="020B0604020202020204" pitchFamily="34" charset="0"/>
+                <a:cs typeface="Arial" panose="020B0604020202020204" pitchFamily="34" charset="0"/>
+              </a:rPr>
+              <a:t>A discapito delle apparenze e quanto proposto nel paper</a:t>
+            </a:r>
+          </a:p>
+          <a:p>
+            <a:pPr marL="1200150" lvl="2" indent="-285750">
+              <a:buFont typeface="Wingdings" panose="05000000000000000000" pitchFamily="2" charset="2"/>
+              <a:buChar char="q"/>
+            </a:pPr>
+            <a:endParaRPr lang="it-IT" sz="2400" dirty="0">
+              <a:latin typeface="Arial" panose="020B0604020202020204" pitchFamily="34" charset="0"/>
+              <a:cs typeface="Arial" panose="020B0604020202020204" pitchFamily="34" charset="0"/>
+            </a:endParaRPr>
+          </a:p>
+          <a:p>
+            <a:pPr marL="285750" indent="-285750">
+              <a:buFont typeface="Wingdings" panose="05000000000000000000" pitchFamily="2" charset="2"/>
+              <a:buChar char="q"/>
+            </a:pPr>
+            <a:r>
+              <a:rPr lang="it-IT" sz="2400" dirty="0">
+                <a:latin typeface="Arial" panose="020B0604020202020204" pitchFamily="34" charset="0"/>
+                <a:cs typeface="Arial" panose="020B0604020202020204" pitchFamily="34" charset="0"/>
+              </a:rPr>
+              <a:t>Per confermare che non sia noise dovuto al risolutore:</a:t>
+            </a:r>
+          </a:p>
+          <a:p>
+            <a:pPr marL="742950" lvl="1" indent="-285750">
+              <a:buFont typeface="Wingdings" panose="05000000000000000000" pitchFamily="2" charset="2"/>
+              <a:buChar char="q"/>
+            </a:pPr>
+            <a:r>
+              <a:rPr lang="it-IT" sz="2400" dirty="0">
+                <a:latin typeface="Arial" panose="020B0604020202020204" pitchFamily="34" charset="0"/>
+                <a:cs typeface="Arial" panose="020B0604020202020204" pitchFamily="34" charset="0"/>
+              </a:rPr>
+              <a:t>Rieffettuato l’esperimento con metodi numerici diversi</a:t>
+            </a:r>
+          </a:p>
+          <a:p>
+            <a:pPr marL="742950" lvl="1" indent="-285750">
+              <a:buFont typeface="Wingdings" panose="05000000000000000000" pitchFamily="2" charset="2"/>
+              <a:buChar char="q"/>
+            </a:pPr>
+            <a:r>
+              <a:rPr lang="it-IT" sz="2400" dirty="0">
+                <a:latin typeface="Arial" panose="020B0604020202020204" pitchFamily="34" charset="0"/>
+                <a:cs typeface="Arial" panose="020B0604020202020204" pitchFamily="34" charset="0"/>
+              </a:rPr>
+              <a:t>Stessi risultati, confermato</a:t>
+            </a:r>
+          </a:p>
+          <a:p>
+            <a:pPr marL="742950" lvl="1" indent="-285750">
+              <a:buFont typeface="Wingdings" panose="05000000000000000000" pitchFamily="2" charset="2"/>
+              <a:buChar char="q"/>
+            </a:pPr>
+            <a:endParaRPr lang="it-IT" sz="2400" dirty="0">
+              <a:latin typeface="Arial" panose="020B0604020202020204" pitchFamily="34" charset="0"/>
+              <a:cs typeface="Arial" panose="020B0604020202020204" pitchFamily="34" charset="0"/>
+            </a:endParaRPr>
+          </a:p>
+        </p:txBody>
+      </p:sp>
+      <p:sp>
+        <p:nvSpPr>
+          <p:cNvPr id="5" name="Date Placeholder 4">
+            <a:extLst>
+              <a:ext uri="{FF2B5EF4-FFF2-40B4-BE49-F238E27FC236}">
+                <a16:creationId xmlns:a16="http://schemas.microsoft.com/office/drawing/2014/main" id="{2ED846B0-B38C-A692-E9A3-FFA97B60385E}"/>
               </a:ext>
             </a:extLst>
           </p:cNvPr>
@@ -10270,9 +10268,9 @@
           <a:bodyPr/>
           <a:lstStyle/>
           <a:p>
-            <a:fld id="{DCD21B3C-0FEB-4362-9619-5D2FABF53E43}" type="datetime1">
+            <a:fld id="{C5E77C2B-364A-4D71-8BAD-691E9BD64FFE}" type="datetime1">
               <a:rPr lang="it-IT" smtClean="0"/>
-              <a:t>03/01/2026</a:t>
+              <a:t>04/01/2026</a:t>
             </a:fld>
             <a:endParaRPr lang="en-US"/>
           </a:p>
@@ -10280,10 +10278,10 @@
       </p:sp>
       <p:sp>
         <p:nvSpPr>
-          <p:cNvPr id="5" name="Footer Placeholder 4">
-            <a:extLst>
-              <a:ext uri="{FF2B5EF4-FFF2-40B4-BE49-F238E27FC236}">
-                <a16:creationId xmlns:a16="http://schemas.microsoft.com/office/drawing/2014/main" id="{5521B956-4499-3184-8C33-996D0739C513}"/>
+          <p:cNvPr id="6" name="Footer Placeholder 5">
+            <a:extLst>
+              <a:ext uri="{FF2B5EF4-FFF2-40B4-BE49-F238E27FC236}">
+                <a16:creationId xmlns:a16="http://schemas.microsoft.com/office/drawing/2014/main" id="{F9469EB7-D049-4D97-ECD0-F3AE4915CDA4}"/>
               </a:ext>
             </a:extLst>
           </p:cNvPr>
@@ -10309,10 +10307,10 @@
       </p:sp>
       <p:sp>
         <p:nvSpPr>
-          <p:cNvPr id="6" name="Slide Number Placeholder 5">
-            <a:extLst>
-              <a:ext uri="{FF2B5EF4-FFF2-40B4-BE49-F238E27FC236}">
-                <a16:creationId xmlns:a16="http://schemas.microsoft.com/office/drawing/2014/main" id="{792BBE54-F7B0-EA44-F857-F163C5680F96}"/>
+          <p:cNvPr id="7" name="Slide Number Placeholder 6">
+            <a:extLst>
+              <a:ext uri="{FF2B5EF4-FFF2-40B4-BE49-F238E27FC236}">
+                <a16:creationId xmlns:a16="http://schemas.microsoft.com/office/drawing/2014/main" id="{2FF40AED-F76D-795E-5333-A4B81466833A}"/>
               </a:ext>
             </a:extLst>
           </p:cNvPr>
@@ -10339,7 +10337,7 @@
     </p:spTree>
     <p:extLst>
       <p:ext uri="{BB962C8B-B14F-4D97-AF65-F5344CB8AC3E}">
-        <p14:creationId xmlns:p14="http://schemas.microsoft.com/office/powerpoint/2010/main" val="678765483"/>
+        <p14:creationId xmlns:p14="http://schemas.microsoft.com/office/powerpoint/2010/main" val="393239306"/>
       </p:ext>
     </p:extLst>
   </p:cSld>
@@ -10357,7 +10355,7 @@
         <p:cNvPr id="1" name="">
           <a:extLst>
             <a:ext uri="{FF2B5EF4-FFF2-40B4-BE49-F238E27FC236}">
-              <a16:creationId xmlns:a16="http://schemas.microsoft.com/office/drawing/2014/main" id="{E082A180-B4A3-A9EB-9C6B-97B7E6484B17}"/>
+              <a16:creationId xmlns:a16="http://schemas.microsoft.com/office/drawing/2014/main" id="{DDC630C4-A2E7-4675-A543-9FEFEB48C66F}"/>
             </a:ext>
           </a:extLst>
         </p:cNvPr>
@@ -10377,7 +10375,7 @@
           <p:cNvPr id="3" name="TextBox 2">
             <a:extLst>
               <a:ext uri="{FF2B5EF4-FFF2-40B4-BE49-F238E27FC236}">
-                <a16:creationId xmlns:a16="http://schemas.microsoft.com/office/drawing/2014/main" id="{E5B1847E-2437-275D-BC8A-1158C45A42FE}"/>
+                <a16:creationId xmlns:a16="http://schemas.microsoft.com/office/drawing/2014/main" id="{AA900290-CEF3-1C84-ED74-6C905D2E8C39}"/>
               </a:ext>
             </a:extLst>
           </p:cNvPr>
@@ -10402,7 +10400,7 @@
           <a:p>
             <a:r>
               <a:rPr lang="it-IT" sz="2800" b="1" dirty="0"/>
-              <a:t>APPROFONDIMENTO SU W2</a:t>
+              <a:t>ULTERIORI SPERIMENTAZIONI </a:t>
             </a:r>
           </a:p>
         </p:txBody>
@@ -10412,7 +10410,7 @@
           <p:cNvPr id="4" name="Rectangle 3">
             <a:extLst>
               <a:ext uri="{FF2B5EF4-FFF2-40B4-BE49-F238E27FC236}">
-                <a16:creationId xmlns:a16="http://schemas.microsoft.com/office/drawing/2014/main" id="{64639D59-BF8C-D069-2A3D-938ED69BB493}"/>
+                <a16:creationId xmlns:a16="http://schemas.microsoft.com/office/drawing/2014/main" id="{A296E94F-3EDF-85B5-9FE9-C83560FAD80A}"/>
               </a:ext>
             </a:extLst>
           </p:cNvPr>
@@ -10464,7 +10462,7 @@
           <p:cNvPr id="9" name="TextBox 8">
             <a:extLst>
               <a:ext uri="{FF2B5EF4-FFF2-40B4-BE49-F238E27FC236}">
-                <a16:creationId xmlns:a16="http://schemas.microsoft.com/office/drawing/2014/main" id="{C8D9922D-1633-0551-E062-C52E3F0E267A}"/>
+                <a16:creationId xmlns:a16="http://schemas.microsoft.com/office/drawing/2014/main" id="{FE8E974E-5D79-EAAD-8215-1CA8EB2ACDE4}"/>
               </a:ext>
             </a:extLst>
           </p:cNvPr>
@@ -10490,655 +10488,6 @@
             <a:pPr algn="r"/>
             <a:r>
               <a:rPr lang="it-IT" sz="2400" b="1" i="1" dirty="0"/>
-              <a:t>Step: Confronto dei risultati</a:t>
-            </a:r>
-          </a:p>
-        </p:txBody>
-      </p:sp>
-      <p:sp>
-        <p:nvSpPr>
-          <p:cNvPr id="2" name="Date Placeholder 1">
-            <a:extLst>
-              <a:ext uri="{FF2B5EF4-FFF2-40B4-BE49-F238E27FC236}">
-                <a16:creationId xmlns:a16="http://schemas.microsoft.com/office/drawing/2014/main" id="{544BA93B-ECEE-4F15-D94B-C334B01275B7}"/>
-              </a:ext>
-            </a:extLst>
-          </p:cNvPr>
-          <p:cNvSpPr>
-            <a:spLocks noGrp="1"/>
-          </p:cNvSpPr>
-          <p:nvPr>
-            <p:ph type="dt" sz="half" idx="10"/>
-          </p:nvPr>
-        </p:nvSpPr>
-        <p:spPr/>
-        <p:txBody>
-          <a:bodyPr/>
-          <a:lstStyle/>
-          <a:p>
-            <a:fld id="{5B984578-FC4A-4BC5-A56E-8C608487780F}" type="datetime1">
-              <a:rPr lang="it-IT" smtClean="0"/>
-              <a:t>03/01/2026</a:t>
-            </a:fld>
-            <a:endParaRPr lang="en-US"/>
-          </a:p>
-        </p:txBody>
-      </p:sp>
-      <p:sp>
-        <p:nvSpPr>
-          <p:cNvPr id="6" name="Footer Placeholder 5">
-            <a:extLst>
-              <a:ext uri="{FF2B5EF4-FFF2-40B4-BE49-F238E27FC236}">
-                <a16:creationId xmlns:a16="http://schemas.microsoft.com/office/drawing/2014/main" id="{9D233D3A-3D73-C032-F75B-02CE82B2998C}"/>
-              </a:ext>
-            </a:extLst>
-          </p:cNvPr>
-          <p:cNvSpPr>
-            <a:spLocks noGrp="1"/>
-          </p:cNvSpPr>
-          <p:nvPr>
-            <p:ph type="ftr" sz="quarter" idx="11"/>
-          </p:nvPr>
-        </p:nvSpPr>
-        <p:spPr/>
-        <p:txBody>
-          <a:bodyPr/>
-          <a:lstStyle/>
-          <a:p>
-            <a:r>
-              <a:rPr lang="nn-NO"/>
-              <a:t>DINO MENG [SM3201466], BsC AIDA@MIGE</a:t>
-            </a:r>
-            <a:endParaRPr lang="en-US"/>
-          </a:p>
-        </p:txBody>
-      </p:sp>
-      <p:sp>
-        <p:nvSpPr>
-          <p:cNvPr id="7" name="Slide Number Placeholder 6">
-            <a:extLst>
-              <a:ext uri="{FF2B5EF4-FFF2-40B4-BE49-F238E27FC236}">
-                <a16:creationId xmlns:a16="http://schemas.microsoft.com/office/drawing/2014/main" id="{18AEDF5E-071A-9EF2-4F0B-F1A2F9CEFAB8}"/>
-              </a:ext>
-            </a:extLst>
-          </p:cNvPr>
-          <p:cNvSpPr>
-            <a:spLocks noGrp="1"/>
-          </p:cNvSpPr>
-          <p:nvPr>
-            <p:ph type="sldNum" sz="quarter" idx="12"/>
-          </p:nvPr>
-        </p:nvSpPr>
-        <p:spPr/>
-        <p:txBody>
-          <a:bodyPr/>
-          <a:lstStyle/>
-          <a:p>
-            <a:fld id="{8BF32AC9-143A-477E-841D-1F801B7F8FE8}" type="slidenum">
-              <a:rPr lang="en-US" smtClean="0"/>
-              <a:t>25</a:t>
-            </a:fld>
-            <a:endParaRPr lang="en-US"/>
-          </a:p>
-        </p:txBody>
-      </p:sp>
-      <p:pic>
-        <p:nvPicPr>
-          <p:cNvPr id="10" name="Picture 9" descr="A graph of a sound wave&#10;&#10;AI-generated content may be incorrect.">
-            <a:extLst>
-              <a:ext uri="{FF2B5EF4-FFF2-40B4-BE49-F238E27FC236}">
-                <a16:creationId xmlns:a16="http://schemas.microsoft.com/office/drawing/2014/main" id="{644F473F-2078-AD6E-2303-3291CBD0651E}"/>
-              </a:ext>
-            </a:extLst>
-          </p:cNvPr>
-          <p:cNvPicPr>
-            <a:picLocks noChangeAspect="1"/>
-          </p:cNvPicPr>
-          <p:nvPr/>
-        </p:nvPicPr>
-        <p:blipFill>
-          <a:blip r:embed="rId2"/>
-          <a:stretch>
-            <a:fillRect/>
-          </a:stretch>
-        </p:blipFill>
-        <p:spPr>
-          <a:xfrm>
-            <a:off x="1338261" y="1436711"/>
-            <a:ext cx="9515475" cy="4552950"/>
-          </a:xfrm>
-          <a:prstGeom prst="rect">
-            <a:avLst/>
-          </a:prstGeom>
-        </p:spPr>
-      </p:pic>
-    </p:spTree>
-    <p:extLst>
-      <p:ext uri="{BB962C8B-B14F-4D97-AF65-F5344CB8AC3E}">
-        <p14:creationId xmlns:p14="http://schemas.microsoft.com/office/powerpoint/2010/main" val="3663038567"/>
-      </p:ext>
-    </p:extLst>
-  </p:cSld>
-  <p:clrMapOvr>
-    <a:masterClrMapping/>
-  </p:clrMapOvr>
-</p:sld>
-</file>
-
-<file path=ppt/slides/slide26.xml><?xml version="1.0" encoding="utf-8"?>
-<p:sld xmlns:a="http://schemas.openxmlformats.org/drawingml/2006/main" xmlns:r="http://schemas.openxmlformats.org/officeDocument/2006/relationships" xmlns:p="http://schemas.openxmlformats.org/presentationml/2006/main">
-  <p:cSld>
-    <p:spTree>
-      <p:nvGrpSpPr>
-        <p:cNvPr id="1" name="">
-          <a:extLst>
-            <a:ext uri="{FF2B5EF4-FFF2-40B4-BE49-F238E27FC236}">
-              <a16:creationId xmlns:a16="http://schemas.microsoft.com/office/drawing/2014/main" id="{729FE9A4-6EA0-3AB3-6F89-BE1990D2F7BA}"/>
-            </a:ext>
-          </a:extLst>
-        </p:cNvPr>
-        <p:cNvGrpSpPr/>
-        <p:nvPr/>
-      </p:nvGrpSpPr>
-      <p:grpSpPr>
-        <a:xfrm>
-          <a:off x="0" y="0"/>
-          <a:ext cx="0" cy="0"/>
-          <a:chOff x="0" y="0"/>
-          <a:chExt cx="0" cy="0"/>
-        </a:xfrm>
-      </p:grpSpPr>
-      <p:sp>
-        <p:nvSpPr>
-          <p:cNvPr id="3" name="TextBox 2">
-            <a:extLst>
-              <a:ext uri="{FF2B5EF4-FFF2-40B4-BE49-F238E27FC236}">
-                <a16:creationId xmlns:a16="http://schemas.microsoft.com/office/drawing/2014/main" id="{97B0DD3E-4157-B76F-9987-D1CD9DC5873B}"/>
-              </a:ext>
-            </a:extLst>
-          </p:cNvPr>
-          <p:cNvSpPr txBox="1"/>
-          <p:nvPr/>
-        </p:nvSpPr>
-        <p:spPr>
-          <a:xfrm>
-            <a:off x="688257" y="442035"/>
-            <a:ext cx="5407743" cy="523220"/>
-          </a:xfrm>
-          <a:prstGeom prst="rect">
-            <a:avLst/>
-          </a:prstGeom>
-          <a:noFill/>
-        </p:spPr>
-        <p:txBody>
-          <a:bodyPr wrap="square">
-            <a:spAutoFit/>
-          </a:bodyPr>
-          <a:lstStyle/>
-          <a:p>
-            <a:r>
-              <a:rPr lang="it-IT" sz="2800" b="1" dirty="0"/>
-              <a:t>APPROFONDIMENTO SU W2</a:t>
-            </a:r>
-          </a:p>
-        </p:txBody>
-      </p:sp>
-      <p:sp>
-        <p:nvSpPr>
-          <p:cNvPr id="4" name="Rectangle 3">
-            <a:extLst>
-              <a:ext uri="{FF2B5EF4-FFF2-40B4-BE49-F238E27FC236}">
-                <a16:creationId xmlns:a16="http://schemas.microsoft.com/office/drawing/2014/main" id="{5CF43595-52D0-D7A0-717D-FDCAAB81CCE5}"/>
-              </a:ext>
-            </a:extLst>
-          </p:cNvPr>
-          <p:cNvSpPr/>
-          <p:nvPr/>
-        </p:nvSpPr>
-        <p:spPr>
-          <a:xfrm>
-            <a:off x="688257" y="965255"/>
-            <a:ext cx="10815485" cy="104767"/>
-          </a:xfrm>
-          <a:prstGeom prst="rect">
-            <a:avLst/>
-          </a:prstGeom>
-          <a:solidFill>
-            <a:schemeClr val="accent4"/>
-          </a:solidFill>
-          <a:ln>
-            <a:noFill/>
-          </a:ln>
-        </p:spPr>
-        <p:style>
-          <a:lnRef idx="2">
-            <a:schemeClr val="accent1">
-              <a:shade val="15000"/>
-            </a:schemeClr>
-          </a:lnRef>
-          <a:fillRef idx="1">
-            <a:schemeClr val="accent1"/>
-          </a:fillRef>
-          <a:effectRef idx="0">
-            <a:schemeClr val="accent1"/>
-          </a:effectRef>
-          <a:fontRef idx="minor">
-            <a:schemeClr val="lt1"/>
-          </a:fontRef>
-        </p:style>
-        <p:txBody>
-          <a:bodyPr rtlCol="0" anchor="ctr"/>
-          <a:lstStyle/>
-          <a:p>
-            <a:pPr algn="ctr"/>
-            <a:endParaRPr lang="en-US"/>
-          </a:p>
-        </p:txBody>
-      </p:sp>
-      <p:sp>
-        <p:nvSpPr>
-          <p:cNvPr id="9" name="TextBox 8">
-            <a:extLst>
-              <a:ext uri="{FF2B5EF4-FFF2-40B4-BE49-F238E27FC236}">
-                <a16:creationId xmlns:a16="http://schemas.microsoft.com/office/drawing/2014/main" id="{BCA882A3-E78C-B2BA-6C34-867AB5F7AA15}"/>
-              </a:ext>
-            </a:extLst>
-          </p:cNvPr>
-          <p:cNvSpPr txBox="1"/>
-          <p:nvPr/>
-        </p:nvSpPr>
-        <p:spPr>
-          <a:xfrm>
-            <a:off x="6959599" y="514495"/>
-            <a:ext cx="4544143" cy="461665"/>
-          </a:xfrm>
-          <a:prstGeom prst="rect">
-            <a:avLst/>
-          </a:prstGeom>
-          <a:noFill/>
-        </p:spPr>
-        <p:txBody>
-          <a:bodyPr wrap="square">
-            <a:spAutoFit/>
-          </a:bodyPr>
-          <a:lstStyle/>
-          <a:p>
-            <a:pPr algn="r"/>
-            <a:r>
-              <a:rPr lang="it-IT" sz="2400" b="1" i="1" dirty="0"/>
-              <a:t>Step: Confronto dei risultati</a:t>
-            </a:r>
-          </a:p>
-        </p:txBody>
-      </p:sp>
-      <p:sp>
-        <p:nvSpPr>
-          <p:cNvPr id="2" name="TextBox 1">
-            <a:extLst>
-              <a:ext uri="{FF2B5EF4-FFF2-40B4-BE49-F238E27FC236}">
-                <a16:creationId xmlns:a16="http://schemas.microsoft.com/office/drawing/2014/main" id="{5229A26A-3C47-D1AB-FDA1-B2AF227D8AB0}"/>
-              </a:ext>
-            </a:extLst>
-          </p:cNvPr>
-          <p:cNvSpPr txBox="1"/>
-          <p:nvPr/>
-        </p:nvSpPr>
-        <p:spPr>
-          <a:xfrm>
-            <a:off x="688257" y="1257642"/>
-            <a:ext cx="10028904" cy="3046988"/>
-          </a:xfrm>
-          <a:prstGeom prst="rect">
-            <a:avLst/>
-          </a:prstGeom>
-          <a:noFill/>
-        </p:spPr>
-        <p:txBody>
-          <a:bodyPr wrap="square" rtlCol="0">
-            <a:spAutoFit/>
-          </a:bodyPr>
-          <a:lstStyle/>
-          <a:p>
-            <a:pPr marL="285750" indent="-285750">
-              <a:buFont typeface="Wingdings" panose="05000000000000000000" pitchFamily="2" charset="2"/>
-              <a:buChar char="q"/>
-            </a:pPr>
-            <a:r>
-              <a:rPr lang="it-IT" sz="2400" dirty="0">
-                <a:latin typeface="Arial" panose="020B0604020202020204" pitchFamily="34" charset="0"/>
-                <a:cs typeface="Arial" panose="020B0604020202020204" pitchFamily="34" charset="0"/>
-              </a:rPr>
-              <a:t>Implicazioni</a:t>
-            </a:r>
-          </a:p>
-          <a:p>
-            <a:pPr marL="742950" lvl="1" indent="-285750">
-              <a:buFont typeface="Wingdings" panose="05000000000000000000" pitchFamily="2" charset="2"/>
-              <a:buChar char="q"/>
-            </a:pPr>
-            <a:r>
-              <a:rPr lang="it-IT" sz="2400" dirty="0">
-                <a:latin typeface="Arial" panose="020B0604020202020204" pitchFamily="34" charset="0"/>
-                <a:cs typeface="Arial" panose="020B0604020202020204" pitchFamily="34" charset="0"/>
-              </a:rPr>
-              <a:t>In realtà W2 non era mai LAS</a:t>
-            </a:r>
-          </a:p>
-          <a:p>
-            <a:pPr marL="1200150" lvl="2" indent="-285750">
-              <a:buFont typeface="Wingdings" panose="05000000000000000000" pitchFamily="2" charset="2"/>
-              <a:buChar char="q"/>
-            </a:pPr>
-            <a:r>
-              <a:rPr lang="it-IT" sz="2400" dirty="0">
-                <a:latin typeface="Arial" panose="020B0604020202020204" pitchFamily="34" charset="0"/>
-                <a:cs typeface="Arial" panose="020B0604020202020204" pitchFamily="34" charset="0"/>
-              </a:rPr>
-              <a:t>A discapito delle apparenze e quanto proposto nel paper</a:t>
-            </a:r>
-          </a:p>
-          <a:p>
-            <a:pPr marL="1200150" lvl="2" indent="-285750">
-              <a:buFont typeface="Wingdings" panose="05000000000000000000" pitchFamily="2" charset="2"/>
-              <a:buChar char="q"/>
-            </a:pPr>
-            <a:endParaRPr lang="it-IT" sz="2400" dirty="0">
-              <a:latin typeface="Arial" panose="020B0604020202020204" pitchFamily="34" charset="0"/>
-              <a:cs typeface="Arial" panose="020B0604020202020204" pitchFamily="34" charset="0"/>
-            </a:endParaRPr>
-          </a:p>
-          <a:p>
-            <a:pPr marL="285750" indent="-285750">
-              <a:buFont typeface="Wingdings" panose="05000000000000000000" pitchFamily="2" charset="2"/>
-              <a:buChar char="q"/>
-            </a:pPr>
-            <a:r>
-              <a:rPr lang="it-IT" sz="2400" dirty="0">
-                <a:latin typeface="Arial" panose="020B0604020202020204" pitchFamily="34" charset="0"/>
-                <a:cs typeface="Arial" panose="020B0604020202020204" pitchFamily="34" charset="0"/>
-              </a:rPr>
-              <a:t>Per confermare che non sia noise dovuto al risolutore:</a:t>
-            </a:r>
-          </a:p>
-          <a:p>
-            <a:pPr marL="742950" lvl="1" indent="-285750">
-              <a:buFont typeface="Wingdings" panose="05000000000000000000" pitchFamily="2" charset="2"/>
-              <a:buChar char="q"/>
-            </a:pPr>
-            <a:r>
-              <a:rPr lang="it-IT" sz="2400" dirty="0">
-                <a:latin typeface="Arial" panose="020B0604020202020204" pitchFamily="34" charset="0"/>
-                <a:cs typeface="Arial" panose="020B0604020202020204" pitchFamily="34" charset="0"/>
-              </a:rPr>
-              <a:t>Rieffettuato l’esperimento con metodi numerici diversi</a:t>
-            </a:r>
-          </a:p>
-          <a:p>
-            <a:pPr marL="742950" lvl="1" indent="-285750">
-              <a:buFont typeface="Wingdings" panose="05000000000000000000" pitchFamily="2" charset="2"/>
-              <a:buChar char="q"/>
-            </a:pPr>
-            <a:r>
-              <a:rPr lang="it-IT" sz="2400" dirty="0">
-                <a:latin typeface="Arial" panose="020B0604020202020204" pitchFamily="34" charset="0"/>
-                <a:cs typeface="Arial" panose="020B0604020202020204" pitchFamily="34" charset="0"/>
-              </a:rPr>
-              <a:t>Stessi risultati, confermato</a:t>
-            </a:r>
-          </a:p>
-          <a:p>
-            <a:pPr marL="742950" lvl="1" indent="-285750">
-              <a:buFont typeface="Wingdings" panose="05000000000000000000" pitchFamily="2" charset="2"/>
-              <a:buChar char="q"/>
-            </a:pPr>
-            <a:endParaRPr lang="it-IT" sz="2400" dirty="0">
-              <a:latin typeface="Arial" panose="020B0604020202020204" pitchFamily="34" charset="0"/>
-              <a:cs typeface="Arial" panose="020B0604020202020204" pitchFamily="34" charset="0"/>
-            </a:endParaRPr>
-          </a:p>
-        </p:txBody>
-      </p:sp>
-      <p:sp>
-        <p:nvSpPr>
-          <p:cNvPr id="5" name="Date Placeholder 4">
-            <a:extLst>
-              <a:ext uri="{FF2B5EF4-FFF2-40B4-BE49-F238E27FC236}">
-                <a16:creationId xmlns:a16="http://schemas.microsoft.com/office/drawing/2014/main" id="{2ED846B0-B38C-A692-E9A3-FFA97B60385E}"/>
-              </a:ext>
-            </a:extLst>
-          </p:cNvPr>
-          <p:cNvSpPr>
-            <a:spLocks noGrp="1"/>
-          </p:cNvSpPr>
-          <p:nvPr>
-            <p:ph type="dt" sz="half" idx="10"/>
-          </p:nvPr>
-        </p:nvSpPr>
-        <p:spPr/>
-        <p:txBody>
-          <a:bodyPr/>
-          <a:lstStyle/>
-          <a:p>
-            <a:fld id="{C5E77C2B-364A-4D71-8BAD-691E9BD64FFE}" type="datetime1">
-              <a:rPr lang="it-IT" smtClean="0"/>
-              <a:t>03/01/2026</a:t>
-            </a:fld>
-            <a:endParaRPr lang="en-US"/>
-          </a:p>
-        </p:txBody>
-      </p:sp>
-      <p:sp>
-        <p:nvSpPr>
-          <p:cNvPr id="6" name="Footer Placeholder 5">
-            <a:extLst>
-              <a:ext uri="{FF2B5EF4-FFF2-40B4-BE49-F238E27FC236}">
-                <a16:creationId xmlns:a16="http://schemas.microsoft.com/office/drawing/2014/main" id="{F9469EB7-D049-4D97-ECD0-F3AE4915CDA4}"/>
-              </a:ext>
-            </a:extLst>
-          </p:cNvPr>
-          <p:cNvSpPr>
-            <a:spLocks noGrp="1"/>
-          </p:cNvSpPr>
-          <p:nvPr>
-            <p:ph type="ftr" sz="quarter" idx="11"/>
-          </p:nvPr>
-        </p:nvSpPr>
-        <p:spPr/>
-        <p:txBody>
-          <a:bodyPr/>
-          <a:lstStyle/>
-          <a:p>
-            <a:r>
-              <a:rPr lang="nn-NO"/>
-              <a:t>DINO MENG [SM3201466], BsC AIDA@MIGE</a:t>
-            </a:r>
-            <a:endParaRPr lang="en-US"/>
-          </a:p>
-        </p:txBody>
-      </p:sp>
-      <p:sp>
-        <p:nvSpPr>
-          <p:cNvPr id="7" name="Slide Number Placeholder 6">
-            <a:extLst>
-              <a:ext uri="{FF2B5EF4-FFF2-40B4-BE49-F238E27FC236}">
-                <a16:creationId xmlns:a16="http://schemas.microsoft.com/office/drawing/2014/main" id="{2FF40AED-F76D-795E-5333-A4B81466833A}"/>
-              </a:ext>
-            </a:extLst>
-          </p:cNvPr>
-          <p:cNvSpPr>
-            <a:spLocks noGrp="1"/>
-          </p:cNvSpPr>
-          <p:nvPr>
-            <p:ph type="sldNum" sz="quarter" idx="12"/>
-          </p:nvPr>
-        </p:nvSpPr>
-        <p:spPr/>
-        <p:txBody>
-          <a:bodyPr/>
-          <a:lstStyle/>
-          <a:p>
-            <a:fld id="{8BF32AC9-143A-477E-841D-1F801B7F8FE8}" type="slidenum">
-              <a:rPr lang="en-US" smtClean="0"/>
-              <a:t>26</a:t>
-            </a:fld>
-            <a:endParaRPr lang="en-US"/>
-          </a:p>
-        </p:txBody>
-      </p:sp>
-    </p:spTree>
-    <p:extLst>
-      <p:ext uri="{BB962C8B-B14F-4D97-AF65-F5344CB8AC3E}">
-        <p14:creationId xmlns:p14="http://schemas.microsoft.com/office/powerpoint/2010/main" val="393239306"/>
-      </p:ext>
-    </p:extLst>
-  </p:cSld>
-  <p:clrMapOvr>
-    <a:masterClrMapping/>
-  </p:clrMapOvr>
-</p:sld>
-</file>
-
-<file path=ppt/slides/slide27.xml><?xml version="1.0" encoding="utf-8"?>
-<p:sld xmlns:a="http://schemas.openxmlformats.org/drawingml/2006/main" xmlns:r="http://schemas.openxmlformats.org/officeDocument/2006/relationships" xmlns:p="http://schemas.openxmlformats.org/presentationml/2006/main">
-  <p:cSld>
-    <p:spTree>
-      <p:nvGrpSpPr>
-        <p:cNvPr id="1" name="">
-          <a:extLst>
-            <a:ext uri="{FF2B5EF4-FFF2-40B4-BE49-F238E27FC236}">
-              <a16:creationId xmlns:a16="http://schemas.microsoft.com/office/drawing/2014/main" id="{DDC630C4-A2E7-4675-A543-9FEFEB48C66F}"/>
-            </a:ext>
-          </a:extLst>
-        </p:cNvPr>
-        <p:cNvGrpSpPr/>
-        <p:nvPr/>
-      </p:nvGrpSpPr>
-      <p:grpSpPr>
-        <a:xfrm>
-          <a:off x="0" y="0"/>
-          <a:ext cx="0" cy="0"/>
-          <a:chOff x="0" y="0"/>
-          <a:chExt cx="0" cy="0"/>
-        </a:xfrm>
-      </p:grpSpPr>
-      <p:sp>
-        <p:nvSpPr>
-          <p:cNvPr id="3" name="TextBox 2">
-            <a:extLst>
-              <a:ext uri="{FF2B5EF4-FFF2-40B4-BE49-F238E27FC236}">
-                <a16:creationId xmlns:a16="http://schemas.microsoft.com/office/drawing/2014/main" id="{AA900290-CEF3-1C84-ED74-6C905D2E8C39}"/>
-              </a:ext>
-            </a:extLst>
-          </p:cNvPr>
-          <p:cNvSpPr txBox="1"/>
-          <p:nvPr/>
-        </p:nvSpPr>
-        <p:spPr>
-          <a:xfrm>
-            <a:off x="688257" y="442035"/>
-            <a:ext cx="5407743" cy="523220"/>
-          </a:xfrm>
-          <a:prstGeom prst="rect">
-            <a:avLst/>
-          </a:prstGeom>
-          <a:noFill/>
-        </p:spPr>
-        <p:txBody>
-          <a:bodyPr wrap="square">
-            <a:spAutoFit/>
-          </a:bodyPr>
-          <a:lstStyle/>
-          <a:p>
-            <a:r>
-              <a:rPr lang="it-IT" sz="2800" b="1" dirty="0"/>
-              <a:t>ULTERIORI SPERIMENTAZIONI </a:t>
-            </a:r>
-          </a:p>
-        </p:txBody>
-      </p:sp>
-      <p:sp>
-        <p:nvSpPr>
-          <p:cNvPr id="4" name="Rectangle 3">
-            <a:extLst>
-              <a:ext uri="{FF2B5EF4-FFF2-40B4-BE49-F238E27FC236}">
-                <a16:creationId xmlns:a16="http://schemas.microsoft.com/office/drawing/2014/main" id="{A296E94F-3EDF-85B5-9FE9-C83560FAD80A}"/>
-              </a:ext>
-            </a:extLst>
-          </p:cNvPr>
-          <p:cNvSpPr/>
-          <p:nvPr/>
-        </p:nvSpPr>
-        <p:spPr>
-          <a:xfrm>
-            <a:off x="688257" y="965255"/>
-            <a:ext cx="10815485" cy="104767"/>
-          </a:xfrm>
-          <a:prstGeom prst="rect">
-            <a:avLst/>
-          </a:prstGeom>
-          <a:solidFill>
-            <a:schemeClr val="accent4"/>
-          </a:solidFill>
-          <a:ln>
-            <a:noFill/>
-          </a:ln>
-        </p:spPr>
-        <p:style>
-          <a:lnRef idx="2">
-            <a:schemeClr val="accent1">
-              <a:shade val="15000"/>
-            </a:schemeClr>
-          </a:lnRef>
-          <a:fillRef idx="1">
-            <a:schemeClr val="accent1"/>
-          </a:fillRef>
-          <a:effectRef idx="0">
-            <a:schemeClr val="accent1"/>
-          </a:effectRef>
-          <a:fontRef idx="minor">
-            <a:schemeClr val="lt1"/>
-          </a:fontRef>
-        </p:style>
-        <p:txBody>
-          <a:bodyPr rtlCol="0" anchor="ctr"/>
-          <a:lstStyle/>
-          <a:p>
-            <a:pPr algn="ctr"/>
-            <a:endParaRPr lang="en-US"/>
-          </a:p>
-        </p:txBody>
-      </p:sp>
-      <p:sp>
-        <p:nvSpPr>
-          <p:cNvPr id="9" name="TextBox 8">
-            <a:extLst>
-              <a:ext uri="{FF2B5EF4-FFF2-40B4-BE49-F238E27FC236}">
-                <a16:creationId xmlns:a16="http://schemas.microsoft.com/office/drawing/2014/main" id="{FE8E974E-5D79-EAAD-8215-1CA8EB2ACDE4}"/>
-              </a:ext>
-            </a:extLst>
-          </p:cNvPr>
-          <p:cNvSpPr txBox="1"/>
-          <p:nvPr/>
-        </p:nvSpPr>
-        <p:spPr>
-          <a:xfrm>
-            <a:off x="6959599" y="514495"/>
-            <a:ext cx="4544143" cy="461665"/>
-          </a:xfrm>
-          <a:prstGeom prst="rect">
-            <a:avLst/>
-          </a:prstGeom>
-          <a:noFill/>
-        </p:spPr>
-        <p:txBody>
-          <a:bodyPr wrap="square">
-            <a:spAutoFit/>
-          </a:bodyPr>
-          <a:lstStyle/>
-          <a:p>
-            <a:pPr algn="r"/>
-            <a:r>
-              <a:rPr lang="it-IT" sz="2400" b="1" i="1" dirty="0"/>
               <a:t>Step: More stuff</a:t>
             </a:r>
           </a:p>
@@ -11222,7 +10571,7 @@
           <a:p>
             <a:fld id="{C6EF02CD-913D-490D-9F2F-9D6BDCD607B3}" type="datetime1">
               <a:rPr lang="it-IT" smtClean="0"/>
-              <a:t>03/01/2026</a:t>
+              <a:t>04/01/2026</a:t>
             </a:fld>
             <a:endParaRPr lang="en-US"/>
           </a:p>
@@ -11280,7 +10629,7 @@
           <a:p>
             <a:fld id="{8BF32AC9-143A-477E-841D-1F801B7F8FE8}" type="slidenum">
               <a:rPr lang="en-US" smtClean="0"/>
-              <a:t>27</a:t>
+              <a:t>25</a:t>
             </a:fld>
             <a:endParaRPr lang="en-US"/>
           </a:p>
@@ -11359,7 +10708,7 @@
 </p:sld>
 </file>
 
-<file path=ppt/slides/slide28.xml><?xml version="1.0" encoding="utf-8"?>
+<file path=ppt/slides/slide26.xml><?xml version="1.0" encoding="utf-8"?>
 <p:sld xmlns:a="http://schemas.openxmlformats.org/drawingml/2006/main" xmlns:r="http://schemas.openxmlformats.org/officeDocument/2006/relationships" xmlns:p="http://schemas.openxmlformats.org/presentationml/2006/main">
   <p:cSld>
     <p:spTree>
@@ -11505,8 +10854,8 @@
           </a:p>
         </p:txBody>
       </p:sp>
-      <mc:AlternateContent xmlns:mc="http://schemas.openxmlformats.org/markup-compatibility/2006">
-        <mc:Choice xmlns:a14="http://schemas.microsoft.com/office/drawing/2010/main" Requires="a14">
+      <mc:AlternateContent xmlns:mc="http://schemas.openxmlformats.org/markup-compatibility/2006" xmlns:a14="http://schemas.microsoft.com/office/drawing/2010/main">
+        <mc:Choice Requires="a14">
           <p:sp>
             <p:nvSpPr>
               <p:cNvPr id="2" name="TextBox 1">
@@ -11705,7 +11054,7 @@
             </p:txBody>
           </p:sp>
         </mc:Choice>
-        <mc:Fallback>
+        <mc:Fallback xmlns="">
           <p:sp>
             <p:nvSpPr>
               <p:cNvPr id="2" name="TextBox 1">
@@ -11773,7 +11122,7 @@
           <a:p>
             <a:fld id="{C6EF02CD-913D-490D-9F2F-9D6BDCD607B3}" type="datetime1">
               <a:rPr lang="it-IT" smtClean="0"/>
-              <a:t>03/01/2026</a:t>
+              <a:t>04/01/2026</a:t>
             </a:fld>
             <a:endParaRPr lang="en-US"/>
           </a:p>
@@ -11831,7 +11180,7 @@
           <a:p>
             <a:fld id="{8BF32AC9-143A-477E-841D-1F801B7F8FE8}" type="slidenum">
               <a:rPr lang="en-US" smtClean="0"/>
-              <a:t>28</a:t>
+              <a:t>26</a:t>
             </a:fld>
             <a:endParaRPr lang="en-US"/>
           </a:p>
@@ -11850,7 +11199,7 @@
 </p:sld>
 </file>
 
-<file path=ppt/slides/slide29.xml><?xml version="1.0" encoding="utf-8"?>
+<file path=ppt/slides/slide27.xml><?xml version="1.0" encoding="utf-8"?>
 <p:sld xmlns:a="http://schemas.openxmlformats.org/drawingml/2006/main" xmlns:r="http://schemas.openxmlformats.org/officeDocument/2006/relationships" xmlns:p="http://schemas.openxmlformats.org/presentationml/2006/main">
   <p:cSld>
     <p:spTree>
@@ -12023,7 +11372,7 @@
           <a:p>
             <a:fld id="{C6EF02CD-913D-490D-9F2F-9D6BDCD607B3}" type="datetime1">
               <a:rPr lang="it-IT" smtClean="0"/>
-              <a:t>03/01/2026</a:t>
+              <a:t>04/01/2026</a:t>
             </a:fld>
             <a:endParaRPr lang="en-US"/>
           </a:p>
@@ -12081,7 +11430,7 @@
           <a:p>
             <a:fld id="{8BF32AC9-143A-477E-841D-1F801B7F8FE8}" type="slidenum">
               <a:rPr lang="en-US" smtClean="0"/>
-              <a:t>29</a:t>
+              <a:t>27</a:t>
             </a:fld>
             <a:endParaRPr lang="en-US"/>
           </a:p>
@@ -12117,8 +11466,8 @@
           </a:prstGeom>
         </p:spPr>
       </p:pic>
-      <mc:AlternateContent xmlns:mc="http://schemas.openxmlformats.org/markup-compatibility/2006">
-        <mc:Choice xmlns:a14="http://schemas.microsoft.com/office/drawing/2010/main" Requires="a14">
+      <mc:AlternateContent xmlns:mc="http://schemas.openxmlformats.org/markup-compatibility/2006" xmlns:a14="http://schemas.microsoft.com/office/drawing/2010/main">
+        <mc:Choice Requires="a14">
           <p:sp>
             <p:nvSpPr>
               <p:cNvPr id="12" name="TextBox 11">
@@ -12311,7 +11660,7 @@
             </p:txBody>
           </p:sp>
         </mc:Choice>
-        <mc:Fallback>
+        <mc:Fallback xmlns="">
           <p:sp>
             <p:nvSpPr>
               <p:cNvPr id="12" name="TextBox 11">
@@ -12369,7 +11718,7 @@
 </p:sld>
 </file>
 
-<file path=ppt/slides/slide3.xml><?xml version="1.0" encoding="utf-8"?>
+<file path=ppt/slides/slide28.xml><?xml version="1.0" encoding="utf-8"?>
 <p:sld xmlns:a="http://schemas.openxmlformats.org/drawingml/2006/main" xmlns:r="http://schemas.openxmlformats.org/officeDocument/2006/relationships" xmlns:p="http://schemas.openxmlformats.org/presentationml/2006/main">
   <p:cSld>
     <p:spTree>
@@ -12377,7 +11726,7 @@
         <p:cNvPr id="1" name="">
           <a:extLst>
             <a:ext uri="{FF2B5EF4-FFF2-40B4-BE49-F238E27FC236}">
-              <a16:creationId xmlns:a16="http://schemas.microsoft.com/office/drawing/2014/main" id="{9B83727E-27C8-3BC2-0BE9-6E847212FD24}"/>
+              <a16:creationId xmlns:a16="http://schemas.microsoft.com/office/drawing/2014/main" id="{96E5363B-C443-2C30-76AC-1A20ED6B1343}"/>
             </a:ext>
           </a:extLst>
         </p:cNvPr>
@@ -12397,7 +11746,7 @@
           <p:cNvPr id="3" name="TextBox 2">
             <a:extLst>
               <a:ext uri="{FF2B5EF4-FFF2-40B4-BE49-F238E27FC236}">
-                <a16:creationId xmlns:a16="http://schemas.microsoft.com/office/drawing/2014/main" id="{7CAC9E22-B53F-66C9-EC08-8C202BDA41B1}"/>
+                <a16:creationId xmlns:a16="http://schemas.microsoft.com/office/drawing/2014/main" id="{18D8A499-2D61-3350-373E-8EBD281DB141}"/>
               </a:ext>
             </a:extLst>
           </p:cNvPr>
@@ -12407,7 +11756,7 @@
         <p:spPr>
           <a:xfrm>
             <a:off x="688257" y="442035"/>
-            <a:ext cx="4991183" cy="523220"/>
+            <a:ext cx="5407743" cy="523220"/>
           </a:xfrm>
           <a:prstGeom prst="rect">
             <a:avLst/>
@@ -12422,7 +11771,11 @@
           <a:p>
             <a:r>
               <a:rPr lang="it-IT" sz="2800" b="1" dirty="0"/>
-              <a:t>OBBIETTIVI</a:t>
+              <a:t>FATTORE </a:t>
+            </a:r>
+            <a:r>
+              <a:rPr lang="el-GR" sz="2800" b="1" dirty="0"/>
+              <a:t>𝜎</a:t>
             </a:r>
           </a:p>
         </p:txBody>
@@ -12432,7 +11785,7 @@
           <p:cNvPr id="4" name="Rectangle 3">
             <a:extLst>
               <a:ext uri="{FF2B5EF4-FFF2-40B4-BE49-F238E27FC236}">
-                <a16:creationId xmlns:a16="http://schemas.microsoft.com/office/drawing/2014/main" id="{1A8E64B5-1412-B215-45FD-678D251A3117}"/>
+                <a16:creationId xmlns:a16="http://schemas.microsoft.com/office/drawing/2014/main" id="{55BBA5D8-A77B-7A34-15A4-D5765E556311}"/>
               </a:ext>
             </a:extLst>
           </p:cNvPr>
@@ -12479,8 +11832,682 @@
           </a:p>
         </p:txBody>
       </p:sp>
-      <mc:AlternateContent xmlns:mc="http://schemas.openxmlformats.org/markup-compatibility/2006">
-        <mc:Choice xmlns:a14="http://schemas.microsoft.com/office/drawing/2010/main" Requires="a14">
+      <p:sp>
+        <p:nvSpPr>
+          <p:cNvPr id="9" name="TextBox 8">
+            <a:extLst>
+              <a:ext uri="{FF2B5EF4-FFF2-40B4-BE49-F238E27FC236}">
+                <a16:creationId xmlns:a16="http://schemas.microsoft.com/office/drawing/2014/main" id="{6662678C-7842-9FB1-14CE-5E5831F4C67F}"/>
+              </a:ext>
+            </a:extLst>
+          </p:cNvPr>
+          <p:cNvSpPr txBox="1"/>
+          <p:nvPr/>
+        </p:nvSpPr>
+        <p:spPr>
+          <a:xfrm>
+            <a:off x="6959599" y="514495"/>
+            <a:ext cx="4544143" cy="461665"/>
+          </a:xfrm>
+          <a:prstGeom prst="rect">
+            <a:avLst/>
+          </a:prstGeom>
+          <a:noFill/>
+        </p:spPr>
+        <p:txBody>
+          <a:bodyPr wrap="square">
+            <a:spAutoFit/>
+          </a:bodyPr>
+          <a:lstStyle/>
+          <a:p>
+            <a:pPr algn="r"/>
+            <a:r>
+              <a:rPr lang="it-IT" sz="2400" b="1" i="1" dirty="0"/>
+              <a:t>Step: More stuff</a:t>
+            </a:r>
+          </a:p>
+        </p:txBody>
+      </p:sp>
+      <p:sp>
+        <p:nvSpPr>
+          <p:cNvPr id="5" name="Date Placeholder 4">
+            <a:extLst>
+              <a:ext uri="{FF2B5EF4-FFF2-40B4-BE49-F238E27FC236}">
+                <a16:creationId xmlns:a16="http://schemas.microsoft.com/office/drawing/2014/main" id="{4324BAF3-B0FA-49A4-4F07-372D1C29CD81}"/>
+              </a:ext>
+            </a:extLst>
+          </p:cNvPr>
+          <p:cNvSpPr>
+            <a:spLocks noGrp="1"/>
+          </p:cNvSpPr>
+          <p:nvPr>
+            <p:ph type="dt" sz="half" idx="10"/>
+          </p:nvPr>
+        </p:nvSpPr>
+        <p:spPr/>
+        <p:txBody>
+          <a:bodyPr/>
+          <a:lstStyle/>
+          <a:p>
+            <a:fld id="{C6EF02CD-913D-490D-9F2F-9D6BDCD607B3}" type="datetime1">
+              <a:rPr lang="it-IT" smtClean="0"/>
+              <a:t>04/01/2026</a:t>
+            </a:fld>
+            <a:endParaRPr lang="en-US"/>
+          </a:p>
+        </p:txBody>
+      </p:sp>
+      <p:sp>
+        <p:nvSpPr>
+          <p:cNvPr id="6" name="Footer Placeholder 5">
+            <a:extLst>
+              <a:ext uri="{FF2B5EF4-FFF2-40B4-BE49-F238E27FC236}">
+                <a16:creationId xmlns:a16="http://schemas.microsoft.com/office/drawing/2014/main" id="{24AAAAC8-FFC7-7B63-19BE-AF2B8C10509F}"/>
+              </a:ext>
+            </a:extLst>
+          </p:cNvPr>
+          <p:cNvSpPr>
+            <a:spLocks noGrp="1"/>
+          </p:cNvSpPr>
+          <p:nvPr>
+            <p:ph type="ftr" sz="quarter" idx="11"/>
+          </p:nvPr>
+        </p:nvSpPr>
+        <p:spPr/>
+        <p:txBody>
+          <a:bodyPr/>
+          <a:lstStyle/>
+          <a:p>
+            <a:r>
+              <a:rPr lang="nn-NO"/>
+              <a:t>DINO MENG [SM3201466], BsC AIDA@MIGE</a:t>
+            </a:r>
+            <a:endParaRPr lang="en-US"/>
+          </a:p>
+        </p:txBody>
+      </p:sp>
+      <p:sp>
+        <p:nvSpPr>
+          <p:cNvPr id="7" name="Slide Number Placeholder 6">
+            <a:extLst>
+              <a:ext uri="{FF2B5EF4-FFF2-40B4-BE49-F238E27FC236}">
+                <a16:creationId xmlns:a16="http://schemas.microsoft.com/office/drawing/2014/main" id="{6B6A1E7B-5B7F-2BF9-E56B-74329CFAE4FD}"/>
+              </a:ext>
+            </a:extLst>
+          </p:cNvPr>
+          <p:cNvSpPr>
+            <a:spLocks noGrp="1"/>
+          </p:cNvSpPr>
+          <p:nvPr>
+            <p:ph type="sldNum" sz="quarter" idx="12"/>
+          </p:nvPr>
+        </p:nvSpPr>
+        <p:spPr/>
+        <p:txBody>
+          <a:bodyPr/>
+          <a:lstStyle/>
+          <a:p>
+            <a:fld id="{8BF32AC9-143A-477E-841D-1F801B7F8FE8}" type="slidenum">
+              <a:rPr lang="en-US" smtClean="0"/>
+              <a:t>28</a:t>
+            </a:fld>
+            <a:endParaRPr lang="en-US"/>
+          </a:p>
+        </p:txBody>
+      </p:sp>
+      <mc:AlternateContent xmlns:mc="http://schemas.openxmlformats.org/markup-compatibility/2006" xmlns:a14="http://schemas.microsoft.com/office/drawing/2010/main">
+        <mc:Choice Requires="a14">
+          <p:sp>
+            <p:nvSpPr>
+              <p:cNvPr id="12" name="TextBox 11">
+                <a:extLst>
+                  <a:ext uri="{FF2B5EF4-FFF2-40B4-BE49-F238E27FC236}">
+                    <a16:creationId xmlns:a16="http://schemas.microsoft.com/office/drawing/2014/main" id="{8D3955B6-A31B-BE5E-7BDD-21C6641EF41B}"/>
+                  </a:ext>
+                </a:extLst>
+              </p:cNvPr>
+              <p:cNvSpPr txBox="1"/>
+              <p:nvPr/>
+            </p:nvSpPr>
+            <p:spPr>
+              <a:xfrm>
+                <a:off x="6213010" y="1983429"/>
+                <a:ext cx="5447687" cy="1200329"/>
+              </a:xfrm>
+              <a:prstGeom prst="rect">
+                <a:avLst/>
+              </a:prstGeom>
+              <a:noFill/>
+            </p:spPr>
+            <p:txBody>
+              <a:bodyPr wrap="square">
+                <a:spAutoFit/>
+              </a:bodyPr>
+              <a:lstStyle/>
+              <a:p>
+                <a:pPr marL="285750" indent="-285750">
+                  <a:buFont typeface="Wingdings" panose="05000000000000000000" pitchFamily="2" charset="2"/>
+                  <a:buChar char="q"/>
+                </a:pPr>
+                <a:r>
+                  <a:rPr lang="it-IT" sz="2400" dirty="0">
+                    <a:latin typeface="Arial" panose="020B0604020202020204" pitchFamily="34" charset="0"/>
+                    <a:cs typeface="Arial" panose="020B0604020202020204" pitchFamily="34" charset="0"/>
+                  </a:rPr>
+                  <a:t>Risultato analogo per </a:t>
+                </a:r>
+                <a14:m>
+                  <m:oMath xmlns:m="http://schemas.openxmlformats.org/officeDocument/2006/math">
+                    <m:r>
+                      <a:rPr lang="it-IT" sz="2400" i="1">
+                        <a:latin typeface="Cambria Math" panose="02040503050406030204" pitchFamily="18" charset="0"/>
+                        <a:cs typeface="Arial" panose="020B0604020202020204" pitchFamily="34" charset="0"/>
+                      </a:rPr>
+                      <m:t>𝜎</m:t>
+                    </m:r>
+                  </m:oMath>
+                </a14:m>
+                <a:endParaRPr lang="it-IT" sz="2400" dirty="0">
+                  <a:latin typeface="Arial" panose="020B0604020202020204" pitchFamily="34" charset="0"/>
+                  <a:cs typeface="Arial" panose="020B0604020202020204" pitchFamily="34" charset="0"/>
+                </a:endParaRPr>
+              </a:p>
+              <a:p>
+                <a:pPr marL="742950" lvl="1" indent="-285750">
+                  <a:buFont typeface="Wingdings" panose="05000000000000000000" pitchFamily="2" charset="2"/>
+                  <a:buChar char="q"/>
+                </a:pPr>
+                <a:r>
+                  <a:rPr lang="it-IT" sz="2400" dirty="0">
+                    <a:latin typeface="Arial" panose="020B0604020202020204" pitchFamily="34" charset="0"/>
+                    <a:cs typeface="Arial" panose="020B0604020202020204" pitchFamily="34" charset="0"/>
+                  </a:rPr>
+                  <a:t>Questa volta fatto variare «solo» in [0,10]</a:t>
+                </a:r>
+              </a:p>
+            </p:txBody>
+          </p:sp>
+        </mc:Choice>
+        <mc:Fallback xmlns="">
+          <p:sp>
+            <p:nvSpPr>
+              <p:cNvPr id="12" name="TextBox 11">
+                <a:extLst>
+                  <a:ext uri="{FF2B5EF4-FFF2-40B4-BE49-F238E27FC236}">
+                    <a16:creationId xmlns:a16="http://schemas.microsoft.com/office/drawing/2014/main" id="{8D3955B6-A31B-BE5E-7BDD-21C6641EF41B}"/>
+                  </a:ext>
+                </a:extLst>
+              </p:cNvPr>
+              <p:cNvSpPr txBox="1">
+                <a:spLocks noRot="1" noChangeAspect="1" noMove="1" noResize="1" noEditPoints="1" noAdjustHandles="1" noChangeArrowheads="1" noChangeShapeType="1" noTextEdit="1"/>
+              </p:cNvSpPr>
+              <p:nvPr/>
+            </p:nvSpPr>
+            <p:spPr>
+              <a:xfrm>
+                <a:off x="6213010" y="1983429"/>
+                <a:ext cx="5447687" cy="1200329"/>
+              </a:xfrm>
+              <a:prstGeom prst="rect">
+                <a:avLst/>
+              </a:prstGeom>
+              <a:blipFill>
+                <a:blip r:embed="rId2"/>
+                <a:stretch>
+                  <a:fillRect l="-1454" t="-3553" r="-895" b="-11168"/>
+                </a:stretch>
+              </a:blipFill>
+            </p:spPr>
+            <p:txBody>
+              <a:bodyPr/>
+              <a:lstStyle/>
+              <a:p>
+                <a:r>
+                  <a:rPr lang="en-US">
+                    <a:noFill/>
+                  </a:rPr>
+                  <a:t> </a:t>
+                </a:r>
+              </a:p>
+            </p:txBody>
+          </p:sp>
+        </mc:Fallback>
+      </mc:AlternateContent>
+      <p:pic>
+        <p:nvPicPr>
+          <p:cNvPr id="13" name="Picture 12" descr="A diagram of a graph&#10;&#10;AI-generated content may be incorrect.">
+            <a:extLst>
+              <a:ext uri="{FF2B5EF4-FFF2-40B4-BE49-F238E27FC236}">
+                <a16:creationId xmlns:a16="http://schemas.microsoft.com/office/drawing/2014/main" id="{B2263EAB-BD24-3C41-ED62-87EE15141122}"/>
+              </a:ext>
+            </a:extLst>
+          </p:cNvPr>
+          <p:cNvPicPr>
+            <a:picLocks noChangeAspect="1"/>
+          </p:cNvPicPr>
+          <p:nvPr/>
+        </p:nvPicPr>
+        <p:blipFill>
+          <a:blip r:embed="rId3"/>
+          <a:stretch>
+            <a:fillRect/>
+          </a:stretch>
+        </p:blipFill>
+        <p:spPr>
+          <a:xfrm>
+            <a:off x="688257" y="1416015"/>
+            <a:ext cx="5353050" cy="4572000"/>
+          </a:xfrm>
+          <a:prstGeom prst="rect">
+            <a:avLst/>
+          </a:prstGeom>
+        </p:spPr>
+      </p:pic>
+    </p:spTree>
+    <p:extLst>
+      <p:ext uri="{BB962C8B-B14F-4D97-AF65-F5344CB8AC3E}">
+        <p14:creationId xmlns:p14="http://schemas.microsoft.com/office/powerpoint/2010/main" val="4047128178"/>
+      </p:ext>
+    </p:extLst>
+  </p:cSld>
+  <p:clrMapOvr>
+    <a:masterClrMapping/>
+  </p:clrMapOvr>
+</p:sld>
+</file>
+
+<file path=ppt/slides/slide29.xml><?xml version="1.0" encoding="utf-8"?>
+<p:sld xmlns:a="http://schemas.openxmlformats.org/drawingml/2006/main" xmlns:r="http://schemas.openxmlformats.org/officeDocument/2006/relationships" xmlns:p="http://schemas.openxmlformats.org/presentationml/2006/main">
+  <p:cSld>
+    <p:spTree>
+      <p:nvGrpSpPr>
+        <p:cNvPr id="1" name="">
+          <a:extLst>
+            <a:ext uri="{FF2B5EF4-FFF2-40B4-BE49-F238E27FC236}">
+              <a16:creationId xmlns:a16="http://schemas.microsoft.com/office/drawing/2014/main" id="{B74B6A40-D661-9A26-0E43-D4D937EBCC3F}"/>
+            </a:ext>
+          </a:extLst>
+        </p:cNvPr>
+        <p:cNvGrpSpPr/>
+        <p:nvPr/>
+      </p:nvGrpSpPr>
+      <p:grpSpPr>
+        <a:xfrm>
+          <a:off x="0" y="0"/>
+          <a:ext cx="0" cy="0"/>
+          <a:chOff x="0" y="0"/>
+          <a:chExt cx="0" cy="0"/>
+        </a:xfrm>
+      </p:grpSpPr>
+      <p:sp>
+        <p:nvSpPr>
+          <p:cNvPr id="3" name="TextBox 2">
+            <a:extLst>
+              <a:ext uri="{FF2B5EF4-FFF2-40B4-BE49-F238E27FC236}">
+                <a16:creationId xmlns:a16="http://schemas.microsoft.com/office/drawing/2014/main" id="{18F2C9DA-85F0-4279-745E-F5A7627C2113}"/>
+              </a:ext>
+            </a:extLst>
+          </p:cNvPr>
+          <p:cNvSpPr txBox="1"/>
+          <p:nvPr/>
+        </p:nvSpPr>
+        <p:spPr>
+          <a:xfrm>
+            <a:off x="688257" y="442035"/>
+            <a:ext cx="5407743" cy="523220"/>
+          </a:xfrm>
+          <a:prstGeom prst="rect">
+            <a:avLst/>
+          </a:prstGeom>
+          <a:noFill/>
+        </p:spPr>
+        <p:txBody>
+          <a:bodyPr wrap="square">
+            <a:spAutoFit/>
+          </a:bodyPr>
+          <a:lstStyle/>
+          <a:p>
+            <a:r>
+              <a:rPr lang="it-IT" sz="2800" b="1" dirty="0"/>
+              <a:t>FATTORE </a:t>
+            </a:r>
+            <a:r>
+              <a:rPr lang="el-GR" sz="2800" b="1" dirty="0"/>
+              <a:t>𝜎</a:t>
+            </a:r>
+          </a:p>
+        </p:txBody>
+      </p:sp>
+      <p:sp>
+        <p:nvSpPr>
+          <p:cNvPr id="4" name="Rectangle 3">
+            <a:extLst>
+              <a:ext uri="{FF2B5EF4-FFF2-40B4-BE49-F238E27FC236}">
+                <a16:creationId xmlns:a16="http://schemas.microsoft.com/office/drawing/2014/main" id="{A8C17A29-B201-8A6E-5DFB-AF2E0F3F1329}"/>
+              </a:ext>
+            </a:extLst>
+          </p:cNvPr>
+          <p:cNvSpPr/>
+          <p:nvPr/>
+        </p:nvSpPr>
+        <p:spPr>
+          <a:xfrm>
+            <a:off x="688257" y="965255"/>
+            <a:ext cx="10815485" cy="104767"/>
+          </a:xfrm>
+          <a:prstGeom prst="rect">
+            <a:avLst/>
+          </a:prstGeom>
+          <a:solidFill>
+            <a:schemeClr val="accent4"/>
+          </a:solidFill>
+          <a:ln>
+            <a:noFill/>
+          </a:ln>
+        </p:spPr>
+        <p:style>
+          <a:lnRef idx="2">
+            <a:schemeClr val="accent1">
+              <a:shade val="15000"/>
+            </a:schemeClr>
+          </a:lnRef>
+          <a:fillRef idx="1">
+            <a:schemeClr val="accent1"/>
+          </a:fillRef>
+          <a:effectRef idx="0">
+            <a:schemeClr val="accent1"/>
+          </a:effectRef>
+          <a:fontRef idx="minor">
+            <a:schemeClr val="lt1"/>
+          </a:fontRef>
+        </p:style>
+        <p:txBody>
+          <a:bodyPr rtlCol="0" anchor="ctr"/>
+          <a:lstStyle/>
+          <a:p>
+            <a:pPr algn="ctr"/>
+            <a:endParaRPr lang="en-US"/>
+          </a:p>
+        </p:txBody>
+      </p:sp>
+      <p:sp>
+        <p:nvSpPr>
+          <p:cNvPr id="9" name="TextBox 8">
+            <a:extLst>
+              <a:ext uri="{FF2B5EF4-FFF2-40B4-BE49-F238E27FC236}">
+                <a16:creationId xmlns:a16="http://schemas.microsoft.com/office/drawing/2014/main" id="{26ADCA7A-CA30-93E7-807D-37D345A7EF64}"/>
+              </a:ext>
+            </a:extLst>
+          </p:cNvPr>
+          <p:cNvSpPr txBox="1"/>
+          <p:nvPr/>
+        </p:nvSpPr>
+        <p:spPr>
+          <a:xfrm>
+            <a:off x="6959599" y="514495"/>
+            <a:ext cx="4544143" cy="461665"/>
+          </a:xfrm>
+          <a:prstGeom prst="rect">
+            <a:avLst/>
+          </a:prstGeom>
+          <a:noFill/>
+        </p:spPr>
+        <p:txBody>
+          <a:bodyPr wrap="square">
+            <a:spAutoFit/>
+          </a:bodyPr>
+          <a:lstStyle/>
+          <a:p>
+            <a:pPr algn="r"/>
+            <a:r>
+              <a:rPr lang="it-IT" sz="2400" b="1" i="1" dirty="0"/>
+              <a:t>Step: More stuff</a:t>
+            </a:r>
+          </a:p>
+        </p:txBody>
+      </p:sp>
+      <p:sp>
+        <p:nvSpPr>
+          <p:cNvPr id="5" name="Date Placeholder 4">
+            <a:extLst>
+              <a:ext uri="{FF2B5EF4-FFF2-40B4-BE49-F238E27FC236}">
+                <a16:creationId xmlns:a16="http://schemas.microsoft.com/office/drawing/2014/main" id="{B6164E64-4683-F6B2-A4E8-3147F1ED829E}"/>
+              </a:ext>
+            </a:extLst>
+          </p:cNvPr>
+          <p:cNvSpPr>
+            <a:spLocks noGrp="1"/>
+          </p:cNvSpPr>
+          <p:nvPr>
+            <p:ph type="dt" sz="half" idx="10"/>
+          </p:nvPr>
+        </p:nvSpPr>
+        <p:spPr/>
+        <p:txBody>
+          <a:bodyPr/>
+          <a:lstStyle/>
+          <a:p>
+            <a:fld id="{C6EF02CD-913D-490D-9F2F-9D6BDCD607B3}" type="datetime1">
+              <a:rPr lang="it-IT" smtClean="0"/>
+              <a:t>04/01/2026</a:t>
+            </a:fld>
+            <a:endParaRPr lang="en-US"/>
+          </a:p>
+        </p:txBody>
+      </p:sp>
+      <p:sp>
+        <p:nvSpPr>
+          <p:cNvPr id="6" name="Footer Placeholder 5">
+            <a:extLst>
+              <a:ext uri="{FF2B5EF4-FFF2-40B4-BE49-F238E27FC236}">
+                <a16:creationId xmlns:a16="http://schemas.microsoft.com/office/drawing/2014/main" id="{95A6F43F-BCD3-A849-551B-FD5B61092448}"/>
+              </a:ext>
+            </a:extLst>
+          </p:cNvPr>
+          <p:cNvSpPr>
+            <a:spLocks noGrp="1"/>
+          </p:cNvSpPr>
+          <p:nvPr>
+            <p:ph type="ftr" sz="quarter" idx="11"/>
+          </p:nvPr>
+        </p:nvSpPr>
+        <p:spPr/>
+        <p:txBody>
+          <a:bodyPr/>
+          <a:lstStyle/>
+          <a:p>
+            <a:r>
+              <a:rPr lang="nn-NO"/>
+              <a:t>DINO MENG [SM3201466], BsC AIDA@MIGE</a:t>
+            </a:r>
+            <a:endParaRPr lang="en-US"/>
+          </a:p>
+        </p:txBody>
+      </p:sp>
+      <p:sp>
+        <p:nvSpPr>
+          <p:cNvPr id="7" name="Slide Number Placeholder 6">
+            <a:extLst>
+              <a:ext uri="{FF2B5EF4-FFF2-40B4-BE49-F238E27FC236}">
+                <a16:creationId xmlns:a16="http://schemas.microsoft.com/office/drawing/2014/main" id="{B0F95E78-CE82-F067-7EBD-C1EB7772B1B7}"/>
+              </a:ext>
+            </a:extLst>
+          </p:cNvPr>
+          <p:cNvSpPr>
+            <a:spLocks noGrp="1"/>
+          </p:cNvSpPr>
+          <p:nvPr>
+            <p:ph type="sldNum" sz="quarter" idx="12"/>
+          </p:nvPr>
+        </p:nvSpPr>
+        <p:spPr/>
+        <p:txBody>
+          <a:bodyPr/>
+          <a:lstStyle/>
+          <a:p>
+            <a:fld id="{8BF32AC9-143A-477E-841D-1F801B7F8FE8}" type="slidenum">
+              <a:rPr lang="en-US" smtClean="0"/>
+              <a:t>29</a:t>
+            </a:fld>
+            <a:endParaRPr lang="en-US"/>
+          </a:p>
+        </p:txBody>
+      </p:sp>
+      <p:pic>
+        <p:nvPicPr>
+          <p:cNvPr id="8" name="Picture 7" descr="A graph of different colored lines&#10;&#10;AI-generated content may be incorrect.">
+            <a:extLst>
+              <a:ext uri="{FF2B5EF4-FFF2-40B4-BE49-F238E27FC236}">
+                <a16:creationId xmlns:a16="http://schemas.microsoft.com/office/drawing/2014/main" id="{55C000E7-208C-EC4A-1744-A812B88A24F4}"/>
+              </a:ext>
+            </a:extLst>
+          </p:cNvPr>
+          <p:cNvPicPr>
+            <a:picLocks noChangeAspect="1"/>
+          </p:cNvPicPr>
+          <p:nvPr/>
+        </p:nvPicPr>
+        <p:blipFill>
+          <a:blip r:embed="rId2"/>
+          <a:stretch>
+            <a:fillRect/>
+          </a:stretch>
+        </p:blipFill>
+        <p:spPr>
+          <a:xfrm>
+            <a:off x="1150340" y="1416015"/>
+            <a:ext cx="9891320" cy="4629817"/>
+          </a:xfrm>
+          <a:prstGeom prst="rect">
+            <a:avLst/>
+          </a:prstGeom>
+        </p:spPr>
+      </p:pic>
+    </p:spTree>
+    <p:extLst>
+      <p:ext uri="{BB962C8B-B14F-4D97-AF65-F5344CB8AC3E}">
+        <p14:creationId xmlns:p14="http://schemas.microsoft.com/office/powerpoint/2010/main" val="202612540"/>
+      </p:ext>
+    </p:extLst>
+  </p:cSld>
+  <p:clrMapOvr>
+    <a:masterClrMapping/>
+  </p:clrMapOvr>
+</p:sld>
+</file>
+
+<file path=ppt/slides/slide3.xml><?xml version="1.0" encoding="utf-8"?>
+<p:sld xmlns:a="http://schemas.openxmlformats.org/drawingml/2006/main" xmlns:r="http://schemas.openxmlformats.org/officeDocument/2006/relationships" xmlns:p="http://schemas.openxmlformats.org/presentationml/2006/main">
+  <p:cSld>
+    <p:spTree>
+      <p:nvGrpSpPr>
+        <p:cNvPr id="1" name="">
+          <a:extLst>
+            <a:ext uri="{FF2B5EF4-FFF2-40B4-BE49-F238E27FC236}">
+              <a16:creationId xmlns:a16="http://schemas.microsoft.com/office/drawing/2014/main" id="{9B83727E-27C8-3BC2-0BE9-6E847212FD24}"/>
+            </a:ext>
+          </a:extLst>
+        </p:cNvPr>
+        <p:cNvGrpSpPr/>
+        <p:nvPr/>
+      </p:nvGrpSpPr>
+      <p:grpSpPr>
+        <a:xfrm>
+          <a:off x="0" y="0"/>
+          <a:ext cx="0" cy="0"/>
+          <a:chOff x="0" y="0"/>
+          <a:chExt cx="0" cy="0"/>
+        </a:xfrm>
+      </p:grpSpPr>
+      <p:sp>
+        <p:nvSpPr>
+          <p:cNvPr id="3" name="TextBox 2">
+            <a:extLst>
+              <a:ext uri="{FF2B5EF4-FFF2-40B4-BE49-F238E27FC236}">
+                <a16:creationId xmlns:a16="http://schemas.microsoft.com/office/drawing/2014/main" id="{7CAC9E22-B53F-66C9-EC08-8C202BDA41B1}"/>
+              </a:ext>
+            </a:extLst>
+          </p:cNvPr>
+          <p:cNvSpPr txBox="1"/>
+          <p:nvPr/>
+        </p:nvSpPr>
+        <p:spPr>
+          <a:xfrm>
+            <a:off x="688257" y="442035"/>
+            <a:ext cx="4991183" cy="523220"/>
+          </a:xfrm>
+          <a:prstGeom prst="rect">
+            <a:avLst/>
+          </a:prstGeom>
+          <a:noFill/>
+        </p:spPr>
+        <p:txBody>
+          <a:bodyPr wrap="square">
+            <a:spAutoFit/>
+          </a:bodyPr>
+          <a:lstStyle/>
+          <a:p>
+            <a:r>
+              <a:rPr lang="it-IT" sz="2800" b="1" dirty="0"/>
+              <a:t>OBBIETTIVI</a:t>
+            </a:r>
+          </a:p>
+        </p:txBody>
+      </p:sp>
+      <p:sp>
+        <p:nvSpPr>
+          <p:cNvPr id="4" name="Rectangle 3">
+            <a:extLst>
+              <a:ext uri="{FF2B5EF4-FFF2-40B4-BE49-F238E27FC236}">
+                <a16:creationId xmlns:a16="http://schemas.microsoft.com/office/drawing/2014/main" id="{1A8E64B5-1412-B215-45FD-678D251A3117}"/>
+              </a:ext>
+            </a:extLst>
+          </p:cNvPr>
+          <p:cNvSpPr/>
+          <p:nvPr/>
+        </p:nvSpPr>
+        <p:spPr>
+          <a:xfrm>
+            <a:off x="688257" y="965255"/>
+            <a:ext cx="10815485" cy="104767"/>
+          </a:xfrm>
+          <a:prstGeom prst="rect">
+            <a:avLst/>
+          </a:prstGeom>
+          <a:solidFill>
+            <a:schemeClr val="accent4"/>
+          </a:solidFill>
+          <a:ln>
+            <a:noFill/>
+          </a:ln>
+        </p:spPr>
+        <p:style>
+          <a:lnRef idx="2">
+            <a:schemeClr val="accent1">
+              <a:shade val="15000"/>
+            </a:schemeClr>
+          </a:lnRef>
+          <a:fillRef idx="1">
+            <a:schemeClr val="accent1"/>
+          </a:fillRef>
+          <a:effectRef idx="0">
+            <a:schemeClr val="accent1"/>
+          </a:effectRef>
+          <a:fontRef idx="minor">
+            <a:schemeClr val="lt1"/>
+          </a:fontRef>
+        </p:style>
+        <p:txBody>
+          <a:bodyPr rtlCol="0" anchor="ctr"/>
+          <a:lstStyle/>
+          <a:p>
+            <a:pPr algn="ctr"/>
+            <a:endParaRPr lang="en-US"/>
+          </a:p>
+        </p:txBody>
+      </p:sp>
+      <mc:AlternateContent xmlns:mc="http://schemas.openxmlformats.org/markup-compatibility/2006" xmlns:a14="http://schemas.microsoft.com/office/drawing/2010/main">
+        <mc:Choice Requires="a14">
           <p:sp>
             <p:nvSpPr>
               <p:cNvPr id="7" name="TextBox 6">
@@ -12682,7 +12709,7 @@
             </p:txBody>
           </p:sp>
         </mc:Choice>
-        <mc:Fallback>
+        <mc:Fallback xmlns="">
           <p:sp>
             <p:nvSpPr>
               <p:cNvPr id="7" name="TextBox 6">
@@ -12750,7 +12777,7 @@
           <a:p>
             <a:fld id="{27A3E659-987F-4162-B81F-7A5AC08EB42B}" type="datetime1">
               <a:rPr lang="it-IT" smtClean="0"/>
-              <a:t>03/01/2026</a:t>
+              <a:t>04/01/2026</a:t>
             </a:fld>
             <a:endParaRPr lang="en-US"/>
           </a:p>
@@ -12818,684 +12845,6 @@
     <p:extLst>
       <p:ext uri="{BB962C8B-B14F-4D97-AF65-F5344CB8AC3E}">
         <p14:creationId xmlns:p14="http://schemas.microsoft.com/office/powerpoint/2010/main" val="11954351"/>
-      </p:ext>
-    </p:extLst>
-  </p:cSld>
-  <p:clrMapOvr>
-    <a:masterClrMapping/>
-  </p:clrMapOvr>
-</p:sld>
-</file>
-
-<file path=ppt/slides/slide30.xml><?xml version="1.0" encoding="utf-8"?>
-<p:sld xmlns:a="http://schemas.openxmlformats.org/drawingml/2006/main" xmlns:r="http://schemas.openxmlformats.org/officeDocument/2006/relationships" xmlns:p="http://schemas.openxmlformats.org/presentationml/2006/main">
-  <p:cSld>
-    <p:spTree>
-      <p:nvGrpSpPr>
-        <p:cNvPr id="1" name="">
-          <a:extLst>
-            <a:ext uri="{FF2B5EF4-FFF2-40B4-BE49-F238E27FC236}">
-              <a16:creationId xmlns:a16="http://schemas.microsoft.com/office/drawing/2014/main" id="{96E5363B-C443-2C30-76AC-1A20ED6B1343}"/>
-            </a:ext>
-          </a:extLst>
-        </p:cNvPr>
-        <p:cNvGrpSpPr/>
-        <p:nvPr/>
-      </p:nvGrpSpPr>
-      <p:grpSpPr>
-        <a:xfrm>
-          <a:off x="0" y="0"/>
-          <a:ext cx="0" cy="0"/>
-          <a:chOff x="0" y="0"/>
-          <a:chExt cx="0" cy="0"/>
-        </a:xfrm>
-      </p:grpSpPr>
-      <p:sp>
-        <p:nvSpPr>
-          <p:cNvPr id="3" name="TextBox 2">
-            <a:extLst>
-              <a:ext uri="{FF2B5EF4-FFF2-40B4-BE49-F238E27FC236}">
-                <a16:creationId xmlns:a16="http://schemas.microsoft.com/office/drawing/2014/main" id="{18D8A499-2D61-3350-373E-8EBD281DB141}"/>
-              </a:ext>
-            </a:extLst>
-          </p:cNvPr>
-          <p:cNvSpPr txBox="1"/>
-          <p:nvPr/>
-        </p:nvSpPr>
-        <p:spPr>
-          <a:xfrm>
-            <a:off x="688257" y="442035"/>
-            <a:ext cx="5407743" cy="523220"/>
-          </a:xfrm>
-          <a:prstGeom prst="rect">
-            <a:avLst/>
-          </a:prstGeom>
-          <a:noFill/>
-        </p:spPr>
-        <p:txBody>
-          <a:bodyPr wrap="square">
-            <a:spAutoFit/>
-          </a:bodyPr>
-          <a:lstStyle/>
-          <a:p>
-            <a:r>
-              <a:rPr lang="it-IT" sz="2800" b="1" dirty="0"/>
-              <a:t>FATTORE </a:t>
-            </a:r>
-            <a:r>
-              <a:rPr lang="el-GR" sz="2800" b="1" dirty="0"/>
-              <a:t>𝜎</a:t>
-            </a:r>
-          </a:p>
-        </p:txBody>
-      </p:sp>
-      <p:sp>
-        <p:nvSpPr>
-          <p:cNvPr id="4" name="Rectangle 3">
-            <a:extLst>
-              <a:ext uri="{FF2B5EF4-FFF2-40B4-BE49-F238E27FC236}">
-                <a16:creationId xmlns:a16="http://schemas.microsoft.com/office/drawing/2014/main" id="{55BBA5D8-A77B-7A34-15A4-D5765E556311}"/>
-              </a:ext>
-            </a:extLst>
-          </p:cNvPr>
-          <p:cNvSpPr/>
-          <p:nvPr/>
-        </p:nvSpPr>
-        <p:spPr>
-          <a:xfrm>
-            <a:off x="688257" y="965255"/>
-            <a:ext cx="10815485" cy="104767"/>
-          </a:xfrm>
-          <a:prstGeom prst="rect">
-            <a:avLst/>
-          </a:prstGeom>
-          <a:solidFill>
-            <a:schemeClr val="accent4"/>
-          </a:solidFill>
-          <a:ln>
-            <a:noFill/>
-          </a:ln>
-        </p:spPr>
-        <p:style>
-          <a:lnRef idx="2">
-            <a:schemeClr val="accent1">
-              <a:shade val="15000"/>
-            </a:schemeClr>
-          </a:lnRef>
-          <a:fillRef idx="1">
-            <a:schemeClr val="accent1"/>
-          </a:fillRef>
-          <a:effectRef idx="0">
-            <a:schemeClr val="accent1"/>
-          </a:effectRef>
-          <a:fontRef idx="minor">
-            <a:schemeClr val="lt1"/>
-          </a:fontRef>
-        </p:style>
-        <p:txBody>
-          <a:bodyPr rtlCol="0" anchor="ctr"/>
-          <a:lstStyle/>
-          <a:p>
-            <a:pPr algn="ctr"/>
-            <a:endParaRPr lang="en-US"/>
-          </a:p>
-        </p:txBody>
-      </p:sp>
-      <p:sp>
-        <p:nvSpPr>
-          <p:cNvPr id="9" name="TextBox 8">
-            <a:extLst>
-              <a:ext uri="{FF2B5EF4-FFF2-40B4-BE49-F238E27FC236}">
-                <a16:creationId xmlns:a16="http://schemas.microsoft.com/office/drawing/2014/main" id="{6662678C-7842-9FB1-14CE-5E5831F4C67F}"/>
-              </a:ext>
-            </a:extLst>
-          </p:cNvPr>
-          <p:cNvSpPr txBox="1"/>
-          <p:nvPr/>
-        </p:nvSpPr>
-        <p:spPr>
-          <a:xfrm>
-            <a:off x="6959599" y="514495"/>
-            <a:ext cx="4544143" cy="461665"/>
-          </a:xfrm>
-          <a:prstGeom prst="rect">
-            <a:avLst/>
-          </a:prstGeom>
-          <a:noFill/>
-        </p:spPr>
-        <p:txBody>
-          <a:bodyPr wrap="square">
-            <a:spAutoFit/>
-          </a:bodyPr>
-          <a:lstStyle/>
-          <a:p>
-            <a:pPr algn="r"/>
-            <a:r>
-              <a:rPr lang="it-IT" sz="2400" b="1" i="1" dirty="0"/>
-              <a:t>Step: More stuff</a:t>
-            </a:r>
-          </a:p>
-        </p:txBody>
-      </p:sp>
-      <p:sp>
-        <p:nvSpPr>
-          <p:cNvPr id="5" name="Date Placeholder 4">
-            <a:extLst>
-              <a:ext uri="{FF2B5EF4-FFF2-40B4-BE49-F238E27FC236}">
-                <a16:creationId xmlns:a16="http://schemas.microsoft.com/office/drawing/2014/main" id="{4324BAF3-B0FA-49A4-4F07-372D1C29CD81}"/>
-              </a:ext>
-            </a:extLst>
-          </p:cNvPr>
-          <p:cNvSpPr>
-            <a:spLocks noGrp="1"/>
-          </p:cNvSpPr>
-          <p:nvPr>
-            <p:ph type="dt" sz="half" idx="10"/>
-          </p:nvPr>
-        </p:nvSpPr>
-        <p:spPr/>
-        <p:txBody>
-          <a:bodyPr/>
-          <a:lstStyle/>
-          <a:p>
-            <a:fld id="{C6EF02CD-913D-490D-9F2F-9D6BDCD607B3}" type="datetime1">
-              <a:rPr lang="it-IT" smtClean="0"/>
-              <a:t>03/01/2026</a:t>
-            </a:fld>
-            <a:endParaRPr lang="en-US"/>
-          </a:p>
-        </p:txBody>
-      </p:sp>
-      <p:sp>
-        <p:nvSpPr>
-          <p:cNvPr id="6" name="Footer Placeholder 5">
-            <a:extLst>
-              <a:ext uri="{FF2B5EF4-FFF2-40B4-BE49-F238E27FC236}">
-                <a16:creationId xmlns:a16="http://schemas.microsoft.com/office/drawing/2014/main" id="{24AAAAC8-FFC7-7B63-19BE-AF2B8C10509F}"/>
-              </a:ext>
-            </a:extLst>
-          </p:cNvPr>
-          <p:cNvSpPr>
-            <a:spLocks noGrp="1"/>
-          </p:cNvSpPr>
-          <p:nvPr>
-            <p:ph type="ftr" sz="quarter" idx="11"/>
-          </p:nvPr>
-        </p:nvSpPr>
-        <p:spPr/>
-        <p:txBody>
-          <a:bodyPr/>
-          <a:lstStyle/>
-          <a:p>
-            <a:r>
-              <a:rPr lang="nn-NO"/>
-              <a:t>DINO MENG [SM3201466], BsC AIDA@MIGE</a:t>
-            </a:r>
-            <a:endParaRPr lang="en-US"/>
-          </a:p>
-        </p:txBody>
-      </p:sp>
-      <p:sp>
-        <p:nvSpPr>
-          <p:cNvPr id="7" name="Slide Number Placeholder 6">
-            <a:extLst>
-              <a:ext uri="{FF2B5EF4-FFF2-40B4-BE49-F238E27FC236}">
-                <a16:creationId xmlns:a16="http://schemas.microsoft.com/office/drawing/2014/main" id="{6B6A1E7B-5B7F-2BF9-E56B-74329CFAE4FD}"/>
-              </a:ext>
-            </a:extLst>
-          </p:cNvPr>
-          <p:cNvSpPr>
-            <a:spLocks noGrp="1"/>
-          </p:cNvSpPr>
-          <p:nvPr>
-            <p:ph type="sldNum" sz="quarter" idx="12"/>
-          </p:nvPr>
-        </p:nvSpPr>
-        <p:spPr/>
-        <p:txBody>
-          <a:bodyPr/>
-          <a:lstStyle/>
-          <a:p>
-            <a:fld id="{8BF32AC9-143A-477E-841D-1F801B7F8FE8}" type="slidenum">
-              <a:rPr lang="en-US" smtClean="0"/>
-              <a:t>30</a:t>
-            </a:fld>
-            <a:endParaRPr lang="en-US"/>
-          </a:p>
-        </p:txBody>
-      </p:sp>
-      <mc:AlternateContent xmlns:mc="http://schemas.openxmlformats.org/markup-compatibility/2006">
-        <mc:Choice xmlns:a14="http://schemas.microsoft.com/office/drawing/2010/main" Requires="a14">
-          <p:sp>
-            <p:nvSpPr>
-              <p:cNvPr id="12" name="TextBox 11">
-                <a:extLst>
-                  <a:ext uri="{FF2B5EF4-FFF2-40B4-BE49-F238E27FC236}">
-                    <a16:creationId xmlns:a16="http://schemas.microsoft.com/office/drawing/2014/main" id="{8D3955B6-A31B-BE5E-7BDD-21C6641EF41B}"/>
-                  </a:ext>
-                </a:extLst>
-              </p:cNvPr>
-              <p:cNvSpPr txBox="1"/>
-              <p:nvPr/>
-            </p:nvSpPr>
-            <p:spPr>
-              <a:xfrm>
-                <a:off x="6213010" y="1983429"/>
-                <a:ext cx="5447687" cy="1200329"/>
-              </a:xfrm>
-              <a:prstGeom prst="rect">
-                <a:avLst/>
-              </a:prstGeom>
-              <a:noFill/>
-            </p:spPr>
-            <p:txBody>
-              <a:bodyPr wrap="square">
-                <a:spAutoFit/>
-              </a:bodyPr>
-              <a:lstStyle/>
-              <a:p>
-                <a:pPr marL="285750" indent="-285750">
-                  <a:buFont typeface="Wingdings" panose="05000000000000000000" pitchFamily="2" charset="2"/>
-                  <a:buChar char="q"/>
-                </a:pPr>
-                <a:r>
-                  <a:rPr lang="it-IT" sz="2400" dirty="0">
-                    <a:latin typeface="Arial" panose="020B0604020202020204" pitchFamily="34" charset="0"/>
-                    <a:cs typeface="Arial" panose="020B0604020202020204" pitchFamily="34" charset="0"/>
-                  </a:rPr>
-                  <a:t>Risultato analogo per </a:t>
-                </a:r>
-                <a14:m>
-                  <m:oMath xmlns:m="http://schemas.openxmlformats.org/officeDocument/2006/math">
-                    <m:r>
-                      <a:rPr lang="it-IT" sz="2400" i="1">
-                        <a:latin typeface="Cambria Math" panose="02040503050406030204" pitchFamily="18" charset="0"/>
-                        <a:cs typeface="Arial" panose="020B0604020202020204" pitchFamily="34" charset="0"/>
-                      </a:rPr>
-                      <m:t>𝜎</m:t>
-                    </m:r>
-                  </m:oMath>
-                </a14:m>
-                <a:endParaRPr lang="it-IT" sz="2400" dirty="0">
-                  <a:latin typeface="Arial" panose="020B0604020202020204" pitchFamily="34" charset="0"/>
-                  <a:cs typeface="Arial" panose="020B0604020202020204" pitchFamily="34" charset="0"/>
-                </a:endParaRPr>
-              </a:p>
-              <a:p>
-                <a:pPr marL="742950" lvl="1" indent="-285750">
-                  <a:buFont typeface="Wingdings" panose="05000000000000000000" pitchFamily="2" charset="2"/>
-                  <a:buChar char="q"/>
-                </a:pPr>
-                <a:r>
-                  <a:rPr lang="it-IT" sz="2400" dirty="0">
-                    <a:latin typeface="Arial" panose="020B0604020202020204" pitchFamily="34" charset="0"/>
-                    <a:cs typeface="Arial" panose="020B0604020202020204" pitchFamily="34" charset="0"/>
-                  </a:rPr>
-                  <a:t>Questa volta fatto variare «solo» in [0,10]</a:t>
-                </a:r>
-              </a:p>
-            </p:txBody>
-          </p:sp>
-        </mc:Choice>
-        <mc:Fallback>
-          <p:sp>
-            <p:nvSpPr>
-              <p:cNvPr id="12" name="TextBox 11">
-                <a:extLst>
-                  <a:ext uri="{FF2B5EF4-FFF2-40B4-BE49-F238E27FC236}">
-                    <a16:creationId xmlns:a16="http://schemas.microsoft.com/office/drawing/2014/main" id="{8D3955B6-A31B-BE5E-7BDD-21C6641EF41B}"/>
-                  </a:ext>
-                </a:extLst>
-              </p:cNvPr>
-              <p:cNvSpPr txBox="1">
-                <a:spLocks noRot="1" noChangeAspect="1" noMove="1" noResize="1" noEditPoints="1" noAdjustHandles="1" noChangeArrowheads="1" noChangeShapeType="1" noTextEdit="1"/>
-              </p:cNvSpPr>
-              <p:nvPr/>
-            </p:nvSpPr>
-            <p:spPr>
-              <a:xfrm>
-                <a:off x="6213010" y="1983429"/>
-                <a:ext cx="5447687" cy="1200329"/>
-              </a:xfrm>
-              <a:prstGeom prst="rect">
-                <a:avLst/>
-              </a:prstGeom>
-              <a:blipFill>
-                <a:blip r:embed="rId2"/>
-                <a:stretch>
-                  <a:fillRect l="-1454" t="-3553" r="-895" b="-11168"/>
-                </a:stretch>
-              </a:blipFill>
-            </p:spPr>
-            <p:txBody>
-              <a:bodyPr/>
-              <a:lstStyle/>
-              <a:p>
-                <a:r>
-                  <a:rPr lang="en-US">
-                    <a:noFill/>
-                  </a:rPr>
-                  <a:t> </a:t>
-                </a:r>
-              </a:p>
-            </p:txBody>
-          </p:sp>
-        </mc:Fallback>
-      </mc:AlternateContent>
-      <p:pic>
-        <p:nvPicPr>
-          <p:cNvPr id="13" name="Picture 12" descr="A diagram of a graph&#10;&#10;AI-generated content may be incorrect.">
-            <a:extLst>
-              <a:ext uri="{FF2B5EF4-FFF2-40B4-BE49-F238E27FC236}">
-                <a16:creationId xmlns:a16="http://schemas.microsoft.com/office/drawing/2014/main" id="{B2263EAB-BD24-3C41-ED62-87EE15141122}"/>
-              </a:ext>
-            </a:extLst>
-          </p:cNvPr>
-          <p:cNvPicPr>
-            <a:picLocks noChangeAspect="1"/>
-          </p:cNvPicPr>
-          <p:nvPr/>
-        </p:nvPicPr>
-        <p:blipFill>
-          <a:blip r:embed="rId3"/>
-          <a:stretch>
-            <a:fillRect/>
-          </a:stretch>
-        </p:blipFill>
-        <p:spPr>
-          <a:xfrm>
-            <a:off x="688257" y="1416015"/>
-            <a:ext cx="5353050" cy="4572000"/>
-          </a:xfrm>
-          <a:prstGeom prst="rect">
-            <a:avLst/>
-          </a:prstGeom>
-        </p:spPr>
-      </p:pic>
-    </p:spTree>
-    <p:extLst>
-      <p:ext uri="{BB962C8B-B14F-4D97-AF65-F5344CB8AC3E}">
-        <p14:creationId xmlns:p14="http://schemas.microsoft.com/office/powerpoint/2010/main" val="4047128178"/>
-      </p:ext>
-    </p:extLst>
-  </p:cSld>
-  <p:clrMapOvr>
-    <a:masterClrMapping/>
-  </p:clrMapOvr>
-</p:sld>
-</file>
-
-<file path=ppt/slides/slide31.xml><?xml version="1.0" encoding="utf-8"?>
-<p:sld xmlns:a="http://schemas.openxmlformats.org/drawingml/2006/main" xmlns:r="http://schemas.openxmlformats.org/officeDocument/2006/relationships" xmlns:p="http://schemas.openxmlformats.org/presentationml/2006/main">
-  <p:cSld>
-    <p:spTree>
-      <p:nvGrpSpPr>
-        <p:cNvPr id="1" name="">
-          <a:extLst>
-            <a:ext uri="{FF2B5EF4-FFF2-40B4-BE49-F238E27FC236}">
-              <a16:creationId xmlns:a16="http://schemas.microsoft.com/office/drawing/2014/main" id="{B74B6A40-D661-9A26-0E43-D4D937EBCC3F}"/>
-            </a:ext>
-          </a:extLst>
-        </p:cNvPr>
-        <p:cNvGrpSpPr/>
-        <p:nvPr/>
-      </p:nvGrpSpPr>
-      <p:grpSpPr>
-        <a:xfrm>
-          <a:off x="0" y="0"/>
-          <a:ext cx="0" cy="0"/>
-          <a:chOff x="0" y="0"/>
-          <a:chExt cx="0" cy="0"/>
-        </a:xfrm>
-      </p:grpSpPr>
-      <p:sp>
-        <p:nvSpPr>
-          <p:cNvPr id="3" name="TextBox 2">
-            <a:extLst>
-              <a:ext uri="{FF2B5EF4-FFF2-40B4-BE49-F238E27FC236}">
-                <a16:creationId xmlns:a16="http://schemas.microsoft.com/office/drawing/2014/main" id="{18F2C9DA-85F0-4279-745E-F5A7627C2113}"/>
-              </a:ext>
-            </a:extLst>
-          </p:cNvPr>
-          <p:cNvSpPr txBox="1"/>
-          <p:nvPr/>
-        </p:nvSpPr>
-        <p:spPr>
-          <a:xfrm>
-            <a:off x="688257" y="442035"/>
-            <a:ext cx="5407743" cy="523220"/>
-          </a:xfrm>
-          <a:prstGeom prst="rect">
-            <a:avLst/>
-          </a:prstGeom>
-          <a:noFill/>
-        </p:spPr>
-        <p:txBody>
-          <a:bodyPr wrap="square">
-            <a:spAutoFit/>
-          </a:bodyPr>
-          <a:lstStyle/>
-          <a:p>
-            <a:r>
-              <a:rPr lang="it-IT" sz="2800" b="1" dirty="0"/>
-              <a:t>FATTORE </a:t>
-            </a:r>
-            <a:r>
-              <a:rPr lang="el-GR" sz="2800" b="1" dirty="0"/>
-              <a:t>𝜎</a:t>
-            </a:r>
-          </a:p>
-        </p:txBody>
-      </p:sp>
-      <p:sp>
-        <p:nvSpPr>
-          <p:cNvPr id="4" name="Rectangle 3">
-            <a:extLst>
-              <a:ext uri="{FF2B5EF4-FFF2-40B4-BE49-F238E27FC236}">
-                <a16:creationId xmlns:a16="http://schemas.microsoft.com/office/drawing/2014/main" id="{A8C17A29-B201-8A6E-5DFB-AF2E0F3F1329}"/>
-              </a:ext>
-            </a:extLst>
-          </p:cNvPr>
-          <p:cNvSpPr/>
-          <p:nvPr/>
-        </p:nvSpPr>
-        <p:spPr>
-          <a:xfrm>
-            <a:off x="688257" y="965255"/>
-            <a:ext cx="10815485" cy="104767"/>
-          </a:xfrm>
-          <a:prstGeom prst="rect">
-            <a:avLst/>
-          </a:prstGeom>
-          <a:solidFill>
-            <a:schemeClr val="accent4"/>
-          </a:solidFill>
-          <a:ln>
-            <a:noFill/>
-          </a:ln>
-        </p:spPr>
-        <p:style>
-          <a:lnRef idx="2">
-            <a:schemeClr val="accent1">
-              <a:shade val="15000"/>
-            </a:schemeClr>
-          </a:lnRef>
-          <a:fillRef idx="1">
-            <a:schemeClr val="accent1"/>
-          </a:fillRef>
-          <a:effectRef idx="0">
-            <a:schemeClr val="accent1"/>
-          </a:effectRef>
-          <a:fontRef idx="minor">
-            <a:schemeClr val="lt1"/>
-          </a:fontRef>
-        </p:style>
-        <p:txBody>
-          <a:bodyPr rtlCol="0" anchor="ctr"/>
-          <a:lstStyle/>
-          <a:p>
-            <a:pPr algn="ctr"/>
-            <a:endParaRPr lang="en-US"/>
-          </a:p>
-        </p:txBody>
-      </p:sp>
-      <p:sp>
-        <p:nvSpPr>
-          <p:cNvPr id="9" name="TextBox 8">
-            <a:extLst>
-              <a:ext uri="{FF2B5EF4-FFF2-40B4-BE49-F238E27FC236}">
-                <a16:creationId xmlns:a16="http://schemas.microsoft.com/office/drawing/2014/main" id="{26ADCA7A-CA30-93E7-807D-37D345A7EF64}"/>
-              </a:ext>
-            </a:extLst>
-          </p:cNvPr>
-          <p:cNvSpPr txBox="1"/>
-          <p:nvPr/>
-        </p:nvSpPr>
-        <p:spPr>
-          <a:xfrm>
-            <a:off x="6959599" y="514495"/>
-            <a:ext cx="4544143" cy="461665"/>
-          </a:xfrm>
-          <a:prstGeom prst="rect">
-            <a:avLst/>
-          </a:prstGeom>
-          <a:noFill/>
-        </p:spPr>
-        <p:txBody>
-          <a:bodyPr wrap="square">
-            <a:spAutoFit/>
-          </a:bodyPr>
-          <a:lstStyle/>
-          <a:p>
-            <a:pPr algn="r"/>
-            <a:r>
-              <a:rPr lang="it-IT" sz="2400" b="1" i="1" dirty="0"/>
-              <a:t>Step: More stuff</a:t>
-            </a:r>
-          </a:p>
-        </p:txBody>
-      </p:sp>
-      <p:sp>
-        <p:nvSpPr>
-          <p:cNvPr id="5" name="Date Placeholder 4">
-            <a:extLst>
-              <a:ext uri="{FF2B5EF4-FFF2-40B4-BE49-F238E27FC236}">
-                <a16:creationId xmlns:a16="http://schemas.microsoft.com/office/drawing/2014/main" id="{B6164E64-4683-F6B2-A4E8-3147F1ED829E}"/>
-              </a:ext>
-            </a:extLst>
-          </p:cNvPr>
-          <p:cNvSpPr>
-            <a:spLocks noGrp="1"/>
-          </p:cNvSpPr>
-          <p:nvPr>
-            <p:ph type="dt" sz="half" idx="10"/>
-          </p:nvPr>
-        </p:nvSpPr>
-        <p:spPr/>
-        <p:txBody>
-          <a:bodyPr/>
-          <a:lstStyle/>
-          <a:p>
-            <a:fld id="{C6EF02CD-913D-490D-9F2F-9D6BDCD607B3}" type="datetime1">
-              <a:rPr lang="it-IT" smtClean="0"/>
-              <a:t>03/01/2026</a:t>
-            </a:fld>
-            <a:endParaRPr lang="en-US"/>
-          </a:p>
-        </p:txBody>
-      </p:sp>
-      <p:sp>
-        <p:nvSpPr>
-          <p:cNvPr id="6" name="Footer Placeholder 5">
-            <a:extLst>
-              <a:ext uri="{FF2B5EF4-FFF2-40B4-BE49-F238E27FC236}">
-                <a16:creationId xmlns:a16="http://schemas.microsoft.com/office/drawing/2014/main" id="{95A6F43F-BCD3-A849-551B-FD5B61092448}"/>
-              </a:ext>
-            </a:extLst>
-          </p:cNvPr>
-          <p:cNvSpPr>
-            <a:spLocks noGrp="1"/>
-          </p:cNvSpPr>
-          <p:nvPr>
-            <p:ph type="ftr" sz="quarter" idx="11"/>
-          </p:nvPr>
-        </p:nvSpPr>
-        <p:spPr/>
-        <p:txBody>
-          <a:bodyPr/>
-          <a:lstStyle/>
-          <a:p>
-            <a:r>
-              <a:rPr lang="nn-NO"/>
-              <a:t>DINO MENG [SM3201466], BsC AIDA@MIGE</a:t>
-            </a:r>
-            <a:endParaRPr lang="en-US"/>
-          </a:p>
-        </p:txBody>
-      </p:sp>
-      <p:sp>
-        <p:nvSpPr>
-          <p:cNvPr id="7" name="Slide Number Placeholder 6">
-            <a:extLst>
-              <a:ext uri="{FF2B5EF4-FFF2-40B4-BE49-F238E27FC236}">
-                <a16:creationId xmlns:a16="http://schemas.microsoft.com/office/drawing/2014/main" id="{B0F95E78-CE82-F067-7EBD-C1EB7772B1B7}"/>
-              </a:ext>
-            </a:extLst>
-          </p:cNvPr>
-          <p:cNvSpPr>
-            <a:spLocks noGrp="1"/>
-          </p:cNvSpPr>
-          <p:nvPr>
-            <p:ph type="sldNum" sz="quarter" idx="12"/>
-          </p:nvPr>
-        </p:nvSpPr>
-        <p:spPr/>
-        <p:txBody>
-          <a:bodyPr/>
-          <a:lstStyle/>
-          <a:p>
-            <a:fld id="{8BF32AC9-143A-477E-841D-1F801B7F8FE8}" type="slidenum">
-              <a:rPr lang="en-US" smtClean="0"/>
-              <a:t>31</a:t>
-            </a:fld>
-            <a:endParaRPr lang="en-US"/>
-          </a:p>
-        </p:txBody>
-      </p:sp>
-      <p:pic>
-        <p:nvPicPr>
-          <p:cNvPr id="8" name="Picture 7" descr="A graph of different colored lines&#10;&#10;AI-generated content may be incorrect.">
-            <a:extLst>
-              <a:ext uri="{FF2B5EF4-FFF2-40B4-BE49-F238E27FC236}">
-                <a16:creationId xmlns:a16="http://schemas.microsoft.com/office/drawing/2014/main" id="{55C000E7-208C-EC4A-1744-A812B88A24F4}"/>
-              </a:ext>
-            </a:extLst>
-          </p:cNvPr>
-          <p:cNvPicPr>
-            <a:picLocks noChangeAspect="1"/>
-          </p:cNvPicPr>
-          <p:nvPr/>
-        </p:nvPicPr>
-        <p:blipFill>
-          <a:blip r:embed="rId2"/>
-          <a:stretch>
-            <a:fillRect/>
-          </a:stretch>
-        </p:blipFill>
-        <p:spPr>
-          <a:xfrm>
-            <a:off x="1150340" y="1416015"/>
-            <a:ext cx="9891320" cy="4629817"/>
-          </a:xfrm>
-          <a:prstGeom prst="rect">
-            <a:avLst/>
-          </a:prstGeom>
-        </p:spPr>
-      </p:pic>
-    </p:spTree>
-    <p:extLst>
-      <p:ext uri="{BB962C8B-B14F-4D97-AF65-F5344CB8AC3E}">
-        <p14:creationId xmlns:p14="http://schemas.microsoft.com/office/powerpoint/2010/main" val="202612540"/>
       </p:ext>
     </p:extLst>
   </p:cSld>
@@ -13741,7 +13090,7 @@
           <a:p>
             <a:fld id="{D9845C1A-9AE7-4CFB-B4BB-FF54D6A71ADB}" type="datetime1">
               <a:rPr lang="it-IT" smtClean="0"/>
-              <a:t>03/01/2026</a:t>
+              <a:t>04/01/2026</a:t>
             </a:fld>
             <a:endParaRPr lang="en-US"/>
           </a:p>
@@ -14239,7 +13588,7 @@
           <a:p>
             <a:fld id="{5DCCCD83-F29B-4178-A789-3E26EABE1C7A}" type="datetime1">
               <a:rPr lang="it-IT" smtClean="0"/>
-              <a:t>03/01/2026</a:t>
+              <a:t>04/01/2026</a:t>
             </a:fld>
             <a:endParaRPr lang="en-US"/>
           </a:p>
@@ -14615,7 +13964,7 @@
           <a:p>
             <a:fld id="{4C441016-63A1-42AC-B939-9B58CF64338C}" type="datetime1">
               <a:rPr lang="it-IT" smtClean="0"/>
-              <a:t>03/01/2026</a:t>
+              <a:t>04/01/2026</a:t>
             </a:fld>
             <a:endParaRPr lang="en-US"/>
           </a:p>
@@ -15021,7 +14370,7 @@
           <a:p>
             <a:fld id="{63B55B49-8341-42AA-9537-F1E5653FF438}" type="datetime1">
               <a:rPr lang="it-IT" smtClean="0"/>
-              <a:t>03/01/2026</a:t>
+              <a:t>04/01/2026</a:t>
             </a:fld>
             <a:endParaRPr lang="en-US"/>
           </a:p>
@@ -15296,7 +14645,7 @@
           <a:p>
             <a:fld id="{8B082B6C-FF82-4F52-8DBB-5FB157E26F63}" type="datetime1">
               <a:rPr lang="it-IT" smtClean="0"/>
-              <a:t>03/01/2026</a:t>
+              <a:t>04/01/2026</a:t>
             </a:fld>
             <a:endParaRPr lang="en-US"/>
           </a:p>
@@ -15483,8 +14832,8 @@
           </a:p>
         </p:txBody>
       </p:sp>
-      <mc:AlternateContent xmlns:mc="http://schemas.openxmlformats.org/markup-compatibility/2006">
-        <mc:Choice xmlns:a14="http://schemas.microsoft.com/office/drawing/2010/main" Requires="a14">
+      <mc:AlternateContent xmlns:mc="http://schemas.openxmlformats.org/markup-compatibility/2006" xmlns:a14="http://schemas.microsoft.com/office/drawing/2010/main">
+        <mc:Choice Requires="a14">
           <p:sp>
             <p:nvSpPr>
               <p:cNvPr id="7" name="TextBox 6">
@@ -15857,7 +15206,7 @@
             </p:txBody>
           </p:sp>
         </mc:Choice>
-        <mc:Fallback>
+        <mc:Fallback xmlns="">
           <p:sp>
             <p:nvSpPr>
               <p:cNvPr id="7" name="TextBox 6">
@@ -15991,7 +15340,7 @@
           <a:p>
             <a:fld id="{777D5E0C-B568-4CE8-9D10-8B739A803584}" type="datetime1">
               <a:rPr lang="it-IT" smtClean="0"/>
-              <a:t>03/01/2026</a:t>
+              <a:t>04/01/2026</a:t>
             </a:fld>
             <a:endParaRPr lang="en-US"/>
           </a:p>

--- a/Complex Systems/project/PresentationPROJECTSM3201466.pptx
+++ b/Complex Systems/project/PresentationPROJECTSM3201466.pptx
@@ -5273,7 +5273,7 @@
             </a:r>
           </a:p>
           <a:p>
-            <a:pPr marL="285750" indent="-285750">
+            <a:pPr marL="742950" lvl="1" indent="-285750">
               <a:buFont typeface="Wingdings" panose="05000000000000000000" pitchFamily="2" charset="2"/>
               <a:buChar char="q"/>
             </a:pPr>
@@ -5292,18 +5292,21 @@
                 <a:latin typeface="Arial" panose="020B0604020202020204" pitchFamily="34" charset="0"/>
                 <a:cs typeface="Arial" panose="020B0604020202020204" pitchFamily="34" charset="0"/>
               </a:rPr>
-              <a:t>Vediamo una carrellata di risultati + interpretazione biologica</a:t>
-            </a:r>
-          </a:p>
-          <a:p>
-            <a:pPr marL="285750" indent="-285750">
+              <a:t>Vediamo i risultati prodotti</a:t>
+            </a:r>
+          </a:p>
+          <a:p>
+            <a:pPr marL="742950" lvl="1" indent="-285750">
               <a:buFont typeface="Wingdings" panose="05000000000000000000" pitchFamily="2" charset="2"/>
               <a:buChar char="q"/>
             </a:pPr>
-            <a:endParaRPr lang="it-IT" sz="2400" dirty="0">
-              <a:latin typeface="Arial" panose="020B0604020202020204" pitchFamily="34" charset="0"/>
-              <a:cs typeface="Arial" panose="020B0604020202020204" pitchFamily="34" charset="0"/>
-            </a:endParaRPr>
+            <a:r>
+              <a:rPr lang="it-IT" sz="2400" dirty="0">
+                <a:latin typeface="Arial" panose="020B0604020202020204" pitchFamily="34" charset="0"/>
+                <a:cs typeface="Arial" panose="020B0604020202020204" pitchFamily="34" charset="0"/>
+              </a:rPr>
+              <a:t>+ Una loro interpretazione biologica, dove opportuna</a:t>
+            </a:r>
           </a:p>
           <a:p>
             <a:pPr marL="285750" indent="-285750">
@@ -5621,7 +5624,14 @@
                         <a:latin typeface="Cambria Math" panose="02040503050406030204" pitchFamily="18" charset="0"/>
                         <a:cs typeface="Arial" panose="020B0604020202020204" pitchFamily="34" charset="0"/>
                       </a:rPr>
-                      <m:t>=2</m:t>
+                      <m:t>=</m:t>
+                    </m:r>
+                    <m:r>
+                      <a:rPr lang="it-IT" sz="2400" b="0" i="1" smtClean="0">
+                        <a:latin typeface="Cambria Math" panose="02040503050406030204" pitchFamily="18" charset="0"/>
+                        <a:cs typeface="Arial" panose="020B0604020202020204" pitchFamily="34" charset="0"/>
+                      </a:rPr>
+                      <m:t>2</m:t>
                     </m:r>
                   </m:oMath>
                 </a14:m>
@@ -6753,7 +6763,28 @@
                         <a:latin typeface="Cambria Math" panose="02040503050406030204" pitchFamily="18" charset="0"/>
                         <a:cs typeface="Arial" panose="020B0604020202020204" pitchFamily="34" charset="0"/>
                       </a:rPr>
-                      <m:t>=0.002</m:t>
+                      <m:t>=</m:t>
+                    </m:r>
+                    <m:r>
+                      <a:rPr lang="it-IT" sz="2400" i="1">
+                        <a:latin typeface="Cambria Math" panose="02040503050406030204" pitchFamily="18" charset="0"/>
+                        <a:cs typeface="Arial" panose="020B0604020202020204" pitchFamily="34" charset="0"/>
+                      </a:rPr>
+                      <m:t>0</m:t>
+                    </m:r>
+                    <m:r>
+                      <a:rPr lang="it-IT" sz="2400" i="1">
+                        <a:latin typeface="Cambria Math" panose="02040503050406030204" pitchFamily="18" charset="0"/>
+                        <a:cs typeface="Arial" panose="020B0604020202020204" pitchFamily="34" charset="0"/>
+                      </a:rPr>
+                      <m:t>.</m:t>
+                    </m:r>
+                    <m:r>
+                      <a:rPr lang="it-IT" sz="2400" i="1">
+                        <a:latin typeface="Cambria Math" panose="02040503050406030204" pitchFamily="18" charset="0"/>
+                        <a:cs typeface="Arial" panose="020B0604020202020204" pitchFamily="34" charset="0"/>
+                      </a:rPr>
+                      <m:t>002</m:t>
                     </m:r>
                   </m:oMath>
                 </a14:m>
@@ -8248,8 +8279,8 @@
           </a:p>
         </p:txBody>
       </p:sp>
-      <mc:AlternateContent xmlns:mc="http://schemas.openxmlformats.org/markup-compatibility/2006">
-        <mc:Choice xmlns:a14="http://schemas.microsoft.com/office/drawing/2010/main" Requires="a14">
+      <mc:AlternateContent xmlns:mc="http://schemas.openxmlformats.org/markup-compatibility/2006" xmlns:a14="http://schemas.microsoft.com/office/drawing/2010/main">
+        <mc:Choice Requires="a14">
           <p:sp>
             <p:nvSpPr>
               <p:cNvPr id="7" name="TextBox 6">
@@ -8362,7 +8393,7 @@
             </p:txBody>
           </p:sp>
         </mc:Choice>
-        <mc:Fallback>
+        <mc:Fallback xmlns="">
           <p:sp>
             <p:nvSpPr>
               <p:cNvPr id="7" name="TextBox 6">
@@ -9176,8 +9207,8 @@
           </a:p>
         </p:txBody>
       </p:sp>
-      <mc:AlternateContent xmlns:mc="http://schemas.openxmlformats.org/markup-compatibility/2006">
-        <mc:Choice xmlns:a14="http://schemas.microsoft.com/office/drawing/2010/main" Requires="a14">
+      <mc:AlternateContent xmlns:mc="http://schemas.openxmlformats.org/markup-compatibility/2006" xmlns:a14="http://schemas.microsoft.com/office/drawing/2010/main">
+        <mc:Choice Requires="a14">
           <p:sp>
             <p:nvSpPr>
               <p:cNvPr id="7" name="TextBox 6">
@@ -9301,7 +9332,7 @@
             </p:txBody>
           </p:sp>
         </mc:Choice>
-        <mc:Fallback>
+        <mc:Fallback xmlns="">
           <p:sp>
             <p:nvSpPr>
               <p:cNvPr id="7" name="TextBox 6">
@@ -9628,8 +9659,8 @@
           </a:p>
         </p:txBody>
       </p:sp>
-      <mc:AlternateContent xmlns:mc="http://schemas.openxmlformats.org/markup-compatibility/2006">
-        <mc:Choice xmlns:a14="http://schemas.microsoft.com/office/drawing/2010/main" Requires="a14">
+      <mc:AlternateContent xmlns:mc="http://schemas.openxmlformats.org/markup-compatibility/2006" xmlns:a14="http://schemas.microsoft.com/office/drawing/2010/main">
+        <mc:Choice Requires="a14">
           <p:sp>
             <p:nvSpPr>
               <p:cNvPr id="7" name="TextBox 6">
@@ -9714,14 +9745,35 @@
                         <a:latin typeface="Cambria Math" panose="02040503050406030204" pitchFamily="18" charset="0"/>
                         <a:cs typeface="Arial" panose="020B0604020202020204" pitchFamily="34" charset="0"/>
                       </a:rPr>
-                      <m:t>=0.</m:t>
+                      <m:t>=</m:t>
+                    </m:r>
+                    <m:r>
+                      <a:rPr lang="it-IT" sz="2400" i="1">
+                        <a:latin typeface="Cambria Math" panose="02040503050406030204" pitchFamily="18" charset="0"/>
+                        <a:cs typeface="Arial" panose="020B0604020202020204" pitchFamily="34" charset="0"/>
+                      </a:rPr>
+                      <m:t>0</m:t>
+                    </m:r>
+                    <m:r>
+                      <a:rPr lang="it-IT" sz="2400" i="1">
+                        <a:latin typeface="Cambria Math" panose="02040503050406030204" pitchFamily="18" charset="0"/>
+                        <a:cs typeface="Arial" panose="020B0604020202020204" pitchFamily="34" charset="0"/>
+                      </a:rPr>
+                      <m:t>.</m:t>
                     </m:r>
                     <m:r>
                       <a:rPr lang="it-IT" sz="2400" b="0" i="1" smtClean="0">
                         <a:latin typeface="Cambria Math" panose="02040503050406030204" pitchFamily="18" charset="0"/>
                         <a:cs typeface="Arial" panose="020B0604020202020204" pitchFamily="34" charset="0"/>
                       </a:rPr>
-                      <m:t>1 →</m:t>
+                      <m:t>1</m:t>
+                    </m:r>
+                    <m:r>
+                      <a:rPr lang="it-IT" sz="2400" b="0" i="1" smtClean="0">
+                        <a:latin typeface="Cambria Math" panose="02040503050406030204" pitchFamily="18" charset="0"/>
+                        <a:cs typeface="Arial" panose="020B0604020202020204" pitchFamily="34" charset="0"/>
+                      </a:rPr>
+                      <m:t> →</m:t>
                     </m:r>
                     <m:r>
                       <m:rPr>
@@ -9738,7 +9790,28 @@
                         <a:latin typeface="Cambria Math" panose="02040503050406030204" pitchFamily="18" charset="0"/>
                         <a:cs typeface="Arial" panose="020B0604020202020204" pitchFamily="34" charset="0"/>
                       </a:rPr>
-                      <m:t>= 0.001</m:t>
+                      <m:t>= </m:t>
+                    </m:r>
+                    <m:r>
+                      <a:rPr lang="it-IT" sz="2400" b="0" i="1" smtClean="0">
+                        <a:latin typeface="Cambria Math" panose="02040503050406030204" pitchFamily="18" charset="0"/>
+                        <a:cs typeface="Arial" panose="020B0604020202020204" pitchFamily="34" charset="0"/>
+                      </a:rPr>
+                      <m:t>0</m:t>
+                    </m:r>
+                    <m:r>
+                      <a:rPr lang="it-IT" sz="2400" b="0" i="1" smtClean="0">
+                        <a:latin typeface="Cambria Math" panose="02040503050406030204" pitchFamily="18" charset="0"/>
+                        <a:cs typeface="Arial" panose="020B0604020202020204" pitchFamily="34" charset="0"/>
+                      </a:rPr>
+                      <m:t>.</m:t>
+                    </m:r>
+                    <m:r>
+                      <a:rPr lang="it-IT" sz="2400" b="0" i="1" smtClean="0">
+                        <a:latin typeface="Cambria Math" panose="02040503050406030204" pitchFamily="18" charset="0"/>
+                        <a:cs typeface="Arial" panose="020B0604020202020204" pitchFamily="34" charset="0"/>
+                      </a:rPr>
+                      <m:t>001</m:t>
                     </m:r>
                   </m:oMath>
                 </a14:m>
@@ -9766,7 +9839,28 @@
                         <a:latin typeface="Cambria Math" panose="02040503050406030204" pitchFamily="18" charset="0"/>
                         <a:cs typeface="Arial" panose="020B0604020202020204" pitchFamily="34" charset="0"/>
                       </a:rPr>
-                      <m:t>=0.03</m:t>
+                      <m:t>=</m:t>
+                    </m:r>
+                    <m:r>
+                      <a:rPr lang="it-IT" sz="2400" b="0" i="1" smtClean="0">
+                        <a:latin typeface="Cambria Math" panose="02040503050406030204" pitchFamily="18" charset="0"/>
+                        <a:cs typeface="Arial" panose="020B0604020202020204" pitchFamily="34" charset="0"/>
+                      </a:rPr>
+                      <m:t>0</m:t>
+                    </m:r>
+                    <m:r>
+                      <a:rPr lang="it-IT" sz="2400" b="0" i="1" smtClean="0">
+                        <a:latin typeface="Cambria Math" panose="02040503050406030204" pitchFamily="18" charset="0"/>
+                        <a:cs typeface="Arial" panose="020B0604020202020204" pitchFamily="34" charset="0"/>
+                      </a:rPr>
+                      <m:t>.</m:t>
+                    </m:r>
+                    <m:r>
+                      <a:rPr lang="it-IT" sz="2400" b="0" i="1" smtClean="0">
+                        <a:latin typeface="Cambria Math" panose="02040503050406030204" pitchFamily="18" charset="0"/>
+                        <a:cs typeface="Arial" panose="020B0604020202020204" pitchFamily="34" charset="0"/>
+                      </a:rPr>
+                      <m:t>03</m:t>
                     </m:r>
                   </m:oMath>
                 </a14:m>
@@ -9801,7 +9895,7 @@
             </p:txBody>
           </p:sp>
         </mc:Choice>
-        <mc:Fallback>
+        <mc:Fallback xmlns="">
           <p:sp>
             <p:nvSpPr>
               <p:cNvPr id="7" name="TextBox 6">
@@ -11430,8 +11524,8 @@
           </a:p>
         </p:txBody>
       </p:sp>
-      <mc:AlternateContent xmlns:mc="http://schemas.openxmlformats.org/markup-compatibility/2006">
-        <mc:Choice xmlns:a14="http://schemas.microsoft.com/office/drawing/2010/main" Requires="a14">
+      <mc:AlternateContent xmlns:mc="http://schemas.openxmlformats.org/markup-compatibility/2006" xmlns:a14="http://schemas.microsoft.com/office/drawing/2010/main">
+        <mc:Choice Requires="a14">
           <p:sp>
             <p:nvSpPr>
               <p:cNvPr id="11" name="TextBox 10">
@@ -11460,6 +11554,7 @@
               </a:bodyPr>
               <a:lstStyle/>
               <a:p>
+                <a:pPr/>
                 <a14:m>
                   <m:oMathPara xmlns:m="http://schemas.openxmlformats.org/officeDocument/2006/math">
                     <m:oMathParaPr>
@@ -11510,6 +11605,7 @@
                 </a:endParaRPr>
               </a:p>
               <a:p>
+                <a:pPr/>
                 <a14:m>
                   <m:oMathPara xmlns:m="http://schemas.openxmlformats.org/officeDocument/2006/math">
                     <m:oMathParaPr>
@@ -11560,6 +11656,7 @@
                 </a:endParaRPr>
               </a:p>
               <a:p>
+                <a:pPr/>
                 <a14:m>
                   <m:oMathPara xmlns:m="http://schemas.openxmlformats.org/officeDocument/2006/math">
                     <m:oMathParaPr>
@@ -11615,7 +11712,7 @@
             </p:txBody>
           </p:sp>
         </mc:Choice>
-        <mc:Fallback>
+        <mc:Fallback xmlns="">
           <p:sp>
             <p:nvSpPr>
               <p:cNvPr id="11" name="TextBox 10">
@@ -12212,8 +12309,8 @@
           </a:p>
         </p:txBody>
       </p:sp>
-      <mc:AlternateContent xmlns:mc="http://schemas.openxmlformats.org/markup-compatibility/2006">
-        <mc:Choice xmlns:a14="http://schemas.microsoft.com/office/drawing/2010/main" Requires="a14">
+      <mc:AlternateContent xmlns:mc="http://schemas.openxmlformats.org/markup-compatibility/2006" xmlns:a14="http://schemas.microsoft.com/office/drawing/2010/main">
+        <mc:Choice Requires="a14">
           <p:sp>
             <p:nvSpPr>
               <p:cNvPr id="10" name="TextBox 9">
@@ -12242,6 +12339,7 @@
               </a:bodyPr>
               <a:lstStyle/>
               <a:p>
+                <a:pPr/>
                 <a14:m>
                   <m:oMathPara xmlns:m="http://schemas.openxmlformats.org/officeDocument/2006/math">
                     <m:oMathParaPr>
@@ -12295,6 +12393,7 @@
                 </a:endParaRPr>
               </a:p>
               <a:p>
+                <a:pPr/>
                 <a14:m>
                   <m:oMathPara xmlns:m="http://schemas.openxmlformats.org/officeDocument/2006/math">
                     <m:oMathParaPr>
@@ -12348,6 +12447,7 @@
                 </a:endParaRPr>
               </a:p>
               <a:p>
+                <a:pPr/>
                 <a14:m>
                   <m:oMathPara xmlns:m="http://schemas.openxmlformats.org/officeDocument/2006/math">
                     <m:oMathParaPr>
@@ -12403,7 +12503,7 @@
             </p:txBody>
           </p:sp>
         </mc:Choice>
-        <mc:Fallback>
+        <mc:Fallback xmlns="">
           <p:sp>
             <p:nvSpPr>
               <p:cNvPr id="10" name="TextBox 9">
@@ -15069,8 +15169,8 @@
           </a:p>
         </p:txBody>
       </p:sp>
-      <mc:AlternateContent xmlns:mc="http://schemas.openxmlformats.org/markup-compatibility/2006" xmlns:a14="http://schemas.microsoft.com/office/drawing/2010/main">
-        <mc:Choice Requires="a14">
+      <mc:AlternateContent xmlns:mc="http://schemas.openxmlformats.org/markup-compatibility/2006">
+        <mc:Choice xmlns:a14="http://schemas.microsoft.com/office/drawing/2010/main" Requires="a14">
           <p:sp>
             <p:nvSpPr>
               <p:cNvPr id="2" name="TextBox 1">
@@ -15201,7 +15301,21 @@
                         <a:latin typeface="Cambria Math" panose="02040503050406030204" pitchFamily="18" charset="0"/>
                         <a:cs typeface="Arial" panose="020B0604020202020204" pitchFamily="34" charset="0"/>
                       </a:rPr>
-                      <m:t>=0, </m:t>
+                      <m:t>=</m:t>
+                    </m:r>
+                    <m:r>
+                      <a:rPr lang="it-IT" sz="2400" b="0" i="1" smtClean="0">
+                        <a:latin typeface="Cambria Math" panose="02040503050406030204" pitchFamily="18" charset="0"/>
+                        <a:cs typeface="Arial" panose="020B0604020202020204" pitchFamily="34" charset="0"/>
+                      </a:rPr>
+                      <m:t>0</m:t>
+                    </m:r>
+                    <m:r>
+                      <a:rPr lang="it-IT" sz="2400" b="0" i="1" smtClean="0">
+                        <a:latin typeface="Cambria Math" panose="02040503050406030204" pitchFamily="18" charset="0"/>
+                        <a:cs typeface="Arial" panose="020B0604020202020204" pitchFamily="34" charset="0"/>
+                      </a:rPr>
+                      <m:t>, </m:t>
                     </m:r>
                     <m:r>
                       <m:rPr>
@@ -15218,7 +15332,14 @@
                         <a:latin typeface="Cambria Math" panose="02040503050406030204" pitchFamily="18" charset="0"/>
                         <a:cs typeface="Arial" panose="020B0604020202020204" pitchFamily="34" charset="0"/>
                       </a:rPr>
-                      <m:t>=1</m:t>
+                      <m:t>=</m:t>
+                    </m:r>
+                    <m:r>
+                      <a:rPr lang="it-IT" sz="2400" b="0" i="1" smtClean="0">
+                        <a:latin typeface="Cambria Math" panose="02040503050406030204" pitchFamily="18" charset="0"/>
+                        <a:cs typeface="Arial" panose="020B0604020202020204" pitchFamily="34" charset="0"/>
+                      </a:rPr>
+                      <m:t>1</m:t>
                     </m:r>
                   </m:oMath>
                 </a14:m>
@@ -15292,7 +15413,14 @@
                         <a:latin typeface="Cambria Math" panose="02040503050406030204" pitchFamily="18" charset="0"/>
                         <a:cs typeface="Arial" panose="020B0604020202020204" pitchFamily="34" charset="0"/>
                       </a:rPr>
-                      <m:t>=1</m:t>
+                      <m:t>=</m:t>
+                    </m:r>
+                    <m:r>
+                      <a:rPr lang="it-IT" sz="2400" b="0" i="1" smtClean="0">
+                        <a:latin typeface="Cambria Math" panose="02040503050406030204" pitchFamily="18" charset="0"/>
+                        <a:cs typeface="Arial" panose="020B0604020202020204" pitchFamily="34" charset="0"/>
+                      </a:rPr>
+                      <m:t>1</m:t>
                     </m:r>
                     <m:r>
                       <a:rPr lang="it-IT" sz="2400" b="0" i="0" smtClean="0">
@@ -15398,7 +15526,21 @@
                         <a:latin typeface="Cambria Math" panose="02040503050406030204" pitchFamily="18" charset="0"/>
                         <a:cs typeface="Arial" panose="020B0604020202020204" pitchFamily="34" charset="0"/>
                       </a:rPr>
-                      <m:t>=1−</m:t>
+                      <m:t>=</m:t>
+                    </m:r>
+                    <m:r>
+                      <a:rPr lang="it-IT" sz="2400" b="0" i="1" smtClean="0">
+                        <a:latin typeface="Cambria Math" panose="02040503050406030204" pitchFamily="18" charset="0"/>
+                        <a:cs typeface="Arial" panose="020B0604020202020204" pitchFamily="34" charset="0"/>
+                      </a:rPr>
+                      <m:t>1</m:t>
+                    </m:r>
+                    <m:r>
+                      <a:rPr lang="it-IT" sz="2400" b="0" i="1" smtClean="0">
+                        <a:latin typeface="Cambria Math" panose="02040503050406030204" pitchFamily="18" charset="0"/>
+                        <a:cs typeface="Arial" panose="020B0604020202020204" pitchFamily="34" charset="0"/>
+                      </a:rPr>
+                      <m:t>−</m:t>
                     </m:r>
                     <m:r>
                       <a:rPr lang="it-IT" sz="2400" b="0" i="1" smtClean="0">
@@ -15416,6 +15558,9 @@
                     </m:r>
                     <m:r>
                       <a:rPr lang="it-IT" sz="2400" b="0" i="1" smtClean="0">
+                        <a:highlight>
+                          <a:srgbClr val="FFFF00"/>
+                        </a:highlight>
                         <a:latin typeface="Cambria Math" panose="02040503050406030204" pitchFamily="18" charset="0"/>
                         <a:cs typeface="Arial" panose="020B0604020202020204" pitchFamily="34" charset="0"/>
                       </a:rPr>
@@ -15423,6 +15568,9 @@
                     </m:r>
                     <m:r>
                       <a:rPr lang="it-IT" sz="2400" b="0" i="1" smtClean="0">
+                        <a:highlight>
+                          <a:srgbClr val="FFFF00"/>
+                        </a:highlight>
                         <a:latin typeface="Cambria Math" panose="02040503050406030204" pitchFamily="18" charset="0"/>
                         <a:cs typeface="Arial" panose="020B0604020202020204" pitchFamily="34" charset="0"/>
                       </a:rPr>
@@ -15430,6 +15578,9 @@
                     </m:r>
                     <m:r>
                       <a:rPr lang="it-IT" sz="2400" b="0" i="1" smtClean="0">
+                        <a:highlight>
+                          <a:srgbClr val="FFFF00"/>
+                        </a:highlight>
                         <a:latin typeface="Cambria Math" panose="02040503050406030204" pitchFamily="18" charset="0"/>
                         <a:cs typeface="Arial" panose="020B0604020202020204" pitchFamily="34" charset="0"/>
                       </a:rPr>
@@ -15437,6 +15588,9 @@
                     </m:r>
                     <m:r>
                       <a:rPr lang="it-IT" sz="2400" b="0" i="1" smtClean="0">
+                        <a:highlight>
+                          <a:srgbClr val="FFFF00"/>
+                        </a:highlight>
                         <a:latin typeface="Cambria Math" panose="02040503050406030204" pitchFamily="18" charset="0"/>
                         <a:cs typeface="Arial" panose="020B0604020202020204" pitchFamily="34" charset="0"/>
                       </a:rPr>
@@ -15464,7 +15618,21 @@
                         <a:latin typeface="Cambria Math" panose="02040503050406030204" pitchFamily="18" charset="0"/>
                         <a:cs typeface="Arial" panose="020B0604020202020204" pitchFamily="34" charset="0"/>
                       </a:rPr>
-                      <m:t>=1/</m:t>
+                      <m:t>=</m:t>
+                    </m:r>
+                    <m:r>
+                      <a:rPr lang="it-IT" sz="2400" b="0" i="1" smtClean="0">
+                        <a:latin typeface="Cambria Math" panose="02040503050406030204" pitchFamily="18" charset="0"/>
+                        <a:cs typeface="Arial" panose="020B0604020202020204" pitchFamily="34" charset="0"/>
+                      </a:rPr>
+                      <m:t>1</m:t>
+                    </m:r>
+                    <m:r>
+                      <a:rPr lang="it-IT" sz="2400" b="0" i="1" smtClean="0">
+                        <a:latin typeface="Cambria Math" panose="02040503050406030204" pitchFamily="18" charset="0"/>
+                        <a:cs typeface="Arial" panose="020B0604020202020204" pitchFamily="34" charset="0"/>
+                      </a:rPr>
+                      <m:t>/</m:t>
                     </m:r>
                     <m:r>
                       <m:rPr>
@@ -15509,7 +15677,7 @@
             </p:txBody>
           </p:sp>
         </mc:Choice>
-        <mc:Fallback xmlns="">
+        <mc:Fallback>
           <p:sp>
             <p:nvSpPr>
               <p:cNvPr id="2" name="TextBox 1">
@@ -17524,8 +17692,8 @@
           </a:p>
         </p:txBody>
       </p:sp>
-      <mc:AlternateContent xmlns:mc="http://schemas.openxmlformats.org/markup-compatibility/2006" xmlns:a14="http://schemas.microsoft.com/office/drawing/2010/main">
-        <mc:Choice Requires="a14">
+      <mc:AlternateContent xmlns:mc="http://schemas.openxmlformats.org/markup-compatibility/2006">
+        <mc:Choice xmlns:a14="http://schemas.microsoft.com/office/drawing/2010/main" Requires="a14">
           <p:sp>
             <p:nvSpPr>
               <p:cNvPr id="2" name="TextBox 1">
@@ -17595,7 +17763,7 @@
                   <a:buChar char="q"/>
                 </a:pPr>
                 <a:r>
-                  <a:rPr lang="it-IT" sz="2400" i="1" dirty="0">
+                  <a:rPr lang="it-IT" sz="2400" b="1" i="1" dirty="0">
                     <a:latin typeface="Arial" panose="020B0604020202020204" pitchFamily="34" charset="0"/>
                     <a:cs typeface="Arial" panose="020B0604020202020204" pitchFamily="34" charset="0"/>
                   </a:rPr>
@@ -17666,7 +17834,7 @@
                   <a:buChar char="q"/>
                 </a:pPr>
                 <a:r>
-                  <a:rPr lang="it-IT" sz="2400" dirty="0">
+                  <a:rPr lang="it-IT" sz="2400" b="1" i="1" dirty="0">
                     <a:latin typeface="Arial" panose="020B0604020202020204" pitchFamily="34" charset="0"/>
                     <a:cs typeface="Arial" panose="020B0604020202020204" pitchFamily="34" charset="0"/>
                   </a:rPr>
@@ -17844,7 +18012,7 @@
                     <a:latin typeface="Arial" panose="020B0604020202020204" pitchFamily="34" charset="0"/>
                     <a:cs typeface="Arial" panose="020B0604020202020204" pitchFamily="34" charset="0"/>
                   </a:rPr>
-                  <a:t>Effettuiamo un po’ di esperimenti al variare dei parametri</a:t>
+                  <a:t>Effettuiamo un po’ di esperimenti con questa famiglia di oscillatori</a:t>
                 </a:r>
               </a:p>
               <a:p>
@@ -17873,7 +18041,7 @@
                   <a:buChar char="q"/>
                 </a:pPr>
                 <a:r>
-                  <a:rPr lang="it-IT" sz="2400" dirty="0">
+                  <a:rPr lang="it-IT" sz="2400" b="1" i="1" dirty="0">
                     <a:latin typeface="Arial" panose="020B0604020202020204" pitchFamily="34" charset="0"/>
                     <a:cs typeface="Arial" panose="020B0604020202020204" pitchFamily="34" charset="0"/>
                   </a:rPr>
@@ -17906,7 +18074,7 @@
             </p:txBody>
           </p:sp>
         </mc:Choice>
-        <mc:Fallback xmlns="">
+        <mc:Fallback>
           <p:sp>
             <p:nvSpPr>
               <p:cNvPr id="2" name="TextBox 1">
@@ -19085,8 +19253,8 @@
           </a:p>
         </p:txBody>
       </p:sp>
-      <mc:AlternateContent xmlns:mc="http://schemas.openxmlformats.org/markup-compatibility/2006">
-        <mc:Choice xmlns:a14="http://schemas.microsoft.com/office/drawing/2010/main" Requires="a14">
+      <mc:AlternateContent xmlns:mc="http://schemas.openxmlformats.org/markup-compatibility/2006" xmlns:a14="http://schemas.microsoft.com/office/drawing/2010/main">
+        <mc:Choice Requires="a14">
           <p:sp>
             <p:nvSpPr>
               <p:cNvPr id="8" name="TextBox 7">
@@ -19195,7 +19363,7 @@
             </p:txBody>
           </p:sp>
         </mc:Choice>
-        <mc:Fallback>
+        <mc:Fallback xmlns="">
           <p:sp>
             <p:nvSpPr>
               <p:cNvPr id="8" name="TextBox 7">
@@ -23839,8 +24007,8 @@
           </a:p>
         </p:txBody>
       </p:sp>
-      <mc:AlternateContent xmlns:mc="http://schemas.openxmlformats.org/markup-compatibility/2006">
-        <mc:Choice xmlns:a14="http://schemas.microsoft.com/office/drawing/2010/main" Requires="a14">
+      <mc:AlternateContent xmlns:mc="http://schemas.openxmlformats.org/markup-compatibility/2006" xmlns:a14="http://schemas.microsoft.com/office/drawing/2010/main">
+        <mc:Choice Requires="a14">
           <p:sp>
             <p:nvSpPr>
               <p:cNvPr id="7" name="TextBox 6">
@@ -24570,7 +24738,7 @@
             </p:txBody>
           </p:sp>
         </mc:Choice>
-        <mc:Fallback>
+        <mc:Fallback xmlns="">
           <p:sp>
             <p:nvSpPr>
               <p:cNvPr id="7" name="TextBox 6">
